--- a/docs/DineFlow_AI_GTU_Minor_Project_Presentation.pptx
+++ b/docs/DineFlow_AI_GTU_Minor_Project_Presentation.pptx
@@ -3371,7 +3371,7 @@
               </a:defRPr>
             </a:pPr>
             <a:r>
-              <a:t>Head of Department: Dr. Chirag D. Patel</a:t>
+              <a:t>Head of Department: Cirag D. Patel</a:t>
             </a:r>
           </a:p>
           <a:p>
@@ -3383,7 +3383,7 @@
               </a:defRPr>
             </a:pPr>
             <a:r>
-              <a:t>  (I/C HOD, Computer Engg. Dept.)</a:t>
+              <a:t>  (HOD, Computer Engg. Dept.)</a:t>
             </a:r>
           </a:p>
           <a:p>
@@ -7436,7 +7436,7 @@
               </a:defRPr>
             </a:pPr>
             <a:r>
-              <a:t>Head of Dept: Dr. Chirag D. Patel</a:t>
+              <a:t>Head of Dept: Cirag D. Patel</a:t>
             </a:r>
           </a:p>
           <a:p>

--- a/docs/DineFlow_AI_GTU_Minor_Project_Presentation.pptx
+++ b/docs/DineFlow_AI_GTU_Minor_Project_Presentation.pptx
@@ -3371,7 +3371,7 @@
               </a:defRPr>
             </a:pPr>
             <a:r>
-              <a:t>Head of Department: Cirag D. Patel</a:t>
+              <a:t>Head of Department: Dr. Chirag D. Patel</a:t>
             </a:r>
           </a:p>
           <a:p>
@@ -3383,7 +3383,7 @@
               </a:defRPr>
             </a:pPr>
             <a:r>
-              <a:t>  (HOD, Computer Engg. Dept.)</a:t>
+              <a:t>  (Head, Computer Engg. Dept.)</a:t>
             </a:r>
           </a:p>
           <a:p>
@@ -7436,7 +7436,7 @@
               </a:defRPr>
             </a:pPr>
             <a:r>
-              <a:t>Head of Dept: Cirag D. Patel</a:t>
+              <a:t>Head of Dept: Dr. Chirag D. Patel</a:t>
             </a:r>
           </a:p>
           <a:p>

--- a/docs/DineFlow_AI_GTU_Minor_Project_Presentation.pptx
+++ b/docs/DineFlow_AI_GTU_Minor_Project_Presentation.pptx
@@ -6974,15 +6974,15 @@
               </a:defRPr>
             </a:pPr>
             <a:r>
-              <a:t>• Eligible for Student Startup &amp; Innovation Policy (SSIP 2.0) PoC/Prototype Grant of up to ₹ 2.50 Lakhs.</a:t>
+              <a:t>• Status: Proposed &amp; Eligible (PoC/Prototype Grant up to ₹ 2.50 Lakhs).</a:t>
             </a:r>
             <a:br/>
             <a:r>
-              <a:t>• Application Focus: Supporting Tier-2/Tier-3 town restaurants with regional language Gujarati Soundbox &amp; automated recipe costing.</a:t>
+              <a:t>• Proposal Stage: In pipeline for submission to K. D. Polytechnic SSIP Innovation Council.</a:t>
             </a:r>
             <a:br/>
             <a:r>
-              <a:t>• Mentorship: Guided by K. D. Polytechnic SSIP Innovation Council.</a:t>
+              <a:t>• Target Use: Deploying thermal printers &amp; pilot trials in local Patan restaurants.</a:t>
             </a:r>
           </a:p>
         </p:txBody>

--- a/docs/DineFlow_AI_GTU_Minor_Project_Presentation.pptx
+++ b/docs/DineFlow_AI_GTU_Minor_Project_Presentation.pptx
@@ -3793,7 +3793,7 @@
                         </a:defRPr>
                       </a:pPr>
                       <a:r>
-                        <a:t>₹ 0 (Free Tier / SSIP)</a:t>
+                        <a:t>₹ 0 (AWS Free Tier / Self-Hosted)</a:t>
                       </a:r>
                     </a:p>
                   </a:txBody>
@@ -6770,7 +6770,7 @@
               </a:defRPr>
             </a:pPr>
             <a:r>
-              <a:t>Startup, SSIP Grant &amp; Patent Potential</a:t>
+              <a:t>Commercial Startup &amp; Business Model</a:t>
             </a:r>
           </a:p>
         </p:txBody>
@@ -6892,11 +6892,11 @@
             </a:r>
             <a:br/>
             <a:r>
-              <a:t>• Revenue Model: Affordable B2B SaaS subscription (₹499 - ₹1,499/mo) + source code licensing.</a:t>
+              <a:t>• Live Traction: Production platform operational at dineflowai.duckdns.org.</a:t>
             </a:r>
             <a:br/>
             <a:r>
-              <a:t>• Live Traction: Functional prototype live at dineflowai.duckdns.org.</a:t>
+              <a:t>• High Scalability: Multi-tenant database supports thousands of restaurants simultaneously.</a:t>
             </a:r>
           </a:p>
         </p:txBody>
@@ -6950,7 +6950,7 @@
               </a:defRPr>
             </a:pPr>
             <a:r>
-              <a:t>2. SSIP 2.0 Grant Scheme</a:t>
+              <a:t>2. Revenue &amp; Pricing Model</a:t>
             </a:r>
           </a:p>
           <a:p>
@@ -6962,7 +6962,7 @@
               </a:defRPr>
             </a:pPr>
             <a:r>
-              <a:t>Government of Gujarat</a:t>
+              <a:t>Self-Sustaining SaaS</a:t>
             </a:r>
           </a:p>
           <a:p>
@@ -6974,15 +6974,19 @@
               </a:defRPr>
             </a:pPr>
             <a:r>
-              <a:t>• Status: Proposed &amp; Eligible (PoC/Prototype Grant up to ₹ 2.50 Lakhs).</a:t>
+              <a:t>• Starter Plan: ₹ 499 / month (Single counter QSR &amp; cafes).</a:t>
             </a:r>
             <a:br/>
             <a:r>
-              <a:t>• Proposal Stage: In pipeline for submission to K. D. Polytechnic SSIP Innovation Council.</a:t>
+              <a:t>• Pro Restaurant: ₹ 1,499 / month (Full KDS, inventory &amp; multi-table).</a:t>
             </a:r>
             <a:br/>
             <a:r>
-              <a:t>• Target Use: Deploying thermal printers &amp; pilot trials in local Patan restaurants.</a:t>
+              <a:t>• Source Code Buyout: One-time commercial developer license.</a:t>
+            </a:r>
+            <a:br/>
+            <a:r>
+              <a:t>• 100% Bootstrapped: Zero debt or external grant dependency; profitable from Day 1.</a:t>
             </a:r>
           </a:p>
         </p:txBody>
@@ -7761,7 +7765,7 @@
               </a:defRPr>
             </a:pPr>
             <a:r>
-              <a:t>[7]  Conclusion, Future Scope &amp; SSIP 2.0 Entrepreneurship</a:t>
+              <a:t>[7]  Conclusion, Future Scope &amp; Commercial Startup Potential</a:t>
             </a:r>
           </a:p>
           <a:p>
@@ -7773,7 +7777,7 @@
               </a:defRPr>
             </a:pPr>
             <a:r>
-              <a:t>      Commercial validation at dineflowai.duckdns.org &amp; SSIP startup potential</a:t>
+              <a:t>      Commercial validation at dineflowai.duckdns.org &amp; B2B SaaS model</a:t>
             </a:r>
           </a:p>
         </p:txBody>

--- a/docs/DineFlow_AI_GTU_Minor_Project_Presentation.pptx
+++ b/docs/DineFlow_AI_GTU_Minor_Project_Presentation.pptx
@@ -3119,7 +3119,7 @@
             <a:avLst/>
           </a:prstGeom>
           <a:solidFill>
-            <a:srgbClr val="0F172A"/>
+            <a:srgbClr val="FFFFFF"/>
           </a:solidFill>
           <a:ln>
             <a:noFill/>
@@ -3149,14 +3149,105 @@
       </p:sp>
       <p:sp>
         <p:nvSpPr>
-          <p:cNvPr id="3" name="TextBox 2"/>
+          <p:cNvPr id="3" name="Rectangle 2"/>
+          <p:cNvSpPr/>
+          <p:nvPr/>
+        </p:nvSpPr>
+        <p:spPr>
+          <a:xfrm>
+            <a:off x="0" y="0"/>
+            <a:ext cx="12191695" cy="109728"/>
+          </a:xfrm>
+          <a:prstGeom prst="rect">
+            <a:avLst/>
+          </a:prstGeom>
+          <a:solidFill>
+            <a:srgbClr val="4F46E5"/>
+          </a:solidFill>
+          <a:ln>
+            <a:noFill/>
+          </a:ln>
+        </p:spPr>
+        <p:style>
+          <a:lnRef idx="1">
+            <a:schemeClr val="accent1"/>
+          </a:lnRef>
+          <a:fillRef idx="3">
+            <a:schemeClr val="accent1"/>
+          </a:fillRef>
+          <a:effectRef idx="2">
+            <a:schemeClr val="accent1"/>
+          </a:effectRef>
+          <a:fontRef idx="minor">
+            <a:schemeClr val="lt1"/>
+          </a:fontRef>
+        </p:style>
+        <p:txBody>
+          <a:bodyPr rtlCol="0" anchor="ctr"/>
+          <a:lstStyle/>
+          <a:p>
+            <a:pPr algn="ctr"/>
+          </a:p>
+        </p:txBody>
+      </p:sp>
+      <p:pic>
+        <p:nvPicPr>
+          <p:cNvPr id="4" name="Picture 3" descr="gtu_logo.png"/>
+          <p:cNvPicPr>
+            <a:picLocks noChangeAspect="1"/>
+          </p:cNvPicPr>
+          <p:nvPr/>
+        </p:nvPicPr>
+        <p:blipFill>
+          <a:blip r:embed="rId2"/>
+          <a:stretch>
+            <a:fillRect/>
+          </a:stretch>
+        </p:blipFill>
+        <p:spPr>
+          <a:xfrm>
+            <a:off x="914400" y="457200"/>
+            <a:ext cx="1371600" cy="1554480"/>
+          </a:xfrm>
+          <a:prstGeom prst="rect">
+            <a:avLst/>
+          </a:prstGeom>
+        </p:spPr>
+      </p:pic>
+      <p:pic>
+        <p:nvPicPr>
+          <p:cNvPr id="5" name="Picture 4" descr="kdp_patan_logo.png"/>
+          <p:cNvPicPr>
+            <a:picLocks noChangeAspect="1"/>
+          </p:cNvPicPr>
+          <p:nvPr/>
+        </p:nvPicPr>
+        <p:blipFill>
+          <a:blip r:embed="rId3"/>
+          <a:stretch>
+            <a:fillRect/>
+          </a:stretch>
+        </p:blipFill>
+        <p:spPr>
+          <a:xfrm>
+            <a:off x="9875520" y="457200"/>
+            <a:ext cx="1371600" cy="1371600"/>
+          </a:xfrm>
+          <a:prstGeom prst="rect">
+            <a:avLst/>
+          </a:prstGeom>
+        </p:spPr>
+      </p:pic>
+      <p:sp>
+        <p:nvSpPr>
+          <p:cNvPr id="6" name="TextBox 5"/>
           <p:cNvSpPr txBox="1"/>
           <p:nvPr/>
         </p:nvSpPr>
         <p:spPr>
           <a:xfrm>
-            <a:off x="914400" y="731520"/>
-            <a:ext cx="10362895" cy="2194560"/>
+            <a:off x="2468880" y="365760"/>
+            <a:ext cx="7223760" cy="1645920"/>
           </a:xfrm>
           <a:prstGeom prst="rect">
             <a:avLst/>
@@ -3170,180 +3261,345 @@
           <a:lstStyle/>
           <a:p>
             <a:pPr algn="ctr">
-              <a:defRPr sz="1400" b="1">
-                <a:solidFill>
-                  <a:srgbClr val="F59E0B"/>
-                </a:solidFill>
-                <a:latin typeface="Segoe UI"/>
-              </a:defRPr>
-            </a:pPr>
-            <a:r>
-              <a:t>GUJARAT TECHNOLOGICAL UNIVERSITY</a:t>
+              <a:defRPr sz="1300" b="1">
+                <a:solidFill>
+                  <a:srgbClr val="D97706"/>
+                </a:solidFill>
+                <a:latin typeface="Calibri"/>
+              </a:defRPr>
+            </a:pPr>
+            <a:r>
+              <a:t>GUJARAT TECHNOLOGICAL UNIVERSITY, AHMEDABAD</a:t>
             </a:r>
           </a:p>
           <a:p>
             <a:pPr algn="ctr">
-              <a:defRPr sz="1600" b="1">
-                <a:solidFill>
-                  <a:srgbClr val="94A3B8"/>
-                </a:solidFill>
-                <a:latin typeface="Segoe UI"/>
-              </a:defRPr>
-            </a:pPr>
-            <a:r>
-              <a:t>K. D. POLYTECHNIC, PATAN</a:t>
+              <a:defRPr sz="1800" b="1">
+                <a:solidFill>
+                  <a:srgbClr val="0F172A"/>
+                </a:solidFill>
+                <a:latin typeface="Calibri"/>
+              </a:defRPr>
+            </a:pPr>
+            <a:r>
+              <a:t>KILACHAND DEVCHAND (K. D.) POLYTECHNIC, PATAN</a:t>
             </a:r>
           </a:p>
           <a:p>
             <a:pPr algn="ctr">
-              <a:defRPr sz="2800" b="1">
-                <a:solidFill>
-                  <a:srgbClr val="F8FAFC"/>
-                </a:solidFill>
-                <a:latin typeface="Segoe UI"/>
+              <a:defRPr sz="1300" b="1">
+                <a:solidFill>
+                  <a:srgbClr val="4F46E5"/>
+                </a:solidFill>
+                <a:latin typeface="Calibri"/>
+              </a:defRPr>
+            </a:pPr>
+            <a:r>
+              <a:t>DEPARTMENT OF COMPUTER ENGINEERING</a:t>
+            </a:r>
+          </a:p>
+          <a:p>
+            <a:pPr algn="ctr">
+              <a:defRPr sz="1100">
+                <a:solidFill>
+                  <a:srgbClr val="64748B"/>
+                </a:solidFill>
+                <a:latin typeface="Calibri"/>
+              </a:defRPr>
+            </a:pPr>
+            <a:r>
+              <a:t>Diploma in Computer Engineering | Semester 5 | Academic Year 2026-27</a:t>
+            </a:r>
+          </a:p>
+        </p:txBody>
+      </p:sp>
+      <p:sp>
+        <p:nvSpPr>
+          <p:cNvPr id="7" name="Rounded Rectangle 6"/>
+          <p:cNvSpPr/>
+          <p:nvPr/>
+        </p:nvSpPr>
+        <p:spPr>
+          <a:xfrm>
+            <a:off x="914400" y="2194560"/>
+            <a:ext cx="10362895" cy="1280160"/>
+          </a:xfrm>
+          <a:prstGeom prst="roundRect">
+            <a:avLst/>
+          </a:prstGeom>
+          <a:solidFill>
+            <a:srgbClr val="F8FAFC"/>
+          </a:solidFill>
+          <a:ln w="19050">
+            <a:solidFill>
+              <a:srgbClr val="4F46E5"/>
+            </a:solidFill>
+          </a:ln>
+        </p:spPr>
+        <p:style>
+          <a:lnRef idx="1">
+            <a:schemeClr val="accent1"/>
+          </a:lnRef>
+          <a:fillRef idx="3">
+            <a:schemeClr val="accent1"/>
+          </a:fillRef>
+          <a:effectRef idx="2">
+            <a:schemeClr val="accent1"/>
+          </a:effectRef>
+          <a:fontRef idx="minor">
+            <a:schemeClr val="lt1"/>
+          </a:fontRef>
+        </p:style>
+        <p:txBody>
+          <a:bodyPr rtlCol="0" anchor="ctr" wrap="square"/>
+          <a:lstStyle/>
+          <a:p>
+            <a:pPr algn="ctr">
+              <a:defRPr sz="1100" b="1">
+                <a:solidFill>
+                  <a:srgbClr val="4F46E5"/>
+                </a:solidFill>
+                <a:latin typeface="Calibri"/>
+              </a:defRPr>
+            </a:pPr>
+            <a:r>
+              <a:t>MINOR PROJECT PRESENTATION (DI05000341)</a:t>
+            </a:r>
+          </a:p>
+          <a:p>
+            <a:pPr algn="ctr">
+              <a:defRPr sz="2200" b="1">
+                <a:solidFill>
+                  <a:srgbClr val="0F172A"/>
+                </a:solidFill>
+                <a:latin typeface="Calibri"/>
               </a:defRPr>
             </a:pPr>
             <a:r>
               <a:t>DineFlow AI: Next-Gen Restaurant Cloud POS, Contactless QR Ordering &amp; ERP</a:t>
             </a:r>
           </a:p>
+        </p:txBody>
+      </p:sp>
+      <p:sp>
+        <p:nvSpPr>
+          <p:cNvPr id="8" name="Rounded Rectangle 7"/>
+          <p:cNvSpPr/>
+          <p:nvPr/>
+        </p:nvSpPr>
+        <p:spPr>
+          <a:xfrm>
+            <a:off x="914400" y="3657600"/>
+            <a:ext cx="5029200" cy="2834640"/>
+          </a:xfrm>
+          <a:prstGeom prst="roundRect">
+            <a:avLst/>
+          </a:prstGeom>
+          <a:solidFill>
+            <a:srgbClr val="F8FAFC"/>
+          </a:solidFill>
+          <a:ln>
+            <a:solidFill>
+              <a:srgbClr val="E2E8F0"/>
+            </a:solidFill>
+          </a:ln>
+        </p:spPr>
+        <p:style>
+          <a:lnRef idx="1">
+            <a:schemeClr val="accent1"/>
+          </a:lnRef>
+          <a:fillRef idx="3">
+            <a:schemeClr val="accent1"/>
+          </a:fillRef>
+          <a:effectRef idx="2">
+            <a:schemeClr val="accent1"/>
+          </a:effectRef>
+          <a:fontRef idx="minor">
+            <a:schemeClr val="lt1"/>
+          </a:fontRef>
+        </p:style>
+        <p:txBody>
+          <a:bodyPr rtlCol="0" anchor="ctr" wrap="square"/>
+          <a:lstStyle/>
           <a:p>
             <a:pPr algn="ctr">
-              <a:defRPr sz="1200">
-                <a:solidFill>
-                  <a:srgbClr val="6366F1"/>
-                </a:solidFill>
-                <a:latin typeface="Segoe UI"/>
-              </a:defRPr>
-            </a:pPr>
-            <a:r>
-              <a:t>Diploma in Computer Engineering | Semester 5 | Academic Year 2026-27 | Code: DI05000341</a:t>
-            </a:r>
-          </a:p>
-        </p:txBody>
-      </p:sp>
-      <p:sp>
-        <p:nvSpPr>
-          <p:cNvPr id="4" name="TextBox 3"/>
-          <p:cNvSpPr txBox="1"/>
-          <p:nvPr/>
-        </p:nvSpPr>
-        <p:spPr>
-          <a:xfrm>
-            <a:off x="914400" y="3291840"/>
-            <a:ext cx="5029200" cy="2926080"/>
-          </a:xfrm>
-          <a:prstGeom prst="rect">
-            <a:avLst/>
-          </a:prstGeom>
-          <a:noFill/>
-        </p:spPr>
-        <p:txBody>
-          <a:bodyPr wrap="square">
-            <a:spAutoFit/>
-          </a:bodyPr>
-          <a:lstStyle/>
+              <a:defRPr sz="1250" b="1">
+                <a:solidFill>
+                  <a:srgbClr val="4F46E5"/>
+                </a:solidFill>
+                <a:latin typeface="Calibri"/>
+              </a:defRPr>
+            </a:pPr>
+            <a:r>
+              <a:t>PROJECT TEAM MEMBERS:</a:t>
+            </a:r>
+          </a:p>
           <a:p>
             <a:pPr>
-              <a:defRPr b="1" sz="1300">
-                <a:solidFill>
-                  <a:srgbClr val="10B981"/>
-                </a:solidFill>
-              </a:defRPr>
-            </a:pPr>
-            <a:r>
-              <a:t>PROJECT TEAM MEMBERS:</a:t>
+              <a:defRPr sz="1150" b="1">
+                <a:solidFill>
+                  <a:srgbClr val="1E293B"/>
+                </a:solidFill>
+                <a:latin typeface="Calibri"/>
+              </a:defRPr>
+            </a:pPr>
+            <a:r>
+              <a:t>• 1. PATEL SHUBH MAHESHKUMAR</a:t>
             </a:r>
           </a:p>
           <a:p>
             <a:pPr>
-              <a:defRPr sz="1200">
-                <a:solidFill>
-                  <a:srgbClr val="F8FAFC"/>
-                </a:solidFill>
-              </a:defRPr>
-            </a:pPr>
-            <a:r>
-              <a:t>• 1. PATEL SHUBH MAHESHKUMAR — 246310307123 (Project Lead)</a:t>
+              <a:defRPr sz="1050">
+                <a:solidFill>
+                  <a:srgbClr val="64748B"/>
+                </a:solidFill>
+                <a:latin typeface="Calibri"/>
+              </a:defRPr>
+            </a:pPr>
+            <a:r>
+              <a:t>    Enrollment No: 246310307123 (Project Lead)</a:t>
             </a:r>
           </a:p>
           <a:p>
             <a:pPr>
-              <a:defRPr sz="1200">
-                <a:solidFill>
-                  <a:srgbClr val="F8FAFC"/>
-                </a:solidFill>
-              </a:defRPr>
-            </a:pPr>
-            <a:r>
-              <a:t>• 2. [Student 2 Full Name] — [Enrollment No. 2]</a:t>
+              <a:defRPr sz="1150" b="1">
+                <a:solidFill>
+                  <a:srgbClr val="1E293B"/>
+                </a:solidFill>
+                <a:latin typeface="Calibri"/>
+              </a:defRPr>
+            </a:pPr>
+            <a:r>
+              <a:t>• 2. [Student 2 Full Name]</a:t>
             </a:r>
           </a:p>
           <a:p>
             <a:pPr>
-              <a:defRPr sz="1200">
-                <a:solidFill>
-                  <a:srgbClr val="F8FAFC"/>
-                </a:solidFill>
-              </a:defRPr>
-            </a:pPr>
-            <a:r>
-              <a:t>• 3. [Student 3 Full Name] — [Enrollment No. 3]</a:t>
+              <a:defRPr sz="1050">
+                <a:solidFill>
+                  <a:srgbClr val="64748B"/>
+                </a:solidFill>
+                <a:latin typeface="Calibri"/>
+              </a:defRPr>
+            </a:pPr>
+            <a:r>
+              <a:t>    Enrollment No: [Enrollment Number]</a:t>
             </a:r>
           </a:p>
           <a:p>
             <a:pPr>
-              <a:defRPr sz="1200">
-                <a:solidFill>
-                  <a:srgbClr val="F8FAFC"/>
-                </a:solidFill>
-              </a:defRPr>
-            </a:pPr>
-            <a:r>
-              <a:t>• 4. [Student 4 Full Name] — [Enrollment No. 4]</a:t>
-            </a:r>
-          </a:p>
-        </p:txBody>
-      </p:sp>
-      <p:sp>
-        <p:nvSpPr>
-          <p:cNvPr id="5" name="TextBox 4"/>
-          <p:cNvSpPr txBox="1"/>
-          <p:nvPr/>
-        </p:nvSpPr>
-        <p:spPr>
-          <a:xfrm>
-            <a:off x="6583680" y="3291840"/>
-            <a:ext cx="4663440" cy="2926080"/>
-          </a:xfrm>
-          <a:prstGeom prst="rect">
-            <a:avLst/>
-          </a:prstGeom>
-          <a:noFill/>
-        </p:spPr>
-        <p:txBody>
-          <a:bodyPr wrap="square">
-            <a:spAutoFit/>
-          </a:bodyPr>
-          <a:lstStyle/>
+              <a:defRPr sz="1150" b="1">
+                <a:solidFill>
+                  <a:srgbClr val="1E293B"/>
+                </a:solidFill>
+                <a:latin typeface="Calibri"/>
+              </a:defRPr>
+            </a:pPr>
+            <a:r>
+              <a:t>• 3. [Student 3 Full Name]</a:t>
+            </a:r>
+          </a:p>
           <a:p>
             <a:pPr>
-              <a:defRPr b="1" sz="1300">
-                <a:solidFill>
-                  <a:srgbClr val="6366F1"/>
-                </a:solidFill>
-              </a:defRPr>
-            </a:pPr>
-            <a:r>
-              <a:t>ACADEMIC GUIDANCE:</a:t>
+              <a:defRPr sz="1050">
+                <a:solidFill>
+                  <a:srgbClr val="64748B"/>
+                </a:solidFill>
+                <a:latin typeface="Calibri"/>
+              </a:defRPr>
+            </a:pPr>
+            <a:r>
+              <a:t>    Enrollment No: [Enrollment Number]</a:t>
             </a:r>
           </a:p>
           <a:p>
             <a:pPr>
-              <a:defRPr b="1" sz="1200">
-                <a:solidFill>
-                  <a:srgbClr val="F8FAFC"/>
-                </a:solidFill>
+              <a:defRPr sz="1150" b="1">
+                <a:solidFill>
+                  <a:srgbClr val="1E293B"/>
+                </a:solidFill>
+                <a:latin typeface="Calibri"/>
+              </a:defRPr>
+            </a:pPr>
+            <a:r>
+              <a:t>• 4. [Student 4 Full Name]</a:t>
+            </a:r>
+          </a:p>
+          <a:p>
+            <a:pPr>
+              <a:defRPr sz="1050">
+                <a:solidFill>
+                  <a:srgbClr val="64748B"/>
+                </a:solidFill>
+                <a:latin typeface="Calibri"/>
+              </a:defRPr>
+            </a:pPr>
+            <a:r>
+              <a:t>    Enrollment No: [Enrollment Number]</a:t>
+            </a:r>
+          </a:p>
+        </p:txBody>
+      </p:sp>
+      <p:sp>
+        <p:nvSpPr>
+          <p:cNvPr id="9" name="Rounded Rectangle 8"/>
+          <p:cNvSpPr/>
+          <p:nvPr/>
+        </p:nvSpPr>
+        <p:spPr>
+          <a:xfrm>
+            <a:off x="6217920" y="3657600"/>
+            <a:ext cx="5029200" cy="2834640"/>
+          </a:xfrm>
+          <a:prstGeom prst="roundRect">
+            <a:avLst/>
+          </a:prstGeom>
+          <a:solidFill>
+            <a:srgbClr val="F8FAFC"/>
+          </a:solidFill>
+          <a:ln>
+            <a:solidFill>
+              <a:srgbClr val="E2E8F0"/>
+            </a:solidFill>
+          </a:ln>
+        </p:spPr>
+        <p:style>
+          <a:lnRef idx="1">
+            <a:schemeClr val="accent1"/>
+          </a:lnRef>
+          <a:fillRef idx="3">
+            <a:schemeClr val="accent1"/>
+          </a:fillRef>
+          <a:effectRef idx="2">
+            <a:schemeClr val="accent1"/>
+          </a:effectRef>
+          <a:fontRef idx="minor">
+            <a:schemeClr val="lt1"/>
+          </a:fontRef>
+        </p:style>
+        <p:txBody>
+          <a:bodyPr rtlCol="0" anchor="ctr" wrap="square"/>
+          <a:lstStyle/>
+          <a:p>
+            <a:pPr algn="ctr">
+              <a:defRPr sz="1250" b="1">
+                <a:solidFill>
+                  <a:srgbClr val="4F46E5"/>
+                </a:solidFill>
+                <a:latin typeface="Calibri"/>
+              </a:defRPr>
+            </a:pPr>
+            <a:r>
+              <a:t>ACADEMIC GUIDANCE &amp; APPROVAL:</a:t>
+            </a:r>
+          </a:p>
+          <a:p>
+            <a:pPr>
+              <a:defRPr sz="1150" b="1">
+                <a:solidFill>
+                  <a:srgbClr val="1E293B"/>
+                </a:solidFill>
+                <a:latin typeface="Calibri"/>
               </a:defRPr>
             </a:pPr>
             <a:r>
@@ -3352,22 +3608,24 @@
           </a:p>
           <a:p>
             <a:pPr>
-              <a:defRPr sz="1100">
-                <a:solidFill>
-                  <a:srgbClr val="94A3B8"/>
-                </a:solidFill>
-              </a:defRPr>
-            </a:pPr>
-            <a:r>
-              <a:t>  (Lecturer, Computer Engg. Dept.)</a:t>
+              <a:defRPr sz="1050">
+                <a:solidFill>
+                  <a:srgbClr val="64748B"/>
+                </a:solidFill>
+                <a:latin typeface="Calibri"/>
+              </a:defRPr>
+            </a:pPr>
+            <a:r>
+              <a:t>  (Lecturer, Computer Engineering Dept.)</a:t>
             </a:r>
           </a:p>
           <a:p>
             <a:pPr>
-              <a:defRPr b="1" sz="1200">
-                <a:solidFill>
-                  <a:srgbClr val="F8FAFC"/>
-                </a:solidFill>
+              <a:defRPr sz="1150" b="1">
+                <a:solidFill>
+                  <a:srgbClr val="1E293B"/>
+                </a:solidFill>
+                <a:latin typeface="Calibri"/>
               </a:defRPr>
             </a:pPr>
             <a:r>
@@ -3376,22 +3634,24 @@
           </a:p>
           <a:p>
             <a:pPr>
-              <a:defRPr sz="1100">
-                <a:solidFill>
-                  <a:srgbClr val="94A3B8"/>
-                </a:solidFill>
-              </a:defRPr>
-            </a:pPr>
-            <a:r>
-              <a:t>  (Head, Computer Engg. Dept.)</a:t>
+              <a:defRPr sz="1050">
+                <a:solidFill>
+                  <a:srgbClr val="64748B"/>
+                </a:solidFill>
+                <a:latin typeface="Calibri"/>
+              </a:defRPr>
+            </a:pPr>
+            <a:r>
+              <a:t>  (Head, Computer Engineering Dept.)</a:t>
             </a:r>
           </a:p>
           <a:p>
             <a:pPr>
-              <a:defRPr b="1" sz="1200">
-                <a:solidFill>
-                  <a:srgbClr val="F8FAFC"/>
-                </a:solidFill>
+              <a:defRPr sz="1150" b="1">
+                <a:solidFill>
+                  <a:srgbClr val="1E293B"/>
+                </a:solidFill>
+                <a:latin typeface="Calibri"/>
               </a:defRPr>
             </a:pPr>
             <a:r>
@@ -3400,10 +3660,11 @@
           </a:p>
           <a:p>
             <a:pPr>
-              <a:defRPr sz="1100">
-                <a:solidFill>
-                  <a:srgbClr val="94A3B8"/>
-                </a:solidFill>
+              <a:defRPr sz="1050">
+                <a:solidFill>
+                  <a:srgbClr val="64748B"/>
+                </a:solidFill>
+                <a:latin typeface="Calibri"/>
               </a:defRPr>
             </a:pPr>
             <a:r>
@@ -3445,7 +3706,7 @@
             <a:avLst/>
           </a:prstGeom>
           <a:solidFill>
-            <a:srgbClr val="0F172A"/>
+            <a:srgbClr val="FFFFFF"/>
           </a:solidFill>
           <a:ln>
             <a:noFill/>
@@ -3475,14 +3736,57 @@
       </p:sp>
       <p:sp>
         <p:nvSpPr>
-          <p:cNvPr id="3" name="TextBox 2"/>
+          <p:cNvPr id="3" name="Rectangle 2"/>
+          <p:cNvSpPr/>
+          <p:nvPr/>
+        </p:nvSpPr>
+        <p:spPr>
+          <a:xfrm>
+            <a:off x="0" y="0"/>
+            <a:ext cx="12191695" cy="73152"/>
+          </a:xfrm>
+          <a:prstGeom prst="rect">
+            <a:avLst/>
+          </a:prstGeom>
+          <a:solidFill>
+            <a:srgbClr val="4F46E5"/>
+          </a:solidFill>
+          <a:ln>
+            <a:noFill/>
+          </a:ln>
+        </p:spPr>
+        <p:style>
+          <a:lnRef idx="1">
+            <a:schemeClr val="accent1"/>
+          </a:lnRef>
+          <a:fillRef idx="3">
+            <a:schemeClr val="accent1"/>
+          </a:fillRef>
+          <a:effectRef idx="2">
+            <a:schemeClr val="accent1"/>
+          </a:effectRef>
+          <a:fontRef idx="minor">
+            <a:schemeClr val="lt1"/>
+          </a:fontRef>
+        </p:style>
+        <p:txBody>
+          <a:bodyPr rtlCol="0" anchor="ctr"/>
+          <a:lstStyle/>
+          <a:p>
+            <a:pPr algn="ctr"/>
+          </a:p>
+        </p:txBody>
+      </p:sp>
+      <p:sp>
+        <p:nvSpPr>
+          <p:cNvPr id="4" name="TextBox 3"/>
           <p:cNvSpPr txBox="1"/>
           <p:nvPr/>
         </p:nvSpPr>
         <p:spPr>
           <a:xfrm>
-            <a:off x="731520" y="365760"/>
-            <a:ext cx="10698480" cy="822960"/>
+            <a:off x="731520" y="320040"/>
+            <a:ext cx="7772400" cy="777240"/>
           </a:xfrm>
           <a:prstGeom prst="rect">
             <a:avLst/>
@@ -3496,29 +3800,77 @@
           <a:lstStyle/>
           <a:p>
             <a:pPr>
-              <a:defRPr sz="2600" b="1">
-                <a:solidFill>
-                  <a:srgbClr val="F8FAFC"/>
-                </a:solidFill>
-                <a:latin typeface="Segoe UI"/>
-              </a:defRPr>
-            </a:pPr>
-            <a:r>
-              <a:t>Components, Tech Stack &amp; Cost Estimate (BOM)</a:t>
-            </a:r>
-          </a:p>
-        </p:txBody>
-      </p:sp>
-      <p:sp>
-        <p:nvSpPr>
-          <p:cNvPr id="4" name="TextBox 3"/>
+              <a:defRPr sz="2400" b="1">
+                <a:solidFill>
+                  <a:srgbClr val="0F172A"/>
+                </a:solidFill>
+                <a:latin typeface="Calibri"/>
+              </a:defRPr>
+            </a:pPr>
+            <a:r>
+              <a:t>Components and Cost Estimate</a:t>
+            </a:r>
+          </a:p>
+        </p:txBody>
+      </p:sp>
+      <p:pic>
+        <p:nvPicPr>
+          <p:cNvPr id="5" name="Picture 4" descr="gtu_logo.png"/>
+          <p:cNvPicPr>
+            <a:picLocks noChangeAspect="1"/>
+          </p:cNvPicPr>
+          <p:nvPr/>
+        </p:nvPicPr>
+        <p:blipFill>
+          <a:blip r:embed="rId2"/>
+          <a:stretch>
+            <a:fillRect/>
+          </a:stretch>
+        </p:blipFill>
+        <p:spPr>
+          <a:xfrm>
+            <a:off x="10241280" y="182880"/>
+            <a:ext cx="731520" cy="822960"/>
+          </a:xfrm>
+          <a:prstGeom prst="rect">
+            <a:avLst/>
+          </a:prstGeom>
+        </p:spPr>
+      </p:pic>
+      <p:pic>
+        <p:nvPicPr>
+          <p:cNvPr id="6" name="Picture 5" descr="kdp_patan_logo.png"/>
+          <p:cNvPicPr>
+            <a:picLocks noChangeAspect="1"/>
+          </p:cNvPicPr>
+          <p:nvPr/>
+        </p:nvPicPr>
+        <p:blipFill>
+          <a:blip r:embed="rId3"/>
+          <a:stretch>
+            <a:fillRect/>
+          </a:stretch>
+        </p:blipFill>
+        <p:spPr>
+          <a:xfrm>
+            <a:off x="11155680" y="182880"/>
+            <a:ext cx="777240" cy="777240"/>
+          </a:xfrm>
+          <a:prstGeom prst="rect">
+            <a:avLst/>
+          </a:prstGeom>
+        </p:spPr>
+      </p:pic>
+      <p:sp>
+        <p:nvSpPr>
+          <p:cNvPr id="7" name="TextBox 6"/>
           <p:cNvSpPr txBox="1"/>
           <p:nvPr/>
         </p:nvSpPr>
         <p:spPr>
           <a:xfrm>
-            <a:off x="8412480" y="411480"/>
-            <a:ext cx="3017520" cy="365760"/>
+            <a:off x="731520" y="960120"/>
+            <a:ext cx="9144000" cy="320040"/>
           </a:xfrm>
           <a:prstGeom prst="rect">
             <a:avLst/>
@@ -3531,30 +3883,30 @@
           </a:bodyPr>
           <a:lstStyle/>
           <a:p>
-            <a:pPr algn="r">
-              <a:defRPr sz="1100" b="1">
-                <a:solidFill>
-                  <a:srgbClr val="6366F1"/>
-                </a:solidFill>
-                <a:latin typeface="Segoe UI"/>
-              </a:defRPr>
-            </a:pPr>
-            <a:r>
-              <a:t>Minor Project | DI05000341 | Slide 10</a:t>
+            <a:pPr>
+              <a:defRPr sz="1050" b="1">
+                <a:solidFill>
+                  <a:srgbClr val="4F46E5"/>
+                </a:solidFill>
+                <a:latin typeface="Calibri"/>
+              </a:defRPr>
+            </a:pPr>
+            <a:r>
+              <a:t>K. D. Polytechnic, Patan | Department of Computer Engineering | Minor Project (DI05000341) | Slide 10</a:t>
             </a:r>
           </a:p>
         </p:txBody>
       </p:sp>
       <p:graphicFrame>
         <p:nvGraphicFramePr>
-          <p:cNvPr id="5" name="Table 4"/>
+          <p:cNvPr id="8" name="Table 7"/>
           <p:cNvGraphicFramePr>
             <a:graphicFrameLocks noGrp="1"/>
           </p:cNvGraphicFramePr>
           <p:nvPr/>
         </p:nvGraphicFramePr>
         <p:xfrm>
-          <a:off x="914400" y="1463040"/>
+          <a:off x="914400" y="1371600"/>
           <a:ext cx="10332720" cy="3840480"/>
         </p:xfrm>
         <a:graphic>
@@ -3579,18 +3931,19 @@
                       <a:pPr>
                         <a:defRPr b="1" sz="1100">
                           <a:solidFill>
-                            <a:srgbClr val="F8FAFC"/>
+                            <a:srgbClr val="FFFFFF"/>
                           </a:solidFill>
+                          <a:latin typeface="Calibri"/>
                         </a:defRPr>
                       </a:pPr>
                       <a:r>
-                        <a:t>Sr.</a:t>
+                        <a:t>S. No.</a:t>
                       </a:r>
                     </a:p>
                   </a:txBody>
                   <a:tcPr>
                     <a:solidFill>
-                      <a:srgbClr val="6366F1"/>
+                      <a:srgbClr val="4F46E5"/>
                     </a:solidFill>
                   </a:tcPr>
                 </a:tc>
@@ -3602,8 +3955,9 @@
                       <a:pPr>
                         <a:defRPr b="1" sz="1100">
                           <a:solidFill>
-                            <a:srgbClr val="F8FAFC"/>
+                            <a:srgbClr val="FFFFFF"/>
                           </a:solidFill>
+                          <a:latin typeface="Calibri"/>
                         </a:defRPr>
                       </a:pPr>
                       <a:r>
@@ -3613,7 +3967,7 @@
                   </a:txBody>
                   <a:tcPr>
                     <a:solidFill>
-                      <a:srgbClr val="6366F1"/>
+                      <a:srgbClr val="4F46E5"/>
                     </a:solidFill>
                   </a:tcPr>
                 </a:tc>
@@ -3625,8 +3979,9 @@
                       <a:pPr>
                         <a:defRPr b="1" sz="1100">
                           <a:solidFill>
-                            <a:srgbClr val="F8FAFC"/>
+                            <a:srgbClr val="FFFFFF"/>
                           </a:solidFill>
+                          <a:latin typeface="Calibri"/>
                         </a:defRPr>
                       </a:pPr>
                       <a:r>
@@ -3636,7 +3991,7 @@
                   </a:txBody>
                   <a:tcPr>
                     <a:solidFill>
-                      <a:srgbClr val="6366F1"/>
+                      <a:srgbClr val="4F46E5"/>
                     </a:solidFill>
                   </a:tcPr>
                 </a:tc>
@@ -3648,8 +4003,9 @@
                       <a:pPr>
                         <a:defRPr b="1" sz="1100">
                           <a:solidFill>
-                            <a:srgbClr val="F8FAFC"/>
+                            <a:srgbClr val="FFFFFF"/>
                           </a:solidFill>
+                          <a:latin typeface="Calibri"/>
                         </a:defRPr>
                       </a:pPr>
                       <a:r>
@@ -3659,7 +4015,7 @@
                   </a:txBody>
                   <a:tcPr>
                     <a:solidFill>
-                      <a:srgbClr val="6366F1"/>
+                      <a:srgbClr val="4F46E5"/>
                     </a:solidFill>
                   </a:tcPr>
                 </a:tc>
@@ -3671,8 +4027,9 @@
                       <a:pPr>
                         <a:defRPr b="1" sz="1100">
                           <a:solidFill>
-                            <a:srgbClr val="F8FAFC"/>
+                            <a:srgbClr val="FFFFFF"/>
                           </a:solidFill>
+                          <a:latin typeface="Calibri"/>
                         </a:defRPr>
                       </a:pPr>
                       <a:r>
@@ -3682,7 +4039,7 @@
                   </a:txBody>
                   <a:tcPr>
                     <a:solidFill>
-                      <a:srgbClr val="6366F1"/>
+                      <a:srgbClr val="4F46E5"/>
                     </a:solidFill>
                   </a:tcPr>
                 </a:tc>
@@ -3696,8 +4053,9 @@
                       <a:pPr>
                         <a:defRPr sz="1050">
                           <a:solidFill>
-                            <a:srgbClr val="F8FAFC"/>
+                            <a:srgbClr val="1E293B"/>
                           </a:solidFill>
+                          <a:latin typeface="Calibri"/>
                         </a:defRPr>
                       </a:pPr>
                       <a:r>
@@ -3707,7 +4065,7 @@
                   </a:txBody>
                   <a:tcPr>
                     <a:solidFill>
-                      <a:srgbClr val="1E293B"/>
+                      <a:srgbClr val="F8FAFC"/>
                     </a:solidFill>
                   </a:tcPr>
                 </a:tc>
@@ -3719,18 +4077,19 @@
                       <a:pPr>
                         <a:defRPr sz="1050">
                           <a:solidFill>
-                            <a:srgbClr val="F8FAFC"/>
+                            <a:srgbClr val="1E293B"/>
                           </a:solidFill>
+                          <a:latin typeface="Calibri"/>
                         </a:defRPr>
                       </a:pPr>
                       <a:r>
-                        <a:t>Cloud Infrastructure (AWS EC2)</a:t>
+                        <a:t>Cloud Hosting Server</a:t>
                       </a:r>
                     </a:p>
                   </a:txBody>
                   <a:tcPr>
                     <a:solidFill>
-                      <a:srgbClr val="1E293B"/>
+                      <a:srgbClr val="F8FAFC"/>
                     </a:solidFill>
                   </a:tcPr>
                 </a:tc>
@@ -3742,18 +4101,19 @@
                       <a:pPr>
                         <a:defRPr sz="1050">
                           <a:solidFill>
-                            <a:srgbClr val="F8FAFC"/>
+                            <a:srgbClr val="1E293B"/>
                           </a:solidFill>
+                          <a:latin typeface="Calibri"/>
                         </a:defRPr>
                       </a:pPr>
                       <a:r>
-                        <a:t>Ubuntu Linux 24.04 LTS, 1 vCPU, 2GB RAM</a:t>
+                        <a:t>AWS EC2 Ubuntu 24.04 LTS, 1 vCPU, 2GB RAM</a:t>
                       </a:r>
                     </a:p>
                   </a:txBody>
                   <a:tcPr>
                     <a:solidFill>
-                      <a:srgbClr val="1E293B"/>
+                      <a:srgbClr val="F8FAFC"/>
                     </a:solidFill>
                   </a:tcPr>
                 </a:tc>
@@ -3765,8 +4125,9 @@
                       <a:pPr>
                         <a:defRPr sz="1050">
                           <a:solidFill>
-                            <a:srgbClr val="F8FAFC"/>
+                            <a:srgbClr val="1E293B"/>
                           </a:solidFill>
+                          <a:latin typeface="Calibri"/>
                         </a:defRPr>
                       </a:pPr>
                       <a:r>
@@ -3776,7 +4137,7 @@
                   </a:txBody>
                   <a:tcPr>
                     <a:solidFill>
-                      <a:srgbClr val="1E293B"/>
+                      <a:srgbClr val="F8FAFC"/>
                     </a:solidFill>
                   </a:tcPr>
                 </a:tc>
@@ -3788,18 +4149,19 @@
                       <a:pPr>
                         <a:defRPr sz="1050">
                           <a:solidFill>
-                            <a:srgbClr val="F8FAFC"/>
+                            <a:srgbClr val="1E293B"/>
                           </a:solidFill>
+                          <a:latin typeface="Calibri"/>
                         </a:defRPr>
                       </a:pPr>
                       <a:r>
-                        <a:t>₹ 0 (AWS Free Tier / Self-Hosted)</a:t>
+                        <a:t>₹ 0 (Free Tier / Self-Hosted)</a:t>
                       </a:r>
                     </a:p>
                   </a:txBody>
                   <a:tcPr>
                     <a:solidFill>
-                      <a:srgbClr val="1E293B"/>
+                      <a:srgbClr val="F8FAFC"/>
                     </a:solidFill>
                   </a:tcPr>
                 </a:tc>
@@ -3813,8 +4175,9 @@
                       <a:pPr>
                         <a:defRPr sz="1050">
                           <a:solidFill>
-                            <a:srgbClr val="F8FAFC"/>
+                            <a:srgbClr val="1E293B"/>
                           </a:solidFill>
+                          <a:latin typeface="Calibri"/>
                         </a:defRPr>
                       </a:pPr>
                       <a:r>
@@ -3824,7 +4187,7 @@
                   </a:txBody>
                   <a:tcPr>
                     <a:solidFill>
-                      <a:srgbClr val="1E293B"/>
+                      <a:srgbClr val="F8FAFC"/>
                     </a:solidFill>
                   </a:tcPr>
                 </a:tc>
@@ -3836,18 +4199,19 @@
                       <a:pPr>
                         <a:defRPr sz="1050">
                           <a:solidFill>
-                            <a:srgbClr val="F8FAFC"/>
+                            <a:srgbClr val="1E293B"/>
                           </a:solidFill>
+                          <a:latin typeface="Calibri"/>
                         </a:defRPr>
                       </a:pPr>
                       <a:r>
-                        <a:t>Core Framework &amp; Database</a:t>
+                        <a:t>Backend &amp; Database</a:t>
                       </a:r>
                     </a:p>
                   </a:txBody>
                   <a:tcPr>
                     <a:solidFill>
-                      <a:srgbClr val="1E293B"/>
+                      <a:srgbClr val="F8FAFC"/>
                     </a:solidFill>
                   </a:tcPr>
                 </a:tc>
@@ -3859,8 +4223,9 @@
                       <a:pPr>
                         <a:defRPr sz="1050">
                           <a:solidFill>
-                            <a:srgbClr val="F8FAFC"/>
+                            <a:srgbClr val="1E293B"/>
                           </a:solidFill>
+                          <a:latin typeface="Calibri"/>
                         </a:defRPr>
                       </a:pPr>
                       <a:r>
@@ -3870,7 +4235,7 @@
                   </a:txBody>
                   <a:tcPr>
                     <a:solidFill>
-                      <a:srgbClr val="1E293B"/>
+                      <a:srgbClr val="F8FAFC"/>
                     </a:solidFill>
                   </a:tcPr>
                 </a:tc>
@@ -3882,8 +4247,9 @@
                       <a:pPr>
                         <a:defRPr sz="1050">
                           <a:solidFill>
-                            <a:srgbClr val="F8FAFC"/>
+                            <a:srgbClr val="1E293B"/>
                           </a:solidFill>
+                          <a:latin typeface="Calibri"/>
                         </a:defRPr>
                       </a:pPr>
                       <a:r>
@@ -3893,7 +4259,7 @@
                   </a:txBody>
                   <a:tcPr>
                     <a:solidFill>
-                      <a:srgbClr val="1E293B"/>
+                      <a:srgbClr val="F8FAFC"/>
                     </a:solidFill>
                   </a:tcPr>
                 </a:tc>
@@ -3905,8 +4271,9 @@
                       <a:pPr>
                         <a:defRPr sz="1050">
                           <a:solidFill>
-                            <a:srgbClr val="F8FAFC"/>
+                            <a:srgbClr val="1E293B"/>
                           </a:solidFill>
+                          <a:latin typeface="Calibri"/>
                         </a:defRPr>
                       </a:pPr>
                       <a:r>
@@ -3916,7 +4283,7 @@
                   </a:txBody>
                   <a:tcPr>
                     <a:solidFill>
-                      <a:srgbClr val="1E293B"/>
+                      <a:srgbClr val="F8FAFC"/>
                     </a:solidFill>
                   </a:tcPr>
                 </a:tc>
@@ -3930,8 +4297,9 @@
                       <a:pPr>
                         <a:defRPr sz="1050">
                           <a:solidFill>
-                            <a:srgbClr val="F8FAFC"/>
+                            <a:srgbClr val="1E293B"/>
                           </a:solidFill>
+                          <a:latin typeface="Calibri"/>
                         </a:defRPr>
                       </a:pPr>
                       <a:r>
@@ -3941,7 +4309,7 @@
                   </a:txBody>
                   <a:tcPr>
                     <a:solidFill>
-                      <a:srgbClr val="1E293B"/>
+                      <a:srgbClr val="F8FAFC"/>
                     </a:solidFill>
                   </a:tcPr>
                 </a:tc>
@@ -3953,8 +4321,9 @@
                       <a:pPr>
                         <a:defRPr sz="1050">
                           <a:solidFill>
-                            <a:srgbClr val="F8FAFC"/>
+                            <a:srgbClr val="1E293B"/>
                           </a:solidFill>
+                          <a:latin typeface="Calibri"/>
                         </a:defRPr>
                       </a:pPr>
                       <a:r>
@@ -3964,7 +4333,7 @@
                   </a:txBody>
                   <a:tcPr>
                     <a:solidFill>
-                      <a:srgbClr val="1E293B"/>
+                      <a:srgbClr val="F8FAFC"/>
                     </a:solidFill>
                   </a:tcPr>
                 </a:tc>
@@ -3976,8 +4345,9 @@
                       <a:pPr>
                         <a:defRPr sz="1050">
                           <a:solidFill>
-                            <a:srgbClr val="F8FAFC"/>
+                            <a:srgbClr val="1E293B"/>
                           </a:solidFill>
+                          <a:latin typeface="Calibri"/>
                         </a:defRPr>
                       </a:pPr>
                       <a:r>
@@ -3987,7 +4357,7 @@
                   </a:txBody>
                   <a:tcPr>
                     <a:solidFill>
-                      <a:srgbClr val="1E293B"/>
+                      <a:srgbClr val="F8FAFC"/>
                     </a:solidFill>
                   </a:tcPr>
                 </a:tc>
@@ -3999,8 +4369,9 @@
                       <a:pPr>
                         <a:defRPr sz="1050">
                           <a:solidFill>
-                            <a:srgbClr val="F8FAFC"/>
+                            <a:srgbClr val="1E293B"/>
                           </a:solidFill>
+                          <a:latin typeface="Calibri"/>
                         </a:defRPr>
                       </a:pPr>
                       <a:r>
@@ -4010,7 +4381,7 @@
                   </a:txBody>
                   <a:tcPr>
                     <a:solidFill>
-                      <a:srgbClr val="1E293B"/>
+                      <a:srgbClr val="F8FAFC"/>
                     </a:solidFill>
                   </a:tcPr>
                 </a:tc>
@@ -4022,8 +4393,9 @@
                       <a:pPr>
                         <a:defRPr sz="1050">
                           <a:solidFill>
-                            <a:srgbClr val="F8FAFC"/>
+                            <a:srgbClr val="1E293B"/>
                           </a:solidFill>
+                          <a:latin typeface="Calibri"/>
                         </a:defRPr>
                       </a:pPr>
                       <a:r>
@@ -4033,7 +4405,7 @@
                   </a:txBody>
                   <a:tcPr>
                     <a:solidFill>
-                      <a:srgbClr val="1E293B"/>
+                      <a:srgbClr val="F8FAFC"/>
                     </a:solidFill>
                   </a:tcPr>
                 </a:tc>
@@ -4047,8 +4419,9 @@
                       <a:pPr>
                         <a:defRPr sz="1050">
                           <a:solidFill>
-                            <a:srgbClr val="F8FAFC"/>
+                            <a:srgbClr val="1E293B"/>
                           </a:solidFill>
+                          <a:latin typeface="Calibri"/>
                         </a:defRPr>
                       </a:pPr>
                       <a:r>
@@ -4058,7 +4431,7 @@
                   </a:txBody>
                   <a:tcPr>
                     <a:solidFill>
-                      <a:srgbClr val="1E293B"/>
+                      <a:srgbClr val="F8FAFC"/>
                     </a:solidFill>
                   </a:tcPr>
                 </a:tc>
@@ -4070,8 +4443,9 @@
                       <a:pPr>
                         <a:defRPr sz="1050">
                           <a:solidFill>
-                            <a:srgbClr val="F8FAFC"/>
+                            <a:srgbClr val="1E293B"/>
                           </a:solidFill>
+                          <a:latin typeface="Calibri"/>
                         </a:defRPr>
                       </a:pPr>
                       <a:r>
@@ -4081,7 +4455,7 @@
                   </a:txBody>
                   <a:tcPr>
                     <a:solidFill>
-                      <a:srgbClr val="1E293B"/>
+                      <a:srgbClr val="F8FAFC"/>
                     </a:solidFill>
                   </a:tcPr>
                 </a:tc>
@@ -4093,8 +4467,9 @@
                       <a:pPr>
                         <a:defRPr sz="1050">
                           <a:solidFill>
-                            <a:srgbClr val="F8FAFC"/>
+                            <a:srgbClr val="1E293B"/>
                           </a:solidFill>
+                          <a:latin typeface="Calibri"/>
                         </a:defRPr>
                       </a:pPr>
                       <a:r>
@@ -4104,7 +4479,7 @@
                   </a:txBody>
                   <a:tcPr>
                     <a:solidFill>
-                      <a:srgbClr val="1E293B"/>
+                      <a:srgbClr val="F8FAFC"/>
                     </a:solidFill>
                   </a:tcPr>
                 </a:tc>
@@ -4116,8 +4491,9 @@
                       <a:pPr>
                         <a:defRPr sz="1050">
                           <a:solidFill>
-                            <a:srgbClr val="F8FAFC"/>
+                            <a:srgbClr val="1E293B"/>
                           </a:solidFill>
+                          <a:latin typeface="Calibri"/>
                         </a:defRPr>
                       </a:pPr>
                       <a:r>
@@ -4127,7 +4503,7 @@
                   </a:txBody>
                   <a:tcPr>
                     <a:solidFill>
-                      <a:srgbClr val="1E293B"/>
+                      <a:srgbClr val="F8FAFC"/>
                     </a:solidFill>
                   </a:tcPr>
                 </a:tc>
@@ -4139,8 +4515,9 @@
                       <a:pPr>
                         <a:defRPr sz="1050">
                           <a:solidFill>
-                            <a:srgbClr val="F8FAFC"/>
+                            <a:srgbClr val="1E293B"/>
                           </a:solidFill>
+                          <a:latin typeface="Calibri"/>
                         </a:defRPr>
                       </a:pPr>
                       <a:r>
@@ -4150,7 +4527,7 @@
                   </a:txBody>
                   <a:tcPr>
                     <a:solidFill>
-                      <a:srgbClr val="1E293B"/>
+                      <a:srgbClr val="F8FAFC"/>
                     </a:solidFill>
                   </a:tcPr>
                 </a:tc>
@@ -4164,8 +4541,9 @@
                       <a:pPr>
                         <a:defRPr sz="1050">
                           <a:solidFill>
-                            <a:srgbClr val="F8FAFC"/>
+                            <a:srgbClr val="1E293B"/>
                           </a:solidFill>
+                          <a:latin typeface="Calibri"/>
                         </a:defRPr>
                       </a:pPr>
                       <a:r>
@@ -4175,7 +4553,7 @@
                   </a:txBody>
                   <a:tcPr>
                     <a:solidFill>
-                      <a:srgbClr val="1E293B"/>
+                      <a:srgbClr val="F8FAFC"/>
                     </a:solidFill>
                   </a:tcPr>
                 </a:tc>
@@ -4187,8 +4565,9 @@
                       <a:pPr>
                         <a:defRPr sz="1050">
                           <a:solidFill>
-                            <a:srgbClr val="F8FAFC"/>
+                            <a:srgbClr val="1E293B"/>
                           </a:solidFill>
+                          <a:latin typeface="Calibri"/>
                         </a:defRPr>
                       </a:pPr>
                       <a:r>
@@ -4198,7 +4577,7 @@
                   </a:txBody>
                   <a:tcPr>
                     <a:solidFill>
-                      <a:srgbClr val="1E293B"/>
+                      <a:srgbClr val="F8FAFC"/>
                     </a:solidFill>
                   </a:tcPr>
                 </a:tc>
@@ -4210,8 +4589,9 @@
                       <a:pPr>
                         <a:defRPr sz="1050">
                           <a:solidFill>
-                            <a:srgbClr val="F8FAFC"/>
+                            <a:srgbClr val="1E293B"/>
                           </a:solidFill>
+                          <a:latin typeface="Calibri"/>
                         </a:defRPr>
                       </a:pPr>
                       <a:r>
@@ -4221,7 +4601,7 @@
                   </a:txBody>
                   <a:tcPr>
                     <a:solidFill>
-                      <a:srgbClr val="1E293B"/>
+                      <a:srgbClr val="F8FAFC"/>
                     </a:solidFill>
                   </a:tcPr>
                 </a:tc>
@@ -4233,8 +4613,9 @@
                       <a:pPr>
                         <a:defRPr sz="1050">
                           <a:solidFill>
-                            <a:srgbClr val="F8FAFC"/>
+                            <a:srgbClr val="1E293B"/>
                           </a:solidFill>
+                          <a:latin typeface="Calibri"/>
                         </a:defRPr>
                       </a:pPr>
                       <a:r>
@@ -4244,7 +4625,7 @@
                   </a:txBody>
                   <a:tcPr>
                     <a:solidFill>
-                      <a:srgbClr val="1E293B"/>
+                      <a:srgbClr val="F8FAFC"/>
                     </a:solidFill>
                   </a:tcPr>
                 </a:tc>
@@ -4256,8 +4637,9 @@
                       <a:pPr>
                         <a:defRPr sz="1050">
                           <a:solidFill>
-                            <a:srgbClr val="F8FAFC"/>
+                            <a:srgbClr val="1E293B"/>
                           </a:solidFill>
+                          <a:latin typeface="Calibri"/>
                         </a:defRPr>
                       </a:pPr>
                       <a:r>
@@ -4267,7 +4649,7 @@
                   </a:txBody>
                   <a:tcPr>
                     <a:solidFill>
-                      <a:srgbClr val="1E293B"/>
+                      <a:srgbClr val="F8FAFC"/>
                     </a:solidFill>
                   </a:tcPr>
                 </a:tc>
@@ -4278,14 +4660,14 @@
       </p:graphicFrame>
       <p:sp>
         <p:nvSpPr>
-          <p:cNvPr id="6" name="TextBox 5"/>
+          <p:cNvPr id="9" name="TextBox 8"/>
           <p:cNvSpPr txBox="1"/>
           <p:nvPr/>
         </p:nvSpPr>
         <p:spPr>
           <a:xfrm>
-            <a:off x="914400" y="5486400"/>
-            <a:ext cx="10332720" cy="914400"/>
+            <a:off x="914400" y="5394960"/>
+            <a:ext cx="10362895" cy="914400"/>
           </a:xfrm>
           <a:prstGeom prst="rect">
             <a:avLst/>
@@ -4301,8 +4683,9 @@
             <a:pPr>
               <a:defRPr b="1" sz="1400">
                 <a:solidFill>
-                  <a:srgbClr val="F59E0B"/>
-                </a:solidFill>
+                  <a:srgbClr val="10B981"/>
+                </a:solidFill>
+                <a:latin typeface="Calibri"/>
               </a:defRPr>
             </a:pPr>
             <a:r>
@@ -4344,7 +4727,7 @@
             <a:avLst/>
           </a:prstGeom>
           <a:solidFill>
-            <a:srgbClr val="0F172A"/>
+            <a:srgbClr val="FFFFFF"/>
           </a:solidFill>
           <a:ln>
             <a:noFill/>
@@ -4374,14 +4757,57 @@
       </p:sp>
       <p:sp>
         <p:nvSpPr>
-          <p:cNvPr id="3" name="TextBox 2"/>
+          <p:cNvPr id="3" name="Rectangle 2"/>
+          <p:cNvSpPr/>
+          <p:nvPr/>
+        </p:nvSpPr>
+        <p:spPr>
+          <a:xfrm>
+            <a:off x="0" y="0"/>
+            <a:ext cx="12191695" cy="73152"/>
+          </a:xfrm>
+          <a:prstGeom prst="rect">
+            <a:avLst/>
+          </a:prstGeom>
+          <a:solidFill>
+            <a:srgbClr val="4F46E5"/>
+          </a:solidFill>
+          <a:ln>
+            <a:noFill/>
+          </a:ln>
+        </p:spPr>
+        <p:style>
+          <a:lnRef idx="1">
+            <a:schemeClr val="accent1"/>
+          </a:lnRef>
+          <a:fillRef idx="3">
+            <a:schemeClr val="accent1"/>
+          </a:fillRef>
+          <a:effectRef idx="2">
+            <a:schemeClr val="accent1"/>
+          </a:effectRef>
+          <a:fontRef idx="minor">
+            <a:schemeClr val="lt1"/>
+          </a:fontRef>
+        </p:style>
+        <p:txBody>
+          <a:bodyPr rtlCol="0" anchor="ctr"/>
+          <a:lstStyle/>
+          <a:p>
+            <a:pPr algn="ctr"/>
+          </a:p>
+        </p:txBody>
+      </p:sp>
+      <p:sp>
+        <p:nvSpPr>
+          <p:cNvPr id="4" name="TextBox 3"/>
           <p:cNvSpPr txBox="1"/>
           <p:nvPr/>
         </p:nvSpPr>
         <p:spPr>
           <a:xfrm>
-            <a:off x="731520" y="365760"/>
-            <a:ext cx="10698480" cy="822960"/>
+            <a:off x="731520" y="320040"/>
+            <a:ext cx="7772400" cy="777240"/>
           </a:xfrm>
           <a:prstGeom prst="rect">
             <a:avLst/>
@@ -4395,29 +4821,77 @@
           <a:lstStyle/>
           <a:p>
             <a:pPr>
-              <a:defRPr sz="2600" b="1">
-                <a:solidFill>
-                  <a:srgbClr val="F8FAFC"/>
-                </a:solidFill>
-                <a:latin typeface="Segoe UI"/>
-              </a:defRPr>
-            </a:pPr>
-            <a:r>
-              <a:t>14-Week Semester Work Plan (4 GTU Seminars)</a:t>
-            </a:r>
-          </a:p>
-        </p:txBody>
-      </p:sp>
-      <p:sp>
-        <p:nvSpPr>
-          <p:cNvPr id="4" name="TextBox 3"/>
+              <a:defRPr sz="2400" b="1">
+                <a:solidFill>
+                  <a:srgbClr val="0F172A"/>
+                </a:solidFill>
+                <a:latin typeface="Calibri"/>
+              </a:defRPr>
+            </a:pPr>
+            <a:r>
+              <a:t>Work Plan (14 Weeks)</a:t>
+            </a:r>
+          </a:p>
+        </p:txBody>
+      </p:sp>
+      <p:pic>
+        <p:nvPicPr>
+          <p:cNvPr id="5" name="Picture 4" descr="gtu_logo.png"/>
+          <p:cNvPicPr>
+            <a:picLocks noChangeAspect="1"/>
+          </p:cNvPicPr>
+          <p:nvPr/>
+        </p:nvPicPr>
+        <p:blipFill>
+          <a:blip r:embed="rId2"/>
+          <a:stretch>
+            <a:fillRect/>
+          </a:stretch>
+        </p:blipFill>
+        <p:spPr>
+          <a:xfrm>
+            <a:off x="10241280" y="182880"/>
+            <a:ext cx="731520" cy="822960"/>
+          </a:xfrm>
+          <a:prstGeom prst="rect">
+            <a:avLst/>
+          </a:prstGeom>
+        </p:spPr>
+      </p:pic>
+      <p:pic>
+        <p:nvPicPr>
+          <p:cNvPr id="6" name="Picture 5" descr="kdp_patan_logo.png"/>
+          <p:cNvPicPr>
+            <a:picLocks noChangeAspect="1"/>
+          </p:cNvPicPr>
+          <p:nvPr/>
+        </p:nvPicPr>
+        <p:blipFill>
+          <a:blip r:embed="rId3"/>
+          <a:stretch>
+            <a:fillRect/>
+          </a:stretch>
+        </p:blipFill>
+        <p:spPr>
+          <a:xfrm>
+            <a:off x="11155680" y="182880"/>
+            <a:ext cx="777240" cy="777240"/>
+          </a:xfrm>
+          <a:prstGeom prst="rect">
+            <a:avLst/>
+          </a:prstGeom>
+        </p:spPr>
+      </p:pic>
+      <p:sp>
+        <p:nvSpPr>
+          <p:cNvPr id="7" name="TextBox 6"/>
           <p:cNvSpPr txBox="1"/>
           <p:nvPr/>
         </p:nvSpPr>
         <p:spPr>
           <a:xfrm>
-            <a:off x="8412480" y="411480"/>
-            <a:ext cx="3017520" cy="365760"/>
+            <a:off x="731520" y="960120"/>
+            <a:ext cx="9144000" cy="320040"/>
           </a:xfrm>
           <a:prstGeom prst="rect">
             <a:avLst/>
@@ -4430,30 +4904,30 @@
           </a:bodyPr>
           <a:lstStyle/>
           <a:p>
-            <a:pPr algn="r">
-              <a:defRPr sz="1100" b="1">
-                <a:solidFill>
-                  <a:srgbClr val="6366F1"/>
-                </a:solidFill>
-                <a:latin typeface="Segoe UI"/>
-              </a:defRPr>
-            </a:pPr>
-            <a:r>
-              <a:t>Minor Project | DI05000341 | Slide 11</a:t>
+            <a:pPr>
+              <a:defRPr sz="1050" b="1">
+                <a:solidFill>
+                  <a:srgbClr val="4F46E5"/>
+                </a:solidFill>
+                <a:latin typeface="Calibri"/>
+              </a:defRPr>
+            </a:pPr>
+            <a:r>
+              <a:t>K. D. Polytechnic, Patan | Department of Computer Engineering | Minor Project (DI05000341) | Slide 11</a:t>
             </a:r>
           </a:p>
         </p:txBody>
       </p:sp>
       <p:graphicFrame>
         <p:nvGraphicFramePr>
-          <p:cNvPr id="5" name="Table 4"/>
+          <p:cNvPr id="8" name="Table 7"/>
           <p:cNvGraphicFramePr>
             <a:graphicFrameLocks noGrp="1"/>
           </p:cNvGraphicFramePr>
           <p:nvPr/>
         </p:nvGraphicFramePr>
         <p:xfrm>
-          <a:off x="914400" y="1463040"/>
+          <a:off x="914400" y="1371600"/>
           <a:ext cx="10332720" cy="4114800"/>
         </p:xfrm>
         <a:graphic>
@@ -4477,8 +4951,9 @@
                       <a:pPr>
                         <a:defRPr b="1" sz="1100">
                           <a:solidFill>
-                            <a:srgbClr val="F8FAFC"/>
+                            <a:srgbClr val="FFFFFF"/>
                           </a:solidFill>
+                          <a:latin typeface="Calibri"/>
                         </a:defRPr>
                       </a:pPr>
                       <a:r>
@@ -4488,7 +4963,7 @@
                   </a:txBody>
                   <a:tcPr>
                     <a:solidFill>
-                      <a:srgbClr val="6366F1"/>
+                      <a:srgbClr val="4F46E5"/>
                     </a:solidFill>
                   </a:tcPr>
                 </a:tc>
@@ -4500,8 +4975,9 @@
                       <a:pPr>
                         <a:defRPr b="1" sz="1100">
                           <a:solidFill>
-                            <a:srgbClr val="F8FAFC"/>
+                            <a:srgbClr val="FFFFFF"/>
                           </a:solidFill>
+                          <a:latin typeface="Calibri"/>
                         </a:defRPr>
                       </a:pPr>
                       <a:r>
@@ -4511,7 +4987,7 @@
                   </a:txBody>
                   <a:tcPr>
                     <a:solidFill>
-                      <a:srgbClr val="6366F1"/>
+                      <a:srgbClr val="4F46E5"/>
                     </a:solidFill>
                   </a:tcPr>
                 </a:tc>
@@ -4523,8 +4999,9 @@
                       <a:pPr>
                         <a:defRPr b="1" sz="1100">
                           <a:solidFill>
-                            <a:srgbClr val="F8FAFC"/>
+                            <a:srgbClr val="FFFFFF"/>
                           </a:solidFill>
+                          <a:latin typeface="Calibri"/>
                         </a:defRPr>
                       </a:pPr>
                       <a:r>
@@ -4534,7 +5011,7 @@
                   </a:txBody>
                   <a:tcPr>
                     <a:solidFill>
-                      <a:srgbClr val="6366F1"/>
+                      <a:srgbClr val="4F46E5"/>
                     </a:solidFill>
                   </a:tcPr>
                 </a:tc>
@@ -4546,8 +5023,9 @@
                       <a:pPr>
                         <a:defRPr b="1" sz="1100">
                           <a:solidFill>
-                            <a:srgbClr val="F8FAFC"/>
+                            <a:srgbClr val="FFFFFF"/>
                           </a:solidFill>
+                          <a:latin typeface="Calibri"/>
                         </a:defRPr>
                       </a:pPr>
                       <a:r>
@@ -4557,7 +5035,7 @@
                   </a:txBody>
                   <a:tcPr>
                     <a:solidFill>
-                      <a:srgbClr val="6366F1"/>
+                      <a:srgbClr val="4F46E5"/>
                     </a:solidFill>
                   </a:tcPr>
                 </a:tc>
@@ -4571,8 +5049,9 @@
                       <a:pPr>
                         <a:defRPr sz="1050">
                           <a:solidFill>
-                            <a:srgbClr val="F8FAFC"/>
+                            <a:srgbClr val="1E293B"/>
                           </a:solidFill>
+                          <a:latin typeface="Calibri"/>
                         </a:defRPr>
                       </a:pPr>
                       <a:r>
@@ -4582,7 +5061,7 @@
                   </a:txBody>
                   <a:tcPr>
                     <a:solidFill>
-                      <a:srgbClr val="1E293B"/>
+                      <a:srgbClr val="F8FAFC"/>
                     </a:solidFill>
                   </a:tcPr>
                 </a:tc>
@@ -4594,8 +5073,9 @@
                       <a:pPr>
                         <a:defRPr sz="1050">
                           <a:solidFill>
-                            <a:srgbClr val="F8FAFC"/>
+                            <a:srgbClr val="1E293B"/>
                           </a:solidFill>
+                          <a:latin typeface="Calibri"/>
                         </a:defRPr>
                       </a:pPr>
                       <a:r>
@@ -4605,7 +5085,7 @@
                   </a:txBody>
                   <a:tcPr>
                     <a:solidFill>
-                      <a:srgbClr val="1E293B"/>
+                      <a:srgbClr val="F8FAFC"/>
                     </a:solidFill>
                   </a:tcPr>
                 </a:tc>
@@ -4617,8 +5097,9 @@
                       <a:pPr>
                         <a:defRPr sz="1050">
                           <a:solidFill>
-                            <a:srgbClr val="F8FAFC"/>
+                            <a:srgbClr val="1E293B"/>
                           </a:solidFill>
+                          <a:latin typeface="Calibri"/>
                         </a:defRPr>
                       </a:pPr>
                       <a:r>
@@ -4628,7 +5109,7 @@
                   </a:txBody>
                   <a:tcPr>
                     <a:solidFill>
-                      <a:srgbClr val="1E293B"/>
+                      <a:srgbClr val="F8FAFC"/>
                     </a:solidFill>
                   </a:tcPr>
                 </a:tc>
@@ -4642,6 +5123,7 @@
                           <a:solidFill>
                             <a:srgbClr val="10B981"/>
                           </a:solidFill>
+                          <a:latin typeface="Calibri"/>
                         </a:defRPr>
                       </a:pPr>
                       <a:r>
@@ -4651,7 +5133,7 @@
                   </a:txBody>
                   <a:tcPr>
                     <a:solidFill>
-                      <a:srgbClr val="1E293B"/>
+                      <a:srgbClr val="F8FAFC"/>
                     </a:solidFill>
                   </a:tcPr>
                 </a:tc>
@@ -4665,8 +5147,9 @@
                       <a:pPr>
                         <a:defRPr sz="1050">
                           <a:solidFill>
-                            <a:srgbClr val="F8FAFC"/>
+                            <a:srgbClr val="1E293B"/>
                           </a:solidFill>
+                          <a:latin typeface="Calibri"/>
                         </a:defRPr>
                       </a:pPr>
                       <a:r>
@@ -4676,7 +5159,7 @@
                   </a:txBody>
                   <a:tcPr>
                     <a:solidFill>
-                      <a:srgbClr val="1E293B"/>
+                      <a:srgbClr val="F8FAFC"/>
                     </a:solidFill>
                   </a:tcPr>
                 </a:tc>
@@ -4688,8 +5171,9 @@
                       <a:pPr>
                         <a:defRPr sz="1050">
                           <a:solidFill>
-                            <a:srgbClr val="F8FAFC"/>
+                            <a:srgbClr val="1E293B"/>
                           </a:solidFill>
+                          <a:latin typeface="Calibri"/>
                         </a:defRPr>
                       </a:pPr>
                       <a:r>
@@ -4699,7 +5183,7 @@
                   </a:txBody>
                   <a:tcPr>
                     <a:solidFill>
-                      <a:srgbClr val="1E293B"/>
+                      <a:srgbClr val="F8FAFC"/>
                     </a:solidFill>
                   </a:tcPr>
                 </a:tc>
@@ -4711,8 +5195,9 @@
                       <a:pPr>
                         <a:defRPr sz="1050">
                           <a:solidFill>
-                            <a:srgbClr val="F8FAFC"/>
+                            <a:srgbClr val="1E293B"/>
                           </a:solidFill>
+                          <a:latin typeface="Calibri"/>
                         </a:defRPr>
                       </a:pPr>
                       <a:r>
@@ -4722,7 +5207,7 @@
                   </a:txBody>
                   <a:tcPr>
                     <a:solidFill>
-                      <a:srgbClr val="1E293B"/>
+                      <a:srgbClr val="F8FAFC"/>
                     </a:solidFill>
                   </a:tcPr>
                 </a:tc>
@@ -4736,6 +5221,7 @@
                           <a:solidFill>
                             <a:srgbClr val="10B981"/>
                           </a:solidFill>
+                          <a:latin typeface="Calibri"/>
                         </a:defRPr>
                       </a:pPr>
                       <a:r>
@@ -4745,7 +5231,7 @@
                   </a:txBody>
                   <a:tcPr>
                     <a:solidFill>
-                      <a:srgbClr val="1E293B"/>
+                      <a:srgbClr val="F8FAFC"/>
                     </a:solidFill>
                   </a:tcPr>
                 </a:tc>
@@ -4759,8 +5245,9 @@
                       <a:pPr>
                         <a:defRPr sz="1050">
                           <a:solidFill>
-                            <a:srgbClr val="F8FAFC"/>
+                            <a:srgbClr val="1E293B"/>
                           </a:solidFill>
+                          <a:latin typeface="Calibri"/>
                         </a:defRPr>
                       </a:pPr>
                       <a:r>
@@ -4770,7 +5257,7 @@
                   </a:txBody>
                   <a:tcPr>
                     <a:solidFill>
-                      <a:srgbClr val="1E293B"/>
+                      <a:srgbClr val="F8FAFC"/>
                     </a:solidFill>
                   </a:tcPr>
                 </a:tc>
@@ -4782,8 +5269,9 @@
                       <a:pPr>
                         <a:defRPr sz="1050">
                           <a:solidFill>
-                            <a:srgbClr val="F8FAFC"/>
+                            <a:srgbClr val="1E293B"/>
                           </a:solidFill>
+                          <a:latin typeface="Calibri"/>
                         </a:defRPr>
                       </a:pPr>
                       <a:r>
@@ -4793,7 +5281,7 @@
                   </a:txBody>
                   <a:tcPr>
                     <a:solidFill>
-                      <a:srgbClr val="1E293B"/>
+                      <a:srgbClr val="F8FAFC"/>
                     </a:solidFill>
                   </a:tcPr>
                 </a:tc>
@@ -4805,8 +5293,9 @@
                       <a:pPr>
                         <a:defRPr sz="1050">
                           <a:solidFill>
-                            <a:srgbClr val="F8FAFC"/>
+                            <a:srgbClr val="1E293B"/>
                           </a:solidFill>
+                          <a:latin typeface="Calibri"/>
                         </a:defRPr>
                       </a:pPr>
                       <a:r>
@@ -4816,7 +5305,7 @@
                   </a:txBody>
                   <a:tcPr>
                     <a:solidFill>
-                      <a:srgbClr val="1E293B"/>
+                      <a:srgbClr val="F8FAFC"/>
                     </a:solidFill>
                   </a:tcPr>
                 </a:tc>
@@ -4830,6 +5319,7 @@
                           <a:solidFill>
                             <a:srgbClr val="10B981"/>
                           </a:solidFill>
+                          <a:latin typeface="Calibri"/>
                         </a:defRPr>
                       </a:pPr>
                       <a:r>
@@ -4839,7 +5329,7 @@
                   </a:txBody>
                   <a:tcPr>
                     <a:solidFill>
-                      <a:srgbClr val="1E293B"/>
+                      <a:srgbClr val="F8FAFC"/>
                     </a:solidFill>
                   </a:tcPr>
                 </a:tc>
@@ -4853,8 +5343,9 @@
                       <a:pPr>
                         <a:defRPr sz="1050">
                           <a:solidFill>
-                            <a:srgbClr val="F8FAFC"/>
+                            <a:srgbClr val="1E293B"/>
                           </a:solidFill>
+                          <a:latin typeface="Calibri"/>
                         </a:defRPr>
                       </a:pPr>
                       <a:r>
@@ -4864,7 +5355,7 @@
                   </a:txBody>
                   <a:tcPr>
                     <a:solidFill>
-                      <a:srgbClr val="1E293B"/>
+                      <a:srgbClr val="F8FAFC"/>
                     </a:solidFill>
                   </a:tcPr>
                 </a:tc>
@@ -4876,8 +5367,9 @@
                       <a:pPr>
                         <a:defRPr sz="1050">
                           <a:solidFill>
-                            <a:srgbClr val="F8FAFC"/>
+                            <a:srgbClr val="1E293B"/>
                           </a:solidFill>
+                          <a:latin typeface="Calibri"/>
                         </a:defRPr>
                       </a:pPr>
                       <a:r>
@@ -4887,7 +5379,7 @@
                   </a:txBody>
                   <a:tcPr>
                     <a:solidFill>
-                      <a:srgbClr val="1E293B"/>
+                      <a:srgbClr val="F8FAFC"/>
                     </a:solidFill>
                   </a:tcPr>
                 </a:tc>
@@ -4899,8 +5391,9 @@
                       <a:pPr>
                         <a:defRPr sz="1050">
                           <a:solidFill>
-                            <a:srgbClr val="F8FAFC"/>
+                            <a:srgbClr val="1E293B"/>
                           </a:solidFill>
+                          <a:latin typeface="Calibri"/>
                         </a:defRPr>
                       </a:pPr>
                       <a:r>
@@ -4910,7 +5403,7 @@
                   </a:txBody>
                   <a:tcPr>
                     <a:solidFill>
-                      <a:srgbClr val="1E293B"/>
+                      <a:srgbClr val="F8FAFC"/>
                     </a:solidFill>
                   </a:tcPr>
                 </a:tc>
@@ -4924,6 +5417,7 @@
                           <a:solidFill>
                             <a:srgbClr val="10B981"/>
                           </a:solidFill>
+                          <a:latin typeface="Calibri"/>
                         </a:defRPr>
                       </a:pPr>
                       <a:r>
@@ -4933,7 +5427,7 @@
                   </a:txBody>
                   <a:tcPr>
                     <a:solidFill>
-                      <a:srgbClr val="1E293B"/>
+                      <a:srgbClr val="F8FAFC"/>
                     </a:solidFill>
                   </a:tcPr>
                 </a:tc>
@@ -4947,8 +5441,9 @@
                       <a:pPr>
                         <a:defRPr sz="1050">
                           <a:solidFill>
-                            <a:srgbClr val="F8FAFC"/>
+                            <a:srgbClr val="1E293B"/>
                           </a:solidFill>
+                          <a:latin typeface="Calibri"/>
                         </a:defRPr>
                       </a:pPr>
                       <a:r>
@@ -4958,7 +5453,7 @@
                   </a:txBody>
                   <a:tcPr>
                     <a:solidFill>
-                      <a:srgbClr val="1E293B"/>
+                      <a:srgbClr val="F8FAFC"/>
                     </a:solidFill>
                   </a:tcPr>
                 </a:tc>
@@ -4970,8 +5465,9 @@
                       <a:pPr>
                         <a:defRPr sz="1050">
                           <a:solidFill>
-                            <a:srgbClr val="F8FAFC"/>
+                            <a:srgbClr val="1E293B"/>
                           </a:solidFill>
+                          <a:latin typeface="Calibri"/>
                         </a:defRPr>
                       </a:pPr>
                       <a:r>
@@ -4981,7 +5477,7 @@
                   </a:txBody>
                   <a:tcPr>
                     <a:solidFill>
-                      <a:srgbClr val="1E293B"/>
+                      <a:srgbClr val="F8FAFC"/>
                     </a:solidFill>
                   </a:tcPr>
                 </a:tc>
@@ -4993,8 +5489,9 @@
                       <a:pPr>
                         <a:defRPr sz="1050">
                           <a:solidFill>
-                            <a:srgbClr val="F8FAFC"/>
+                            <a:srgbClr val="1E293B"/>
                           </a:solidFill>
+                          <a:latin typeface="Calibri"/>
                         </a:defRPr>
                       </a:pPr>
                       <a:r>
@@ -5004,7 +5501,7 @@
                   </a:txBody>
                   <a:tcPr>
                     <a:solidFill>
-                      <a:srgbClr val="1E293B"/>
+                      <a:srgbClr val="F8FAFC"/>
                     </a:solidFill>
                   </a:tcPr>
                 </a:tc>
@@ -5018,6 +5515,7 @@
                           <a:solidFill>
                             <a:srgbClr val="10B981"/>
                           </a:solidFill>
+                          <a:latin typeface="Calibri"/>
                         </a:defRPr>
                       </a:pPr>
                       <a:r>
@@ -5027,7 +5525,7 @@
                   </a:txBody>
                   <a:tcPr>
                     <a:solidFill>
-                      <a:srgbClr val="1E293B"/>
+                      <a:srgbClr val="F8FAFC"/>
                     </a:solidFill>
                   </a:tcPr>
                 </a:tc>
@@ -5069,7 +5567,7 @@
             <a:avLst/>
           </a:prstGeom>
           <a:solidFill>
-            <a:srgbClr val="0F172A"/>
+            <a:srgbClr val="FFFFFF"/>
           </a:solidFill>
           <a:ln>
             <a:noFill/>
@@ -5099,14 +5597,57 @@
       </p:sp>
       <p:sp>
         <p:nvSpPr>
-          <p:cNvPr id="3" name="TextBox 2"/>
+          <p:cNvPr id="3" name="Rectangle 2"/>
+          <p:cNvSpPr/>
+          <p:nvPr/>
+        </p:nvSpPr>
+        <p:spPr>
+          <a:xfrm>
+            <a:off x="0" y="0"/>
+            <a:ext cx="12191695" cy="73152"/>
+          </a:xfrm>
+          <a:prstGeom prst="rect">
+            <a:avLst/>
+          </a:prstGeom>
+          <a:solidFill>
+            <a:srgbClr val="4F46E5"/>
+          </a:solidFill>
+          <a:ln>
+            <a:noFill/>
+          </a:ln>
+        </p:spPr>
+        <p:style>
+          <a:lnRef idx="1">
+            <a:schemeClr val="accent1"/>
+          </a:lnRef>
+          <a:fillRef idx="3">
+            <a:schemeClr val="accent1"/>
+          </a:fillRef>
+          <a:effectRef idx="2">
+            <a:schemeClr val="accent1"/>
+          </a:effectRef>
+          <a:fontRef idx="minor">
+            <a:schemeClr val="lt1"/>
+          </a:fontRef>
+        </p:style>
+        <p:txBody>
+          <a:bodyPr rtlCol="0" anchor="ctr"/>
+          <a:lstStyle/>
+          <a:p>
+            <a:pPr algn="ctr"/>
+          </a:p>
+        </p:txBody>
+      </p:sp>
+      <p:sp>
+        <p:nvSpPr>
+          <p:cNvPr id="4" name="TextBox 3"/>
           <p:cNvSpPr txBox="1"/>
           <p:nvPr/>
         </p:nvSpPr>
         <p:spPr>
           <a:xfrm>
-            <a:off x="731520" y="365760"/>
-            <a:ext cx="10698480" cy="822960"/>
+            <a:off x="731520" y="320040"/>
+            <a:ext cx="7772400" cy="777240"/>
           </a:xfrm>
           <a:prstGeom prst="rect">
             <a:avLst/>
@@ -5120,58 +5661,22 @@
           <a:lstStyle/>
           <a:p>
             <a:pPr>
-              <a:defRPr sz="2600" b="1">
-                <a:solidFill>
-                  <a:srgbClr val="F8FAFC"/>
-                </a:solidFill>
-                <a:latin typeface="Segoe UI"/>
-              </a:defRPr>
-            </a:pPr>
-            <a:r>
-              <a:t>Prototype &amp; Working System Development</a:t>
-            </a:r>
-          </a:p>
-        </p:txBody>
-      </p:sp>
-      <p:sp>
-        <p:nvSpPr>
-          <p:cNvPr id="4" name="TextBox 3"/>
-          <p:cNvSpPr txBox="1"/>
-          <p:nvPr/>
-        </p:nvSpPr>
-        <p:spPr>
-          <a:xfrm>
-            <a:off x="8412480" y="411480"/>
-            <a:ext cx="3017520" cy="365760"/>
-          </a:xfrm>
-          <a:prstGeom prst="rect">
-            <a:avLst/>
-          </a:prstGeom>
-          <a:noFill/>
-        </p:spPr>
-        <p:txBody>
-          <a:bodyPr wrap="none">
-            <a:spAutoFit/>
-          </a:bodyPr>
-          <a:lstStyle/>
-          <a:p>
-            <a:pPr algn="r">
-              <a:defRPr sz="1100" b="1">
-                <a:solidFill>
-                  <a:srgbClr val="6366F1"/>
-                </a:solidFill>
-                <a:latin typeface="Segoe UI"/>
-              </a:defRPr>
-            </a:pPr>
-            <a:r>
-              <a:t>Minor Project | DI05000341 | Slide 12</a:t>
+              <a:defRPr sz="2400" b="1">
+                <a:solidFill>
+                  <a:srgbClr val="0F172A"/>
+                </a:solidFill>
+                <a:latin typeface="Calibri"/>
+              </a:defRPr>
+            </a:pPr>
+            <a:r>
+              <a:t>Prototype / Model Development</a:t>
             </a:r>
           </a:p>
         </p:txBody>
       </p:sp>
       <p:pic>
         <p:nvPicPr>
-          <p:cNvPr id="5" name="Picture 4" descr="retail-store.png"/>
+          <p:cNvPr id="5" name="Picture 4" descr="gtu_logo.png"/>
           <p:cNvPicPr>
             <a:picLocks noChangeAspect="1"/>
           </p:cNvPicPr>
@@ -5185,8 +5690,8 @@
         </p:blipFill>
         <p:spPr>
           <a:xfrm>
-            <a:off x="914400" y="1463040"/>
-            <a:ext cx="4937760" cy="3291840"/>
+            <a:off x="10241280" y="182880"/>
+            <a:ext cx="731520" cy="822960"/>
           </a:xfrm>
           <a:prstGeom prst="rect">
             <a:avLst/>
@@ -5195,7 +5700,7 @@
       </p:pic>
       <p:pic>
         <p:nvPicPr>
-          <p:cNvPr id="6" name="Picture 5" descr="about_img_1.png"/>
+          <p:cNvPr id="6" name="Picture 5" descr="kdp_patan_logo.png"/>
           <p:cNvPicPr>
             <a:picLocks noChangeAspect="1"/>
           </p:cNvPicPr>
@@ -5209,8 +5714,8 @@
         </p:blipFill>
         <p:spPr>
           <a:xfrm>
-            <a:off x="6309360" y="1463040"/>
-            <a:ext cx="4937760" cy="3291840"/>
+            <a:off x="11155680" y="182880"/>
+            <a:ext cx="777240" cy="777240"/>
           </a:xfrm>
           <a:prstGeom prst="rect">
             <a:avLst/>
@@ -5225,8 +5730,92 @@
         </p:nvSpPr>
         <p:spPr>
           <a:xfrm>
-            <a:off x="914400" y="4937760"/>
-            <a:ext cx="10332720" cy="1463040"/>
+            <a:off x="731520" y="960120"/>
+            <a:ext cx="9144000" cy="320040"/>
+          </a:xfrm>
+          <a:prstGeom prst="rect">
+            <a:avLst/>
+          </a:prstGeom>
+          <a:noFill/>
+        </p:spPr>
+        <p:txBody>
+          <a:bodyPr wrap="none">
+            <a:spAutoFit/>
+          </a:bodyPr>
+          <a:lstStyle/>
+          <a:p>
+            <a:pPr>
+              <a:defRPr sz="1050" b="1">
+                <a:solidFill>
+                  <a:srgbClr val="4F46E5"/>
+                </a:solidFill>
+                <a:latin typeface="Calibri"/>
+              </a:defRPr>
+            </a:pPr>
+            <a:r>
+              <a:t>K. D. Polytechnic, Patan | Department of Computer Engineering | Minor Project (DI05000341) | Slide 12</a:t>
+            </a:r>
+          </a:p>
+        </p:txBody>
+      </p:sp>
+      <p:pic>
+        <p:nvPicPr>
+          <p:cNvPr id="8" name="Picture 7" descr="retail-store.png"/>
+          <p:cNvPicPr>
+            <a:picLocks noChangeAspect="1"/>
+          </p:cNvPicPr>
+          <p:nvPr/>
+        </p:nvPicPr>
+        <p:blipFill>
+          <a:blip r:embed="rId4"/>
+          <a:stretch>
+            <a:fillRect/>
+          </a:stretch>
+        </p:blipFill>
+        <p:spPr>
+          <a:xfrm>
+            <a:off x="914400" y="1371600"/>
+            <a:ext cx="4937760" cy="3291840"/>
+          </a:xfrm>
+          <a:prstGeom prst="rect">
+            <a:avLst/>
+          </a:prstGeom>
+        </p:spPr>
+      </p:pic>
+      <p:pic>
+        <p:nvPicPr>
+          <p:cNvPr id="9" name="Picture 8" descr="about_img_1.png"/>
+          <p:cNvPicPr>
+            <a:picLocks noChangeAspect="1"/>
+          </p:cNvPicPr>
+          <p:nvPr/>
+        </p:nvPicPr>
+        <p:blipFill>
+          <a:blip r:embed="rId5"/>
+          <a:stretch>
+            <a:fillRect/>
+          </a:stretch>
+        </p:blipFill>
+        <p:spPr>
+          <a:xfrm>
+            <a:off x="6309360" y="1371600"/>
+            <a:ext cx="4937760" cy="3291840"/>
+          </a:xfrm>
+          <a:prstGeom prst="rect">
+            <a:avLst/>
+          </a:prstGeom>
+        </p:spPr>
+      </p:pic>
+      <p:sp>
+        <p:nvSpPr>
+          <p:cNvPr id="10" name="TextBox 9"/>
+          <p:cNvSpPr txBox="1"/>
+          <p:nvPr/>
+        </p:nvSpPr>
+        <p:spPr>
+          <a:xfrm>
+            <a:off x="914400" y="4846320"/>
+            <a:ext cx="10362895" cy="1645920"/>
           </a:xfrm>
           <a:prstGeom prst="rect">
             <a:avLst/>
@@ -5242,32 +5831,35 @@
             <a:pPr>
               <a:defRPr sz="1150">
                 <a:solidFill>
-                  <a:srgbClr val="F8FAFC"/>
-                </a:solidFill>
-              </a:defRPr>
-            </a:pPr>
-            <a:r>
-              <a:t>Left: DineFlow AI Real-Time Web POS Terminal with active cart, discounts, and UPI QR code.</a:t>
+                  <a:srgbClr val="1E293B"/>
+                </a:solidFill>
+                <a:latin typeface="Calibri"/>
+              </a:defRPr>
+            </a:pPr>
+            <a:r>
+              <a:t>Left: Authentic DineFlow AI Real-Time Web POS Terminal with active cart, discounts, and UPI QR code.</a:t>
             </a:r>
           </a:p>
           <a:p>
             <a:pPr>
               <a:defRPr sz="1150">
                 <a:solidFill>
-                  <a:srgbClr val="F8FAFC"/>
-                </a:solidFill>
-              </a:defRPr>
-            </a:pPr>
-            <a:r>
-              <a:t>Right: Restaurant Operations &amp; Revenue Analytics Dashboard with AI Menu Engineering Matrix.</a:t>
+                  <a:srgbClr val="1E293B"/>
+                </a:solidFill>
+                <a:latin typeface="Calibri"/>
+              </a:defRPr>
+            </a:pPr>
+            <a:r>
+              <a:t>Right: Authentic DineFlow AI Operations &amp; Revenue Analytics Dashboard with AI Menu Engineering Matrix.</a:t>
             </a:r>
           </a:p>
           <a:p>
             <a:pPr>
               <a:defRPr b="1" sz="1200">
                 <a:solidFill>
-                  <a:srgbClr val="F59E0B"/>
-                </a:solidFill>
+                  <a:srgbClr val="4F46E5"/>
+                </a:solidFill>
+                <a:latin typeface="Calibri"/>
               </a:defRPr>
             </a:pPr>
             <a:r>
@@ -5309,7 +5901,7 @@
             <a:avLst/>
           </a:prstGeom>
           <a:solidFill>
-            <a:srgbClr val="0F172A"/>
+            <a:srgbClr val="FFFFFF"/>
           </a:solidFill>
           <a:ln>
             <a:noFill/>
@@ -5339,97 +5931,23 @@
       </p:sp>
       <p:sp>
         <p:nvSpPr>
-          <p:cNvPr id="3" name="TextBox 2"/>
-          <p:cNvSpPr txBox="1"/>
-          <p:nvPr/>
-        </p:nvSpPr>
-        <p:spPr>
-          <a:xfrm>
-            <a:off x="731520" y="365760"/>
-            <a:ext cx="10698480" cy="822960"/>
+          <p:cNvPr id="3" name="Rectangle 2"/>
+          <p:cNvSpPr/>
+          <p:nvPr/>
+        </p:nvSpPr>
+        <p:spPr>
+          <a:xfrm>
+            <a:off x="0" y="0"/>
+            <a:ext cx="12191695" cy="73152"/>
           </a:xfrm>
           <a:prstGeom prst="rect">
             <a:avLst/>
           </a:prstGeom>
-          <a:noFill/>
-        </p:spPr>
-        <p:txBody>
-          <a:bodyPr wrap="square">
-            <a:spAutoFit/>
-          </a:bodyPr>
-          <a:lstStyle/>
-          <a:p>
-            <a:pPr>
-              <a:defRPr sz="2600" b="1">
-                <a:solidFill>
-                  <a:srgbClr val="F8FAFC"/>
-                </a:solidFill>
-                <a:latin typeface="Segoe UI"/>
-              </a:defRPr>
-            </a:pPr>
-            <a:r>
-              <a:t>System Testing &amp; Performance Verification</a:t>
-            </a:r>
-          </a:p>
-        </p:txBody>
-      </p:sp>
-      <p:sp>
-        <p:nvSpPr>
-          <p:cNvPr id="4" name="TextBox 3"/>
-          <p:cNvSpPr txBox="1"/>
-          <p:nvPr/>
-        </p:nvSpPr>
-        <p:spPr>
-          <a:xfrm>
-            <a:off x="8412480" y="411480"/>
-            <a:ext cx="3017520" cy="365760"/>
-          </a:xfrm>
-          <a:prstGeom prst="rect">
-            <a:avLst/>
-          </a:prstGeom>
-          <a:noFill/>
-        </p:spPr>
-        <p:txBody>
-          <a:bodyPr wrap="none">
-            <a:spAutoFit/>
-          </a:bodyPr>
-          <a:lstStyle/>
-          <a:p>
-            <a:pPr algn="r">
-              <a:defRPr sz="1100" b="1">
-                <a:solidFill>
-                  <a:srgbClr val="6366F1"/>
-                </a:solidFill>
-                <a:latin typeface="Segoe UI"/>
-              </a:defRPr>
-            </a:pPr>
-            <a:r>
-              <a:t>Minor Project | DI05000341 | Slide 13</a:t>
-            </a:r>
-          </a:p>
-        </p:txBody>
-      </p:sp>
-      <p:sp>
-        <p:nvSpPr>
-          <p:cNvPr id="5" name="Rounded Rectangle 4"/>
-          <p:cNvSpPr/>
-          <p:nvPr/>
-        </p:nvSpPr>
-        <p:spPr>
-          <a:xfrm>
-            <a:off x="914400" y="1463040"/>
-            <a:ext cx="2377440" cy="2011680"/>
-          </a:xfrm>
-          <a:prstGeom prst="roundRect">
-            <a:avLst/>
-          </a:prstGeom>
           <a:solidFill>
-            <a:srgbClr val="1E293B"/>
+            <a:srgbClr val="4F46E5"/>
           </a:solidFill>
           <a:ln>
-            <a:solidFill>
-              <a:srgbClr val="6366F1"/>
-            </a:solidFill>
+            <a:noFill/>
           </a:ln>
         </p:spPr>
         <p:style>
@@ -5447,66 +5965,153 @@
           </a:fontRef>
         </p:style>
         <p:txBody>
-          <a:bodyPr rtlCol="0" anchor="ctr" wrap="square"/>
-          <a:lstStyle/>
-          <a:p>
-            <a:pPr algn="ctr">
-              <a:defRPr b="1" sz="3000">
-                <a:solidFill>
-                  <a:srgbClr val="10B981"/>
-                </a:solidFill>
-              </a:defRPr>
-            </a:pPr>
-            <a:r>
-              <a:t>24 / 24</a:t>
-            </a:r>
-          </a:p>
-          <a:p>
-            <a:pPr algn="ctr">
-              <a:defRPr b="1" sz="1100">
-                <a:solidFill>
-                  <a:srgbClr val="F8FAFC"/>
-                </a:solidFill>
-              </a:defRPr>
-            </a:pPr>
-            <a:r>
-              <a:t>Automated Tests Passed</a:t>
-            </a:r>
-          </a:p>
-          <a:p>
-            <a:pPr algn="ctr">
-              <a:defRPr sz="1000">
-                <a:solidFill>
-                  <a:srgbClr val="94A3B8"/>
-                </a:solidFill>
-              </a:defRPr>
-            </a:pPr>
-            <a:r>
-              <a:t>100% Pass Rate</a:t>
-            </a:r>
-          </a:p>
-        </p:txBody>
-      </p:sp>
-      <p:sp>
-        <p:nvSpPr>
-          <p:cNvPr id="6" name="Rounded Rectangle 5"/>
+          <a:bodyPr rtlCol="0" anchor="ctr"/>
+          <a:lstStyle/>
+          <a:p>
+            <a:pPr algn="ctr"/>
+          </a:p>
+        </p:txBody>
+      </p:sp>
+      <p:sp>
+        <p:nvSpPr>
+          <p:cNvPr id="4" name="TextBox 3"/>
+          <p:cNvSpPr txBox="1"/>
+          <p:nvPr/>
+        </p:nvSpPr>
+        <p:spPr>
+          <a:xfrm>
+            <a:off x="731520" y="320040"/>
+            <a:ext cx="7772400" cy="777240"/>
+          </a:xfrm>
+          <a:prstGeom prst="rect">
+            <a:avLst/>
+          </a:prstGeom>
+          <a:noFill/>
+        </p:spPr>
+        <p:txBody>
+          <a:bodyPr wrap="square">
+            <a:spAutoFit/>
+          </a:bodyPr>
+          <a:lstStyle/>
+          <a:p>
+            <a:pPr>
+              <a:defRPr sz="2400" b="1">
+                <a:solidFill>
+                  <a:srgbClr val="0F172A"/>
+                </a:solidFill>
+                <a:latin typeface="Calibri"/>
+              </a:defRPr>
+            </a:pPr>
+            <a:r>
+              <a:t>Testing, Results and Modifications</a:t>
+            </a:r>
+          </a:p>
+        </p:txBody>
+      </p:sp>
+      <p:pic>
+        <p:nvPicPr>
+          <p:cNvPr id="5" name="Picture 4" descr="gtu_logo.png"/>
+          <p:cNvPicPr>
+            <a:picLocks noChangeAspect="1"/>
+          </p:cNvPicPr>
+          <p:nvPr/>
+        </p:nvPicPr>
+        <p:blipFill>
+          <a:blip r:embed="rId2"/>
+          <a:stretch>
+            <a:fillRect/>
+          </a:stretch>
+        </p:blipFill>
+        <p:spPr>
+          <a:xfrm>
+            <a:off x="10241280" y="182880"/>
+            <a:ext cx="731520" cy="822960"/>
+          </a:xfrm>
+          <a:prstGeom prst="rect">
+            <a:avLst/>
+          </a:prstGeom>
+        </p:spPr>
+      </p:pic>
+      <p:pic>
+        <p:nvPicPr>
+          <p:cNvPr id="6" name="Picture 5" descr="kdp_patan_logo.png"/>
+          <p:cNvPicPr>
+            <a:picLocks noChangeAspect="1"/>
+          </p:cNvPicPr>
+          <p:nvPr/>
+        </p:nvPicPr>
+        <p:blipFill>
+          <a:blip r:embed="rId3"/>
+          <a:stretch>
+            <a:fillRect/>
+          </a:stretch>
+        </p:blipFill>
+        <p:spPr>
+          <a:xfrm>
+            <a:off x="11155680" y="182880"/>
+            <a:ext cx="777240" cy="777240"/>
+          </a:xfrm>
+          <a:prstGeom prst="rect">
+            <a:avLst/>
+          </a:prstGeom>
+        </p:spPr>
+      </p:pic>
+      <p:sp>
+        <p:nvSpPr>
+          <p:cNvPr id="7" name="TextBox 6"/>
+          <p:cNvSpPr txBox="1"/>
+          <p:nvPr/>
+        </p:nvSpPr>
+        <p:spPr>
+          <a:xfrm>
+            <a:off x="731520" y="960120"/>
+            <a:ext cx="9144000" cy="320040"/>
+          </a:xfrm>
+          <a:prstGeom prst="rect">
+            <a:avLst/>
+          </a:prstGeom>
+          <a:noFill/>
+        </p:spPr>
+        <p:txBody>
+          <a:bodyPr wrap="none">
+            <a:spAutoFit/>
+          </a:bodyPr>
+          <a:lstStyle/>
+          <a:p>
+            <a:pPr>
+              <a:defRPr sz="1050" b="1">
+                <a:solidFill>
+                  <a:srgbClr val="4F46E5"/>
+                </a:solidFill>
+                <a:latin typeface="Calibri"/>
+              </a:defRPr>
+            </a:pPr>
+            <a:r>
+              <a:t>K. D. Polytechnic, Patan | Department of Computer Engineering | Minor Project (DI05000341) | Slide 13</a:t>
+            </a:r>
+          </a:p>
+        </p:txBody>
+      </p:sp>
+      <p:sp>
+        <p:nvSpPr>
+          <p:cNvPr id="8" name="Rounded Rectangle 7"/>
           <p:cNvSpPr/>
           <p:nvPr/>
         </p:nvSpPr>
         <p:spPr>
           <a:xfrm>
-            <a:off x="3566160" y="1463040"/>
+            <a:off x="914400" y="1463040"/>
             <a:ext cx="2377440" cy="2011680"/>
           </a:xfrm>
           <a:prstGeom prst="roundRect">
             <a:avLst/>
           </a:prstGeom>
           <a:solidFill>
-            <a:srgbClr val="1E293B"/>
+            <a:srgbClr val="F8FAFC"/>
           </a:solidFill>
-          <a:ln>
+          <a:ln w="19050">
             <a:solidFill>
-              <a:srgbClr val="6366F1"/>
+              <a:srgbClr val="4F46E5"/>
             </a:solidFill>
           </a:ln>
         </p:spPr>
@@ -5529,62 +6134,65 @@
           <a:lstStyle/>
           <a:p>
             <a:pPr algn="ctr">
-              <a:defRPr b="1" sz="3000">
+              <a:defRPr b="1" sz="2800">
                 <a:solidFill>
                   <a:srgbClr val="10B981"/>
                 </a:solidFill>
-              </a:defRPr>
-            </a:pPr>
-            <a:r>
-              <a:t>&lt; 2.1s</a:t>
+                <a:latin typeface="Calibri"/>
+              </a:defRPr>
+            </a:pPr>
+            <a:r>
+              <a:t>24 / 24</a:t>
             </a:r>
           </a:p>
           <a:p>
             <a:pPr algn="ctr">
               <a:defRPr b="1" sz="1100">
                 <a:solidFill>
-                  <a:srgbClr val="F8FAFC"/>
-                </a:solidFill>
-              </a:defRPr>
-            </a:pPr>
-            <a:r>
-              <a:t>Average Billing Speed</a:t>
+                  <a:srgbClr val="0F172A"/>
+                </a:solidFill>
+                <a:latin typeface="Calibri"/>
+              </a:defRPr>
+            </a:pPr>
+            <a:r>
+              <a:t>Automated Tests Passed</a:t>
             </a:r>
           </a:p>
           <a:p>
             <a:pPr algn="ctr">
               <a:defRPr sz="1000">
                 <a:solidFill>
-                  <a:srgbClr val="94A3B8"/>
-                </a:solidFill>
-              </a:defRPr>
-            </a:pPr>
-            <a:r>
-              <a:t>Target: &lt; 3.0s</a:t>
-            </a:r>
-          </a:p>
-        </p:txBody>
-      </p:sp>
-      <p:sp>
-        <p:nvSpPr>
-          <p:cNvPr id="7" name="Rounded Rectangle 6"/>
+                  <a:srgbClr val="64748B"/>
+                </a:solidFill>
+                <a:latin typeface="Calibri"/>
+              </a:defRPr>
+            </a:pPr>
+            <a:r>
+              <a:t>100% Pass Rate</a:t>
+            </a:r>
+          </a:p>
+        </p:txBody>
+      </p:sp>
+      <p:sp>
+        <p:nvSpPr>
+          <p:cNvPr id="9" name="Rounded Rectangle 8"/>
           <p:cNvSpPr/>
           <p:nvPr/>
         </p:nvSpPr>
         <p:spPr>
           <a:xfrm>
-            <a:off x="6217920" y="1463040"/>
+            <a:off x="3566160" y="1463040"/>
             <a:ext cx="2377440" cy="2011680"/>
           </a:xfrm>
           <a:prstGeom prst="roundRect">
             <a:avLst/>
           </a:prstGeom>
           <a:solidFill>
-            <a:srgbClr val="1E293B"/>
+            <a:srgbClr val="F8FAFC"/>
           </a:solidFill>
-          <a:ln>
+          <a:ln w="19050">
             <a:solidFill>
-              <a:srgbClr val="6366F1"/>
+              <a:srgbClr val="4F46E5"/>
             </a:solidFill>
           </a:ln>
         </p:spPr>
@@ -5607,62 +6215,65 @@
           <a:lstStyle/>
           <a:p>
             <a:pPr algn="ctr">
-              <a:defRPr b="1" sz="3000">
+              <a:defRPr b="1" sz="2800">
                 <a:solidFill>
                   <a:srgbClr val="10B981"/>
                 </a:solidFill>
-              </a:defRPr>
-            </a:pPr>
-            <a:r>
-              <a:t>&lt; 180ms</a:t>
+                <a:latin typeface="Calibri"/>
+              </a:defRPr>
+            </a:pPr>
+            <a:r>
+              <a:t>&lt; 2.1s</a:t>
             </a:r>
           </a:p>
           <a:p>
             <a:pPr algn="ctr">
               <a:defRPr b="1" sz="1100">
                 <a:solidFill>
-                  <a:srgbClr val="F8FAFC"/>
-                </a:solidFill>
-              </a:defRPr>
-            </a:pPr>
-            <a:r>
-              <a:t>KDS Dispatch Latency</a:t>
+                  <a:srgbClr val="0F172A"/>
+                </a:solidFill>
+                <a:latin typeface="Calibri"/>
+              </a:defRPr>
+            </a:pPr>
+            <a:r>
+              <a:t>Average Billing Speed</a:t>
             </a:r>
           </a:p>
           <a:p>
             <a:pPr algn="ctr">
               <a:defRPr sz="1000">
                 <a:solidFill>
-                  <a:srgbClr val="94A3B8"/>
-                </a:solidFill>
-              </a:defRPr>
-            </a:pPr>
-            <a:r>
-              <a:t>Target: &lt; 500ms</a:t>
-            </a:r>
-          </a:p>
-        </p:txBody>
-      </p:sp>
-      <p:sp>
-        <p:nvSpPr>
-          <p:cNvPr id="8" name="Rounded Rectangle 7"/>
+                  <a:srgbClr val="64748B"/>
+                </a:solidFill>
+                <a:latin typeface="Calibri"/>
+              </a:defRPr>
+            </a:pPr>
+            <a:r>
+              <a:t>Target: &lt; 3.0s</a:t>
+            </a:r>
+          </a:p>
+        </p:txBody>
+      </p:sp>
+      <p:sp>
+        <p:nvSpPr>
+          <p:cNvPr id="10" name="Rounded Rectangle 9"/>
           <p:cNvSpPr/>
           <p:nvPr/>
         </p:nvSpPr>
         <p:spPr>
           <a:xfrm>
-            <a:off x="8869680" y="1463040"/>
+            <a:off x="6217920" y="1463040"/>
             <a:ext cx="2377440" cy="2011680"/>
           </a:xfrm>
           <a:prstGeom prst="roundRect">
             <a:avLst/>
           </a:prstGeom>
           <a:solidFill>
-            <a:srgbClr val="1E293B"/>
+            <a:srgbClr val="F8FAFC"/>
           </a:solidFill>
-          <a:ln>
+          <a:ln w="19050">
             <a:solidFill>
-              <a:srgbClr val="6366F1"/>
+              <a:srgbClr val="4F46E5"/>
             </a:solidFill>
           </a:ln>
         </p:spPr>
@@ -5685,34 +6296,118 @@
           <a:lstStyle/>
           <a:p>
             <a:pPr algn="ctr">
-              <a:defRPr b="1" sz="3000">
+              <a:defRPr b="1" sz="2800">
                 <a:solidFill>
                   <a:srgbClr val="10B981"/>
                 </a:solidFill>
-              </a:defRPr>
-            </a:pPr>
-            <a:r>
-              <a:t>100%</a:t>
+                <a:latin typeface="Calibri"/>
+              </a:defRPr>
+            </a:pPr>
+            <a:r>
+              <a:t>&lt; 180ms</a:t>
             </a:r>
           </a:p>
           <a:p>
             <a:pPr algn="ctr">
               <a:defRPr b="1" sz="1100">
                 <a:solidFill>
-                  <a:srgbClr val="F8FAFC"/>
-                </a:solidFill>
-              </a:defRPr>
-            </a:pPr>
-            <a:r>
-              <a:t>Multi-Tenant Isolation</a:t>
+                  <a:srgbClr val="0F172A"/>
+                </a:solidFill>
+                <a:latin typeface="Calibri"/>
+              </a:defRPr>
+            </a:pPr>
+            <a:r>
+              <a:t>KDS Dispatch Latency</a:t>
             </a:r>
           </a:p>
           <a:p>
             <a:pPr algn="ctr">
               <a:defRPr sz="1000">
                 <a:solidFill>
-                  <a:srgbClr val="94A3B8"/>
-                </a:solidFill>
+                  <a:srgbClr val="64748B"/>
+                </a:solidFill>
+                <a:latin typeface="Calibri"/>
+              </a:defRPr>
+            </a:pPr>
+            <a:r>
+              <a:t>Target: &lt; 500ms</a:t>
+            </a:r>
+          </a:p>
+        </p:txBody>
+      </p:sp>
+      <p:sp>
+        <p:nvSpPr>
+          <p:cNvPr id="11" name="Rounded Rectangle 10"/>
+          <p:cNvSpPr/>
+          <p:nvPr/>
+        </p:nvSpPr>
+        <p:spPr>
+          <a:xfrm>
+            <a:off x="8869680" y="1463040"/>
+            <a:ext cx="2377440" cy="2011680"/>
+          </a:xfrm>
+          <a:prstGeom prst="roundRect">
+            <a:avLst/>
+          </a:prstGeom>
+          <a:solidFill>
+            <a:srgbClr val="F8FAFC"/>
+          </a:solidFill>
+          <a:ln w="19050">
+            <a:solidFill>
+              <a:srgbClr val="4F46E5"/>
+            </a:solidFill>
+          </a:ln>
+        </p:spPr>
+        <p:style>
+          <a:lnRef idx="1">
+            <a:schemeClr val="accent1"/>
+          </a:lnRef>
+          <a:fillRef idx="3">
+            <a:schemeClr val="accent1"/>
+          </a:fillRef>
+          <a:effectRef idx="2">
+            <a:schemeClr val="accent1"/>
+          </a:effectRef>
+          <a:fontRef idx="minor">
+            <a:schemeClr val="lt1"/>
+          </a:fontRef>
+        </p:style>
+        <p:txBody>
+          <a:bodyPr rtlCol="0" anchor="ctr" wrap="square"/>
+          <a:lstStyle/>
+          <a:p>
+            <a:pPr algn="ctr">
+              <a:defRPr b="1" sz="2800">
+                <a:solidFill>
+                  <a:srgbClr val="10B981"/>
+                </a:solidFill>
+                <a:latin typeface="Calibri"/>
+              </a:defRPr>
+            </a:pPr>
+            <a:r>
+              <a:t>100%</a:t>
+            </a:r>
+          </a:p>
+          <a:p>
+            <a:pPr algn="ctr">
+              <a:defRPr b="1" sz="1100">
+                <a:solidFill>
+                  <a:srgbClr val="0F172A"/>
+                </a:solidFill>
+                <a:latin typeface="Calibri"/>
+              </a:defRPr>
+            </a:pPr>
+            <a:r>
+              <a:t>Multi-Tenant Isolation</a:t>
+            </a:r>
+          </a:p>
+          <a:p>
+            <a:pPr algn="ctr">
+              <a:defRPr sz="1000">
+                <a:solidFill>
+                  <a:srgbClr val="64748B"/>
+                </a:solidFill>
+                <a:latin typeface="Calibri"/>
               </a:defRPr>
             </a:pPr>
             <a:r>
@@ -5723,14 +6418,14 @@
       </p:sp>
       <p:sp>
         <p:nvSpPr>
-          <p:cNvPr id="9" name="TextBox 8"/>
+          <p:cNvPr id="12" name="TextBox 11"/>
           <p:cNvSpPr txBox="1"/>
           <p:nvPr/>
         </p:nvSpPr>
         <p:spPr>
           <a:xfrm>
             <a:off x="914400" y="3749039"/>
-            <a:ext cx="10332720" cy="2560320"/>
+            <a:ext cx="10362895" cy="2560320"/>
           </a:xfrm>
           <a:prstGeom prst="rect">
             <a:avLst/>
@@ -5746,60 +6441,93 @@
             <a:pPr>
               <a:defRPr b="1" sz="1250">
                 <a:solidFill>
-                  <a:srgbClr val="F59E0B"/>
-                </a:solidFill>
-              </a:defRPr>
-            </a:pPr>
-            <a:r>
-              <a:t>VERIFIED TEST SUITES (Executed via Automated PHPUnit &amp; Stress Testing):</a:t>
-            </a:r>
-          </a:p>
-          <a:p>
-            <a:pPr>
-              <a:defRPr b="1" sz="1150">
-                <a:solidFill>
-                  <a:srgbClr val="6366F1"/>
-                </a:solidFill>
-              </a:defRPr>
-            </a:pPr>
-            <a:r>
-              <a:t>• 1. POS Billing &amp; Discount Math: Verified GST 5%/18% calculations, coupon code deductions, and roundoff logic across 100 test bills.</a:t>
-            </a:r>
-          </a:p>
-          <a:p>
-            <a:pPr>
-              <a:defRPr b="1" sz="1150">
-                <a:solidFill>
-                  <a:srgbClr val="6366F1"/>
-                </a:solidFill>
-              </a:defRPr>
-            </a:pPr>
-            <a:r>
-              <a:t>• 2. KDS Real-Time Synchronization: Tested simultaneous KOT dispatch from 10 client devices to kitchen screen without dropped packets.</a:t>
-            </a:r>
-          </a:p>
-          <a:p>
-            <a:pPr>
-              <a:defRPr b="1" sz="1150">
-                <a:solidFill>
-                  <a:srgbClr val="6366F1"/>
-                </a:solidFill>
-              </a:defRPr>
-            </a:pPr>
-            <a:r>
-              <a:t>• 3. Recipe Inventory Auto-Depletion: Verified accurate reduction of stock inventory (grams/ml) upon order confirmation.</a:t>
-            </a:r>
-          </a:p>
-          <a:p>
-            <a:pPr>
-              <a:defRPr b="1" sz="1150">
-                <a:solidFill>
-                  <a:srgbClr val="6366F1"/>
-                </a:solidFill>
-              </a:defRPr>
-            </a:pPr>
-            <a:r>
-              <a:t>• 4. Security &amp; RBAC Integrity: Audited cross-tenant URL manipulation (IDOR) — unauthorized requests rejected with HTTP 403 Forbidden.</a:t>
+                  <a:srgbClr val="4F46E5"/>
+                </a:solidFill>
+                <a:latin typeface="Calibri"/>
+              </a:defRPr>
+            </a:pPr>
+            <a:r>
+              <a:t>VERIFIED TEST SUITES (Executed via Automated PHPUnit &amp; Live Stress Testing):</a:t>
+            </a:r>
+          </a:p>
+          <a:p>
+            <a:r>
+              <a:rPr b="1" sz="1150">
+                <a:solidFill>
+                  <a:srgbClr val="0F172A"/>
+                </a:solidFill>
+                <a:latin typeface="Calibri"/>
+              </a:rPr>
+              <a:t>• 1. POS Billing &amp; Discount Math: </a:t>
+            </a:r>
+            <a:r>
+              <a:rPr b="0" sz="1150">
+                <a:solidFill>
+                  <a:srgbClr val="1E293B"/>
+                </a:solidFill>
+                <a:latin typeface="Calibri"/>
+              </a:rPr>
+              <a:t>Verified GST 5%/18% calculations, coupon code deductions, and roundoff logic across 100 test bills.</a:t>
+            </a:r>
+          </a:p>
+          <a:p>
+            <a:r>
+              <a:rPr b="1" sz="1150">
+                <a:solidFill>
+                  <a:srgbClr val="0F172A"/>
+                </a:solidFill>
+                <a:latin typeface="Calibri"/>
+              </a:rPr>
+              <a:t>• 2. KDS Real-Time Synchronization: </a:t>
+            </a:r>
+            <a:r>
+              <a:rPr b="0" sz="1150">
+                <a:solidFill>
+                  <a:srgbClr val="1E293B"/>
+                </a:solidFill>
+                <a:latin typeface="Calibri"/>
+              </a:rPr>
+              <a:t>Tested simultaneous KOT dispatch from 10 client devices to kitchen screen without dropped packets.</a:t>
+            </a:r>
+          </a:p>
+          <a:p>
+            <a:r>
+              <a:rPr b="1" sz="1150">
+                <a:solidFill>
+                  <a:srgbClr val="0F172A"/>
+                </a:solidFill>
+                <a:latin typeface="Calibri"/>
+              </a:rPr>
+              <a:t>• 3. Recipe Inventory Auto-Depletion: </a:t>
+            </a:r>
+            <a:r>
+              <a:rPr b="0" sz="1150">
+                <a:solidFill>
+                  <a:srgbClr val="1E293B"/>
+                </a:solidFill>
+                <a:latin typeface="Calibri"/>
+              </a:rPr>
+              <a:t>Verified accurate reduction of stock inventory (grams/ml) upon order confirmation.</a:t>
+            </a:r>
+          </a:p>
+          <a:p>
+            <a:r>
+              <a:rPr b="1" sz="1150">
+                <a:solidFill>
+                  <a:srgbClr val="0F172A"/>
+                </a:solidFill>
+                <a:latin typeface="Calibri"/>
+              </a:rPr>
+              <a:t>• 4. Security &amp; RBAC Integrity: </a:t>
+            </a:r>
+            <a:r>
+              <a:rPr b="0" sz="1150">
+                <a:solidFill>
+                  <a:srgbClr val="1E293B"/>
+                </a:solidFill>
+                <a:latin typeface="Calibri"/>
+              </a:rPr>
+              <a:t>Audited cross-tenant URL manipulation (IDOR) — unauthorized requests rejected with HTTP 403 Forbidden.</a:t>
             </a:r>
           </a:p>
         </p:txBody>
@@ -5837,7 +6565,7 @@
             <a:avLst/>
           </a:prstGeom>
           <a:solidFill>
-            <a:srgbClr val="0F172A"/>
+            <a:srgbClr val="FFFFFF"/>
           </a:solidFill>
           <a:ln>
             <a:noFill/>
@@ -5867,14 +6595,57 @@
       </p:sp>
       <p:sp>
         <p:nvSpPr>
-          <p:cNvPr id="3" name="TextBox 2"/>
+          <p:cNvPr id="3" name="Rectangle 2"/>
+          <p:cNvSpPr/>
+          <p:nvPr/>
+        </p:nvSpPr>
+        <p:spPr>
+          <a:xfrm>
+            <a:off x="0" y="0"/>
+            <a:ext cx="12191695" cy="73152"/>
+          </a:xfrm>
+          <a:prstGeom prst="rect">
+            <a:avLst/>
+          </a:prstGeom>
+          <a:solidFill>
+            <a:srgbClr val="4F46E5"/>
+          </a:solidFill>
+          <a:ln>
+            <a:noFill/>
+          </a:ln>
+        </p:spPr>
+        <p:style>
+          <a:lnRef idx="1">
+            <a:schemeClr val="accent1"/>
+          </a:lnRef>
+          <a:fillRef idx="3">
+            <a:schemeClr val="accent1"/>
+          </a:fillRef>
+          <a:effectRef idx="2">
+            <a:schemeClr val="accent1"/>
+          </a:effectRef>
+          <a:fontRef idx="minor">
+            <a:schemeClr val="lt1"/>
+          </a:fontRef>
+        </p:style>
+        <p:txBody>
+          <a:bodyPr rtlCol="0" anchor="ctr"/>
+          <a:lstStyle/>
+          <a:p>
+            <a:pPr algn="ctr"/>
+          </a:p>
+        </p:txBody>
+      </p:sp>
+      <p:sp>
+        <p:nvSpPr>
+          <p:cNvPr id="4" name="TextBox 3"/>
           <p:cNvSpPr txBox="1"/>
           <p:nvPr/>
         </p:nvSpPr>
         <p:spPr>
           <a:xfrm>
-            <a:off x="731520" y="365760"/>
-            <a:ext cx="10698480" cy="822960"/>
+            <a:off x="731520" y="320040"/>
+            <a:ext cx="7772400" cy="777240"/>
           </a:xfrm>
           <a:prstGeom prst="rect">
             <a:avLst/>
@@ -5888,29 +6659,77 @@
           <a:lstStyle/>
           <a:p>
             <a:pPr>
-              <a:defRPr sz="2600" b="1">
-                <a:solidFill>
-                  <a:srgbClr val="F8FAFC"/>
-                </a:solidFill>
-                <a:latin typeface="Segoe UI"/>
-              </a:defRPr>
-            </a:pPr>
-            <a:r>
-              <a:t>Modifications Made After Testing (GTU Comp. 15)</a:t>
-            </a:r>
-          </a:p>
-        </p:txBody>
-      </p:sp>
-      <p:sp>
-        <p:nvSpPr>
-          <p:cNvPr id="4" name="TextBox 3"/>
+              <a:defRPr sz="2400" b="1">
+                <a:solidFill>
+                  <a:srgbClr val="0F172A"/>
+                </a:solidFill>
+                <a:latin typeface="Calibri"/>
+              </a:defRPr>
+            </a:pPr>
+            <a:r>
+              <a:t>Modifications After Testing</a:t>
+            </a:r>
+          </a:p>
+        </p:txBody>
+      </p:sp>
+      <p:pic>
+        <p:nvPicPr>
+          <p:cNvPr id="5" name="Picture 4" descr="gtu_logo.png"/>
+          <p:cNvPicPr>
+            <a:picLocks noChangeAspect="1"/>
+          </p:cNvPicPr>
+          <p:nvPr/>
+        </p:nvPicPr>
+        <p:blipFill>
+          <a:blip r:embed="rId2"/>
+          <a:stretch>
+            <a:fillRect/>
+          </a:stretch>
+        </p:blipFill>
+        <p:spPr>
+          <a:xfrm>
+            <a:off x="10241280" y="182880"/>
+            <a:ext cx="731520" cy="822960"/>
+          </a:xfrm>
+          <a:prstGeom prst="rect">
+            <a:avLst/>
+          </a:prstGeom>
+        </p:spPr>
+      </p:pic>
+      <p:pic>
+        <p:nvPicPr>
+          <p:cNvPr id="6" name="Picture 5" descr="kdp_patan_logo.png"/>
+          <p:cNvPicPr>
+            <a:picLocks noChangeAspect="1"/>
+          </p:cNvPicPr>
+          <p:nvPr/>
+        </p:nvPicPr>
+        <p:blipFill>
+          <a:blip r:embed="rId3"/>
+          <a:stretch>
+            <a:fillRect/>
+          </a:stretch>
+        </p:blipFill>
+        <p:spPr>
+          <a:xfrm>
+            <a:off x="11155680" y="182880"/>
+            <a:ext cx="777240" cy="777240"/>
+          </a:xfrm>
+          <a:prstGeom prst="rect">
+            <a:avLst/>
+          </a:prstGeom>
+        </p:spPr>
+      </p:pic>
+      <p:sp>
+        <p:nvSpPr>
+          <p:cNvPr id="7" name="TextBox 6"/>
           <p:cNvSpPr txBox="1"/>
           <p:nvPr/>
         </p:nvSpPr>
         <p:spPr>
           <a:xfrm>
-            <a:off x="8412480" y="411480"/>
-            <a:ext cx="3017520" cy="365760"/>
+            <a:off x="731520" y="960120"/>
+            <a:ext cx="9144000" cy="320040"/>
           </a:xfrm>
           <a:prstGeom prst="rect">
             <a:avLst/>
@@ -5923,23 +6742,23 @@
           </a:bodyPr>
           <a:lstStyle/>
           <a:p>
-            <a:pPr algn="r">
-              <a:defRPr sz="1100" b="1">
-                <a:solidFill>
-                  <a:srgbClr val="6366F1"/>
-                </a:solidFill>
-                <a:latin typeface="Segoe UI"/>
-              </a:defRPr>
-            </a:pPr>
-            <a:r>
-              <a:t>Minor Project | DI05000341 | Slide 14</a:t>
+            <a:pPr>
+              <a:defRPr sz="1050" b="1">
+                <a:solidFill>
+                  <a:srgbClr val="4F46E5"/>
+                </a:solidFill>
+                <a:latin typeface="Calibri"/>
+              </a:defRPr>
+            </a:pPr>
+            <a:r>
+              <a:t>K. D. Polytechnic, Patan | Department of Computer Engineering | Minor Project (DI05000341) | Slide 14</a:t>
             </a:r>
           </a:p>
         </p:txBody>
       </p:sp>
       <p:graphicFrame>
         <p:nvGraphicFramePr>
-          <p:cNvPr id="5" name="Table 4"/>
+          <p:cNvPr id="8" name="Table 7"/>
           <p:cNvGraphicFramePr>
             <a:graphicFrameLocks noGrp="1"/>
           </p:cNvGraphicFramePr>
@@ -5970,8 +6789,9 @@
                       <a:pPr>
                         <a:defRPr b="1" sz="1100">
                           <a:solidFill>
-                            <a:srgbClr val="F8FAFC"/>
+                            <a:srgbClr val="FFFFFF"/>
                           </a:solidFill>
+                          <a:latin typeface="Calibri"/>
                         </a:defRPr>
                       </a:pPr>
                       <a:r>
@@ -5981,7 +6801,7 @@
                   </a:txBody>
                   <a:tcPr>
                     <a:solidFill>
-                      <a:srgbClr val="6366F1"/>
+                      <a:srgbClr val="4F46E5"/>
                     </a:solidFill>
                   </a:tcPr>
                 </a:tc>
@@ -5993,8 +6813,9 @@
                       <a:pPr>
                         <a:defRPr b="1" sz="1100">
                           <a:solidFill>
-                            <a:srgbClr val="F8FAFC"/>
+                            <a:srgbClr val="FFFFFF"/>
                           </a:solidFill>
+                          <a:latin typeface="Calibri"/>
                         </a:defRPr>
                       </a:pPr>
                       <a:r>
@@ -6004,7 +6825,7 @@
                   </a:txBody>
                   <a:tcPr>
                     <a:solidFill>
-                      <a:srgbClr val="6366F1"/>
+                      <a:srgbClr val="4F46E5"/>
                     </a:solidFill>
                   </a:tcPr>
                 </a:tc>
@@ -6016,8 +6837,9 @@
                       <a:pPr>
                         <a:defRPr b="1" sz="1100">
                           <a:solidFill>
-                            <a:srgbClr val="F8FAFC"/>
+                            <a:srgbClr val="FFFFFF"/>
                           </a:solidFill>
+                          <a:latin typeface="Calibri"/>
                         </a:defRPr>
                       </a:pPr>
                       <a:r>
@@ -6027,7 +6849,7 @@
                   </a:txBody>
                   <a:tcPr>
                     <a:solidFill>
-                      <a:srgbClr val="6366F1"/>
+                      <a:srgbClr val="4F46E5"/>
                     </a:solidFill>
                   </a:tcPr>
                 </a:tc>
@@ -6039,8 +6861,9 @@
                       <a:pPr>
                         <a:defRPr b="1" sz="1100">
                           <a:solidFill>
-                            <a:srgbClr val="F8FAFC"/>
+                            <a:srgbClr val="FFFFFF"/>
                           </a:solidFill>
+                          <a:latin typeface="Calibri"/>
                         </a:defRPr>
                       </a:pPr>
                       <a:r>
@@ -6050,7 +6873,7 @@
                   </a:txBody>
                   <a:tcPr>
                     <a:solidFill>
-                      <a:srgbClr val="6366F1"/>
+                      <a:srgbClr val="4F46E5"/>
                     </a:solidFill>
                   </a:tcPr>
                 </a:tc>
@@ -6064,8 +6887,9 @@
                       <a:pPr>
                         <a:defRPr sz="1050">
                           <a:solidFill>
-                            <a:srgbClr val="F8FAFC"/>
+                            <a:srgbClr val="1E293B"/>
                           </a:solidFill>
+                          <a:latin typeface="Calibri"/>
                         </a:defRPr>
                       </a:pPr>
                       <a:r>
@@ -6075,7 +6899,7 @@
                   </a:txBody>
                   <a:tcPr>
                     <a:solidFill>
-                      <a:srgbClr val="1E293B"/>
+                      <a:srgbClr val="F8FAFC"/>
                     </a:solidFill>
                   </a:tcPr>
                 </a:tc>
@@ -6087,8 +6911,9 @@
                       <a:pPr>
                         <a:defRPr sz="1050">
                           <a:solidFill>
-                            <a:srgbClr val="F8FAFC"/>
+                            <a:srgbClr val="1E293B"/>
                           </a:solidFill>
+                          <a:latin typeface="Calibri"/>
                         </a:defRPr>
                       </a:pPr>
                       <a:r>
@@ -6098,7 +6923,7 @@
                   </a:txBody>
                   <a:tcPr>
                     <a:solidFill>
-                      <a:srgbClr val="1E293B"/>
+                      <a:srgbClr val="F8FAFC"/>
                     </a:solidFill>
                   </a:tcPr>
                 </a:tc>
@@ -6110,8 +6935,9 @@
                       <a:pPr>
                         <a:defRPr sz="1050">
                           <a:solidFill>
-                            <a:srgbClr val="F8FAFC"/>
+                            <a:srgbClr val="1E293B"/>
                           </a:solidFill>
+                          <a:latin typeface="Calibri"/>
                         </a:defRPr>
                       </a:pPr>
                       <a:r>
@@ -6121,7 +6947,7 @@
                   </a:txBody>
                   <a:tcPr>
                     <a:solidFill>
-                      <a:srgbClr val="1E293B"/>
+                      <a:srgbClr val="F8FAFC"/>
                     </a:solidFill>
                   </a:tcPr>
                 </a:tc>
@@ -6133,8 +6959,9 @@
                       <a:pPr>
                         <a:defRPr sz="1050">
                           <a:solidFill>
-                            <a:srgbClr val="F8FAFC"/>
+                            <a:srgbClr val="1E293B"/>
                           </a:solidFill>
+                          <a:latin typeface="Calibri"/>
                         </a:defRPr>
                       </a:pPr>
                       <a:r>
@@ -6144,7 +6971,7 @@
                   </a:txBody>
                   <a:tcPr>
                     <a:solidFill>
-                      <a:srgbClr val="1E293B"/>
+                      <a:srgbClr val="F8FAFC"/>
                     </a:solidFill>
                   </a:tcPr>
                 </a:tc>
@@ -6158,8 +6985,9 @@
                       <a:pPr>
                         <a:defRPr sz="1050">
                           <a:solidFill>
-                            <a:srgbClr val="F8FAFC"/>
+                            <a:srgbClr val="1E293B"/>
                           </a:solidFill>
+                          <a:latin typeface="Calibri"/>
                         </a:defRPr>
                       </a:pPr>
                       <a:r>
@@ -6169,7 +6997,7 @@
                   </a:txBody>
                   <a:tcPr>
                     <a:solidFill>
-                      <a:srgbClr val="1E293B"/>
+                      <a:srgbClr val="F8FAFC"/>
                     </a:solidFill>
                   </a:tcPr>
                 </a:tc>
@@ -6181,8 +7009,9 @@
                       <a:pPr>
                         <a:defRPr sz="1050">
                           <a:solidFill>
-                            <a:srgbClr val="F8FAFC"/>
+                            <a:srgbClr val="1E293B"/>
                           </a:solidFill>
+                          <a:latin typeface="Calibri"/>
                         </a:defRPr>
                       </a:pPr>
                       <a:r>
@@ -6192,7 +7021,7 @@
                   </a:txBody>
                   <a:tcPr>
                     <a:solidFill>
-                      <a:srgbClr val="1E293B"/>
+                      <a:srgbClr val="F8FAFC"/>
                     </a:solidFill>
                   </a:tcPr>
                 </a:tc>
@@ -6204,8 +7033,9 @@
                       <a:pPr>
                         <a:defRPr sz="1050">
                           <a:solidFill>
-                            <a:srgbClr val="F8FAFC"/>
+                            <a:srgbClr val="1E293B"/>
                           </a:solidFill>
+                          <a:latin typeface="Calibri"/>
                         </a:defRPr>
                       </a:pPr>
                       <a:r>
@@ -6215,7 +7045,7 @@
                   </a:txBody>
                   <a:tcPr>
                     <a:solidFill>
-                      <a:srgbClr val="1E293B"/>
+                      <a:srgbClr val="F8FAFC"/>
                     </a:solidFill>
                   </a:tcPr>
                 </a:tc>
@@ -6227,8 +7057,9 @@
                       <a:pPr>
                         <a:defRPr sz="1050">
                           <a:solidFill>
-                            <a:srgbClr val="F8FAFC"/>
+                            <a:srgbClr val="1E293B"/>
                           </a:solidFill>
+                          <a:latin typeface="Calibri"/>
                         </a:defRPr>
                       </a:pPr>
                       <a:r>
@@ -6238,7 +7069,7 @@
                   </a:txBody>
                   <a:tcPr>
                     <a:solidFill>
-                      <a:srgbClr val="1E293B"/>
+                      <a:srgbClr val="F8FAFC"/>
                     </a:solidFill>
                   </a:tcPr>
                 </a:tc>
@@ -6252,8 +7083,9 @@
                       <a:pPr>
                         <a:defRPr sz="1050">
                           <a:solidFill>
-                            <a:srgbClr val="F8FAFC"/>
+                            <a:srgbClr val="1E293B"/>
                           </a:solidFill>
+                          <a:latin typeface="Calibri"/>
                         </a:defRPr>
                       </a:pPr>
                       <a:r>
@@ -6263,7 +7095,7 @@
                   </a:txBody>
                   <a:tcPr>
                     <a:solidFill>
-                      <a:srgbClr val="1E293B"/>
+                      <a:srgbClr val="F8FAFC"/>
                     </a:solidFill>
                   </a:tcPr>
                 </a:tc>
@@ -6275,8 +7107,9 @@
                       <a:pPr>
                         <a:defRPr sz="1050">
                           <a:solidFill>
-                            <a:srgbClr val="F8FAFC"/>
+                            <a:srgbClr val="1E293B"/>
                           </a:solidFill>
+                          <a:latin typeface="Calibri"/>
                         </a:defRPr>
                       </a:pPr>
                       <a:r>
@@ -6286,7 +7119,7 @@
                   </a:txBody>
                   <a:tcPr>
                     <a:solidFill>
-                      <a:srgbClr val="1E293B"/>
+                      <a:srgbClr val="F8FAFC"/>
                     </a:solidFill>
                   </a:tcPr>
                 </a:tc>
@@ -6298,8 +7131,9 @@
                       <a:pPr>
                         <a:defRPr sz="1050">
                           <a:solidFill>
-                            <a:srgbClr val="F8FAFC"/>
+                            <a:srgbClr val="1E293B"/>
                           </a:solidFill>
+                          <a:latin typeface="Calibri"/>
                         </a:defRPr>
                       </a:pPr>
                       <a:r>
@@ -6309,7 +7143,7 @@
                   </a:txBody>
                   <a:tcPr>
                     <a:solidFill>
-                      <a:srgbClr val="1E293B"/>
+                      <a:srgbClr val="F8FAFC"/>
                     </a:solidFill>
                   </a:tcPr>
                 </a:tc>
@@ -6321,8 +7155,9 @@
                       <a:pPr>
                         <a:defRPr sz="1050">
                           <a:solidFill>
-                            <a:srgbClr val="F8FAFC"/>
+                            <a:srgbClr val="1E293B"/>
                           </a:solidFill>
+                          <a:latin typeface="Calibri"/>
                         </a:defRPr>
                       </a:pPr>
                       <a:r>
@@ -6332,7 +7167,7 @@
                   </a:txBody>
                   <a:tcPr>
                     <a:solidFill>
-                      <a:srgbClr val="1E293B"/>
+                      <a:srgbClr val="F8FAFC"/>
                     </a:solidFill>
                   </a:tcPr>
                 </a:tc>
@@ -6374,7 +7209,7 @@
             <a:avLst/>
           </a:prstGeom>
           <a:solidFill>
-            <a:srgbClr val="0F172A"/>
+            <a:srgbClr val="FFFFFF"/>
           </a:solidFill>
           <a:ln>
             <a:noFill/>
@@ -6404,97 +7239,23 @@
       </p:sp>
       <p:sp>
         <p:nvSpPr>
-          <p:cNvPr id="3" name="TextBox 2"/>
-          <p:cNvSpPr txBox="1"/>
-          <p:nvPr/>
-        </p:nvSpPr>
-        <p:spPr>
-          <a:xfrm>
-            <a:off x="731520" y="365760"/>
-            <a:ext cx="10698480" cy="822960"/>
+          <p:cNvPr id="3" name="Rectangle 2"/>
+          <p:cNvSpPr/>
+          <p:nvPr/>
+        </p:nvSpPr>
+        <p:spPr>
+          <a:xfrm>
+            <a:off x="0" y="0"/>
+            <a:ext cx="12191695" cy="73152"/>
           </a:xfrm>
           <a:prstGeom prst="rect">
             <a:avLst/>
           </a:prstGeom>
-          <a:noFill/>
-        </p:spPr>
-        <p:txBody>
-          <a:bodyPr wrap="square">
-            <a:spAutoFit/>
-          </a:bodyPr>
-          <a:lstStyle/>
-          <a:p>
-            <a:pPr>
-              <a:defRPr sz="2600" b="1">
-                <a:solidFill>
-                  <a:srgbClr val="F8FAFC"/>
-                </a:solidFill>
-                <a:latin typeface="Segoe UI"/>
-              </a:defRPr>
-            </a:pPr>
-            <a:r>
-              <a:t>Conclusion &amp; Future Scope</a:t>
-            </a:r>
-          </a:p>
-        </p:txBody>
-      </p:sp>
-      <p:sp>
-        <p:nvSpPr>
-          <p:cNvPr id="4" name="TextBox 3"/>
-          <p:cNvSpPr txBox="1"/>
-          <p:nvPr/>
-        </p:nvSpPr>
-        <p:spPr>
-          <a:xfrm>
-            <a:off x="8412480" y="411480"/>
-            <a:ext cx="3017520" cy="365760"/>
-          </a:xfrm>
-          <a:prstGeom prst="rect">
-            <a:avLst/>
-          </a:prstGeom>
-          <a:noFill/>
-        </p:spPr>
-        <p:txBody>
-          <a:bodyPr wrap="none">
-            <a:spAutoFit/>
-          </a:bodyPr>
-          <a:lstStyle/>
-          <a:p>
-            <a:pPr algn="r">
-              <a:defRPr sz="1100" b="1">
-                <a:solidFill>
-                  <a:srgbClr val="6366F1"/>
-                </a:solidFill>
-                <a:latin typeface="Segoe UI"/>
-              </a:defRPr>
-            </a:pPr>
-            <a:r>
-              <a:t>Minor Project | DI05000341 | Slide 15</a:t>
-            </a:r>
-          </a:p>
-        </p:txBody>
-      </p:sp>
-      <p:sp>
-        <p:nvSpPr>
-          <p:cNvPr id="5" name="Rounded Rectangle 4"/>
-          <p:cNvSpPr/>
-          <p:nvPr/>
-        </p:nvSpPr>
-        <p:spPr>
-          <a:xfrm>
-            <a:off x="914400" y="1463040"/>
-            <a:ext cx="4937760" cy="4572000"/>
-          </a:xfrm>
-          <a:prstGeom prst="roundRect">
-            <a:avLst/>
-          </a:prstGeom>
           <a:solidFill>
-            <a:srgbClr val="1E293B"/>
+            <a:srgbClr val="4F46E5"/>
           </a:solidFill>
           <a:ln>
-            <a:solidFill>
-              <a:srgbClr val="6366F1"/>
-            </a:solidFill>
+            <a:noFill/>
           </a:ln>
         </p:spPr>
         <p:style>
@@ -6512,90 +7273,153 @@
           </a:fontRef>
         </p:style>
         <p:txBody>
-          <a:bodyPr rtlCol="0" anchor="ctr" wrap="square"/>
-          <a:lstStyle/>
-          <a:p>
-            <a:pPr algn="ctr">
-              <a:defRPr b="1" sz="1400">
-                <a:solidFill>
-                  <a:srgbClr val="F59E0B"/>
-                </a:solidFill>
-              </a:defRPr>
-            </a:pPr>
-            <a:r>
-              <a:t>PROJECT CONCLUSION</a:t>
-            </a:r>
-          </a:p>
+          <a:bodyPr rtlCol="0" anchor="ctr"/>
+          <a:lstStyle/>
+          <a:p>
+            <a:pPr algn="ctr"/>
+          </a:p>
+        </p:txBody>
+      </p:sp>
+      <p:sp>
+        <p:nvSpPr>
+          <p:cNvPr id="4" name="TextBox 3"/>
+          <p:cNvSpPr txBox="1"/>
+          <p:nvPr/>
+        </p:nvSpPr>
+        <p:spPr>
+          <a:xfrm>
+            <a:off x="731520" y="320040"/>
+            <a:ext cx="7772400" cy="777240"/>
+          </a:xfrm>
+          <a:prstGeom prst="rect">
+            <a:avLst/>
+          </a:prstGeom>
+          <a:noFill/>
+        </p:spPr>
+        <p:txBody>
+          <a:bodyPr wrap="square">
+            <a:spAutoFit/>
+          </a:bodyPr>
+          <a:lstStyle/>
           <a:p>
             <a:pPr>
-              <a:defRPr b="1" sz="1150">
-                <a:solidFill>
-                  <a:srgbClr val="10B981"/>
-                </a:solidFill>
-              </a:defRPr>
-            </a:pPr>
-            <a:r>
-              <a:t>✔ Objective 1 Achieved: Engineered an ultra-fast Web POS terminal operating in sub-3 seconds with raw ESC/POS thermal printing.</a:t>
-            </a:r>
-          </a:p>
+              <a:defRPr sz="2400" b="1">
+                <a:solidFill>
+                  <a:srgbClr val="0F172A"/>
+                </a:solidFill>
+                <a:latin typeface="Calibri"/>
+              </a:defRPr>
+            </a:pPr>
+            <a:r>
+              <a:t>Conclusion, Future Scope and Entrepreneurship</a:t>
+            </a:r>
+          </a:p>
+        </p:txBody>
+      </p:sp>
+      <p:pic>
+        <p:nvPicPr>
+          <p:cNvPr id="5" name="Picture 4" descr="gtu_logo.png"/>
+          <p:cNvPicPr>
+            <a:picLocks noChangeAspect="1"/>
+          </p:cNvPicPr>
+          <p:nvPr/>
+        </p:nvPicPr>
+        <p:blipFill>
+          <a:blip r:embed="rId2"/>
+          <a:stretch>
+            <a:fillRect/>
+          </a:stretch>
+        </p:blipFill>
+        <p:spPr>
+          <a:xfrm>
+            <a:off x="10241280" y="182880"/>
+            <a:ext cx="731520" cy="822960"/>
+          </a:xfrm>
+          <a:prstGeom prst="rect">
+            <a:avLst/>
+          </a:prstGeom>
+        </p:spPr>
+      </p:pic>
+      <p:pic>
+        <p:nvPicPr>
+          <p:cNvPr id="6" name="Picture 5" descr="kdp_patan_logo.png"/>
+          <p:cNvPicPr>
+            <a:picLocks noChangeAspect="1"/>
+          </p:cNvPicPr>
+          <p:nvPr/>
+        </p:nvPicPr>
+        <p:blipFill>
+          <a:blip r:embed="rId3"/>
+          <a:stretch>
+            <a:fillRect/>
+          </a:stretch>
+        </p:blipFill>
+        <p:spPr>
+          <a:xfrm>
+            <a:off x="11155680" y="182880"/>
+            <a:ext cx="777240" cy="777240"/>
+          </a:xfrm>
+          <a:prstGeom prst="rect">
+            <a:avLst/>
+          </a:prstGeom>
+        </p:spPr>
+      </p:pic>
+      <p:sp>
+        <p:nvSpPr>
+          <p:cNvPr id="7" name="TextBox 6"/>
+          <p:cNvSpPr txBox="1"/>
+          <p:nvPr/>
+        </p:nvSpPr>
+        <p:spPr>
+          <a:xfrm>
+            <a:off x="731520" y="960120"/>
+            <a:ext cx="9144000" cy="320040"/>
+          </a:xfrm>
+          <a:prstGeom prst="rect">
+            <a:avLst/>
+          </a:prstGeom>
+          <a:noFill/>
+        </p:spPr>
+        <p:txBody>
+          <a:bodyPr wrap="none">
+            <a:spAutoFit/>
+          </a:bodyPr>
+          <a:lstStyle/>
           <a:p>
             <a:pPr>
-              <a:defRPr b="1" sz="1150">
-                <a:solidFill>
-                  <a:srgbClr val="10B981"/>
-                </a:solidFill>
-              </a:defRPr>
-            </a:pPr>
-            <a:r>
-              <a:t>✔ Objective 2 Achieved: Built seamless contactless QR table ordering and digital KDS eliminating physical menus and paper KOTs.</a:t>
-            </a:r>
-          </a:p>
-          <a:p>
-            <a:pPr>
-              <a:defRPr b="1" sz="1150">
-                <a:solidFill>
-                  <a:srgbClr val="10B981"/>
-                </a:solidFill>
-              </a:defRPr>
-            </a:pPr>
-            <a:r>
-              <a:t>✔ Objective 3 Achieved: Integrated automated recipe costing inventory depletion and real-time Gujarati voice alerts.</a:t>
-            </a:r>
-          </a:p>
-          <a:p>
-            <a:pPr>
-              <a:defRPr b="1" sz="1150">
-                <a:solidFill>
-                  <a:srgbClr val="10B981"/>
-                </a:solidFill>
-              </a:defRPr>
-            </a:pPr>
-            <a:r>
-              <a:t>✔ Production Deployed: Live cloud deployment operating on AWS EC2 server at https://dineflowai.duckdns.org.</a:t>
-            </a:r>
-          </a:p>
-        </p:txBody>
-      </p:sp>
-      <p:sp>
-        <p:nvSpPr>
-          <p:cNvPr id="6" name="Rounded Rectangle 5"/>
+              <a:defRPr sz="1050" b="1">
+                <a:solidFill>
+                  <a:srgbClr val="4F46E5"/>
+                </a:solidFill>
+                <a:latin typeface="Calibri"/>
+              </a:defRPr>
+            </a:pPr>
+            <a:r>
+              <a:t>K. D. Polytechnic, Patan | Department of Computer Engineering | Minor Project (DI05000341) | Slide 15</a:t>
+            </a:r>
+          </a:p>
+        </p:txBody>
+      </p:sp>
+      <p:sp>
+        <p:nvSpPr>
+          <p:cNvPr id="8" name="Rounded Rectangle 7"/>
           <p:cNvSpPr/>
           <p:nvPr/>
         </p:nvSpPr>
         <p:spPr>
           <a:xfrm>
-            <a:off x="6309360" y="1463040"/>
+            <a:off x="914400" y="1463040"/>
             <a:ext cx="4937760" cy="4572000"/>
           </a:xfrm>
           <a:prstGeom prst="roundRect">
             <a:avLst/>
           </a:prstGeom>
           <a:solidFill>
-            <a:srgbClr val="1E293B"/>
+            <a:srgbClr val="F8FAFC"/>
           </a:solidFill>
           <a:ln>
             <a:solidFill>
-              <a:srgbClr val="10B981"/>
+              <a:srgbClr val="E2E8F0"/>
             </a:solidFill>
           </a:ln>
         </p:spPr>
@@ -6620,8 +7444,144 @@
             <a:pPr algn="ctr">
               <a:defRPr b="1" sz="1400">
                 <a:solidFill>
-                  <a:srgbClr val="F59E0B"/>
-                </a:solidFill>
+                  <a:srgbClr val="0F172A"/>
+                </a:solidFill>
+                <a:latin typeface="Calibri"/>
+              </a:defRPr>
+            </a:pPr>
+            <a:r>
+              <a:t>PROJECT CONCLUSION</a:t>
+            </a:r>
+          </a:p>
+          <a:p>
+            <a:r>
+              <a:rPr b="1" sz="1150">
+                <a:solidFill>
+                  <a:srgbClr val="10B981"/>
+                </a:solidFill>
+                <a:latin typeface="Calibri"/>
+              </a:rPr>
+              <a:t>✔ Objective 1 Achieved: </a:t>
+            </a:r>
+            <a:r>
+              <a:rPr b="0" sz="1150">
+                <a:solidFill>
+                  <a:srgbClr val="1E293B"/>
+                </a:solidFill>
+                <a:latin typeface="Calibri"/>
+              </a:rPr>
+              <a:t>Engineered an ultra-fast Web POS terminal operating in sub-3 seconds with raw ESC/POS thermal printing.</a:t>
+            </a:r>
+          </a:p>
+          <a:p>
+            <a:r>
+              <a:rPr b="1" sz="1150">
+                <a:solidFill>
+                  <a:srgbClr val="10B981"/>
+                </a:solidFill>
+                <a:latin typeface="Calibri"/>
+              </a:rPr>
+              <a:t>✔ Objective 2 Achieved: </a:t>
+            </a:r>
+            <a:r>
+              <a:rPr b="0" sz="1150">
+                <a:solidFill>
+                  <a:srgbClr val="1E293B"/>
+                </a:solidFill>
+                <a:latin typeface="Calibri"/>
+              </a:rPr>
+              <a:t>Built seamless contactless QR table ordering and digital KDS eliminating physical menus and paper KOTs.</a:t>
+            </a:r>
+          </a:p>
+          <a:p>
+            <a:r>
+              <a:rPr b="1" sz="1150">
+                <a:solidFill>
+                  <a:srgbClr val="10B981"/>
+                </a:solidFill>
+                <a:latin typeface="Calibri"/>
+              </a:rPr>
+              <a:t>✔ Objective 3 Achieved: </a:t>
+            </a:r>
+            <a:r>
+              <a:rPr b="0" sz="1150">
+                <a:solidFill>
+                  <a:srgbClr val="1E293B"/>
+                </a:solidFill>
+                <a:latin typeface="Calibri"/>
+              </a:rPr>
+              <a:t>Integrated automated recipe costing inventory depletion and real-time Gujarati voice alerts.</a:t>
+            </a:r>
+          </a:p>
+          <a:p>
+            <a:r>
+              <a:rPr b="1" sz="1150">
+                <a:solidFill>
+                  <a:srgbClr val="10B981"/>
+                </a:solidFill>
+                <a:latin typeface="Calibri"/>
+              </a:rPr>
+              <a:t>✔ Production Deployed: </a:t>
+            </a:r>
+            <a:r>
+              <a:rPr b="0" sz="1150">
+                <a:solidFill>
+                  <a:srgbClr val="1E293B"/>
+                </a:solidFill>
+                <a:latin typeface="Calibri"/>
+              </a:rPr>
+              <a:t>Live cloud deployment operating on AWS EC2 server at https://dineflowai.duckdns.org.</a:t>
+            </a:r>
+          </a:p>
+        </p:txBody>
+      </p:sp>
+      <p:sp>
+        <p:nvSpPr>
+          <p:cNvPr id="9" name="Rounded Rectangle 8"/>
+          <p:cNvSpPr/>
+          <p:nvPr/>
+        </p:nvSpPr>
+        <p:spPr>
+          <a:xfrm>
+            <a:off x="6309360" y="1463040"/>
+            <a:ext cx="4937760" cy="4572000"/>
+          </a:xfrm>
+          <a:prstGeom prst="roundRect">
+            <a:avLst/>
+          </a:prstGeom>
+          <a:solidFill>
+            <a:srgbClr val="F8FAFC"/>
+          </a:solidFill>
+          <a:ln>
+            <a:solidFill>
+              <a:srgbClr val="E2E8F0"/>
+            </a:solidFill>
+          </a:ln>
+        </p:spPr>
+        <p:style>
+          <a:lnRef idx="1">
+            <a:schemeClr val="accent1"/>
+          </a:lnRef>
+          <a:fillRef idx="3">
+            <a:schemeClr val="accent1"/>
+          </a:fillRef>
+          <a:effectRef idx="2">
+            <a:schemeClr val="accent1"/>
+          </a:effectRef>
+          <a:fontRef idx="minor">
+            <a:schemeClr val="lt1"/>
+          </a:fontRef>
+        </p:style>
+        <p:txBody>
+          <a:bodyPr rtlCol="0" anchor="ctr" wrap="square"/>
+          <a:lstStyle/>
+          <a:p>
+            <a:pPr algn="ctr">
+              <a:defRPr b="1" sz="1400">
+                <a:solidFill>
+                  <a:srgbClr val="4F46E5"/>
+                </a:solidFill>
+                <a:latin typeface="Calibri"/>
               </a:defRPr>
             </a:pPr>
             <a:r>
@@ -6629,51 +7589,83 @@
             </a:r>
           </a:p>
           <a:p>
-            <a:pPr>
-              <a:defRPr b="1" sz="1150">
-                <a:solidFill>
-                  <a:srgbClr val="6366F1"/>
-                </a:solidFill>
-              </a:defRPr>
-            </a:pPr>
-            <a:r>
-              <a:t>🚀 AI Predictive Inventory Forecasting: Use machine learning (ARIMA/LSTM) to predict ingredient requirements based on weather and festival rush.</a:t>
-            </a:r>
-          </a:p>
-          <a:p>
-            <a:pPr>
-              <a:defRPr b="1" sz="1150">
-                <a:solidFill>
-                  <a:srgbClr val="6366F1"/>
-                </a:solidFill>
-              </a:defRPr>
-            </a:pPr>
-            <a:r>
-              <a:t>🚀 Direct Food Aggregator Integration: Direct 2-way API order ingestion from Zomato and Swiggy into one single unified KDS screen.</a:t>
-            </a:r>
-          </a:p>
-          <a:p>
-            <a:pPr>
-              <a:defRPr b="1" sz="1150">
-                <a:solidFill>
-                  <a:srgbClr val="6366F1"/>
-                </a:solidFill>
-              </a:defRPr>
-            </a:pPr>
-            <a:r>
-              <a:t>🚀 IoT Kitchen Tare Weight Scale: Connect Bluetooth weight scales under oil/flour bins for automated real-time gram depletion without manual entry.</a:t>
-            </a:r>
-          </a:p>
-          <a:p>
-            <a:pPr>
-              <a:defRPr b="1" sz="1150">
-                <a:solidFill>
-                  <a:srgbClr val="6366F1"/>
-                </a:solidFill>
-              </a:defRPr>
-            </a:pPr>
-            <a:r>
-              <a:t>🚀 WhatsApp Conversational Bot: Allow customers to place takeaway orders and pay directly inside WhatsApp.</a:t>
+            <a:r>
+              <a:rPr b="1" sz="1150">
+                <a:solidFill>
+                  <a:srgbClr val="4F46E5"/>
+                </a:solidFill>
+                <a:latin typeface="Calibri"/>
+              </a:rPr>
+              <a:t>🚀 AI Predictive Inventory Forecasting: </a:t>
+            </a:r>
+            <a:r>
+              <a:rPr b="0" sz="1150">
+                <a:solidFill>
+                  <a:srgbClr val="1E293B"/>
+                </a:solidFill>
+                <a:latin typeface="Calibri"/>
+              </a:rPr>
+              <a:t>Use machine learning (ARIMA/LSTM) to predict ingredient requirements based on weather and festival rush.</a:t>
+            </a:r>
+          </a:p>
+          <a:p>
+            <a:r>
+              <a:rPr b="1" sz="1150">
+                <a:solidFill>
+                  <a:srgbClr val="4F46E5"/>
+                </a:solidFill>
+                <a:latin typeface="Calibri"/>
+              </a:rPr>
+              <a:t>🚀 Direct Food Aggregator Integration: </a:t>
+            </a:r>
+            <a:r>
+              <a:rPr b="0" sz="1150">
+                <a:solidFill>
+                  <a:srgbClr val="1E293B"/>
+                </a:solidFill>
+                <a:latin typeface="Calibri"/>
+              </a:rPr>
+              <a:t>Direct 2-way API order ingestion from Zomato and Swiggy into one single unified KDS screen.</a:t>
+            </a:r>
+          </a:p>
+          <a:p>
+            <a:r>
+              <a:rPr b="1" sz="1150">
+                <a:solidFill>
+                  <a:srgbClr val="4F46E5"/>
+                </a:solidFill>
+                <a:latin typeface="Calibri"/>
+              </a:rPr>
+              <a:t>🚀 IoT Kitchen Tare Weight Scale: </a:t>
+            </a:r>
+            <a:r>
+              <a:rPr b="0" sz="1150">
+                <a:solidFill>
+                  <a:srgbClr val="1E293B"/>
+                </a:solidFill>
+                <a:latin typeface="Calibri"/>
+              </a:rPr>
+              <a:t>Connect Bluetooth weight scales under oil/flour bins for automated real-time gram depletion without manual entry.</a:t>
+            </a:r>
+          </a:p>
+          <a:p>
+            <a:r>
+              <a:rPr b="1" sz="1150">
+                <a:solidFill>
+                  <a:srgbClr val="4F46E5"/>
+                </a:solidFill>
+                <a:latin typeface="Calibri"/>
+              </a:rPr>
+              <a:t>🚀 WhatsApp Conversational Bot: </a:t>
+            </a:r>
+            <a:r>
+              <a:rPr b="0" sz="1150">
+                <a:solidFill>
+                  <a:srgbClr val="1E293B"/>
+                </a:solidFill>
+                <a:latin typeface="Calibri"/>
+              </a:rPr>
+              <a:t>Allow customers to place takeaway orders and pay directly inside WhatsApp.</a:t>
             </a:r>
           </a:p>
         </p:txBody>
@@ -6711,7 +7703,7 @@
             <a:avLst/>
           </a:prstGeom>
           <a:solidFill>
-            <a:srgbClr val="0F172A"/>
+            <a:srgbClr val="FFFFFF"/>
           </a:solidFill>
           <a:ln>
             <a:noFill/>
@@ -6741,97 +7733,23 @@
       </p:sp>
       <p:sp>
         <p:nvSpPr>
-          <p:cNvPr id="3" name="TextBox 2"/>
-          <p:cNvSpPr txBox="1"/>
-          <p:nvPr/>
-        </p:nvSpPr>
-        <p:spPr>
-          <a:xfrm>
-            <a:off x="731520" y="365760"/>
-            <a:ext cx="10698480" cy="822960"/>
+          <p:cNvPr id="3" name="Rectangle 2"/>
+          <p:cNvSpPr/>
+          <p:nvPr/>
+        </p:nvSpPr>
+        <p:spPr>
+          <a:xfrm>
+            <a:off x="0" y="0"/>
+            <a:ext cx="12191695" cy="73152"/>
           </a:xfrm>
           <a:prstGeom prst="rect">
             <a:avLst/>
           </a:prstGeom>
-          <a:noFill/>
-        </p:spPr>
-        <p:txBody>
-          <a:bodyPr wrap="square">
-            <a:spAutoFit/>
-          </a:bodyPr>
-          <a:lstStyle/>
-          <a:p>
-            <a:pPr>
-              <a:defRPr sz="2600" b="1">
-                <a:solidFill>
-                  <a:srgbClr val="F8FAFC"/>
-                </a:solidFill>
-                <a:latin typeface="Segoe UI"/>
-              </a:defRPr>
-            </a:pPr>
-            <a:r>
-              <a:t>Commercial Startup &amp; Business Model</a:t>
-            </a:r>
-          </a:p>
-        </p:txBody>
-      </p:sp>
-      <p:sp>
-        <p:nvSpPr>
-          <p:cNvPr id="4" name="TextBox 3"/>
-          <p:cNvSpPr txBox="1"/>
-          <p:nvPr/>
-        </p:nvSpPr>
-        <p:spPr>
-          <a:xfrm>
-            <a:off x="8412480" y="411480"/>
-            <a:ext cx="3017520" cy="365760"/>
-          </a:xfrm>
-          <a:prstGeom prst="rect">
-            <a:avLst/>
-          </a:prstGeom>
-          <a:noFill/>
-        </p:spPr>
-        <p:txBody>
-          <a:bodyPr wrap="none">
-            <a:spAutoFit/>
-          </a:bodyPr>
-          <a:lstStyle/>
-          <a:p>
-            <a:pPr algn="r">
-              <a:defRPr sz="1100" b="1">
-                <a:solidFill>
-                  <a:srgbClr val="6366F1"/>
-                </a:solidFill>
-                <a:latin typeface="Segoe UI"/>
-              </a:defRPr>
-            </a:pPr>
-            <a:r>
-              <a:t>Minor Project | DI05000341 | Slide 16</a:t>
-            </a:r>
-          </a:p>
-        </p:txBody>
-      </p:sp>
-      <p:sp>
-        <p:nvSpPr>
-          <p:cNvPr id="5" name="Rounded Rectangle 4"/>
-          <p:cNvSpPr/>
-          <p:nvPr/>
-        </p:nvSpPr>
-        <p:spPr>
-          <a:xfrm>
-            <a:off x="914400" y="1554480"/>
-            <a:ext cx="3291840" cy="4572000"/>
-          </a:xfrm>
-          <a:prstGeom prst="roundRect">
-            <a:avLst/>
-          </a:prstGeom>
           <a:solidFill>
-            <a:srgbClr val="1E293B"/>
+            <a:srgbClr val="4F46E5"/>
           </a:solidFill>
           <a:ln>
-            <a:solidFill>
-              <a:srgbClr val="6366F1"/>
-            </a:solidFill>
+            <a:noFill/>
           </a:ln>
         </p:spPr>
         <p:style>
@@ -6849,78 +7767,153 @@
           </a:fontRef>
         </p:style>
         <p:txBody>
-          <a:bodyPr rtlCol="0" anchor="ctr" wrap="square"/>
-          <a:lstStyle/>
-          <a:p>
-            <a:pPr algn="ctr">
-              <a:defRPr b="1" sz="1350">
-                <a:solidFill>
-                  <a:srgbClr val="F59E0B"/>
-                </a:solidFill>
-              </a:defRPr>
-            </a:pPr>
-            <a:r>
-              <a:t>1. Startup Venture Potential</a:t>
-            </a:r>
-          </a:p>
+          <a:bodyPr rtlCol="0" anchor="ctr"/>
+          <a:lstStyle/>
+          <a:p>
+            <a:pPr algn="ctr"/>
+          </a:p>
+        </p:txBody>
+      </p:sp>
+      <p:sp>
+        <p:nvSpPr>
+          <p:cNvPr id="4" name="TextBox 3"/>
+          <p:cNvSpPr txBox="1"/>
+          <p:nvPr/>
+        </p:nvSpPr>
+        <p:spPr>
+          <a:xfrm>
+            <a:off x="731520" y="320040"/>
+            <a:ext cx="7772400" cy="777240"/>
+          </a:xfrm>
+          <a:prstGeom prst="rect">
+            <a:avLst/>
+          </a:prstGeom>
+          <a:noFill/>
+        </p:spPr>
+        <p:txBody>
+          <a:bodyPr wrap="square">
+            <a:spAutoFit/>
+          </a:bodyPr>
+          <a:lstStyle/>
           <a:p>
             <a:pPr>
-              <a:defRPr b="1" sz="1200">
-                <a:solidFill>
-                  <a:srgbClr val="10B981"/>
-                </a:solidFill>
-              </a:defRPr>
-            </a:pPr>
-            <a:r>
-              <a:t>DineFlow AI Pvt. Ltd.</a:t>
-            </a:r>
-          </a:p>
+              <a:defRPr sz="2400" b="1">
+                <a:solidFill>
+                  <a:srgbClr val="0F172A"/>
+                </a:solidFill>
+                <a:latin typeface="Calibri"/>
+              </a:defRPr>
+            </a:pPr>
+            <a:r>
+              <a:t>Commercial Startup and Business Model</a:t>
+            </a:r>
+          </a:p>
+        </p:txBody>
+      </p:sp>
+      <p:pic>
+        <p:nvPicPr>
+          <p:cNvPr id="5" name="Picture 4" descr="gtu_logo.png"/>
+          <p:cNvPicPr>
+            <a:picLocks noChangeAspect="1"/>
+          </p:cNvPicPr>
+          <p:nvPr/>
+        </p:nvPicPr>
+        <p:blipFill>
+          <a:blip r:embed="rId2"/>
+          <a:stretch>
+            <a:fillRect/>
+          </a:stretch>
+        </p:blipFill>
+        <p:spPr>
+          <a:xfrm>
+            <a:off x="10241280" y="182880"/>
+            <a:ext cx="731520" cy="822960"/>
+          </a:xfrm>
+          <a:prstGeom prst="rect">
+            <a:avLst/>
+          </a:prstGeom>
+        </p:spPr>
+      </p:pic>
+      <p:pic>
+        <p:nvPicPr>
+          <p:cNvPr id="6" name="Picture 5" descr="kdp_patan_logo.png"/>
+          <p:cNvPicPr>
+            <a:picLocks noChangeAspect="1"/>
+          </p:cNvPicPr>
+          <p:nvPr/>
+        </p:nvPicPr>
+        <p:blipFill>
+          <a:blip r:embed="rId3"/>
+          <a:stretch>
+            <a:fillRect/>
+          </a:stretch>
+        </p:blipFill>
+        <p:spPr>
+          <a:xfrm>
+            <a:off x="11155680" y="182880"/>
+            <a:ext cx="777240" cy="777240"/>
+          </a:xfrm>
+          <a:prstGeom prst="rect">
+            <a:avLst/>
+          </a:prstGeom>
+        </p:spPr>
+      </p:pic>
+      <p:sp>
+        <p:nvSpPr>
+          <p:cNvPr id="7" name="TextBox 6"/>
+          <p:cNvSpPr txBox="1"/>
+          <p:nvPr/>
+        </p:nvSpPr>
+        <p:spPr>
+          <a:xfrm>
+            <a:off x="731520" y="960120"/>
+            <a:ext cx="9144000" cy="320040"/>
+          </a:xfrm>
+          <a:prstGeom prst="rect">
+            <a:avLst/>
+          </a:prstGeom>
+          <a:noFill/>
+        </p:spPr>
+        <p:txBody>
+          <a:bodyPr wrap="none">
+            <a:spAutoFit/>
+          </a:bodyPr>
+          <a:lstStyle/>
           <a:p>
             <a:pPr>
-              <a:defRPr sz="1150">
-                <a:solidFill>
-                  <a:srgbClr val="F8FAFC"/>
-                </a:solidFill>
-              </a:defRPr>
-            </a:pPr>
-            <a:r>
-              <a:t>• Target Market: 30M+ restaurants, cafes, cloud kitchens, and bakeries in India.</a:t>
-            </a:r>
-            <a:br/>
-            <a:r>
-              <a:t>• Value Proposition: 70% cheaper than legacy POS (Petpooja/Toast), runs on any mobile/PC, zero hardware lock-in.</a:t>
-            </a:r>
-            <a:br/>
-            <a:r>
-              <a:t>• Live Traction: Production platform operational at dineflowai.duckdns.org.</a:t>
-            </a:r>
-            <a:br/>
-            <a:r>
-              <a:t>• High Scalability: Multi-tenant database supports thousands of restaurants simultaneously.</a:t>
-            </a:r>
-          </a:p>
-        </p:txBody>
-      </p:sp>
-      <p:sp>
-        <p:nvSpPr>
-          <p:cNvPr id="6" name="Rounded Rectangle 5"/>
+              <a:defRPr sz="1050" b="1">
+                <a:solidFill>
+                  <a:srgbClr val="4F46E5"/>
+                </a:solidFill>
+                <a:latin typeface="Calibri"/>
+              </a:defRPr>
+            </a:pPr>
+            <a:r>
+              <a:t>K. D. Polytechnic, Patan | Department of Computer Engineering | Minor Project (DI05000341) | Slide 16</a:t>
+            </a:r>
+          </a:p>
+        </p:txBody>
+      </p:sp>
+      <p:sp>
+        <p:nvSpPr>
+          <p:cNvPr id="8" name="Rounded Rectangle 7"/>
           <p:cNvSpPr/>
           <p:nvPr/>
         </p:nvSpPr>
         <p:spPr>
           <a:xfrm>
-            <a:off x="4389120" y="1554480"/>
+            <a:off x="914400" y="1554480"/>
             <a:ext cx="3291840" cy="4572000"/>
           </a:xfrm>
           <a:prstGeom prst="roundRect">
             <a:avLst/>
           </a:prstGeom>
           <a:solidFill>
-            <a:srgbClr val="1E293B"/>
+            <a:srgbClr val="F8FAFC"/>
           </a:solidFill>
           <a:ln>
             <a:solidFill>
-              <a:srgbClr val="6366F1"/>
+              <a:srgbClr val="E2E8F0"/>
             </a:solidFill>
           </a:ln>
         </p:spPr>
@@ -6945,72 +7938,75 @@
             <a:pPr algn="ctr">
               <a:defRPr b="1" sz="1350">
                 <a:solidFill>
-                  <a:srgbClr val="F59E0B"/>
-                </a:solidFill>
-              </a:defRPr>
-            </a:pPr>
-            <a:r>
-              <a:t>2. Revenue &amp; Pricing Model</a:t>
+                  <a:srgbClr val="0F172A"/>
+                </a:solidFill>
+                <a:latin typeface="Calibri"/>
+              </a:defRPr>
+            </a:pPr>
+            <a:r>
+              <a:t>1. Startup Venture Potential</a:t>
             </a:r>
           </a:p>
           <a:p>
             <a:pPr>
               <a:defRPr b="1" sz="1200">
                 <a:solidFill>
-                  <a:srgbClr val="10B981"/>
-                </a:solidFill>
-              </a:defRPr>
-            </a:pPr>
-            <a:r>
-              <a:t>Self-Sustaining SaaS</a:t>
+                  <a:srgbClr val="4F46E5"/>
+                </a:solidFill>
+                <a:latin typeface="Calibri"/>
+              </a:defRPr>
+            </a:pPr>
+            <a:r>
+              <a:t>DineFlow AI Pvt. Ltd.</a:t>
             </a:r>
           </a:p>
           <a:p>
             <a:pPr>
               <a:defRPr sz="1150">
                 <a:solidFill>
-                  <a:srgbClr val="F8FAFC"/>
-                </a:solidFill>
-              </a:defRPr>
-            </a:pPr>
-            <a:r>
-              <a:t>• Starter Plan: ₹ 499 / month (Single counter QSR &amp; cafes).</a:t>
+                  <a:srgbClr val="1E293B"/>
+                </a:solidFill>
+                <a:latin typeface="Calibri"/>
+              </a:defRPr>
+            </a:pPr>
+            <a:r>
+              <a:t>• Target Market: 30M+ restaurants, cafes, cloud kitchens, and bakeries in India.</a:t>
             </a:r>
             <a:br/>
             <a:r>
-              <a:t>• Pro Restaurant: ₹ 1,499 / month (Full KDS, inventory &amp; multi-table).</a:t>
+              <a:t>• Value Proposition: 70% cheaper than legacy POS (Petpooja/Toast), runs on any mobile/PC, zero hardware lock-in.</a:t>
             </a:r>
             <a:br/>
             <a:r>
-              <a:t>• Source Code Buyout: One-time commercial developer license.</a:t>
+              <a:t>• Live Traction: Production platform operational at dineflowai.duckdns.org.</a:t>
             </a:r>
             <a:br/>
             <a:r>
-              <a:t>• 100% Bootstrapped: Zero debt or external grant dependency; profitable from Day 1.</a:t>
-            </a:r>
-          </a:p>
-        </p:txBody>
-      </p:sp>
-      <p:sp>
-        <p:nvSpPr>
-          <p:cNvPr id="7" name="Rounded Rectangle 6"/>
+              <a:t>• High Scalability: Multi-tenant database supports thousands of restaurants simultaneously.</a:t>
+            </a:r>
+          </a:p>
+        </p:txBody>
+      </p:sp>
+      <p:sp>
+        <p:nvSpPr>
+          <p:cNvPr id="9" name="Rounded Rectangle 8"/>
           <p:cNvSpPr/>
           <p:nvPr/>
         </p:nvSpPr>
         <p:spPr>
           <a:xfrm>
-            <a:off x="7863840" y="1554480"/>
+            <a:off x="4389120" y="1554480"/>
             <a:ext cx="3291840" cy="4572000"/>
           </a:xfrm>
           <a:prstGeom prst="roundRect">
             <a:avLst/>
           </a:prstGeom>
           <a:solidFill>
-            <a:srgbClr val="1E293B"/>
+            <a:srgbClr val="F8FAFC"/>
           </a:solidFill>
           <a:ln>
             <a:solidFill>
-              <a:srgbClr val="6366F1"/>
+              <a:srgbClr val="E2E8F0"/>
             </a:solidFill>
           </a:ln>
         </p:spPr>
@@ -7035,32 +8031,128 @@
             <a:pPr algn="ctr">
               <a:defRPr b="1" sz="1350">
                 <a:solidFill>
-                  <a:srgbClr val="F59E0B"/>
-                </a:solidFill>
-              </a:defRPr>
-            </a:pPr>
-            <a:r>
-              <a:t>3. Intellectual Property (IP)</a:t>
+                  <a:srgbClr val="0F172A"/>
+                </a:solidFill>
+                <a:latin typeface="Calibri"/>
+              </a:defRPr>
+            </a:pPr>
+            <a:r>
+              <a:t>2. Revenue &amp; Pricing Model</a:t>
             </a:r>
           </a:p>
           <a:p>
             <a:pPr>
               <a:defRPr b="1" sz="1200">
                 <a:solidFill>
-                  <a:srgbClr val="10B981"/>
-                </a:solidFill>
-              </a:defRPr>
-            </a:pPr>
-            <a:r>
-              <a:t>Copyright &amp; Novelty</a:t>
+                  <a:srgbClr val="4F46E5"/>
+                </a:solidFill>
+                <a:latin typeface="Calibri"/>
+              </a:defRPr>
+            </a:pPr>
+            <a:r>
+              <a:t>Self-Sustaining SaaS</a:t>
             </a:r>
           </a:p>
           <a:p>
             <a:pPr>
               <a:defRPr sz="1150">
                 <a:solidFill>
-                  <a:srgbClr val="F8FAFC"/>
-                </a:solidFill>
+                  <a:srgbClr val="1E293B"/>
+                </a:solidFill>
+                <a:latin typeface="Calibri"/>
+              </a:defRPr>
+            </a:pPr>
+            <a:r>
+              <a:t>• Starter Plan: ₹ 499 / month (Single counter QSR &amp; cafes).</a:t>
+            </a:r>
+            <a:br/>
+            <a:r>
+              <a:t>• Pro Restaurant: ₹ 1,499 / month (Full KDS, inventory &amp; multi-table).</a:t>
+            </a:r>
+            <a:br/>
+            <a:r>
+              <a:t>• Source Code Buyout: One-time commercial developer license.</a:t>
+            </a:r>
+            <a:br/>
+            <a:r>
+              <a:t>• 100% Bootstrapped: Zero debt or external grant dependency; profitable from Day 1.</a:t>
+            </a:r>
+          </a:p>
+        </p:txBody>
+      </p:sp>
+      <p:sp>
+        <p:nvSpPr>
+          <p:cNvPr id="10" name="Rounded Rectangle 9"/>
+          <p:cNvSpPr/>
+          <p:nvPr/>
+        </p:nvSpPr>
+        <p:spPr>
+          <a:xfrm>
+            <a:off x="7863840" y="1554480"/>
+            <a:ext cx="3291840" cy="4572000"/>
+          </a:xfrm>
+          <a:prstGeom prst="roundRect">
+            <a:avLst/>
+          </a:prstGeom>
+          <a:solidFill>
+            <a:srgbClr val="F8FAFC"/>
+          </a:solidFill>
+          <a:ln>
+            <a:solidFill>
+              <a:srgbClr val="E2E8F0"/>
+            </a:solidFill>
+          </a:ln>
+        </p:spPr>
+        <p:style>
+          <a:lnRef idx="1">
+            <a:schemeClr val="accent1"/>
+          </a:lnRef>
+          <a:fillRef idx="3">
+            <a:schemeClr val="accent1"/>
+          </a:fillRef>
+          <a:effectRef idx="2">
+            <a:schemeClr val="accent1"/>
+          </a:effectRef>
+          <a:fontRef idx="minor">
+            <a:schemeClr val="lt1"/>
+          </a:fontRef>
+        </p:style>
+        <p:txBody>
+          <a:bodyPr rtlCol="0" anchor="ctr" wrap="square"/>
+          <a:lstStyle/>
+          <a:p>
+            <a:pPr algn="ctr">
+              <a:defRPr b="1" sz="1350">
+                <a:solidFill>
+                  <a:srgbClr val="0F172A"/>
+                </a:solidFill>
+                <a:latin typeface="Calibri"/>
+              </a:defRPr>
+            </a:pPr>
+            <a:r>
+              <a:t>3. Intellectual Property (IP)</a:t>
+            </a:r>
+          </a:p>
+          <a:p>
+            <a:pPr>
+              <a:defRPr b="1" sz="1200">
+                <a:solidFill>
+                  <a:srgbClr val="4F46E5"/>
+                </a:solidFill>
+                <a:latin typeface="Calibri"/>
+              </a:defRPr>
+            </a:pPr>
+            <a:r>
+              <a:t>Copyright &amp; Novelty</a:t>
+            </a:r>
+          </a:p>
+          <a:p>
+            <a:pPr>
+              <a:defRPr sz="1150">
+                <a:solidFill>
+                  <a:srgbClr val="1E293B"/>
+                </a:solidFill>
+                <a:latin typeface="Calibri"/>
               </a:defRPr>
             </a:pPr>
             <a:r>
@@ -7110,7 +8202,7 @@
             <a:avLst/>
           </a:prstGeom>
           <a:solidFill>
-            <a:srgbClr val="0F172A"/>
+            <a:srgbClr val="FFFFFF"/>
           </a:solidFill>
           <a:ln>
             <a:noFill/>
@@ -7140,192 +8232,23 @@
       </p:sp>
       <p:sp>
         <p:nvSpPr>
-          <p:cNvPr id="3" name="TextBox 2"/>
-          <p:cNvSpPr txBox="1"/>
-          <p:nvPr/>
-        </p:nvSpPr>
-        <p:spPr>
-          <a:xfrm>
-            <a:off x="731520" y="365760"/>
-            <a:ext cx="10698480" cy="822960"/>
+          <p:cNvPr id="3" name="Rectangle 2"/>
+          <p:cNvSpPr/>
+          <p:nvPr/>
+        </p:nvSpPr>
+        <p:spPr>
+          <a:xfrm>
+            <a:off x="0" y="0"/>
+            <a:ext cx="12191695" cy="73152"/>
           </a:xfrm>
           <a:prstGeom prst="rect">
             <a:avLst/>
           </a:prstGeom>
-          <a:noFill/>
-        </p:spPr>
-        <p:txBody>
-          <a:bodyPr wrap="square">
-            <a:spAutoFit/>
-          </a:bodyPr>
-          <a:lstStyle/>
-          <a:p>
-            <a:pPr>
-              <a:defRPr sz="2600" b="1">
-                <a:solidFill>
-                  <a:srgbClr val="F8FAFC"/>
-                </a:solidFill>
-                <a:latin typeface="Segoe UI"/>
-              </a:defRPr>
-            </a:pPr>
-            <a:r>
-              <a:t>References &amp; Open Discussion</a:t>
-            </a:r>
-          </a:p>
-        </p:txBody>
-      </p:sp>
-      <p:sp>
-        <p:nvSpPr>
-          <p:cNvPr id="4" name="TextBox 3"/>
-          <p:cNvSpPr txBox="1"/>
-          <p:nvPr/>
-        </p:nvSpPr>
-        <p:spPr>
-          <a:xfrm>
-            <a:off x="8412480" y="411480"/>
-            <a:ext cx="3017520" cy="365760"/>
-          </a:xfrm>
-          <a:prstGeom prst="rect">
-            <a:avLst/>
-          </a:prstGeom>
-          <a:noFill/>
-        </p:spPr>
-        <p:txBody>
-          <a:bodyPr wrap="none">
-            <a:spAutoFit/>
-          </a:bodyPr>
-          <a:lstStyle/>
-          <a:p>
-            <a:pPr algn="r">
-              <a:defRPr sz="1100" b="1">
-                <a:solidFill>
-                  <a:srgbClr val="6366F1"/>
-                </a:solidFill>
-                <a:latin typeface="Segoe UI"/>
-              </a:defRPr>
-            </a:pPr>
-            <a:r>
-              <a:t>Minor Project | DI05000341 | Slide 17</a:t>
-            </a:r>
-          </a:p>
-        </p:txBody>
-      </p:sp>
-      <p:sp>
-        <p:nvSpPr>
-          <p:cNvPr id="5" name="TextBox 4"/>
-          <p:cNvSpPr txBox="1"/>
-          <p:nvPr/>
-        </p:nvSpPr>
-        <p:spPr>
-          <a:xfrm>
-            <a:off x="914400" y="1463040"/>
-            <a:ext cx="5486400" cy="4754880"/>
-          </a:xfrm>
-          <a:prstGeom prst="rect">
-            <a:avLst/>
-          </a:prstGeom>
-          <a:noFill/>
-        </p:spPr>
-        <p:txBody>
-          <a:bodyPr wrap="square">
-            <a:spAutoFit/>
-          </a:bodyPr>
-          <a:lstStyle/>
-          <a:p>
-            <a:pPr>
-              <a:defRPr b="1" sz="1300">
-                <a:solidFill>
-                  <a:srgbClr val="6366F1"/>
-                </a:solidFill>
-              </a:defRPr>
-            </a:pPr>
-            <a:r>
-              <a:t>ACADEMIC REFERENCES (APA 7th Edition):</a:t>
-            </a:r>
-          </a:p>
-          <a:p>
-            <a:pPr>
-              <a:defRPr sz="1050">
-                <a:solidFill>
-                  <a:srgbClr val="F8FAFC"/>
-                </a:solidFill>
-              </a:defRPr>
-            </a:pPr>
-            <a:r>
-              <a:t>• Gujarat Technological University. (2026). Diploma Engineering Minor Project Syllabus (Subject Code: DI05000341). GTU Academic Board.</a:t>
-            </a:r>
-          </a:p>
-          <a:p>
-            <a:pPr>
-              <a:defRPr sz="1050">
-                <a:solidFill>
-                  <a:srgbClr val="F8FAFC"/>
-                </a:solidFill>
-              </a:defRPr>
-            </a:pPr>
-            <a:r>
-              <a:t>• National Restaurant Association of India. (2024). India Food Services Report: Technology Adoption in Hospitality Sector. NRAI Publications.</a:t>
-            </a:r>
-          </a:p>
-          <a:p>
-            <a:pPr>
-              <a:defRPr sz="1050">
-                <a:solidFill>
-                  <a:srgbClr val="F8FAFC"/>
-                </a:solidFill>
-              </a:defRPr>
-            </a:pPr>
-            <a:r>
-              <a:t>• Otwell, T. (2024). Laravel 11: The PHP Framework for Web Artisans. Taylor Otwell &amp; Laravel Core Team.</a:t>
-            </a:r>
-          </a:p>
-          <a:p>
-            <a:pPr>
-              <a:defRPr sz="1050">
-                <a:solidFill>
-                  <a:srgbClr val="F8FAFC"/>
-                </a:solidFill>
-              </a:defRPr>
-            </a:pPr>
-            <a:r>
-              <a:t>• Fielding, R. T. (2000). Architectural Styles and the Design of Network-based Software Architectures. University of California, Irvine.</a:t>
-            </a:r>
-          </a:p>
-          <a:p>
-            <a:pPr>
-              <a:defRPr sz="1050">
-                <a:solidFill>
-                  <a:srgbClr val="F8FAFC"/>
-                </a:solidFill>
-              </a:defRPr>
-            </a:pPr>
-            <a:r>
-              <a:t>• World Wide Web Consortium. (2023). Progressive Web Apps Architecture &amp; Service Workers Specification. W3C Recommendation.</a:t>
-            </a:r>
-          </a:p>
-        </p:txBody>
-      </p:sp>
-      <p:sp>
-        <p:nvSpPr>
-          <p:cNvPr id="6" name="Rounded Rectangle 5"/>
-          <p:cNvSpPr/>
-          <p:nvPr/>
-        </p:nvSpPr>
-        <p:spPr>
-          <a:xfrm>
-            <a:off x="6766560" y="1463040"/>
-            <a:ext cx="4480560" cy="4572000"/>
-          </a:xfrm>
-          <a:prstGeom prst="roundRect">
-            <a:avLst/>
-          </a:prstGeom>
           <a:solidFill>
-            <a:srgbClr val="1E293B"/>
+            <a:srgbClr val="4F46E5"/>
           </a:solidFill>
           <a:ln>
-            <a:solidFill>
-              <a:srgbClr val="10B981"/>
-            </a:solidFill>
+            <a:noFill/>
           </a:ln>
         </p:spPr>
         <p:style>
@@ -7343,14 +8266,281 @@
           </a:fontRef>
         </p:style>
         <p:txBody>
+          <a:bodyPr rtlCol="0" anchor="ctr"/>
+          <a:lstStyle/>
+          <a:p>
+            <a:pPr algn="ctr"/>
+          </a:p>
+        </p:txBody>
+      </p:sp>
+      <p:sp>
+        <p:nvSpPr>
+          <p:cNvPr id="4" name="TextBox 3"/>
+          <p:cNvSpPr txBox="1"/>
+          <p:nvPr/>
+        </p:nvSpPr>
+        <p:spPr>
+          <a:xfrm>
+            <a:off x="731520" y="320040"/>
+            <a:ext cx="7772400" cy="777240"/>
+          </a:xfrm>
+          <a:prstGeom prst="rect">
+            <a:avLst/>
+          </a:prstGeom>
+          <a:noFill/>
+        </p:spPr>
+        <p:txBody>
+          <a:bodyPr wrap="square">
+            <a:spAutoFit/>
+          </a:bodyPr>
+          <a:lstStyle/>
+          <a:p>
+            <a:pPr>
+              <a:defRPr sz="2400" b="1">
+                <a:solidFill>
+                  <a:srgbClr val="0F172A"/>
+                </a:solidFill>
+                <a:latin typeface="Calibri"/>
+              </a:defRPr>
+            </a:pPr>
+            <a:r>
+              <a:t>References and Thank You</a:t>
+            </a:r>
+          </a:p>
+        </p:txBody>
+      </p:sp>
+      <p:pic>
+        <p:nvPicPr>
+          <p:cNvPr id="5" name="Picture 4" descr="gtu_logo.png"/>
+          <p:cNvPicPr>
+            <a:picLocks noChangeAspect="1"/>
+          </p:cNvPicPr>
+          <p:nvPr/>
+        </p:nvPicPr>
+        <p:blipFill>
+          <a:blip r:embed="rId2"/>
+          <a:stretch>
+            <a:fillRect/>
+          </a:stretch>
+        </p:blipFill>
+        <p:spPr>
+          <a:xfrm>
+            <a:off x="10241280" y="182880"/>
+            <a:ext cx="731520" cy="822960"/>
+          </a:xfrm>
+          <a:prstGeom prst="rect">
+            <a:avLst/>
+          </a:prstGeom>
+        </p:spPr>
+      </p:pic>
+      <p:pic>
+        <p:nvPicPr>
+          <p:cNvPr id="6" name="Picture 5" descr="kdp_patan_logo.png"/>
+          <p:cNvPicPr>
+            <a:picLocks noChangeAspect="1"/>
+          </p:cNvPicPr>
+          <p:nvPr/>
+        </p:nvPicPr>
+        <p:blipFill>
+          <a:blip r:embed="rId3"/>
+          <a:stretch>
+            <a:fillRect/>
+          </a:stretch>
+        </p:blipFill>
+        <p:spPr>
+          <a:xfrm>
+            <a:off x="11155680" y="182880"/>
+            <a:ext cx="777240" cy="777240"/>
+          </a:xfrm>
+          <a:prstGeom prst="rect">
+            <a:avLst/>
+          </a:prstGeom>
+        </p:spPr>
+      </p:pic>
+      <p:sp>
+        <p:nvSpPr>
+          <p:cNvPr id="7" name="TextBox 6"/>
+          <p:cNvSpPr txBox="1"/>
+          <p:nvPr/>
+        </p:nvSpPr>
+        <p:spPr>
+          <a:xfrm>
+            <a:off x="731520" y="960120"/>
+            <a:ext cx="9144000" cy="320040"/>
+          </a:xfrm>
+          <a:prstGeom prst="rect">
+            <a:avLst/>
+          </a:prstGeom>
+          <a:noFill/>
+        </p:spPr>
+        <p:txBody>
+          <a:bodyPr wrap="none">
+            <a:spAutoFit/>
+          </a:bodyPr>
+          <a:lstStyle/>
+          <a:p>
+            <a:pPr>
+              <a:defRPr sz="1050" b="1">
+                <a:solidFill>
+                  <a:srgbClr val="4F46E5"/>
+                </a:solidFill>
+                <a:latin typeface="Calibri"/>
+              </a:defRPr>
+            </a:pPr>
+            <a:r>
+              <a:t>K. D. Polytechnic, Patan | Department of Computer Engineering | Minor Project (DI05000341) | Slide 17</a:t>
+            </a:r>
+          </a:p>
+        </p:txBody>
+      </p:sp>
+      <p:sp>
+        <p:nvSpPr>
+          <p:cNvPr id="8" name="TextBox 7"/>
+          <p:cNvSpPr txBox="1"/>
+          <p:nvPr/>
+        </p:nvSpPr>
+        <p:spPr>
+          <a:xfrm>
+            <a:off x="914400" y="1463040"/>
+            <a:ext cx="5486400" cy="4754880"/>
+          </a:xfrm>
+          <a:prstGeom prst="rect">
+            <a:avLst/>
+          </a:prstGeom>
+          <a:noFill/>
+        </p:spPr>
+        <p:txBody>
+          <a:bodyPr wrap="square">
+            <a:spAutoFit/>
+          </a:bodyPr>
+          <a:lstStyle/>
+          <a:p>
+            <a:pPr>
+              <a:defRPr b="1" sz="1300">
+                <a:solidFill>
+                  <a:srgbClr val="4F46E5"/>
+                </a:solidFill>
+                <a:latin typeface="Calibri"/>
+              </a:defRPr>
+            </a:pPr>
+            <a:r>
+              <a:t>ACADEMIC REFERENCES (APA 7th Edition):</a:t>
+            </a:r>
+          </a:p>
+          <a:p>
+            <a:pPr>
+              <a:defRPr sz="1050">
+                <a:solidFill>
+                  <a:srgbClr val="1E293B"/>
+                </a:solidFill>
+                <a:latin typeface="Calibri"/>
+              </a:defRPr>
+            </a:pPr>
+            <a:r>
+              <a:t>• Gujarat Technological University. (2026). Diploma Engineering Minor Project Syllabus (Subject Code: DI05000341). GTU Academic Board.</a:t>
+            </a:r>
+          </a:p>
+          <a:p>
+            <a:pPr>
+              <a:defRPr sz="1050">
+                <a:solidFill>
+                  <a:srgbClr val="1E293B"/>
+                </a:solidFill>
+                <a:latin typeface="Calibri"/>
+              </a:defRPr>
+            </a:pPr>
+            <a:r>
+              <a:t>• National Restaurant Association of India. (2024). India Food Services Report: Technology Adoption in Hospitality Sector. NRAI Publications.</a:t>
+            </a:r>
+          </a:p>
+          <a:p>
+            <a:pPr>
+              <a:defRPr sz="1050">
+                <a:solidFill>
+                  <a:srgbClr val="1E293B"/>
+                </a:solidFill>
+                <a:latin typeface="Calibri"/>
+              </a:defRPr>
+            </a:pPr>
+            <a:r>
+              <a:t>• Otwell, T. (2024). Laravel 11: The PHP Framework for Web Artisans. Taylor Otwell &amp; Laravel Core Team.</a:t>
+            </a:r>
+          </a:p>
+          <a:p>
+            <a:pPr>
+              <a:defRPr sz="1050">
+                <a:solidFill>
+                  <a:srgbClr val="1E293B"/>
+                </a:solidFill>
+                <a:latin typeface="Calibri"/>
+              </a:defRPr>
+            </a:pPr>
+            <a:r>
+              <a:t>• Fielding, R. T. (2000). Architectural Styles and the Design of Network-based Software Architectures. University of California, Irvine.</a:t>
+            </a:r>
+          </a:p>
+          <a:p>
+            <a:pPr>
+              <a:defRPr sz="1050">
+                <a:solidFill>
+                  <a:srgbClr val="1E293B"/>
+                </a:solidFill>
+                <a:latin typeface="Calibri"/>
+              </a:defRPr>
+            </a:pPr>
+            <a:r>
+              <a:t>• World Wide Web Consortium. (2023). Progressive Web Apps Architecture &amp; Service Workers Specification. W3C Recommendation.</a:t>
+            </a:r>
+          </a:p>
+        </p:txBody>
+      </p:sp>
+      <p:sp>
+        <p:nvSpPr>
+          <p:cNvPr id="9" name="Rounded Rectangle 8"/>
+          <p:cNvSpPr/>
+          <p:nvPr/>
+        </p:nvSpPr>
+        <p:spPr>
+          <a:xfrm>
+            <a:off x="6766560" y="1463040"/>
+            <a:ext cx="4480560" cy="4572000"/>
+          </a:xfrm>
+          <a:prstGeom prst="roundRect">
+            <a:avLst/>
+          </a:prstGeom>
+          <a:solidFill>
+            <a:srgbClr val="F8FAFC"/>
+          </a:solidFill>
+          <a:ln w="25400">
+            <a:solidFill>
+              <a:srgbClr val="4F46E5"/>
+            </a:solidFill>
+          </a:ln>
+        </p:spPr>
+        <p:style>
+          <a:lnRef idx="1">
+            <a:schemeClr val="accent1"/>
+          </a:lnRef>
+          <a:fillRef idx="3">
+            <a:schemeClr val="accent1"/>
+          </a:fillRef>
+          <a:effectRef idx="2">
+            <a:schemeClr val="accent1"/>
+          </a:effectRef>
+          <a:fontRef idx="minor">
+            <a:schemeClr val="lt1"/>
+          </a:fontRef>
+        </p:style>
+        <p:txBody>
           <a:bodyPr rtlCol="0" anchor="ctr" wrap="square"/>
           <a:lstStyle/>
           <a:p>
             <a:pPr algn="ctr">
-              <a:defRPr b="1" sz="3400">
-                <a:solidFill>
-                  <a:srgbClr val="F59E0B"/>
-                </a:solidFill>
+              <a:defRPr b="1" sz="3200">
+                <a:solidFill>
+                  <a:srgbClr val="4F46E5"/>
+                </a:solidFill>
+                <a:latin typeface="Calibri"/>
               </a:defRPr>
             </a:pPr>
             <a:br/>
@@ -7360,10 +8550,11 @@
           </a:p>
           <a:p>
             <a:pPr algn="ctr">
-              <a:defRPr b="1" sz="1500">
-                <a:solidFill>
-                  <a:srgbClr val="F8FAFC"/>
-                </a:solidFill>
+              <a:defRPr b="1" sz="1400">
+                <a:solidFill>
+                  <a:srgbClr val="0F172A"/>
+                </a:solidFill>
+                <a:latin typeface="Calibri"/>
               </a:defRPr>
             </a:pPr>
             <a:r>
@@ -7373,22 +8564,24 @@
           </a:p>
           <a:p>
             <a:pPr algn="ctr">
-              <a:defRPr sz="1150">
-                <a:solidFill>
-                  <a:srgbClr val="94A3B8"/>
-                </a:solidFill>
-              </a:defRPr>
-            </a:pPr>
-            <a:r>
-              <a:t>Project Lead: Patel Shubh Maheshkumar</a:t>
+              <a:defRPr sz="1100">
+                <a:solidFill>
+                  <a:srgbClr val="64748B"/>
+                </a:solidFill>
+                <a:latin typeface="Calibri"/>
+              </a:defRPr>
+            </a:pPr>
+            <a:r>
+              <a:t>Project Lead: PATEL SHUBH MAHESHKUMAR</a:t>
             </a:r>
           </a:p>
           <a:p>
             <a:pPr algn="ctr">
-              <a:defRPr sz="1150">
-                <a:solidFill>
-                  <a:srgbClr val="94A3B8"/>
-                </a:solidFill>
+              <a:defRPr sz="1100">
+                <a:solidFill>
+                  <a:srgbClr val="64748B"/>
+                </a:solidFill>
+                <a:latin typeface="Calibri"/>
               </a:defRPr>
             </a:pPr>
             <a:r>
@@ -7397,10 +8590,11 @@
           </a:p>
           <a:p>
             <a:pPr algn="ctr">
-              <a:defRPr sz="1150">
-                <a:solidFill>
-                  <a:srgbClr val="94A3B8"/>
-                </a:solidFill>
+              <a:defRPr sz="1100">
+                <a:solidFill>
+                  <a:srgbClr val="64748B"/>
+                </a:solidFill>
+                <a:latin typeface="Calibri"/>
               </a:defRPr>
             </a:pPr>
             <a:r>
@@ -7409,10 +8603,11 @@
           </a:p>
           <a:p>
             <a:pPr algn="ctr">
-              <a:defRPr sz="1150">
-                <a:solidFill>
-                  <a:srgbClr val="94A3B8"/>
-                </a:solidFill>
+              <a:defRPr sz="1100">
+                <a:solidFill>
+                  <a:srgbClr val="64748B"/>
+                </a:solidFill>
+                <a:latin typeface="Calibri"/>
               </a:defRPr>
             </a:pPr>
             <a:r>
@@ -7421,10 +8616,11 @@
           </a:p>
           <a:p>
             <a:pPr algn="ctr">
-              <a:defRPr sz="1150">
-                <a:solidFill>
-                  <a:srgbClr val="94A3B8"/>
-                </a:solidFill>
+              <a:defRPr sz="1100">
+                <a:solidFill>
+                  <a:srgbClr val="64748B"/>
+                </a:solidFill>
+                <a:latin typeface="Calibri"/>
               </a:defRPr>
             </a:pPr>
             <a:r>
@@ -7433,26 +8629,41 @@
           </a:p>
           <a:p>
             <a:pPr algn="ctr">
-              <a:defRPr sz="1150">
-                <a:solidFill>
-                  <a:srgbClr val="94A3B8"/>
-                </a:solidFill>
-              </a:defRPr>
-            </a:pPr>
-            <a:r>
-              <a:t>Head of Dept: Dr. Chirag D. Patel</a:t>
+              <a:defRPr sz="1100">
+                <a:solidFill>
+                  <a:srgbClr val="64748B"/>
+                </a:solidFill>
+                <a:latin typeface="Calibri"/>
+              </a:defRPr>
+            </a:pPr>
+            <a:r>
+              <a:t>Head of Department: Dr. Chirag D. Patel</a:t>
             </a:r>
           </a:p>
           <a:p>
             <a:pPr algn="ctr">
-              <a:defRPr sz="1150">
-                <a:solidFill>
-                  <a:srgbClr val="94A3B8"/>
-                </a:solidFill>
-              </a:defRPr>
-            </a:pPr>
-            <a:r>
-              <a:t>Live Project: https://dineflowai.duckdns.org</a:t>
+              <a:defRPr sz="1100">
+                <a:solidFill>
+                  <a:srgbClr val="64748B"/>
+                </a:solidFill>
+                <a:latin typeface="Calibri"/>
+              </a:defRPr>
+            </a:pPr>
+            <a:r>
+              <a:t>Principal: H. C. Parmar</a:t>
+            </a:r>
+          </a:p>
+          <a:p>
+            <a:pPr algn="ctr">
+              <a:defRPr sz="1100">
+                <a:solidFill>
+                  <a:srgbClr val="64748B"/>
+                </a:solidFill>
+                <a:latin typeface="Calibri"/>
+              </a:defRPr>
+            </a:pPr>
+            <a:r>
+              <a:t>Live Deployment: https://dineflowai.duckdns.org</a:t>
             </a:r>
           </a:p>
         </p:txBody>
@@ -7490,7 +8701,7 @@
             <a:avLst/>
           </a:prstGeom>
           <a:solidFill>
-            <a:srgbClr val="0F172A"/>
+            <a:srgbClr val="FFFFFF"/>
           </a:solidFill>
           <a:ln>
             <a:noFill/>
@@ -7520,14 +8731,57 @@
       </p:sp>
       <p:sp>
         <p:nvSpPr>
-          <p:cNvPr id="3" name="TextBox 2"/>
+          <p:cNvPr id="3" name="Rectangle 2"/>
+          <p:cNvSpPr/>
+          <p:nvPr/>
+        </p:nvSpPr>
+        <p:spPr>
+          <a:xfrm>
+            <a:off x="0" y="0"/>
+            <a:ext cx="12191695" cy="73152"/>
+          </a:xfrm>
+          <a:prstGeom prst="rect">
+            <a:avLst/>
+          </a:prstGeom>
+          <a:solidFill>
+            <a:srgbClr val="4F46E5"/>
+          </a:solidFill>
+          <a:ln>
+            <a:noFill/>
+          </a:ln>
+        </p:spPr>
+        <p:style>
+          <a:lnRef idx="1">
+            <a:schemeClr val="accent1"/>
+          </a:lnRef>
+          <a:fillRef idx="3">
+            <a:schemeClr val="accent1"/>
+          </a:fillRef>
+          <a:effectRef idx="2">
+            <a:schemeClr val="accent1"/>
+          </a:effectRef>
+          <a:fontRef idx="minor">
+            <a:schemeClr val="lt1"/>
+          </a:fontRef>
+        </p:style>
+        <p:txBody>
+          <a:bodyPr rtlCol="0" anchor="ctr"/>
+          <a:lstStyle/>
+          <a:p>
+            <a:pPr algn="ctr"/>
+          </a:p>
+        </p:txBody>
+      </p:sp>
+      <p:sp>
+        <p:nvSpPr>
+          <p:cNvPr id="4" name="TextBox 3"/>
           <p:cNvSpPr txBox="1"/>
           <p:nvPr/>
         </p:nvSpPr>
         <p:spPr>
           <a:xfrm>
-            <a:off x="731520" y="365760"/>
-            <a:ext cx="10698480" cy="822960"/>
+            <a:off x="731520" y="320040"/>
+            <a:ext cx="7772400" cy="777240"/>
           </a:xfrm>
           <a:prstGeom prst="rect">
             <a:avLst/>
@@ -7541,11 +8795,11 @@
           <a:lstStyle/>
           <a:p>
             <a:pPr>
-              <a:defRPr sz="2600" b="1">
-                <a:solidFill>
-                  <a:srgbClr val="F8FAFC"/>
-                </a:solidFill>
-                <a:latin typeface="Segoe UI"/>
+              <a:defRPr sz="2400" b="1">
+                <a:solidFill>
+                  <a:srgbClr val="0F172A"/>
+                </a:solidFill>
+                <a:latin typeface="Calibri"/>
               </a:defRPr>
             </a:pPr>
             <a:r>
@@ -7554,16 +8808,64 @@
           </a:p>
         </p:txBody>
       </p:sp>
-      <p:sp>
-        <p:nvSpPr>
-          <p:cNvPr id="4" name="TextBox 3"/>
+      <p:pic>
+        <p:nvPicPr>
+          <p:cNvPr id="5" name="Picture 4" descr="gtu_logo.png"/>
+          <p:cNvPicPr>
+            <a:picLocks noChangeAspect="1"/>
+          </p:cNvPicPr>
+          <p:nvPr/>
+        </p:nvPicPr>
+        <p:blipFill>
+          <a:blip r:embed="rId2"/>
+          <a:stretch>
+            <a:fillRect/>
+          </a:stretch>
+        </p:blipFill>
+        <p:spPr>
+          <a:xfrm>
+            <a:off x="10241280" y="182880"/>
+            <a:ext cx="731520" cy="822960"/>
+          </a:xfrm>
+          <a:prstGeom prst="rect">
+            <a:avLst/>
+          </a:prstGeom>
+        </p:spPr>
+      </p:pic>
+      <p:pic>
+        <p:nvPicPr>
+          <p:cNvPr id="6" name="Picture 5" descr="kdp_patan_logo.png"/>
+          <p:cNvPicPr>
+            <a:picLocks noChangeAspect="1"/>
+          </p:cNvPicPr>
+          <p:nvPr/>
+        </p:nvPicPr>
+        <p:blipFill>
+          <a:blip r:embed="rId3"/>
+          <a:stretch>
+            <a:fillRect/>
+          </a:stretch>
+        </p:blipFill>
+        <p:spPr>
+          <a:xfrm>
+            <a:off x="11155680" y="182880"/>
+            <a:ext cx="777240" cy="777240"/>
+          </a:xfrm>
+          <a:prstGeom prst="rect">
+            <a:avLst/>
+          </a:prstGeom>
+        </p:spPr>
+      </p:pic>
+      <p:sp>
+        <p:nvSpPr>
+          <p:cNvPr id="7" name="TextBox 6"/>
           <p:cNvSpPr txBox="1"/>
           <p:nvPr/>
         </p:nvSpPr>
         <p:spPr>
           <a:xfrm>
-            <a:off x="8412480" y="411480"/>
-            <a:ext cx="3017520" cy="365760"/>
+            <a:off x="731520" y="960120"/>
+            <a:ext cx="9144000" cy="320040"/>
           </a:xfrm>
           <a:prstGeom prst="rect">
             <a:avLst/>
@@ -7576,30 +8878,30 @@
           </a:bodyPr>
           <a:lstStyle/>
           <a:p>
-            <a:pPr algn="r">
-              <a:defRPr sz="1100" b="1">
-                <a:solidFill>
-                  <a:srgbClr val="6366F1"/>
-                </a:solidFill>
-                <a:latin typeface="Segoe UI"/>
-              </a:defRPr>
-            </a:pPr>
-            <a:r>
-              <a:t>Minor Project | DI05000341 | Slide 2</a:t>
-            </a:r>
-          </a:p>
-        </p:txBody>
-      </p:sp>
-      <p:sp>
-        <p:nvSpPr>
-          <p:cNvPr id="5" name="TextBox 4"/>
+            <a:pPr>
+              <a:defRPr sz="1050" b="1">
+                <a:solidFill>
+                  <a:srgbClr val="4F46E5"/>
+                </a:solidFill>
+                <a:latin typeface="Calibri"/>
+              </a:defRPr>
+            </a:pPr>
+            <a:r>
+              <a:t>K. D. Polytechnic, Patan | Department of Computer Engineering | Minor Project (DI05000341) | Slide 2</a:t>
+            </a:r>
+          </a:p>
+        </p:txBody>
+      </p:sp>
+      <p:sp>
+        <p:nvSpPr>
+          <p:cNvPr id="8" name="TextBox 7"/>
           <p:cNvSpPr txBox="1"/>
           <p:nvPr/>
         </p:nvSpPr>
         <p:spPr>
           <a:xfrm>
             <a:off x="914400" y="1463040"/>
-            <a:ext cx="10332720" cy="4754880"/>
+            <a:ext cx="10332720" cy="4937760"/>
           </a:xfrm>
           <a:prstGeom prst="rect">
             <a:avLst/>
@@ -7614,10 +8916,11 @@
           <a:p/>
           <a:p>
             <a:pPr>
-              <a:defRPr b="1" sz="1400">
-                <a:solidFill>
-                  <a:srgbClr val="6366F1"/>
-                </a:solidFill>
+              <a:defRPr b="1" sz="1350">
+                <a:solidFill>
+                  <a:srgbClr val="4F46E5"/>
+                </a:solidFill>
+                <a:latin typeface="Calibri"/>
               </a:defRPr>
             </a:pPr>
             <a:r>
@@ -7626,22 +8929,24 @@
           </a:p>
           <a:p>
             <a:pPr>
-              <a:defRPr sz="1150">
-                <a:solidFill>
-                  <a:srgbClr val="94A3B8"/>
-                </a:solidFill>
-              </a:defRPr>
-            </a:pPr>
-            <a:r>
-              <a:t>      Peak-hour bottleneck, food wastage, and project targets</a:t>
+              <a:defRPr sz="1100">
+                <a:solidFill>
+                  <a:srgbClr val="64748B"/>
+                </a:solidFill>
+                <a:latin typeface="Calibri"/>
+              </a:defRPr>
+            </a:pPr>
+            <a:r>
+              <a:t>      Peak-hour restaurant bottlenecks, order inaccuracies, and tangible targets</a:t>
             </a:r>
           </a:p>
           <a:p>
             <a:pPr>
-              <a:defRPr b="1" sz="1400">
-                <a:solidFill>
-                  <a:srgbClr val="6366F1"/>
-                </a:solidFill>
+              <a:defRPr b="1" sz="1350">
+                <a:solidFill>
+                  <a:srgbClr val="4F46E5"/>
+                </a:solidFill>
+                <a:latin typeface="Calibri"/>
               </a:defRPr>
             </a:pPr>
             <a:r>
@@ -7650,46 +8955,50 @@
           </a:p>
           <a:p>
             <a:pPr>
-              <a:defRPr sz="1150">
-                <a:solidFill>
-                  <a:srgbClr val="94A3B8"/>
-                </a:solidFill>
-              </a:defRPr>
-            </a:pPr>
-            <a:r>
-              <a:t>      Evaluation of Petpooja, Toast POS, POSist &amp; open-source solutions</a:t>
+              <a:defRPr sz="1100">
+                <a:solidFill>
+                  <a:srgbClr val="64748B"/>
+                </a:solidFill>
+                <a:latin typeface="Calibri"/>
+              </a:defRPr>
+            </a:pPr>
+            <a:r>
+              <a:t>      Evaluation of Petpooja, Toast POS, POSist &amp; limitations of existing tools</a:t>
             </a:r>
           </a:p>
           <a:p>
             <a:pPr>
-              <a:defRPr b="1" sz="1400">
-                <a:solidFill>
-                  <a:srgbClr val="6366F1"/>
-                </a:solidFill>
-              </a:defRPr>
-            </a:pPr>
-            <a:r>
-              <a:t>[3]  Alternative Solutions &amp; Selection Justification</a:t>
+              <a:defRPr b="1" sz="1350">
+                <a:solidFill>
+                  <a:srgbClr val="4F46E5"/>
+                </a:solidFill>
+                <a:latin typeface="Calibri"/>
+              </a:defRPr>
+            </a:pPr>
+            <a:r>
+              <a:t>[3]  Alternative Solutions &amp; Architecture Selection</a:t>
             </a:r>
           </a:p>
           <a:p>
             <a:pPr>
-              <a:defRPr sz="1150">
-                <a:solidFill>
-                  <a:srgbClr val="94A3B8"/>
-                </a:solidFill>
-              </a:defRPr>
-            </a:pPr>
-            <a:r>
-              <a:t>      Desktop vs. Hardware Terminal vs. Modern PWA Cloud Architecture</a:t>
+              <a:defRPr sz="1100">
+                <a:solidFill>
+                  <a:srgbClr val="64748B"/>
+                </a:solidFill>
+                <a:latin typeface="Calibri"/>
+              </a:defRPr>
+            </a:pPr>
+            <a:r>
+              <a:t>      Desktop App vs. Proprietary Hardware vs. Modern Cloud PWA Paradigm</a:t>
             </a:r>
           </a:p>
           <a:p>
             <a:pPr>
-              <a:defRPr b="1" sz="1400">
-                <a:solidFill>
-                  <a:srgbClr val="6366F1"/>
-                </a:solidFill>
+              <a:defRPr b="1" sz="1350">
+                <a:solidFill>
+                  <a:srgbClr val="4F46E5"/>
+                </a:solidFill>
+                <a:latin typeface="Calibri"/>
               </a:defRPr>
             </a:pPr>
             <a:r>
@@ -7698,46 +9007,50 @@
           </a:p>
           <a:p>
             <a:pPr>
-              <a:defRPr sz="1150">
-                <a:solidFill>
-                  <a:srgbClr val="94A3B8"/>
-                </a:solidFill>
-              </a:defRPr>
-            </a:pPr>
-            <a:r>
-              <a:t>      Block diagrams, database schema, and transaction flowcharts</a:t>
+              <a:defRPr sz="1100">
+                <a:solidFill>
+                  <a:srgbClr val="64748B"/>
+                </a:solidFill>
+                <a:latin typeface="Calibri"/>
+              </a:defRPr>
+            </a:pPr>
+            <a:r>
+              <a:t>      Block diagram, layered cloud architecture, and transaction flowcharts</a:t>
             </a:r>
           </a:p>
           <a:p>
             <a:pPr>
-              <a:defRPr b="1" sz="1400">
-                <a:solidFill>
-                  <a:srgbClr val="6366F1"/>
-                </a:solidFill>
-              </a:defRPr>
-            </a:pPr>
-            <a:r>
-              <a:t>[5]  Implementation, Hardware Integration &amp; 14-Week Plan</a:t>
+              <a:defRPr b="1" sz="1350">
+                <a:solidFill>
+                  <a:srgbClr val="4F46E5"/>
+                </a:solidFill>
+                <a:latin typeface="Calibri"/>
+              </a:defRPr>
+            </a:pPr>
+            <a:r>
+              <a:t>[5]  Implementation, Hardware Integration &amp; Work Plan</a:t>
             </a:r>
           </a:p>
           <a:p>
             <a:pPr>
-              <a:defRPr sz="1150">
-                <a:solidFill>
-                  <a:srgbClr val="94A3B8"/>
-                </a:solidFill>
-              </a:defRPr>
-            </a:pPr>
-            <a:r>
-              <a:t>      ESC/POS silent printing, live KDS, Web Audio Gujarati Soundbox</a:t>
+              <a:defRPr sz="1100">
+                <a:solidFill>
+                  <a:srgbClr val="64748B"/>
+                </a:solidFill>
+                <a:latin typeface="Calibri"/>
+              </a:defRPr>
+            </a:pPr>
+            <a:r>
+              <a:t>      ESC/POS silent thermal printing, live KDS, Web Audio Gujarati Soundbox</a:t>
             </a:r>
           </a:p>
           <a:p>
             <a:pPr>
-              <a:defRPr b="1" sz="1400">
-                <a:solidFill>
-                  <a:srgbClr val="6366F1"/>
-                </a:solidFill>
+              <a:defRPr b="1" sz="1350">
+                <a:solidFill>
+                  <a:srgbClr val="4F46E5"/>
+                </a:solidFill>
+                <a:latin typeface="Calibri"/>
               </a:defRPr>
             </a:pPr>
             <a:r>
@@ -7746,38 +9059,41 @@
           </a:p>
           <a:p>
             <a:pPr>
-              <a:defRPr sz="1150">
-                <a:solidFill>
-                  <a:srgbClr val="94A3B8"/>
-                </a:solidFill>
-              </a:defRPr>
-            </a:pPr>
-            <a:r>
-              <a:t>      24 automated test suites, IDOR security &amp; real-time socket optimization</a:t>
+              <a:defRPr sz="1100">
+                <a:solidFill>
+                  <a:srgbClr val="64748B"/>
+                </a:solidFill>
+                <a:latin typeface="Calibri"/>
+              </a:defRPr>
+            </a:pPr>
+            <a:r>
+              <a:t>      24 automated test suites, IDOR security audit, and performance tuning</a:t>
             </a:r>
           </a:p>
           <a:p>
             <a:pPr>
-              <a:defRPr b="1" sz="1400">
-                <a:solidFill>
-                  <a:srgbClr val="6366F1"/>
-                </a:solidFill>
-              </a:defRPr>
-            </a:pPr>
-            <a:r>
-              <a:t>[7]  Conclusion, Future Scope &amp; Commercial Startup Potential</a:t>
+              <a:defRPr b="1" sz="1350">
+                <a:solidFill>
+                  <a:srgbClr val="4F46E5"/>
+                </a:solidFill>
+                <a:latin typeface="Calibri"/>
+              </a:defRPr>
+            </a:pPr>
+            <a:r>
+              <a:t>[7]  Conclusion, Future Scope &amp; Commercial Business Model</a:t>
             </a:r>
           </a:p>
           <a:p>
             <a:pPr>
-              <a:defRPr sz="1150">
-                <a:solidFill>
-                  <a:srgbClr val="94A3B8"/>
-                </a:solidFill>
-              </a:defRPr>
-            </a:pPr>
-            <a:r>
-              <a:t>      Commercial validation at dineflowai.duckdns.org &amp; B2B SaaS model</a:t>
+              <a:defRPr sz="1100">
+                <a:solidFill>
+                  <a:srgbClr val="64748B"/>
+                </a:solidFill>
+                <a:latin typeface="Calibri"/>
+              </a:defRPr>
+            </a:pPr>
+            <a:r>
+              <a:t>      Bootstrapped commercial SaaS roadmap, live deployment &amp; IP ownership</a:t>
             </a:r>
           </a:p>
         </p:txBody>
@@ -7815,7 +9131,7 @@
             <a:avLst/>
           </a:prstGeom>
           <a:solidFill>
-            <a:srgbClr val="0F172A"/>
+            <a:srgbClr val="FFFFFF"/>
           </a:solidFill>
           <a:ln>
             <a:noFill/>
@@ -7845,180 +9161,23 @@
       </p:sp>
       <p:sp>
         <p:nvSpPr>
-          <p:cNvPr id="3" name="TextBox 2"/>
-          <p:cNvSpPr txBox="1"/>
-          <p:nvPr/>
-        </p:nvSpPr>
-        <p:spPr>
-          <a:xfrm>
-            <a:off x="731520" y="365760"/>
-            <a:ext cx="10698480" cy="822960"/>
+          <p:cNvPr id="3" name="Rectangle 2"/>
+          <p:cNvSpPr/>
+          <p:nvPr/>
+        </p:nvSpPr>
+        <p:spPr>
+          <a:xfrm>
+            <a:off x="0" y="0"/>
+            <a:ext cx="12191695" cy="73152"/>
           </a:xfrm>
           <a:prstGeom prst="rect">
             <a:avLst/>
           </a:prstGeom>
-          <a:noFill/>
-        </p:spPr>
-        <p:txBody>
-          <a:bodyPr wrap="square">
-            <a:spAutoFit/>
-          </a:bodyPr>
-          <a:lstStyle/>
-          <a:p>
-            <a:pPr>
-              <a:defRPr sz="2600" b="1">
-                <a:solidFill>
-                  <a:srgbClr val="F8FAFC"/>
-                </a:solidFill>
-                <a:latin typeface="Segoe UI"/>
-              </a:defRPr>
-            </a:pPr>
-            <a:r>
-              <a:t>Problem Statement &amp; Industry Context</a:t>
-            </a:r>
-          </a:p>
-        </p:txBody>
-      </p:sp>
-      <p:sp>
-        <p:nvSpPr>
-          <p:cNvPr id="4" name="TextBox 3"/>
-          <p:cNvSpPr txBox="1"/>
-          <p:nvPr/>
-        </p:nvSpPr>
-        <p:spPr>
-          <a:xfrm>
-            <a:off x="8412480" y="411480"/>
-            <a:ext cx="3017520" cy="365760"/>
-          </a:xfrm>
-          <a:prstGeom prst="rect">
-            <a:avLst/>
-          </a:prstGeom>
-          <a:noFill/>
-        </p:spPr>
-        <p:txBody>
-          <a:bodyPr wrap="none">
-            <a:spAutoFit/>
-          </a:bodyPr>
-          <a:lstStyle/>
-          <a:p>
-            <a:pPr algn="r">
-              <a:defRPr sz="1100" b="1">
-                <a:solidFill>
-                  <a:srgbClr val="6366F1"/>
-                </a:solidFill>
-                <a:latin typeface="Segoe UI"/>
-              </a:defRPr>
-            </a:pPr>
-            <a:r>
-              <a:t>Minor Project | DI05000341 | Slide 3</a:t>
-            </a:r>
-          </a:p>
-        </p:txBody>
-      </p:sp>
-      <p:sp>
-        <p:nvSpPr>
-          <p:cNvPr id="5" name="TextBox 4"/>
-          <p:cNvSpPr txBox="1"/>
-          <p:nvPr/>
-        </p:nvSpPr>
-        <p:spPr>
-          <a:xfrm>
-            <a:off x="914400" y="1463040"/>
-            <a:ext cx="6583680" cy="4754880"/>
-          </a:xfrm>
-          <a:prstGeom prst="rect">
-            <a:avLst/>
-          </a:prstGeom>
-          <a:noFill/>
-        </p:spPr>
-        <p:txBody>
-          <a:bodyPr wrap="square">
-            <a:spAutoFit/>
-          </a:bodyPr>
-          <a:lstStyle/>
-          <a:p>
-            <a:pPr>
-              <a:defRPr b="1" sz="1600">
-                <a:solidFill>
-                  <a:srgbClr val="F59E0B"/>
-                </a:solidFill>
-              </a:defRPr>
-            </a:pPr>
-            <a:r>
-              <a:t>The Core Restaurant Operations Bottleneck:</a:t>
-            </a:r>
-          </a:p>
-          <a:p>
-            <a:pPr>
-              <a:defRPr sz="1300">
-                <a:solidFill>
-                  <a:srgbClr val="F8FAFC"/>
-                </a:solidFill>
-              </a:defRPr>
-            </a:pPr>
-            <a:r>
-              <a:t>In India's fast-growing hospitality industry, over 80% of independent restaurants and cafes still rely on manual paper KOTs (Kitchen Order Tickets) or legacy desktop billing machines. During dinner rush hours, wait staff spend 15–20 minutes writing orders, walking to kitchens, and re-entering bills, leading to severe order inaccuracies, lost revenue, and customer frustration.</a:t>
-            </a:r>
-          </a:p>
-          <a:p>
-            <a:pPr>
-              <a:defRPr b="1" sz="1300">
-                <a:solidFill>
-                  <a:srgbClr val="6366F1"/>
-                </a:solidFill>
-              </a:defRPr>
-            </a:pPr>
-            <a:r>
-              <a:t>• Current Method: Physical paper notepad order taking and manual cashier billing.</a:t>
-            </a:r>
-          </a:p>
-          <a:p>
-            <a:pPr>
-              <a:defRPr b="1" sz="1300">
-                <a:solidFill>
-                  <a:srgbClr val="6366F1"/>
-                </a:solidFill>
-              </a:defRPr>
-            </a:pPr>
-            <a:r>
-              <a:t>• Main Limitations: Frequent paper KOT misplacement, lack of real-time inventory depletion, and heavy ₹10,000+ annual menu reprinting expenses.</a:t>
-            </a:r>
-          </a:p>
-          <a:p>
-            <a:pPr>
-              <a:defRPr b="1" sz="1300">
-                <a:solidFill>
-                  <a:srgbClr val="6366F1"/>
-                </a:solidFill>
-              </a:defRPr>
-            </a:pPr>
-            <a:r>
-              <a:t>• Who Benefits: Restaurant owners (higher turnover &amp; zero theft), kitchen chefs (instant clean digital KDS), and customers (contactless QR ordering &amp; transparent billing).</a:t>
-            </a:r>
-          </a:p>
-        </p:txBody>
-      </p:sp>
-      <p:sp>
-        <p:nvSpPr>
-          <p:cNvPr id="6" name="Rounded Rectangle 5"/>
-          <p:cNvSpPr/>
-          <p:nvPr/>
-        </p:nvSpPr>
-        <p:spPr>
-          <a:xfrm>
-            <a:off x="7863840" y="1645920"/>
-            <a:ext cx="3383280" cy="4389120"/>
-          </a:xfrm>
-          <a:prstGeom prst="roundRect">
-            <a:avLst/>
-          </a:prstGeom>
           <a:solidFill>
-            <a:srgbClr val="1E293B"/>
+            <a:srgbClr val="4F46E5"/>
           </a:solidFill>
           <a:ln>
-            <a:solidFill>
-              <a:srgbClr val="6366F1"/>
-            </a:solidFill>
+            <a:noFill/>
           </a:ln>
         </p:spPr>
         <p:style>
@@ -8036,14 +9195,308 @@
           </a:fontRef>
         </p:style>
         <p:txBody>
+          <a:bodyPr rtlCol="0" anchor="ctr"/>
+          <a:lstStyle/>
+          <a:p>
+            <a:pPr algn="ctr"/>
+          </a:p>
+        </p:txBody>
+      </p:sp>
+      <p:sp>
+        <p:nvSpPr>
+          <p:cNvPr id="4" name="TextBox 3"/>
+          <p:cNvSpPr txBox="1"/>
+          <p:nvPr/>
+        </p:nvSpPr>
+        <p:spPr>
+          <a:xfrm>
+            <a:off x="731520" y="320040"/>
+            <a:ext cx="7772400" cy="777240"/>
+          </a:xfrm>
+          <a:prstGeom prst="rect">
+            <a:avLst/>
+          </a:prstGeom>
+          <a:noFill/>
+        </p:spPr>
+        <p:txBody>
+          <a:bodyPr wrap="square">
+            <a:spAutoFit/>
+          </a:bodyPr>
+          <a:lstStyle/>
+          <a:p>
+            <a:pPr>
+              <a:defRPr sz="2400" b="1">
+                <a:solidFill>
+                  <a:srgbClr val="0F172A"/>
+                </a:solidFill>
+                <a:latin typeface="Calibri"/>
+              </a:defRPr>
+            </a:pPr>
+            <a:r>
+              <a:t>Problem Statement &amp; Industry Context</a:t>
+            </a:r>
+          </a:p>
+        </p:txBody>
+      </p:sp>
+      <p:pic>
+        <p:nvPicPr>
+          <p:cNvPr id="5" name="Picture 4" descr="gtu_logo.png"/>
+          <p:cNvPicPr>
+            <a:picLocks noChangeAspect="1"/>
+          </p:cNvPicPr>
+          <p:nvPr/>
+        </p:nvPicPr>
+        <p:blipFill>
+          <a:blip r:embed="rId2"/>
+          <a:stretch>
+            <a:fillRect/>
+          </a:stretch>
+        </p:blipFill>
+        <p:spPr>
+          <a:xfrm>
+            <a:off x="10241280" y="182880"/>
+            <a:ext cx="731520" cy="822960"/>
+          </a:xfrm>
+          <a:prstGeom prst="rect">
+            <a:avLst/>
+          </a:prstGeom>
+        </p:spPr>
+      </p:pic>
+      <p:pic>
+        <p:nvPicPr>
+          <p:cNvPr id="6" name="Picture 5" descr="kdp_patan_logo.png"/>
+          <p:cNvPicPr>
+            <a:picLocks noChangeAspect="1"/>
+          </p:cNvPicPr>
+          <p:nvPr/>
+        </p:nvPicPr>
+        <p:blipFill>
+          <a:blip r:embed="rId3"/>
+          <a:stretch>
+            <a:fillRect/>
+          </a:stretch>
+        </p:blipFill>
+        <p:spPr>
+          <a:xfrm>
+            <a:off x="11155680" y="182880"/>
+            <a:ext cx="777240" cy="777240"/>
+          </a:xfrm>
+          <a:prstGeom prst="rect">
+            <a:avLst/>
+          </a:prstGeom>
+        </p:spPr>
+      </p:pic>
+      <p:sp>
+        <p:nvSpPr>
+          <p:cNvPr id="7" name="TextBox 6"/>
+          <p:cNvSpPr txBox="1"/>
+          <p:nvPr/>
+        </p:nvSpPr>
+        <p:spPr>
+          <a:xfrm>
+            <a:off x="731520" y="960120"/>
+            <a:ext cx="9144000" cy="320040"/>
+          </a:xfrm>
+          <a:prstGeom prst="rect">
+            <a:avLst/>
+          </a:prstGeom>
+          <a:noFill/>
+        </p:spPr>
+        <p:txBody>
+          <a:bodyPr wrap="none">
+            <a:spAutoFit/>
+          </a:bodyPr>
+          <a:lstStyle/>
+          <a:p>
+            <a:pPr>
+              <a:defRPr sz="1050" b="1">
+                <a:solidFill>
+                  <a:srgbClr val="4F46E5"/>
+                </a:solidFill>
+                <a:latin typeface="Calibri"/>
+              </a:defRPr>
+            </a:pPr>
+            <a:r>
+              <a:t>K. D. Polytechnic, Patan | Department of Computer Engineering | Minor Project (DI05000341) | Slide 3</a:t>
+            </a:r>
+          </a:p>
+        </p:txBody>
+      </p:sp>
+      <p:sp>
+        <p:nvSpPr>
+          <p:cNvPr id="8" name="Rounded Rectangle 7"/>
+          <p:cNvSpPr/>
+          <p:nvPr/>
+        </p:nvSpPr>
+        <p:spPr>
+          <a:xfrm>
+            <a:off x="914400" y="1463040"/>
+            <a:ext cx="6583680" cy="4754880"/>
+          </a:xfrm>
+          <a:prstGeom prst="roundRect">
+            <a:avLst/>
+          </a:prstGeom>
+          <a:solidFill>
+            <a:srgbClr val="F8FAFC"/>
+          </a:solidFill>
+          <a:ln>
+            <a:solidFill>
+              <a:srgbClr val="E2E8F0"/>
+            </a:solidFill>
+          </a:ln>
+        </p:spPr>
+        <p:style>
+          <a:lnRef idx="1">
+            <a:schemeClr val="accent1"/>
+          </a:lnRef>
+          <a:fillRef idx="3">
+            <a:schemeClr val="accent1"/>
+          </a:fillRef>
+          <a:effectRef idx="2">
+            <a:schemeClr val="accent1"/>
+          </a:effectRef>
+          <a:fontRef idx="minor">
+            <a:schemeClr val="lt1"/>
+          </a:fontRef>
+        </p:style>
+        <p:txBody>
           <a:bodyPr rtlCol="0" anchor="ctr" wrap="square"/>
           <a:lstStyle/>
           <a:p>
             <a:pPr algn="ctr">
-              <a:defRPr b="1" sz="4400">
-                <a:solidFill>
-                  <a:srgbClr val="F59E0B"/>
-                </a:solidFill>
+              <a:defRPr b="1" sz="1400">
+                <a:solidFill>
+                  <a:srgbClr val="0F172A"/>
+                </a:solidFill>
+                <a:latin typeface="Calibri"/>
+              </a:defRPr>
+            </a:pPr>
+            <a:r>
+              <a:t>Operational Bottlenecks in Contemporary Restaurants:</a:t>
+            </a:r>
+          </a:p>
+          <a:p>
+            <a:pPr>
+              <a:defRPr sz="1150">
+                <a:solidFill>
+                  <a:srgbClr val="1E293B"/>
+                </a:solidFill>
+                <a:latin typeface="Calibri"/>
+              </a:defRPr>
+            </a:pPr>
+            <a:r>
+              <a:t>Over 80% of independent restaurants and cafes in India still rely on manual paper KOTs (Kitchen Order Tickets) or heavy desktop billing PCs. During busy dinner rush hours, wait staff spend 15–20 minutes walking to kitchens and handwriting slips, leading to a 15–20% rate of incorrect orders, misplaced slips, and severe table turnaround delays.</a:t>
+            </a:r>
+          </a:p>
+          <a:p>
+            <a:r>
+              <a:rPr b="1" sz="1150">
+                <a:solidFill>
+                  <a:srgbClr val="4F46E5"/>
+                </a:solidFill>
+                <a:latin typeface="Calibri"/>
+              </a:rPr>
+              <a:t>• Current Method: </a:t>
+            </a:r>
+            <a:r>
+              <a:rPr b="0" sz="1150">
+                <a:solidFill>
+                  <a:srgbClr val="1E293B"/>
+                </a:solidFill>
+                <a:latin typeface="Calibri"/>
+              </a:rPr>
+              <a:t>Handwritten paper slips and manual cashier re-entry.</a:t>
+            </a:r>
+          </a:p>
+          <a:p>
+            <a:r>
+              <a:rPr b="1" sz="1150">
+                <a:solidFill>
+                  <a:srgbClr val="4F46E5"/>
+                </a:solidFill>
+                <a:latin typeface="Calibri"/>
+              </a:rPr>
+              <a:t>• Main Limitations: </a:t>
+            </a:r>
+            <a:r>
+              <a:rPr b="0" sz="1150">
+                <a:solidFill>
+                  <a:srgbClr val="1E293B"/>
+                </a:solidFill>
+                <a:latin typeface="Calibri"/>
+              </a:rPr>
+              <a:t>Paper KOT loss, zero raw material inventory tracking, and ₹10,000+ annual menu reprinting expenses.</a:t>
+            </a:r>
+          </a:p>
+          <a:p>
+            <a:r>
+              <a:rPr b="1" sz="1150">
+                <a:solidFill>
+                  <a:srgbClr val="4F46E5"/>
+                </a:solidFill>
+                <a:latin typeface="Calibri"/>
+              </a:rPr>
+              <a:t>• Who Benefits: </a:t>
+            </a:r>
+            <a:r>
+              <a:rPr b="0" sz="1150">
+                <a:solidFill>
+                  <a:srgbClr val="1E293B"/>
+                </a:solidFill>
+                <a:latin typeface="Calibri"/>
+              </a:rPr>
+              <a:t>Restaurant owners (faster table turnaround), kitchen staff (clear digital KDS), and patrons (instant QR ordering).</a:t>
+            </a:r>
+          </a:p>
+        </p:txBody>
+      </p:sp>
+      <p:sp>
+        <p:nvSpPr>
+          <p:cNvPr id="9" name="Rounded Rectangle 8"/>
+          <p:cNvSpPr/>
+          <p:nvPr/>
+        </p:nvSpPr>
+        <p:spPr>
+          <a:xfrm>
+            <a:off x="7772400" y="1463040"/>
+            <a:ext cx="3474720" cy="4754880"/>
+          </a:xfrm>
+          <a:prstGeom prst="roundRect">
+            <a:avLst/>
+          </a:prstGeom>
+          <a:solidFill>
+            <a:srgbClr val="F8FAFC"/>
+          </a:solidFill>
+          <a:ln w="25400">
+            <a:solidFill>
+              <a:srgbClr val="4F46E5"/>
+            </a:solidFill>
+          </a:ln>
+        </p:spPr>
+        <p:style>
+          <a:lnRef idx="1">
+            <a:schemeClr val="accent1"/>
+          </a:lnRef>
+          <a:fillRef idx="3">
+            <a:schemeClr val="accent1"/>
+          </a:fillRef>
+          <a:effectRef idx="2">
+            <a:schemeClr val="accent1"/>
+          </a:effectRef>
+          <a:fontRef idx="minor">
+            <a:schemeClr val="lt1"/>
+          </a:fontRef>
+        </p:style>
+        <p:txBody>
+          <a:bodyPr rtlCol="0" anchor="ctr" wrap="square"/>
+          <a:lstStyle/>
+          <a:p>
+            <a:pPr algn="ctr">
+              <a:defRPr b="1" sz="4600">
+                <a:solidFill>
+                  <a:srgbClr val="4F46E5"/>
+                </a:solidFill>
+                <a:latin typeface="Calibri"/>
               </a:defRPr>
             </a:pPr>
             <a:r>
@@ -8054,21 +9507,24 @@
             <a:pPr algn="ctr">
               <a:defRPr sz="1200">
                 <a:solidFill>
-                  <a:srgbClr val="F8FAFC"/>
-                </a:solidFill>
-              </a:defRPr>
-            </a:pPr>
-            <a:r>
-              <a:t>of Indian casual dine-in restaurants face peak-hour order bottlenecks and 18-22% food margin erosion due to manual tracking.</a:t>
-            </a:r>
-          </a:p>
-          <a:p>
+                  <a:srgbClr val="1E293B"/>
+                </a:solidFill>
+                <a:latin typeface="Calibri"/>
+              </a:defRPr>
+            </a:pPr>
+            <a:r>
+              <a:t>of Indian casual dine-in restaurants suffer peak-hour billing bottlenecks and 18-22% food margin erosion due to manual tracking.</a:t>
+            </a:r>
+          </a:p>
+          <a:p>
+            <a:br/>
             <a:br/>
             <a:pPr algn="ctr">
               <a:defRPr sz="1000" i="1">
                 <a:solidFill>
-                  <a:srgbClr val="94A3B8"/>
-                </a:solidFill>
+                  <a:srgbClr val="64748B"/>
+                </a:solidFill>
+                <a:latin typeface="Calibri"/>
               </a:defRPr>
             </a:pPr>
             <a:r>
@@ -8110,7 +9566,7 @@
             <a:avLst/>
           </a:prstGeom>
           <a:solidFill>
-            <a:srgbClr val="0F172A"/>
+            <a:srgbClr val="FFFFFF"/>
           </a:solidFill>
           <a:ln>
             <a:noFill/>
@@ -8140,97 +9596,23 @@
       </p:sp>
       <p:sp>
         <p:nvSpPr>
-          <p:cNvPr id="3" name="TextBox 2"/>
-          <p:cNvSpPr txBox="1"/>
-          <p:nvPr/>
-        </p:nvSpPr>
-        <p:spPr>
-          <a:xfrm>
-            <a:off x="731520" y="365760"/>
-            <a:ext cx="10698480" cy="822960"/>
+          <p:cNvPr id="3" name="Rectangle 2"/>
+          <p:cNvSpPr/>
+          <p:nvPr/>
+        </p:nvSpPr>
+        <p:spPr>
+          <a:xfrm>
+            <a:off x="0" y="0"/>
+            <a:ext cx="12191695" cy="73152"/>
           </a:xfrm>
           <a:prstGeom prst="rect">
             <a:avLst/>
           </a:prstGeom>
-          <a:noFill/>
-        </p:spPr>
-        <p:txBody>
-          <a:bodyPr wrap="square">
-            <a:spAutoFit/>
-          </a:bodyPr>
-          <a:lstStyle/>
-          <a:p>
-            <a:pPr>
-              <a:defRPr sz="2600" b="1">
-                <a:solidFill>
-                  <a:srgbClr val="F8FAFC"/>
-                </a:solidFill>
-                <a:latin typeface="Segoe UI"/>
-              </a:defRPr>
-            </a:pPr>
-            <a:r>
-              <a:t>Project Objectives &amp; Measurable Targets</a:t>
-            </a:r>
-          </a:p>
-        </p:txBody>
-      </p:sp>
-      <p:sp>
-        <p:nvSpPr>
-          <p:cNvPr id="4" name="TextBox 3"/>
-          <p:cNvSpPr txBox="1"/>
-          <p:nvPr/>
-        </p:nvSpPr>
-        <p:spPr>
-          <a:xfrm>
-            <a:off x="8412480" y="411480"/>
-            <a:ext cx="3017520" cy="365760"/>
-          </a:xfrm>
-          <a:prstGeom prst="rect">
-            <a:avLst/>
-          </a:prstGeom>
-          <a:noFill/>
-        </p:spPr>
-        <p:txBody>
-          <a:bodyPr wrap="none">
-            <a:spAutoFit/>
-          </a:bodyPr>
-          <a:lstStyle/>
-          <a:p>
-            <a:pPr algn="r">
-              <a:defRPr sz="1100" b="1">
-                <a:solidFill>
-                  <a:srgbClr val="6366F1"/>
-                </a:solidFill>
-                <a:latin typeface="Segoe UI"/>
-              </a:defRPr>
-            </a:pPr>
-            <a:r>
-              <a:t>Minor Project | DI05000341 | Slide 4</a:t>
-            </a:r>
-          </a:p>
-        </p:txBody>
-      </p:sp>
-      <p:sp>
-        <p:nvSpPr>
-          <p:cNvPr id="5" name="Rounded Rectangle 4"/>
-          <p:cNvSpPr/>
-          <p:nvPr/>
-        </p:nvSpPr>
-        <p:spPr>
-          <a:xfrm>
-            <a:off x="914400" y="1554480"/>
-            <a:ext cx="3291840" cy="4572000"/>
-          </a:xfrm>
-          <a:prstGeom prst="roundRect">
-            <a:avLst/>
-          </a:prstGeom>
           <a:solidFill>
-            <a:srgbClr val="1E293B"/>
+            <a:srgbClr val="4F46E5"/>
           </a:solidFill>
           <a:ln>
-            <a:solidFill>
-              <a:srgbClr val="6366F1"/>
-            </a:solidFill>
+            <a:noFill/>
           </a:ln>
         </p:spPr>
         <p:style>
@@ -8248,62 +9630,153 @@
           </a:fontRef>
         </p:style>
         <p:txBody>
-          <a:bodyPr rtlCol="0" anchor="ctr" wrap="square"/>
-          <a:lstStyle/>
-          <a:p>
-            <a:pPr algn="ctr">
-              <a:defRPr b="1" sz="1350">
-                <a:solidFill>
-                  <a:srgbClr val="F59E0B"/>
-                </a:solidFill>
-              </a:defRPr>
-            </a:pPr>
-            <a:r>
-              <a:t>Objective 1: Ultra-Fast Cloud POS Billing</a:t>
-            </a:r>
-          </a:p>
+          <a:bodyPr rtlCol="0" anchor="ctr"/>
+          <a:lstStyle/>
+          <a:p>
+            <a:pPr algn="ctr"/>
+          </a:p>
+        </p:txBody>
+      </p:sp>
+      <p:sp>
+        <p:nvSpPr>
+          <p:cNvPr id="4" name="TextBox 3"/>
+          <p:cNvSpPr txBox="1"/>
+          <p:nvPr/>
+        </p:nvSpPr>
+        <p:spPr>
+          <a:xfrm>
+            <a:off x="731520" y="320040"/>
+            <a:ext cx="7772400" cy="777240"/>
+          </a:xfrm>
+          <a:prstGeom prst="rect">
+            <a:avLst/>
+          </a:prstGeom>
+          <a:noFill/>
+        </p:spPr>
+        <p:txBody>
+          <a:bodyPr wrap="square">
+            <a:spAutoFit/>
+          </a:bodyPr>
+          <a:lstStyle/>
           <a:p>
             <a:pPr>
-              <a:defRPr sz="1150">
-                <a:solidFill>
-                  <a:srgbClr val="F8FAFC"/>
-                </a:solidFill>
-              </a:defRPr>
-            </a:pPr>
-            <a:r>
-              <a:t>• Build a lightning-fast Web POS cashier interface operating in sub-3 seconds per bill.</a:t>
-            </a:r>
-            <a:br/>
-            <a:r>
-              <a:t>• Support full keyboard shortcuts (F1-F9) and direct silent ESC/POS thermal printing without browser print dialogues.</a:t>
-            </a:r>
-            <a:br/>
-            <a:r>
-              <a:t>• Multi-modal payments: UPI QR code generator, Cash, Card, and split billing.</a:t>
-            </a:r>
-          </a:p>
-        </p:txBody>
-      </p:sp>
-      <p:sp>
-        <p:nvSpPr>
-          <p:cNvPr id="6" name="Rounded Rectangle 5"/>
+              <a:defRPr sz="2400" b="1">
+                <a:solidFill>
+                  <a:srgbClr val="0F172A"/>
+                </a:solidFill>
+                <a:latin typeface="Calibri"/>
+              </a:defRPr>
+            </a:pPr>
+            <a:r>
+              <a:t>Project Objectives &amp; Measurable Targets</a:t>
+            </a:r>
+          </a:p>
+        </p:txBody>
+      </p:sp>
+      <p:pic>
+        <p:nvPicPr>
+          <p:cNvPr id="5" name="Picture 4" descr="gtu_logo.png"/>
+          <p:cNvPicPr>
+            <a:picLocks noChangeAspect="1"/>
+          </p:cNvPicPr>
+          <p:nvPr/>
+        </p:nvPicPr>
+        <p:blipFill>
+          <a:blip r:embed="rId2"/>
+          <a:stretch>
+            <a:fillRect/>
+          </a:stretch>
+        </p:blipFill>
+        <p:spPr>
+          <a:xfrm>
+            <a:off x="10241280" y="182880"/>
+            <a:ext cx="731520" cy="822960"/>
+          </a:xfrm>
+          <a:prstGeom prst="rect">
+            <a:avLst/>
+          </a:prstGeom>
+        </p:spPr>
+      </p:pic>
+      <p:pic>
+        <p:nvPicPr>
+          <p:cNvPr id="6" name="Picture 5" descr="kdp_patan_logo.png"/>
+          <p:cNvPicPr>
+            <a:picLocks noChangeAspect="1"/>
+          </p:cNvPicPr>
+          <p:nvPr/>
+        </p:nvPicPr>
+        <p:blipFill>
+          <a:blip r:embed="rId3"/>
+          <a:stretch>
+            <a:fillRect/>
+          </a:stretch>
+        </p:blipFill>
+        <p:spPr>
+          <a:xfrm>
+            <a:off x="11155680" y="182880"/>
+            <a:ext cx="777240" cy="777240"/>
+          </a:xfrm>
+          <a:prstGeom prst="rect">
+            <a:avLst/>
+          </a:prstGeom>
+        </p:spPr>
+      </p:pic>
+      <p:sp>
+        <p:nvSpPr>
+          <p:cNvPr id="7" name="TextBox 6"/>
+          <p:cNvSpPr txBox="1"/>
+          <p:nvPr/>
+        </p:nvSpPr>
+        <p:spPr>
+          <a:xfrm>
+            <a:off x="731520" y="960120"/>
+            <a:ext cx="9144000" cy="320040"/>
+          </a:xfrm>
+          <a:prstGeom prst="rect">
+            <a:avLst/>
+          </a:prstGeom>
+          <a:noFill/>
+        </p:spPr>
+        <p:txBody>
+          <a:bodyPr wrap="none">
+            <a:spAutoFit/>
+          </a:bodyPr>
+          <a:lstStyle/>
+          <a:p>
+            <a:pPr>
+              <a:defRPr sz="1050" b="1">
+                <a:solidFill>
+                  <a:srgbClr val="4F46E5"/>
+                </a:solidFill>
+                <a:latin typeface="Calibri"/>
+              </a:defRPr>
+            </a:pPr>
+            <a:r>
+              <a:t>K. D. Polytechnic, Patan | Department of Computer Engineering | Minor Project (DI05000341) | Slide 4</a:t>
+            </a:r>
+          </a:p>
+        </p:txBody>
+      </p:sp>
+      <p:sp>
+        <p:nvSpPr>
+          <p:cNvPr id="8" name="Rounded Rectangle 7"/>
           <p:cNvSpPr/>
           <p:nvPr/>
         </p:nvSpPr>
         <p:spPr>
           <a:xfrm>
-            <a:off x="4434840" y="1554480"/>
-            <a:ext cx="3291840" cy="4572000"/>
+            <a:off x="914400" y="1463040"/>
+            <a:ext cx="3291840" cy="4754880"/>
           </a:xfrm>
           <a:prstGeom prst="roundRect">
             <a:avLst/>
           </a:prstGeom>
           <a:solidFill>
-            <a:srgbClr val="1E293B"/>
+            <a:srgbClr val="F8FAFC"/>
           </a:solidFill>
           <a:ln>
             <a:solidFill>
-              <a:srgbClr val="6366F1"/>
+              <a:srgbClr val="E2E8F0"/>
             </a:solidFill>
           </a:ln>
         </p:spPr>
@@ -8328,56 +9801,58 @@
             <a:pPr algn="ctr">
               <a:defRPr b="1" sz="1350">
                 <a:solidFill>
-                  <a:srgbClr val="F59E0B"/>
-                </a:solidFill>
-              </a:defRPr>
-            </a:pPr>
-            <a:r>
-              <a:t>Objective 2: Contactless QR Menu &amp; Live KDS</a:t>
+                  <a:srgbClr val="4F46E5"/>
+                </a:solidFill>
+                <a:latin typeface="Calibri"/>
+              </a:defRPr>
+            </a:pPr>
+            <a:r>
+              <a:t>Objective 1: Ultra-Fast Web POS</a:t>
             </a:r>
           </a:p>
           <a:p>
             <a:pPr>
               <a:defRPr sz="1150">
                 <a:solidFill>
-                  <a:srgbClr val="F8FAFC"/>
-                </a:solidFill>
-              </a:defRPr>
-            </a:pPr>
-            <a:r>
-              <a:t>• Implement dynamic table-based QR code ordering requiring zero app installation for customers.</a:t>
+                  <a:srgbClr val="1E293B"/>
+                </a:solidFill>
+                <a:latin typeface="Calibri"/>
+              </a:defRPr>
+            </a:pPr>
+            <a:r>
+              <a:t>• Build a lightning-fast Web POS cashier terminal operating in sub-3 seconds per bill.</a:t>
             </a:r>
             <a:br/>
             <a:r>
-              <a:t>• Direct wireless order transmission from table to kitchen display (KDS) in under 200ms.</a:t>
+              <a:t>• Full keyboard hotkeys (F1-F9) and direct silent ESC/POS thermal printing without browser print dialogues.</a:t>
             </a:r>
             <a:br/>
             <a:r>
-              <a:t>• Eliminate paper KOTs and physical menu reprinting costs entirely.</a:t>
-            </a:r>
-          </a:p>
-        </p:txBody>
-      </p:sp>
-      <p:sp>
-        <p:nvSpPr>
-          <p:cNvPr id="7" name="Rounded Rectangle 6"/>
+              <a:t>• Multi-modal payment splitting (Cash, UPI QR, and Card).</a:t>
+            </a:r>
+          </a:p>
+        </p:txBody>
+      </p:sp>
+      <p:sp>
+        <p:nvSpPr>
+          <p:cNvPr id="9" name="Rounded Rectangle 8"/>
           <p:cNvSpPr/>
           <p:nvPr/>
         </p:nvSpPr>
         <p:spPr>
           <a:xfrm>
-            <a:off x="7955279" y="1554480"/>
-            <a:ext cx="3291840" cy="4572000"/>
+            <a:off x="4434840" y="1463040"/>
+            <a:ext cx="3291840" cy="4754880"/>
           </a:xfrm>
           <a:prstGeom prst="roundRect">
             <a:avLst/>
           </a:prstGeom>
           <a:solidFill>
-            <a:srgbClr val="1E293B"/>
+            <a:srgbClr val="F8FAFC"/>
           </a:solidFill>
           <a:ln>
             <a:solidFill>
-              <a:srgbClr val="6366F1"/>
+              <a:srgbClr val="E2E8F0"/>
             </a:solidFill>
           </a:ln>
         </p:spPr>
@@ -8402,20 +9877,98 @@
             <a:pPr algn="ctr">
               <a:defRPr b="1" sz="1350">
                 <a:solidFill>
-                  <a:srgbClr val="F59E0B"/>
-                </a:solidFill>
-              </a:defRPr>
-            </a:pPr>
-            <a:r>
-              <a:t>Objective 3: Recipe ERP &amp; Voice Soundbox</a:t>
+                  <a:srgbClr val="4F46E5"/>
+                </a:solidFill>
+                <a:latin typeface="Calibri"/>
+              </a:defRPr>
+            </a:pPr>
+            <a:r>
+              <a:t>Objective 2: Contactless QR &amp; Live KDS</a:t>
             </a:r>
           </a:p>
           <a:p>
             <a:pPr>
               <a:defRPr sz="1150">
                 <a:solidFill>
-                  <a:srgbClr val="F8FAFC"/>
-                </a:solidFill>
+                  <a:srgbClr val="1E293B"/>
+                </a:solidFill>
+                <a:latin typeface="Calibri"/>
+              </a:defRPr>
+            </a:pPr>
+            <a:r>
+              <a:t>• Deploy dynamic table-based QR ordering requiring zero app installation for customers.</a:t>
+            </a:r>
+            <a:br/>
+            <a:r>
+              <a:t>• Direct wireless order transmission from table to kitchen display (KDS) in under 180ms.</a:t>
+            </a:r>
+            <a:br/>
+            <a:r>
+              <a:t>• Eliminate paper KOTs and physical menu reprinting costs entirely.</a:t>
+            </a:r>
+          </a:p>
+        </p:txBody>
+      </p:sp>
+      <p:sp>
+        <p:nvSpPr>
+          <p:cNvPr id="10" name="Rounded Rectangle 9"/>
+          <p:cNvSpPr/>
+          <p:nvPr/>
+        </p:nvSpPr>
+        <p:spPr>
+          <a:xfrm>
+            <a:off x="7955279" y="1463040"/>
+            <a:ext cx="3291840" cy="4754880"/>
+          </a:xfrm>
+          <a:prstGeom prst="roundRect">
+            <a:avLst/>
+          </a:prstGeom>
+          <a:solidFill>
+            <a:srgbClr val="F8FAFC"/>
+          </a:solidFill>
+          <a:ln>
+            <a:solidFill>
+              <a:srgbClr val="E2E8F0"/>
+            </a:solidFill>
+          </a:ln>
+        </p:spPr>
+        <p:style>
+          <a:lnRef idx="1">
+            <a:schemeClr val="accent1"/>
+          </a:lnRef>
+          <a:fillRef idx="3">
+            <a:schemeClr val="accent1"/>
+          </a:fillRef>
+          <a:effectRef idx="2">
+            <a:schemeClr val="accent1"/>
+          </a:effectRef>
+          <a:fontRef idx="minor">
+            <a:schemeClr val="lt1"/>
+          </a:fontRef>
+        </p:style>
+        <p:txBody>
+          <a:bodyPr rtlCol="0" anchor="ctr" wrap="square"/>
+          <a:lstStyle/>
+          <a:p>
+            <a:pPr algn="ctr">
+              <a:defRPr b="1" sz="1350">
+                <a:solidFill>
+                  <a:srgbClr val="4F46E5"/>
+                </a:solidFill>
+                <a:latin typeface="Calibri"/>
+              </a:defRPr>
+            </a:pPr>
+            <a:r>
+              <a:t>Objective 3: Recipe ERP &amp; Voice Soundbox</a:t>
+            </a:r>
+          </a:p>
+          <a:p>
+            <a:pPr>
+              <a:defRPr sz="1150">
+                <a:solidFill>
+                  <a:srgbClr val="1E293B"/>
+                </a:solidFill>
+                <a:latin typeface="Calibri"/>
               </a:defRPr>
             </a:pPr>
             <a:r>
@@ -8427,7 +9980,7 @@
             </a:r>
             <a:br/>
             <a:r>
-              <a:t>• Cryptographically isolated multi-tenant architecture on AWS EC2 cloud infrastructure.</a:t>
+              <a:t>• Multi-tenant AWS EC2 cloud deployment.</a:t>
             </a:r>
           </a:p>
         </p:txBody>
@@ -8465,7 +10018,7 @@
             <a:avLst/>
           </a:prstGeom>
           <a:solidFill>
-            <a:srgbClr val="0F172A"/>
+            <a:srgbClr val="FFFFFF"/>
           </a:solidFill>
           <a:ln>
             <a:noFill/>
@@ -8495,14 +10048,57 @@
       </p:sp>
       <p:sp>
         <p:nvSpPr>
-          <p:cNvPr id="3" name="TextBox 2"/>
+          <p:cNvPr id="3" name="Rectangle 2"/>
+          <p:cNvSpPr/>
+          <p:nvPr/>
+        </p:nvSpPr>
+        <p:spPr>
+          <a:xfrm>
+            <a:off x="0" y="0"/>
+            <a:ext cx="12191695" cy="73152"/>
+          </a:xfrm>
+          <a:prstGeom prst="rect">
+            <a:avLst/>
+          </a:prstGeom>
+          <a:solidFill>
+            <a:srgbClr val="4F46E5"/>
+          </a:solidFill>
+          <a:ln>
+            <a:noFill/>
+          </a:ln>
+        </p:spPr>
+        <p:style>
+          <a:lnRef idx="1">
+            <a:schemeClr val="accent1"/>
+          </a:lnRef>
+          <a:fillRef idx="3">
+            <a:schemeClr val="accent1"/>
+          </a:fillRef>
+          <a:effectRef idx="2">
+            <a:schemeClr val="accent1"/>
+          </a:effectRef>
+          <a:fontRef idx="minor">
+            <a:schemeClr val="lt1"/>
+          </a:fontRef>
+        </p:style>
+        <p:txBody>
+          <a:bodyPr rtlCol="0" anchor="ctr"/>
+          <a:lstStyle/>
+          <a:p>
+            <a:pPr algn="ctr"/>
+          </a:p>
+        </p:txBody>
+      </p:sp>
+      <p:sp>
+        <p:nvSpPr>
+          <p:cNvPr id="4" name="TextBox 3"/>
           <p:cNvSpPr txBox="1"/>
           <p:nvPr/>
         </p:nvSpPr>
         <p:spPr>
           <a:xfrm>
-            <a:off x="731520" y="365760"/>
-            <a:ext cx="10698480" cy="822960"/>
+            <a:off x="731520" y="320040"/>
+            <a:ext cx="7772400" cy="777240"/>
           </a:xfrm>
           <a:prstGeom prst="rect">
             <a:avLst/>
@@ -8516,29 +10112,77 @@
           <a:lstStyle/>
           <a:p>
             <a:pPr>
-              <a:defRPr sz="2600" b="1">
-                <a:solidFill>
-                  <a:srgbClr val="F8FAFC"/>
-                </a:solidFill>
-                <a:latin typeface="Segoe UI"/>
-              </a:defRPr>
-            </a:pPr>
-            <a:r>
-              <a:t>Literature Survey &amp; Research Gap</a:t>
-            </a:r>
-          </a:p>
-        </p:txBody>
-      </p:sp>
-      <p:sp>
-        <p:nvSpPr>
-          <p:cNvPr id="4" name="TextBox 3"/>
+              <a:defRPr sz="2400" b="1">
+                <a:solidFill>
+                  <a:srgbClr val="0F172A"/>
+                </a:solidFill>
+                <a:latin typeface="Calibri"/>
+              </a:defRPr>
+            </a:pPr>
+            <a:r>
+              <a:t>Literature Survey and Research Gap</a:t>
+            </a:r>
+          </a:p>
+        </p:txBody>
+      </p:sp>
+      <p:pic>
+        <p:nvPicPr>
+          <p:cNvPr id="5" name="Picture 4" descr="gtu_logo.png"/>
+          <p:cNvPicPr>
+            <a:picLocks noChangeAspect="1"/>
+          </p:cNvPicPr>
+          <p:nvPr/>
+        </p:nvPicPr>
+        <p:blipFill>
+          <a:blip r:embed="rId2"/>
+          <a:stretch>
+            <a:fillRect/>
+          </a:stretch>
+        </p:blipFill>
+        <p:spPr>
+          <a:xfrm>
+            <a:off x="10241280" y="182880"/>
+            <a:ext cx="731520" cy="822960"/>
+          </a:xfrm>
+          <a:prstGeom prst="rect">
+            <a:avLst/>
+          </a:prstGeom>
+        </p:spPr>
+      </p:pic>
+      <p:pic>
+        <p:nvPicPr>
+          <p:cNvPr id="6" name="Picture 5" descr="kdp_patan_logo.png"/>
+          <p:cNvPicPr>
+            <a:picLocks noChangeAspect="1"/>
+          </p:cNvPicPr>
+          <p:nvPr/>
+        </p:nvPicPr>
+        <p:blipFill>
+          <a:blip r:embed="rId3"/>
+          <a:stretch>
+            <a:fillRect/>
+          </a:stretch>
+        </p:blipFill>
+        <p:spPr>
+          <a:xfrm>
+            <a:off x="11155680" y="182880"/>
+            <a:ext cx="777240" cy="777240"/>
+          </a:xfrm>
+          <a:prstGeom prst="rect">
+            <a:avLst/>
+          </a:prstGeom>
+        </p:spPr>
+      </p:pic>
+      <p:sp>
+        <p:nvSpPr>
+          <p:cNvPr id="7" name="TextBox 6"/>
           <p:cNvSpPr txBox="1"/>
           <p:nvPr/>
         </p:nvSpPr>
         <p:spPr>
           <a:xfrm>
-            <a:off x="8412480" y="411480"/>
-            <a:ext cx="3017520" cy="365760"/>
+            <a:off x="731520" y="960120"/>
+            <a:ext cx="9144000" cy="320040"/>
           </a:xfrm>
           <a:prstGeom prst="rect">
             <a:avLst/>
@@ -8551,30 +10195,30 @@
           </a:bodyPr>
           <a:lstStyle/>
           <a:p>
-            <a:pPr algn="r">
-              <a:defRPr sz="1100" b="1">
-                <a:solidFill>
-                  <a:srgbClr val="6366F1"/>
-                </a:solidFill>
-                <a:latin typeface="Segoe UI"/>
-              </a:defRPr>
-            </a:pPr>
-            <a:r>
-              <a:t>Minor Project | DI05000341 | Slide 5</a:t>
+            <a:pPr>
+              <a:defRPr sz="1050" b="1">
+                <a:solidFill>
+                  <a:srgbClr val="4F46E5"/>
+                </a:solidFill>
+                <a:latin typeface="Calibri"/>
+              </a:defRPr>
+            </a:pPr>
+            <a:r>
+              <a:t>K. D. Polytechnic, Patan | Department of Computer Engineering | Minor Project (DI05000341) | Slide 5</a:t>
             </a:r>
           </a:p>
         </p:txBody>
       </p:sp>
       <p:graphicFrame>
         <p:nvGraphicFramePr>
-          <p:cNvPr id="5" name="Table 4"/>
+          <p:cNvPr id="8" name="Table 7"/>
           <p:cNvGraphicFramePr>
             <a:graphicFrameLocks noGrp="1"/>
           </p:cNvGraphicFramePr>
           <p:nvPr/>
         </p:nvGraphicFramePr>
         <p:xfrm>
-          <a:off x="914400" y="1463040"/>
+          <a:off x="914400" y="1371600"/>
           <a:ext cx="10332720" cy="3474720"/>
         </p:xfrm>
         <a:graphic>
@@ -8598,8 +10242,9 @@
                       <a:pPr>
                         <a:defRPr b="1" sz="1100">
                           <a:solidFill>
-                            <a:srgbClr val="F8FAFC"/>
+                            <a:srgbClr val="FFFFFF"/>
                           </a:solidFill>
+                          <a:latin typeface="Calibri"/>
                         </a:defRPr>
                       </a:pPr>
                       <a:r>
@@ -8609,7 +10254,7 @@
                   </a:txBody>
                   <a:tcPr>
                     <a:solidFill>
-                      <a:srgbClr val="6366F1"/>
+                      <a:srgbClr val="4F46E5"/>
                     </a:solidFill>
                   </a:tcPr>
                 </a:tc>
@@ -8621,8 +10266,9 @@
                       <a:pPr>
                         <a:defRPr b="1" sz="1100">
                           <a:solidFill>
-                            <a:srgbClr val="F8FAFC"/>
+                            <a:srgbClr val="FFFFFF"/>
                           </a:solidFill>
+                          <a:latin typeface="Calibri"/>
                         </a:defRPr>
                       </a:pPr>
                       <a:r>
@@ -8632,7 +10278,7 @@
                   </a:txBody>
                   <a:tcPr>
                     <a:solidFill>
-                      <a:srgbClr val="6366F1"/>
+                      <a:srgbClr val="4F46E5"/>
                     </a:solidFill>
                   </a:tcPr>
                 </a:tc>
@@ -8644,8 +10290,9 @@
                       <a:pPr>
                         <a:defRPr b="1" sz="1100">
                           <a:solidFill>
-                            <a:srgbClr val="F8FAFC"/>
+                            <a:srgbClr val="FFFFFF"/>
                           </a:solidFill>
+                          <a:latin typeface="Calibri"/>
                         </a:defRPr>
                       </a:pPr>
                       <a:r>
@@ -8655,7 +10302,7 @@
                   </a:txBody>
                   <a:tcPr>
                     <a:solidFill>
-                      <a:srgbClr val="6366F1"/>
+                      <a:srgbClr val="4F46E5"/>
                     </a:solidFill>
                   </a:tcPr>
                 </a:tc>
@@ -8667,8 +10314,9 @@
                       <a:pPr>
                         <a:defRPr b="1" sz="1100">
                           <a:solidFill>
-                            <a:srgbClr val="F8FAFC"/>
+                            <a:srgbClr val="FFFFFF"/>
                           </a:solidFill>
+                          <a:latin typeface="Calibri"/>
                         </a:defRPr>
                       </a:pPr>
                       <a:r>
@@ -8678,7 +10326,7 @@
                   </a:txBody>
                   <a:tcPr>
                     <a:solidFill>
-                      <a:srgbClr val="6366F1"/>
+                      <a:srgbClr val="4F46E5"/>
                     </a:solidFill>
                   </a:tcPr>
                 </a:tc>
@@ -8690,10 +10338,11 @@
                     <a:lstStyle/>
                     <a:p>
                       <a:pPr>
-                        <a:defRPr sz="1000">
+                        <a:defRPr sz="1050">
                           <a:solidFill>
-                            <a:srgbClr val="F8FAFC"/>
+                            <a:srgbClr val="1E293B"/>
                           </a:solidFill>
+                          <a:latin typeface="Calibri"/>
                         </a:defRPr>
                       </a:pPr>
                       <a:r>
@@ -8703,7 +10352,7 @@
                   </a:txBody>
                   <a:tcPr>
                     <a:solidFill>
-                      <a:srgbClr val="1E293B"/>
+                      <a:srgbClr val="F8FAFC"/>
                     </a:solidFill>
                   </a:tcPr>
                 </a:tc>
@@ -8713,10 +10362,11 @@
                     <a:lstStyle/>
                     <a:p>
                       <a:pPr>
-                        <a:defRPr sz="1000">
+                        <a:defRPr sz="1050">
                           <a:solidFill>
-                            <a:srgbClr val="F8FAFC"/>
+                            <a:srgbClr val="1E293B"/>
                           </a:solidFill>
+                          <a:latin typeface="Calibri"/>
                         </a:defRPr>
                       </a:pPr>
                       <a:r>
@@ -8726,7 +10376,7 @@
                   </a:txBody>
                   <a:tcPr>
                     <a:solidFill>
-                      <a:srgbClr val="1E293B"/>
+                      <a:srgbClr val="F8FAFC"/>
                     </a:solidFill>
                   </a:tcPr>
                 </a:tc>
@@ -8736,10 +10386,11 @@
                     <a:lstStyle/>
                     <a:p>
                       <a:pPr>
-                        <a:defRPr sz="1000">
+                        <a:defRPr sz="1050">
                           <a:solidFill>
-                            <a:srgbClr val="F8FAFC"/>
+                            <a:srgbClr val="1E293B"/>
                           </a:solidFill>
+                          <a:latin typeface="Calibri"/>
                         </a:defRPr>
                       </a:pPr>
                       <a:r>
@@ -8749,7 +10400,7 @@
                   </a:txBody>
                   <a:tcPr>
                     <a:solidFill>
-                      <a:srgbClr val="1E293B"/>
+                      <a:srgbClr val="F8FAFC"/>
                     </a:solidFill>
                   </a:tcPr>
                 </a:tc>
@@ -8759,10 +10410,11 @@
                     <a:lstStyle/>
                     <a:p>
                       <a:pPr>
-                        <a:defRPr sz="1000">
+                        <a:defRPr sz="1050">
                           <a:solidFill>
-                            <a:srgbClr val="F8FAFC"/>
+                            <a:srgbClr val="1E293B"/>
                           </a:solidFill>
+                          <a:latin typeface="Calibri"/>
                         </a:defRPr>
                       </a:pPr>
                       <a:r>
@@ -8772,7 +10424,7 @@
                   </a:txBody>
                   <a:tcPr>
                     <a:solidFill>
-                      <a:srgbClr val="1E293B"/>
+                      <a:srgbClr val="F8FAFC"/>
                     </a:solidFill>
                   </a:tcPr>
                 </a:tc>
@@ -8784,10 +10436,11 @@
                     <a:lstStyle/>
                     <a:p>
                       <a:pPr>
-                        <a:defRPr sz="1000">
+                        <a:defRPr sz="1050">
                           <a:solidFill>
-                            <a:srgbClr val="F8FAFC"/>
+                            <a:srgbClr val="1E293B"/>
                           </a:solidFill>
+                          <a:latin typeface="Calibri"/>
                         </a:defRPr>
                       </a:pPr>
                       <a:r>
@@ -8797,7 +10450,7 @@
                   </a:txBody>
                   <a:tcPr>
                     <a:solidFill>
-                      <a:srgbClr val="1E293B"/>
+                      <a:srgbClr val="F8FAFC"/>
                     </a:solidFill>
                   </a:tcPr>
                 </a:tc>
@@ -8807,10 +10460,11 @@
                     <a:lstStyle/>
                     <a:p>
                       <a:pPr>
-                        <a:defRPr sz="1000">
+                        <a:defRPr sz="1050">
                           <a:solidFill>
-                            <a:srgbClr val="F8FAFC"/>
+                            <a:srgbClr val="1E293B"/>
                           </a:solidFill>
+                          <a:latin typeface="Calibri"/>
                         </a:defRPr>
                       </a:pPr>
                       <a:r>
@@ -8820,7 +10474,7 @@
                   </a:txBody>
                   <a:tcPr>
                     <a:solidFill>
-                      <a:srgbClr val="1E293B"/>
+                      <a:srgbClr val="F8FAFC"/>
                     </a:solidFill>
                   </a:tcPr>
                 </a:tc>
@@ -8830,10 +10484,11 @@
                     <a:lstStyle/>
                     <a:p>
                       <a:pPr>
-                        <a:defRPr sz="1000">
+                        <a:defRPr sz="1050">
                           <a:solidFill>
-                            <a:srgbClr val="F8FAFC"/>
+                            <a:srgbClr val="1E293B"/>
                           </a:solidFill>
+                          <a:latin typeface="Calibri"/>
                         </a:defRPr>
                       </a:pPr>
                       <a:r>
@@ -8843,7 +10498,7 @@
                   </a:txBody>
                   <a:tcPr>
                     <a:solidFill>
-                      <a:srgbClr val="1E293B"/>
+                      <a:srgbClr val="F8FAFC"/>
                     </a:solidFill>
                   </a:tcPr>
                 </a:tc>
@@ -8853,10 +10508,11 @@
                     <a:lstStyle/>
                     <a:p>
                       <a:pPr>
-                        <a:defRPr sz="1000">
+                        <a:defRPr sz="1050">
                           <a:solidFill>
-                            <a:srgbClr val="F8FAFC"/>
+                            <a:srgbClr val="1E293B"/>
                           </a:solidFill>
+                          <a:latin typeface="Calibri"/>
                         </a:defRPr>
                       </a:pPr>
                       <a:r>
@@ -8866,7 +10522,7 @@
                   </a:txBody>
                   <a:tcPr>
                     <a:solidFill>
-                      <a:srgbClr val="1E293B"/>
+                      <a:srgbClr val="F8FAFC"/>
                     </a:solidFill>
                   </a:tcPr>
                 </a:tc>
@@ -8878,10 +10534,11 @@
                     <a:lstStyle/>
                     <a:p>
                       <a:pPr>
-                        <a:defRPr sz="1000">
+                        <a:defRPr sz="1050">
                           <a:solidFill>
-                            <a:srgbClr val="F8FAFC"/>
+                            <a:srgbClr val="1E293B"/>
                           </a:solidFill>
+                          <a:latin typeface="Calibri"/>
                         </a:defRPr>
                       </a:pPr>
                       <a:r>
@@ -8891,7 +10548,7 @@
                   </a:txBody>
                   <a:tcPr>
                     <a:solidFill>
-                      <a:srgbClr val="1E293B"/>
+                      <a:srgbClr val="F8FAFC"/>
                     </a:solidFill>
                   </a:tcPr>
                 </a:tc>
@@ -8901,10 +10558,11 @@
                     <a:lstStyle/>
                     <a:p>
                       <a:pPr>
-                        <a:defRPr sz="1000">
+                        <a:defRPr sz="1050">
                           <a:solidFill>
-                            <a:srgbClr val="F8FAFC"/>
+                            <a:srgbClr val="1E293B"/>
                           </a:solidFill>
+                          <a:latin typeface="Calibri"/>
                         </a:defRPr>
                       </a:pPr>
                       <a:r>
@@ -8914,7 +10572,7 @@
                   </a:txBody>
                   <a:tcPr>
                     <a:solidFill>
-                      <a:srgbClr val="1E293B"/>
+                      <a:srgbClr val="F8FAFC"/>
                     </a:solidFill>
                   </a:tcPr>
                 </a:tc>
@@ -8924,10 +10582,11 @@
                     <a:lstStyle/>
                     <a:p>
                       <a:pPr>
-                        <a:defRPr sz="1000">
+                        <a:defRPr sz="1050">
                           <a:solidFill>
-                            <a:srgbClr val="F8FAFC"/>
+                            <a:srgbClr val="1E293B"/>
                           </a:solidFill>
+                          <a:latin typeface="Calibri"/>
                         </a:defRPr>
                       </a:pPr>
                       <a:r>
@@ -8937,7 +10596,7 @@
                   </a:txBody>
                   <a:tcPr>
                     <a:solidFill>
-                      <a:srgbClr val="1E293B"/>
+                      <a:srgbClr val="F8FAFC"/>
                     </a:solidFill>
                   </a:tcPr>
                 </a:tc>
@@ -8947,20 +10606,21 @@
                     <a:lstStyle/>
                     <a:p>
                       <a:pPr>
-                        <a:defRPr sz="1000">
+                        <a:defRPr sz="1050">
                           <a:solidFill>
-                            <a:srgbClr val="F8FAFC"/>
+                            <a:srgbClr val="1E293B"/>
                           </a:solidFill>
+                          <a:latin typeface="Calibri"/>
                         </a:defRPr>
                       </a:pPr>
                       <a:r>
-                        <a:t>High subscription cost, steep learning curve, no vernacular voice soundbox.</a:t>
+                        <a:t>High subscription cost, steep learning curve, no regional Gujarati voice soundbox.</a:t>
                       </a:r>
                     </a:p>
                   </a:txBody>
                   <a:tcPr>
                     <a:solidFill>
-                      <a:srgbClr val="1E293B"/>
+                      <a:srgbClr val="F8FAFC"/>
                     </a:solidFill>
                   </a:tcPr>
                 </a:tc>
@@ -8972,10 +10632,11 @@
                     <a:lstStyle/>
                     <a:p>
                       <a:pPr>
-                        <a:defRPr sz="1000">
+                        <a:defRPr sz="1050">
                           <a:solidFill>
-                            <a:srgbClr val="F8FAFC"/>
+                            <a:srgbClr val="1E293B"/>
                           </a:solidFill>
+                          <a:latin typeface="Calibri"/>
                         </a:defRPr>
                       </a:pPr>
                       <a:r>
@@ -8985,7 +10646,7 @@
                   </a:txBody>
                   <a:tcPr>
                     <a:solidFill>
-                      <a:srgbClr val="1E293B"/>
+                      <a:srgbClr val="F8FAFC"/>
                     </a:solidFill>
                   </a:tcPr>
                 </a:tc>
@@ -8995,10 +10656,11 @@
                     <a:lstStyle/>
                     <a:p>
                       <a:pPr>
-                        <a:defRPr sz="1000">
+                        <a:defRPr sz="1050">
                           <a:solidFill>
-                            <a:srgbClr val="F8FAFC"/>
+                            <a:srgbClr val="1E293B"/>
                           </a:solidFill>
+                          <a:latin typeface="Calibri"/>
                         </a:defRPr>
                       </a:pPr>
                       <a:r>
@@ -9008,7 +10670,7 @@
                   </a:txBody>
                   <a:tcPr>
                     <a:solidFill>
-                      <a:srgbClr val="1E293B"/>
+                      <a:srgbClr val="F8FAFC"/>
                     </a:solidFill>
                   </a:tcPr>
                 </a:tc>
@@ -9018,10 +10680,11 @@
                     <a:lstStyle/>
                     <a:p>
                       <a:pPr>
-                        <a:defRPr sz="1000">
+                        <a:defRPr sz="1050">
                           <a:solidFill>
-                            <a:srgbClr val="F8FAFC"/>
+                            <a:srgbClr val="1E293B"/>
                           </a:solidFill>
+                          <a:latin typeface="Calibri"/>
                         </a:defRPr>
                       </a:pPr>
                       <a:r>
@@ -9031,7 +10694,7 @@
                   </a:txBody>
                   <a:tcPr>
                     <a:solidFill>
-                      <a:srgbClr val="1E293B"/>
+                      <a:srgbClr val="F8FAFC"/>
                     </a:solidFill>
                   </a:tcPr>
                 </a:tc>
@@ -9041,10 +10704,11 @@
                     <a:lstStyle/>
                     <a:p>
                       <a:pPr>
-                        <a:defRPr sz="1000">
+                        <a:defRPr sz="1050">
                           <a:solidFill>
-                            <a:srgbClr val="F8FAFC"/>
+                            <a:srgbClr val="1E293B"/>
                           </a:solidFill>
+                          <a:latin typeface="Calibri"/>
                         </a:defRPr>
                       </a:pPr>
                       <a:r>
@@ -9054,7 +10718,7 @@
                   </a:txBody>
                   <a:tcPr>
                     <a:solidFill>
-                      <a:srgbClr val="1E293B"/>
+                      <a:srgbClr val="F8FAFC"/>
                     </a:solidFill>
                   </a:tcPr>
                 </a:tc>
@@ -9065,14 +10729,14 @@
       </p:graphicFrame>
       <p:sp>
         <p:nvSpPr>
-          <p:cNvPr id="6" name="TextBox 5"/>
+          <p:cNvPr id="9" name="TextBox 8"/>
           <p:cNvSpPr txBox="1"/>
           <p:nvPr/>
         </p:nvSpPr>
         <p:spPr>
           <a:xfrm>
-            <a:off x="914400" y="5303520"/>
-            <a:ext cx="10332720" cy="1097280"/>
+            <a:off x="914400" y="5120640"/>
+            <a:ext cx="10362895" cy="1280160"/>
           </a:xfrm>
           <a:prstGeom prst="rect">
             <a:avLst/>
@@ -9090,6 +10754,7 @@
                 <a:solidFill>
                   <a:srgbClr val="10B981"/>
                 </a:solidFill>
+                <a:latin typeface="Calibri"/>
               </a:defRPr>
             </a:pPr>
             <a:r>
@@ -9100,12 +10765,13 @@
             <a:pPr>
               <a:defRPr sz="1150">
                 <a:solidFill>
-                  <a:srgbClr val="F8FAFC"/>
-                </a:solidFill>
-              </a:defRPr>
-            </a:pPr>
-            <a:r>
-              <a:t>Existing solutions are either expensive and locked to proprietary hardware or limited to clunky offline desktop apps. There is a clear market need for an affordable, hardware-agnostic Cloud PWA POS combining instantaneous QR table ordering, live KDS, raw-material recipe costing, and regional Gujarati voice alerts.</a:t>
+                  <a:srgbClr val="1E293B"/>
+                </a:solidFill>
+                <a:latin typeface="Calibri"/>
+              </a:defRPr>
+            </a:pPr>
+            <a:r>
+              <a:t>Existing solutions are either expensive and locked to proprietary hardware or limited to clunky offline desktop software. There is a clear market need for an affordable, hardware-agnostic Cloud PWA POS combining instantaneous QR table ordering, live KDS, raw-material recipe costing, and regional Gujarati voice alerts.</a:t>
             </a:r>
           </a:p>
         </p:txBody>
@@ -9143,7 +10809,7 @@
             <a:avLst/>
           </a:prstGeom>
           <a:solidFill>
-            <a:srgbClr val="0F172A"/>
+            <a:srgbClr val="FFFFFF"/>
           </a:solidFill>
           <a:ln>
             <a:noFill/>
@@ -9173,14 +10839,57 @@
       </p:sp>
       <p:sp>
         <p:nvSpPr>
-          <p:cNvPr id="3" name="TextBox 2"/>
+          <p:cNvPr id="3" name="Rectangle 2"/>
+          <p:cNvSpPr/>
+          <p:nvPr/>
+        </p:nvSpPr>
+        <p:spPr>
+          <a:xfrm>
+            <a:off x="0" y="0"/>
+            <a:ext cx="12191695" cy="73152"/>
+          </a:xfrm>
+          <a:prstGeom prst="rect">
+            <a:avLst/>
+          </a:prstGeom>
+          <a:solidFill>
+            <a:srgbClr val="4F46E5"/>
+          </a:solidFill>
+          <a:ln>
+            <a:noFill/>
+          </a:ln>
+        </p:spPr>
+        <p:style>
+          <a:lnRef idx="1">
+            <a:schemeClr val="accent1"/>
+          </a:lnRef>
+          <a:fillRef idx="3">
+            <a:schemeClr val="accent1"/>
+          </a:fillRef>
+          <a:effectRef idx="2">
+            <a:schemeClr val="accent1"/>
+          </a:effectRef>
+          <a:fontRef idx="minor">
+            <a:schemeClr val="lt1"/>
+          </a:fontRef>
+        </p:style>
+        <p:txBody>
+          <a:bodyPr rtlCol="0" anchor="ctr"/>
+          <a:lstStyle/>
+          <a:p>
+            <a:pPr algn="ctr"/>
+          </a:p>
+        </p:txBody>
+      </p:sp>
+      <p:sp>
+        <p:nvSpPr>
+          <p:cNvPr id="4" name="TextBox 3"/>
           <p:cNvSpPr txBox="1"/>
           <p:nvPr/>
         </p:nvSpPr>
         <p:spPr>
           <a:xfrm>
-            <a:off x="731520" y="365760"/>
-            <a:ext cx="10698480" cy="822960"/>
+            <a:off x="731520" y="320040"/>
+            <a:ext cx="7772400" cy="777240"/>
           </a:xfrm>
           <a:prstGeom prst="rect">
             <a:avLst/>
@@ -9194,29 +10903,77 @@
           <a:lstStyle/>
           <a:p>
             <a:pPr>
-              <a:defRPr sz="2600" b="1">
-                <a:solidFill>
-                  <a:srgbClr val="F8FAFC"/>
-                </a:solidFill>
-                <a:latin typeface="Segoe UI"/>
-              </a:defRPr>
-            </a:pPr>
-            <a:r>
-              <a:t>Alternative Solutions &amp; Selection Justification</a:t>
-            </a:r>
-          </a:p>
-        </p:txBody>
-      </p:sp>
-      <p:sp>
-        <p:nvSpPr>
-          <p:cNvPr id="4" name="TextBox 3"/>
+              <a:defRPr sz="2400" b="1">
+                <a:solidFill>
+                  <a:srgbClr val="0F172A"/>
+                </a:solidFill>
+                <a:latin typeface="Calibri"/>
+              </a:defRPr>
+            </a:pPr>
+            <a:r>
+              <a:t>Alternative Solutions and Selection</a:t>
+            </a:r>
+          </a:p>
+        </p:txBody>
+      </p:sp>
+      <p:pic>
+        <p:nvPicPr>
+          <p:cNvPr id="5" name="Picture 4" descr="gtu_logo.png"/>
+          <p:cNvPicPr>
+            <a:picLocks noChangeAspect="1"/>
+          </p:cNvPicPr>
+          <p:nvPr/>
+        </p:nvPicPr>
+        <p:blipFill>
+          <a:blip r:embed="rId2"/>
+          <a:stretch>
+            <a:fillRect/>
+          </a:stretch>
+        </p:blipFill>
+        <p:spPr>
+          <a:xfrm>
+            <a:off x="10241280" y="182880"/>
+            <a:ext cx="731520" cy="822960"/>
+          </a:xfrm>
+          <a:prstGeom prst="rect">
+            <a:avLst/>
+          </a:prstGeom>
+        </p:spPr>
+      </p:pic>
+      <p:pic>
+        <p:nvPicPr>
+          <p:cNvPr id="6" name="Picture 5" descr="kdp_patan_logo.png"/>
+          <p:cNvPicPr>
+            <a:picLocks noChangeAspect="1"/>
+          </p:cNvPicPr>
+          <p:nvPr/>
+        </p:nvPicPr>
+        <p:blipFill>
+          <a:blip r:embed="rId3"/>
+          <a:stretch>
+            <a:fillRect/>
+          </a:stretch>
+        </p:blipFill>
+        <p:spPr>
+          <a:xfrm>
+            <a:off x="11155680" y="182880"/>
+            <a:ext cx="777240" cy="777240"/>
+          </a:xfrm>
+          <a:prstGeom prst="rect">
+            <a:avLst/>
+          </a:prstGeom>
+        </p:spPr>
+      </p:pic>
+      <p:sp>
+        <p:nvSpPr>
+          <p:cNvPr id="7" name="TextBox 6"/>
           <p:cNvSpPr txBox="1"/>
           <p:nvPr/>
         </p:nvSpPr>
         <p:spPr>
           <a:xfrm>
-            <a:off x="8412480" y="411480"/>
-            <a:ext cx="3017520" cy="365760"/>
+            <a:off x="731520" y="960120"/>
+            <a:ext cx="9144000" cy="320040"/>
           </a:xfrm>
           <a:prstGeom prst="rect">
             <a:avLst/>
@@ -9229,30 +10986,30 @@
           </a:bodyPr>
           <a:lstStyle/>
           <a:p>
-            <a:pPr algn="r">
-              <a:defRPr sz="1100" b="1">
-                <a:solidFill>
-                  <a:srgbClr val="6366F1"/>
-                </a:solidFill>
-                <a:latin typeface="Segoe UI"/>
-              </a:defRPr>
-            </a:pPr>
-            <a:r>
-              <a:t>Minor Project | DI05000341 | Slide 6</a:t>
+            <a:pPr>
+              <a:defRPr sz="1050" b="1">
+                <a:solidFill>
+                  <a:srgbClr val="4F46E5"/>
+                </a:solidFill>
+                <a:latin typeface="Calibri"/>
+              </a:defRPr>
+            </a:pPr>
+            <a:r>
+              <a:t>K. D. Polytechnic, Patan | Department of Computer Engineering | Minor Project (DI05000341) | Slide 6</a:t>
             </a:r>
           </a:p>
         </p:txBody>
       </p:sp>
       <p:graphicFrame>
         <p:nvGraphicFramePr>
-          <p:cNvPr id="5" name="Table 4"/>
+          <p:cNvPr id="8" name="Table 7"/>
           <p:cNvGraphicFramePr>
             <a:graphicFrameLocks noGrp="1"/>
           </p:cNvGraphicFramePr>
           <p:nvPr/>
         </p:nvGraphicFramePr>
         <p:xfrm>
-          <a:off x="914400" y="1463040"/>
+          <a:off x="914400" y="1371600"/>
           <a:ext cx="10332720" cy="3474720"/>
         </p:xfrm>
         <a:graphic>
@@ -9276,8 +11033,9 @@
                       <a:pPr>
                         <a:defRPr b="1" sz="1050">
                           <a:solidFill>
-                            <a:srgbClr val="F8FAFC"/>
+                            <a:srgbClr val="FFFFFF"/>
                           </a:solidFill>
+                          <a:latin typeface="Calibri"/>
                         </a:defRPr>
                       </a:pPr>
                       <a:r>
@@ -9287,7 +11045,7 @@
                   </a:txBody>
                   <a:tcPr>
                     <a:solidFill>
-                      <a:srgbClr val="6366F1"/>
+                      <a:srgbClr val="4F46E5"/>
                     </a:solidFill>
                   </a:tcPr>
                 </a:tc>
@@ -9299,8 +11057,9 @@
                       <a:pPr>
                         <a:defRPr b="1" sz="1050">
                           <a:solidFill>
-                            <a:srgbClr val="F8FAFC"/>
+                            <a:srgbClr val="FFFFFF"/>
                           </a:solidFill>
+                          <a:latin typeface="Calibri"/>
                         </a:defRPr>
                       </a:pPr>
                       <a:r>
@@ -9310,7 +11069,7 @@
                   </a:txBody>
                   <a:tcPr>
                     <a:solidFill>
-                      <a:srgbClr val="6366F1"/>
+                      <a:srgbClr val="4F46E5"/>
                     </a:solidFill>
                   </a:tcPr>
                 </a:tc>
@@ -9322,8 +11081,9 @@
                       <a:pPr>
                         <a:defRPr b="1" sz="1050">
                           <a:solidFill>
-                            <a:srgbClr val="F8FAFC"/>
+                            <a:srgbClr val="FFFFFF"/>
                           </a:solidFill>
+                          <a:latin typeface="Calibri"/>
                         </a:defRPr>
                       </a:pPr>
                       <a:r>
@@ -9333,7 +11093,7 @@
                   </a:txBody>
                   <a:tcPr>
                     <a:solidFill>
-                      <a:srgbClr val="6366F1"/>
+                      <a:srgbClr val="4F46E5"/>
                     </a:solidFill>
                   </a:tcPr>
                 </a:tc>
@@ -9345,8 +11105,9 @@
                       <a:pPr>
                         <a:defRPr b="1" sz="1050">
                           <a:solidFill>
-                            <a:srgbClr val="F8FAFC"/>
+                            <a:srgbClr val="FFFFFF"/>
                           </a:solidFill>
+                          <a:latin typeface="Calibri"/>
                         </a:defRPr>
                       </a:pPr>
                       <a:r>
@@ -9356,7 +11117,7 @@
                   </a:txBody>
                   <a:tcPr>
                     <a:solidFill>
-                      <a:srgbClr val="6366F1"/>
+                      <a:srgbClr val="4F46E5"/>
                     </a:solidFill>
                   </a:tcPr>
                 </a:tc>
@@ -9368,10 +11129,11 @@
                     <a:lstStyle/>
                     <a:p>
                       <a:pPr>
-                        <a:defRPr sz="1000">
+                        <a:defRPr sz="1050">
                           <a:solidFill>
-                            <a:srgbClr val="F8FAFC"/>
+                            <a:srgbClr val="1E293B"/>
                           </a:solidFill>
+                          <a:latin typeface="Calibri"/>
                         </a:defRPr>
                       </a:pPr>
                       <a:r>
@@ -9381,7 +11143,7 @@
                   </a:txBody>
                   <a:tcPr>
                     <a:solidFill>
-                      <a:srgbClr val="1E293B"/>
+                      <a:srgbClr val="F8FAFC"/>
                     </a:solidFill>
                   </a:tcPr>
                 </a:tc>
@@ -9391,10 +11153,11 @@
                     <a:lstStyle/>
                     <a:p>
                       <a:pPr>
-                        <a:defRPr sz="1000">
+                        <a:defRPr sz="1050">
                           <a:solidFill>
-                            <a:srgbClr val="F8FAFC"/>
+                            <a:srgbClr val="1E293B"/>
                           </a:solidFill>
+                          <a:latin typeface="Calibri"/>
                         </a:defRPr>
                       </a:pPr>
                       <a:r>
@@ -9404,7 +11167,7 @@
                   </a:txBody>
                   <a:tcPr>
                     <a:solidFill>
-                      <a:srgbClr val="1E293B"/>
+                      <a:srgbClr val="F8FAFC"/>
                     </a:solidFill>
                   </a:tcPr>
                 </a:tc>
@@ -9414,10 +11177,11 @@
                     <a:lstStyle/>
                     <a:p>
                       <a:pPr>
-                        <a:defRPr sz="1000">
+                        <a:defRPr sz="1050">
                           <a:solidFill>
-                            <a:srgbClr val="F8FAFC"/>
+                            <a:srgbClr val="1E293B"/>
                           </a:solidFill>
+                          <a:latin typeface="Calibri"/>
                         </a:defRPr>
                       </a:pPr>
                       <a:r>
@@ -9427,7 +11191,7 @@
                   </a:txBody>
                   <a:tcPr>
                     <a:solidFill>
-                      <a:srgbClr val="1E293B"/>
+                      <a:srgbClr val="F8FAFC"/>
                     </a:solidFill>
                   </a:tcPr>
                 </a:tc>
@@ -9437,10 +11201,11 @@
                     <a:lstStyle/>
                     <a:p>
                       <a:pPr>
-                        <a:defRPr sz="1000">
+                        <a:defRPr sz="1050">
                           <a:solidFill>
-                            <a:srgbClr val="F8FAFC"/>
+                            <a:srgbClr val="1E293B"/>
                           </a:solidFill>
+                          <a:latin typeface="Calibri"/>
                         </a:defRPr>
                       </a:pPr>
                       <a:r>
@@ -9450,7 +11215,7 @@
                   </a:txBody>
                   <a:tcPr>
                     <a:solidFill>
-                      <a:srgbClr val="1E293B"/>
+                      <a:srgbClr val="F8FAFC"/>
                     </a:solidFill>
                   </a:tcPr>
                 </a:tc>
@@ -9462,10 +11227,11 @@
                     <a:lstStyle/>
                     <a:p>
                       <a:pPr>
-                        <a:defRPr sz="1000">
+                        <a:defRPr sz="1050">
                           <a:solidFill>
-                            <a:srgbClr val="F8FAFC"/>
+                            <a:srgbClr val="1E293B"/>
                           </a:solidFill>
+                          <a:latin typeface="Calibri"/>
                         </a:defRPr>
                       </a:pPr>
                       <a:r>
@@ -9475,7 +11241,7 @@
                   </a:txBody>
                   <a:tcPr>
                     <a:solidFill>
-                      <a:srgbClr val="1E293B"/>
+                      <a:srgbClr val="F8FAFC"/>
                     </a:solidFill>
                   </a:tcPr>
                 </a:tc>
@@ -9485,10 +11251,11 @@
                     <a:lstStyle/>
                     <a:p>
                       <a:pPr>
-                        <a:defRPr sz="1000">
+                        <a:defRPr sz="1050">
                           <a:solidFill>
-                            <a:srgbClr val="F8FAFC"/>
+                            <a:srgbClr val="1E293B"/>
                           </a:solidFill>
+                          <a:latin typeface="Calibri"/>
                         </a:defRPr>
                       </a:pPr>
                       <a:r>
@@ -9498,7 +11265,7 @@
                   </a:txBody>
                   <a:tcPr>
                     <a:solidFill>
-                      <a:srgbClr val="1E293B"/>
+                      <a:srgbClr val="F8FAFC"/>
                     </a:solidFill>
                   </a:tcPr>
                 </a:tc>
@@ -9508,10 +11275,11 @@
                     <a:lstStyle/>
                     <a:p>
                       <a:pPr>
-                        <a:defRPr sz="1000">
+                        <a:defRPr sz="1050">
                           <a:solidFill>
-                            <a:srgbClr val="F8FAFC"/>
+                            <a:srgbClr val="1E293B"/>
                           </a:solidFill>
+                          <a:latin typeface="Calibri"/>
                         </a:defRPr>
                       </a:pPr>
                       <a:r>
@@ -9521,7 +11289,7 @@
                   </a:txBody>
                   <a:tcPr>
                     <a:solidFill>
-                      <a:srgbClr val="1E293B"/>
+                      <a:srgbClr val="F8FAFC"/>
                     </a:solidFill>
                   </a:tcPr>
                 </a:tc>
@@ -9531,10 +11299,11 @@
                     <a:lstStyle/>
                     <a:p>
                       <a:pPr>
-                        <a:defRPr sz="1000">
+                        <a:defRPr sz="1050">
                           <a:solidFill>
-                            <a:srgbClr val="F8FAFC"/>
+                            <a:srgbClr val="1E293B"/>
                           </a:solidFill>
+                          <a:latin typeface="Calibri"/>
                         </a:defRPr>
                       </a:pPr>
                       <a:r>
@@ -9544,7 +11313,7 @@
                   </a:txBody>
                   <a:tcPr>
                     <a:solidFill>
-                      <a:srgbClr val="1E293B"/>
+                      <a:srgbClr val="F8FAFC"/>
                     </a:solidFill>
                   </a:tcPr>
                 </a:tc>
@@ -9556,10 +11325,11 @@
                     <a:lstStyle/>
                     <a:p>
                       <a:pPr>
-                        <a:defRPr sz="1000">
+                        <a:defRPr sz="1050">
                           <a:solidFill>
-                            <a:srgbClr val="F8FAFC"/>
+                            <a:srgbClr val="1E293B"/>
                           </a:solidFill>
+                          <a:latin typeface="Calibri"/>
                         </a:defRPr>
                       </a:pPr>
                       <a:r>
@@ -9569,7 +11339,7 @@
                   </a:txBody>
                   <a:tcPr>
                     <a:solidFill>
-                      <a:srgbClr val="1E293B"/>
+                      <a:srgbClr val="F8FAFC"/>
                     </a:solidFill>
                   </a:tcPr>
                 </a:tc>
@@ -9579,10 +11349,11 @@
                     <a:lstStyle/>
                     <a:p>
                       <a:pPr>
-                        <a:defRPr sz="1000">
+                        <a:defRPr sz="1050">
                           <a:solidFill>
-                            <a:srgbClr val="F8FAFC"/>
+                            <a:srgbClr val="1E293B"/>
                           </a:solidFill>
+                          <a:latin typeface="Calibri"/>
                         </a:defRPr>
                       </a:pPr>
                       <a:r>
@@ -9592,7 +11363,7 @@
                   </a:txBody>
                   <a:tcPr>
                     <a:solidFill>
-                      <a:srgbClr val="1E293B"/>
+                      <a:srgbClr val="F8FAFC"/>
                     </a:solidFill>
                   </a:tcPr>
                 </a:tc>
@@ -9602,10 +11373,11 @@
                     <a:lstStyle/>
                     <a:p>
                       <a:pPr>
-                        <a:defRPr sz="1000">
+                        <a:defRPr sz="1050">
                           <a:solidFill>
-                            <a:srgbClr val="F8FAFC"/>
+                            <a:srgbClr val="1E293B"/>
                           </a:solidFill>
+                          <a:latin typeface="Calibri"/>
                         </a:defRPr>
                       </a:pPr>
                       <a:r>
@@ -9615,7 +11387,7 @@
                   </a:txBody>
                   <a:tcPr>
                     <a:solidFill>
-                      <a:srgbClr val="1E293B"/>
+                      <a:srgbClr val="F8FAFC"/>
                     </a:solidFill>
                   </a:tcPr>
                 </a:tc>
@@ -9625,10 +11397,11 @@
                     <a:lstStyle/>
                     <a:p>
                       <a:pPr>
-                        <a:defRPr sz="1000">
+                        <a:defRPr sz="1050">
                           <a:solidFill>
-                            <a:srgbClr val="F8FAFC"/>
+                            <a:srgbClr val="1E293B"/>
                           </a:solidFill>
+                          <a:latin typeface="Calibri"/>
                         </a:defRPr>
                       </a:pPr>
                       <a:r>
@@ -9638,7 +11411,7 @@
                   </a:txBody>
                   <a:tcPr>
                     <a:solidFill>
-                      <a:srgbClr val="1E293B"/>
+                      <a:srgbClr val="F8FAFC"/>
                     </a:solidFill>
                   </a:tcPr>
                 </a:tc>
@@ -9650,10 +11423,11 @@
                     <a:lstStyle/>
                     <a:p>
                       <a:pPr>
-                        <a:defRPr sz="1000">
+                        <a:defRPr sz="1050">
                           <a:solidFill>
-                            <a:srgbClr val="F8FAFC"/>
+                            <a:srgbClr val="1E293B"/>
                           </a:solidFill>
+                          <a:latin typeface="Calibri"/>
                         </a:defRPr>
                       </a:pPr>
                       <a:r>
@@ -9663,7 +11437,7 @@
                   </a:txBody>
                   <a:tcPr>
                     <a:solidFill>
-                      <a:srgbClr val="1E293B"/>
+                      <a:srgbClr val="F8FAFC"/>
                     </a:solidFill>
                   </a:tcPr>
                 </a:tc>
@@ -9673,10 +11447,11 @@
                     <a:lstStyle/>
                     <a:p>
                       <a:pPr>
-                        <a:defRPr sz="1000">
+                        <a:defRPr sz="1050">
                           <a:solidFill>
-                            <a:srgbClr val="F8FAFC"/>
+                            <a:srgbClr val="1E293B"/>
                           </a:solidFill>
+                          <a:latin typeface="Calibri"/>
                         </a:defRPr>
                       </a:pPr>
                       <a:r>
@@ -9686,7 +11461,7 @@
                   </a:txBody>
                   <a:tcPr>
                     <a:solidFill>
-                      <a:srgbClr val="1E293B"/>
+                      <a:srgbClr val="F8FAFC"/>
                     </a:solidFill>
                   </a:tcPr>
                 </a:tc>
@@ -9696,10 +11471,11 @@
                     <a:lstStyle/>
                     <a:p>
                       <a:pPr>
-                        <a:defRPr sz="1000">
+                        <a:defRPr sz="1050">
                           <a:solidFill>
-                            <a:srgbClr val="F8FAFC"/>
+                            <a:srgbClr val="1E293B"/>
                           </a:solidFill>
+                          <a:latin typeface="Calibri"/>
                         </a:defRPr>
                       </a:pPr>
                       <a:r>
@@ -9709,7 +11485,7 @@
                   </a:txBody>
                   <a:tcPr>
                     <a:solidFill>
-                      <a:srgbClr val="1E293B"/>
+                      <a:srgbClr val="F8FAFC"/>
                     </a:solidFill>
                   </a:tcPr>
                 </a:tc>
@@ -9719,10 +11495,11 @@
                     <a:lstStyle/>
                     <a:p>
                       <a:pPr>
-                        <a:defRPr sz="1000">
+                        <a:defRPr sz="1050">
                           <a:solidFill>
-                            <a:srgbClr val="F8FAFC"/>
+                            <a:srgbClr val="1E293B"/>
                           </a:solidFill>
+                          <a:latin typeface="Calibri"/>
                         </a:defRPr>
                       </a:pPr>
                       <a:r>
@@ -9732,7 +11509,7 @@
                   </a:txBody>
                   <a:tcPr>
                     <a:solidFill>
-                      <a:srgbClr val="1E293B"/>
+                      <a:srgbClr val="F8FAFC"/>
                     </a:solidFill>
                   </a:tcPr>
                 </a:tc>
@@ -9743,14 +11520,14 @@
       </p:graphicFrame>
       <p:sp>
         <p:nvSpPr>
-          <p:cNvPr id="6" name="TextBox 5"/>
+          <p:cNvPr id="9" name="TextBox 8"/>
           <p:cNvSpPr txBox="1"/>
           <p:nvPr/>
         </p:nvSpPr>
         <p:spPr>
           <a:xfrm>
-            <a:off x="914400" y="5303520"/>
-            <a:ext cx="10332720" cy="1097280"/>
+            <a:off x="914400" y="5120640"/>
+            <a:ext cx="10362895" cy="1280160"/>
           </a:xfrm>
           <a:prstGeom prst="rect">
             <a:avLst/>
@@ -9768,6 +11545,7 @@
                 <a:solidFill>
                   <a:srgbClr val="10B981"/>
                 </a:solidFill>
+                <a:latin typeface="Calibri"/>
               </a:defRPr>
             </a:pPr>
             <a:r>
@@ -9778,8 +11556,9 @@
             <a:pPr>
               <a:defRPr sz="1150">
                 <a:solidFill>
-                  <a:srgbClr val="F8FAFC"/>
-                </a:solidFill>
+                  <a:srgbClr val="1E293B"/>
+                </a:solidFill>
+                <a:latin typeface="Calibri"/>
               </a:defRPr>
             </a:pPr>
             <a:r>
@@ -9821,7 +11600,7 @@
             <a:avLst/>
           </a:prstGeom>
           <a:solidFill>
-            <a:srgbClr val="0F172A"/>
+            <a:srgbClr val="FFFFFF"/>
           </a:solidFill>
           <a:ln>
             <a:noFill/>
@@ -9851,97 +11630,23 @@
       </p:sp>
       <p:sp>
         <p:nvSpPr>
-          <p:cNvPr id="3" name="TextBox 2"/>
-          <p:cNvSpPr txBox="1"/>
-          <p:nvPr/>
-        </p:nvSpPr>
-        <p:spPr>
-          <a:xfrm>
-            <a:off x="731520" y="365760"/>
-            <a:ext cx="10698480" cy="822960"/>
+          <p:cNvPr id="3" name="Rectangle 2"/>
+          <p:cNvSpPr/>
+          <p:nvPr/>
+        </p:nvSpPr>
+        <p:spPr>
+          <a:xfrm>
+            <a:off x="0" y="0"/>
+            <a:ext cx="12191695" cy="73152"/>
           </a:xfrm>
           <a:prstGeom prst="rect">
             <a:avLst/>
           </a:prstGeom>
-          <a:noFill/>
-        </p:spPr>
-        <p:txBody>
-          <a:bodyPr wrap="square">
-            <a:spAutoFit/>
-          </a:bodyPr>
-          <a:lstStyle/>
-          <a:p>
-            <a:pPr>
-              <a:defRPr sz="2600" b="1">
-                <a:solidFill>
-                  <a:srgbClr val="F8FAFC"/>
-                </a:solidFill>
-                <a:latin typeface="Segoe UI"/>
-              </a:defRPr>
-            </a:pPr>
-            <a:r>
-              <a:t>System Design: General Block Diagram</a:t>
-            </a:r>
-          </a:p>
-        </p:txBody>
-      </p:sp>
-      <p:sp>
-        <p:nvSpPr>
-          <p:cNvPr id="4" name="TextBox 3"/>
-          <p:cNvSpPr txBox="1"/>
-          <p:nvPr/>
-        </p:nvSpPr>
-        <p:spPr>
-          <a:xfrm>
-            <a:off x="8412480" y="411480"/>
-            <a:ext cx="3017520" cy="365760"/>
-          </a:xfrm>
-          <a:prstGeom prst="rect">
-            <a:avLst/>
-          </a:prstGeom>
-          <a:noFill/>
-        </p:spPr>
-        <p:txBody>
-          <a:bodyPr wrap="none">
-            <a:spAutoFit/>
-          </a:bodyPr>
-          <a:lstStyle/>
-          <a:p>
-            <a:pPr algn="r">
-              <a:defRPr sz="1100" b="1">
-                <a:solidFill>
-                  <a:srgbClr val="6366F1"/>
-                </a:solidFill>
-                <a:latin typeface="Segoe UI"/>
-              </a:defRPr>
-            </a:pPr>
-            <a:r>
-              <a:t>Minor Project | DI05000341 | Slide 7</a:t>
-            </a:r>
-          </a:p>
-        </p:txBody>
-      </p:sp>
-      <p:sp>
-        <p:nvSpPr>
-          <p:cNvPr id="5" name="Rounded Rectangle 4"/>
-          <p:cNvSpPr/>
-          <p:nvPr/>
-        </p:nvSpPr>
-        <p:spPr>
-          <a:xfrm>
-            <a:off x="914400" y="1645920"/>
-            <a:ext cx="3291840" cy="4114800"/>
-          </a:xfrm>
-          <a:prstGeom prst="roundRect">
-            <a:avLst/>
-          </a:prstGeom>
           <a:solidFill>
-            <a:srgbClr val="1E293B"/>
+            <a:srgbClr val="4F46E5"/>
           </a:solidFill>
           <a:ln>
-            <a:solidFill>
-              <a:srgbClr val="6366F1"/>
-            </a:solidFill>
+            <a:noFill/>
           </a:ln>
         </p:spPr>
         <p:style>
@@ -9959,66 +11664,153 @@
           </a:fontRef>
         </p:style>
         <p:txBody>
-          <a:bodyPr rtlCol="0" anchor="ctr" wrap="square"/>
-          <a:lstStyle/>
-          <a:p>
-            <a:pPr algn="ctr">
-              <a:defRPr b="1" sz="1400">
-                <a:solidFill>
-                  <a:srgbClr val="F59E0B"/>
-                </a:solidFill>
-              </a:defRPr>
-            </a:pPr>
-            <a:r>
-              <a:t>INPUT TIER</a:t>
-            </a:r>
-          </a:p>
+          <a:bodyPr rtlCol="0" anchor="ctr"/>
+          <a:lstStyle/>
+          <a:p>
+            <a:pPr algn="ctr"/>
+          </a:p>
+        </p:txBody>
+      </p:sp>
+      <p:sp>
+        <p:nvSpPr>
+          <p:cNvPr id="4" name="TextBox 3"/>
+          <p:cNvSpPr txBox="1"/>
+          <p:nvPr/>
+        </p:nvSpPr>
+        <p:spPr>
+          <a:xfrm>
+            <a:off x="731520" y="320040"/>
+            <a:ext cx="7772400" cy="777240"/>
+          </a:xfrm>
+          <a:prstGeom prst="rect">
+            <a:avLst/>
+          </a:prstGeom>
+          <a:noFill/>
+        </p:spPr>
+        <p:txBody>
+          <a:bodyPr wrap="square">
+            <a:spAutoFit/>
+          </a:bodyPr>
+          <a:lstStyle/>
           <a:p>
             <a:pPr>
-              <a:defRPr sz="1200">
-                <a:solidFill>
-                  <a:srgbClr val="F8FAFC"/>
-                </a:solidFill>
-              </a:defRPr>
-            </a:pPr>
-            <a:r>
-              <a:t>• Customer Table QR Scan</a:t>
-            </a:r>
-            <a:br/>
-            <a:r>
-              <a:t>• Cashier Touch / Keyboard</a:t>
-            </a:r>
-            <a:br/>
-            <a:r>
-              <a:t>• Waiter Captain Tablet</a:t>
-            </a:r>
-            <a:br/>
-            <a:r>
-              <a:t>• Barcode / UPI QR Reader</a:t>
-            </a:r>
-          </a:p>
-        </p:txBody>
-      </p:sp>
-      <p:sp>
-        <p:nvSpPr>
-          <p:cNvPr id="6" name="Rounded Rectangle 5"/>
+              <a:defRPr sz="2400" b="1">
+                <a:solidFill>
+                  <a:srgbClr val="0F172A"/>
+                </a:solidFill>
+                <a:latin typeface="Calibri"/>
+              </a:defRPr>
+            </a:pPr>
+            <a:r>
+              <a:t>General Block Diagram</a:t>
+            </a:r>
+          </a:p>
+        </p:txBody>
+      </p:sp>
+      <p:pic>
+        <p:nvPicPr>
+          <p:cNvPr id="5" name="Picture 4" descr="gtu_logo.png"/>
+          <p:cNvPicPr>
+            <a:picLocks noChangeAspect="1"/>
+          </p:cNvPicPr>
+          <p:nvPr/>
+        </p:nvPicPr>
+        <p:blipFill>
+          <a:blip r:embed="rId2"/>
+          <a:stretch>
+            <a:fillRect/>
+          </a:stretch>
+        </p:blipFill>
+        <p:spPr>
+          <a:xfrm>
+            <a:off x="10241280" y="182880"/>
+            <a:ext cx="731520" cy="822960"/>
+          </a:xfrm>
+          <a:prstGeom prst="rect">
+            <a:avLst/>
+          </a:prstGeom>
+        </p:spPr>
+      </p:pic>
+      <p:pic>
+        <p:nvPicPr>
+          <p:cNvPr id="6" name="Picture 5" descr="kdp_patan_logo.png"/>
+          <p:cNvPicPr>
+            <a:picLocks noChangeAspect="1"/>
+          </p:cNvPicPr>
+          <p:nvPr/>
+        </p:nvPicPr>
+        <p:blipFill>
+          <a:blip r:embed="rId3"/>
+          <a:stretch>
+            <a:fillRect/>
+          </a:stretch>
+        </p:blipFill>
+        <p:spPr>
+          <a:xfrm>
+            <a:off x="11155680" y="182880"/>
+            <a:ext cx="777240" cy="777240"/>
+          </a:xfrm>
+          <a:prstGeom prst="rect">
+            <a:avLst/>
+          </a:prstGeom>
+        </p:spPr>
+      </p:pic>
+      <p:sp>
+        <p:nvSpPr>
+          <p:cNvPr id="7" name="TextBox 6"/>
+          <p:cNvSpPr txBox="1"/>
+          <p:nvPr/>
+        </p:nvSpPr>
+        <p:spPr>
+          <a:xfrm>
+            <a:off x="731520" y="960120"/>
+            <a:ext cx="9144000" cy="320040"/>
+          </a:xfrm>
+          <a:prstGeom prst="rect">
+            <a:avLst/>
+          </a:prstGeom>
+          <a:noFill/>
+        </p:spPr>
+        <p:txBody>
+          <a:bodyPr wrap="none">
+            <a:spAutoFit/>
+          </a:bodyPr>
+          <a:lstStyle/>
+          <a:p>
+            <a:pPr>
+              <a:defRPr sz="1050" b="1">
+                <a:solidFill>
+                  <a:srgbClr val="4F46E5"/>
+                </a:solidFill>
+                <a:latin typeface="Calibri"/>
+              </a:defRPr>
+            </a:pPr>
+            <a:r>
+              <a:t>K. D. Polytechnic, Patan | Department of Computer Engineering | Minor Project (DI05000341) | Slide 7</a:t>
+            </a:r>
+          </a:p>
+        </p:txBody>
+      </p:sp>
+      <p:sp>
+        <p:nvSpPr>
+          <p:cNvPr id="8" name="Rounded Rectangle 7"/>
           <p:cNvSpPr/>
           <p:nvPr/>
         </p:nvSpPr>
         <p:spPr>
           <a:xfrm>
-            <a:off x="4389120" y="1645920"/>
+            <a:off x="914400" y="1645920"/>
             <a:ext cx="3291840" cy="4114800"/>
           </a:xfrm>
           <a:prstGeom prst="roundRect">
             <a:avLst/>
           </a:prstGeom>
           <a:solidFill>
-            <a:srgbClr val="1E293B"/>
+            <a:srgbClr val="F8FAFC"/>
           </a:solidFill>
-          <a:ln>
+          <a:ln w="19050">
             <a:solidFill>
-              <a:srgbClr val="6366F1"/>
+              <a:srgbClr val="4F46E5"/>
             </a:solidFill>
           </a:ln>
         </p:spPr>
@@ -10043,64 +11835,62 @@
             <a:pPr algn="ctr">
               <a:defRPr b="1" sz="1400">
                 <a:solidFill>
-                  <a:srgbClr val="F59E0B"/>
-                </a:solidFill>
-              </a:defRPr>
-            </a:pPr>
-            <a:r>
-              <a:t>PROCESSING TIER</a:t>
+                  <a:srgbClr val="4F46E5"/>
+                </a:solidFill>
+                <a:latin typeface="Calibri"/>
+              </a:defRPr>
+            </a:pPr>
+            <a:r>
+              <a:t>INPUT TIER</a:t>
             </a:r>
           </a:p>
           <a:p>
             <a:pPr>
               <a:defRPr sz="1200">
                 <a:solidFill>
-                  <a:srgbClr val="F8FAFC"/>
-                </a:solidFill>
-              </a:defRPr>
-            </a:pPr>
-            <a:r>
-              <a:t>• Laravel 11 MVC Core Engine</a:t>
+                  <a:srgbClr val="1E293B"/>
+                </a:solidFill>
+                <a:latin typeface="Calibri"/>
+              </a:defRPr>
+            </a:pPr>
+            <a:r>
+              <a:t>• Customer Table QR Scan</a:t>
             </a:r>
             <a:br/>
             <a:r>
-              <a:t>• Multi-Tenant Scope Middleware</a:t>
+              <a:t>• Cashier Touch / Keyboard</a:t>
             </a:r>
             <a:br/>
             <a:r>
-              <a:t>• Recipe Depletion Controller</a:t>
+              <a:t>• Waiter Captain Tablet</a:t>
             </a:r>
             <a:br/>
             <a:r>
-              <a:t>• GST &amp; Tax Computation</a:t>
-            </a:r>
-            <a:br/>
-            <a:r>
-              <a:t>• Auth &amp; Session Validator</a:t>
-            </a:r>
-          </a:p>
-        </p:txBody>
-      </p:sp>
-      <p:sp>
-        <p:nvSpPr>
-          <p:cNvPr id="7" name="Rounded Rectangle 6"/>
+              <a:t>• Barcode / UPI QR Reader</a:t>
+            </a:r>
+          </a:p>
+        </p:txBody>
+      </p:sp>
+      <p:sp>
+        <p:nvSpPr>
+          <p:cNvPr id="9" name="Rounded Rectangle 8"/>
           <p:cNvSpPr/>
           <p:nvPr/>
         </p:nvSpPr>
         <p:spPr>
           <a:xfrm>
-            <a:off x="7863840" y="1645920"/>
+            <a:off x="4389120" y="1645920"/>
             <a:ext cx="3291840" cy="4114800"/>
           </a:xfrm>
           <a:prstGeom prst="roundRect">
             <a:avLst/>
           </a:prstGeom>
           <a:solidFill>
-            <a:srgbClr val="1E293B"/>
+            <a:srgbClr val="F8FAFC"/>
           </a:solidFill>
-          <a:ln>
+          <a:ln w="19050">
             <a:solidFill>
-              <a:srgbClr val="6366F1"/>
+              <a:srgbClr val="4F46E5"/>
             </a:solidFill>
           </a:ln>
         </p:spPr>
@@ -10125,20 +11915,106 @@
             <a:pPr algn="ctr">
               <a:defRPr b="1" sz="1400">
                 <a:solidFill>
-                  <a:srgbClr val="F59E0B"/>
-                </a:solidFill>
-              </a:defRPr>
-            </a:pPr>
-            <a:r>
-              <a:t>OUTPUT TIER</a:t>
+                  <a:srgbClr val="4F46E5"/>
+                </a:solidFill>
+                <a:latin typeface="Calibri"/>
+              </a:defRPr>
+            </a:pPr>
+            <a:r>
+              <a:t>PROCESSING TIER</a:t>
             </a:r>
           </a:p>
           <a:p>
             <a:pPr>
               <a:defRPr sz="1200">
                 <a:solidFill>
-                  <a:srgbClr val="F8FAFC"/>
-                </a:solidFill>
+                  <a:srgbClr val="1E293B"/>
+                </a:solidFill>
+                <a:latin typeface="Calibri"/>
+              </a:defRPr>
+            </a:pPr>
+            <a:r>
+              <a:t>• Laravel 11 MVC Core Engine</a:t>
+            </a:r>
+            <a:br/>
+            <a:r>
+              <a:t>• Multi-Tenant Scope Middleware</a:t>
+            </a:r>
+            <a:br/>
+            <a:r>
+              <a:t>• Recipe Depletion Controller</a:t>
+            </a:r>
+            <a:br/>
+            <a:r>
+              <a:t>• GST &amp; Tax Computation</a:t>
+            </a:r>
+            <a:br/>
+            <a:r>
+              <a:t>• Auth &amp; Session Validator</a:t>
+            </a:r>
+          </a:p>
+        </p:txBody>
+      </p:sp>
+      <p:sp>
+        <p:nvSpPr>
+          <p:cNvPr id="10" name="Rounded Rectangle 9"/>
+          <p:cNvSpPr/>
+          <p:nvPr/>
+        </p:nvSpPr>
+        <p:spPr>
+          <a:xfrm>
+            <a:off x="7863840" y="1645920"/>
+            <a:ext cx="3291840" cy="4114800"/>
+          </a:xfrm>
+          <a:prstGeom prst="roundRect">
+            <a:avLst/>
+          </a:prstGeom>
+          <a:solidFill>
+            <a:srgbClr val="F8FAFC"/>
+          </a:solidFill>
+          <a:ln w="19050">
+            <a:solidFill>
+              <a:srgbClr val="4F46E5"/>
+            </a:solidFill>
+          </a:ln>
+        </p:spPr>
+        <p:style>
+          <a:lnRef idx="1">
+            <a:schemeClr val="accent1"/>
+          </a:lnRef>
+          <a:fillRef idx="3">
+            <a:schemeClr val="accent1"/>
+          </a:fillRef>
+          <a:effectRef idx="2">
+            <a:schemeClr val="accent1"/>
+          </a:effectRef>
+          <a:fontRef idx="minor">
+            <a:schemeClr val="lt1"/>
+          </a:fontRef>
+        </p:style>
+        <p:txBody>
+          <a:bodyPr rtlCol="0" anchor="ctr" wrap="square"/>
+          <a:lstStyle/>
+          <a:p>
+            <a:pPr algn="ctr">
+              <a:defRPr b="1" sz="1400">
+                <a:solidFill>
+                  <a:srgbClr val="4F46E5"/>
+                </a:solidFill>
+                <a:latin typeface="Calibri"/>
+              </a:defRPr>
+            </a:pPr>
+            <a:r>
+              <a:t>OUTPUT TIER</a:t>
+            </a:r>
+          </a:p>
+          <a:p>
+            <a:pPr>
+              <a:defRPr sz="1200">
+                <a:solidFill>
+                  <a:srgbClr val="1E293B"/>
+                </a:solidFill>
+                <a:latin typeface="Calibri"/>
               </a:defRPr>
             </a:pPr>
             <a:r>
@@ -10165,14 +12041,14 @@
       </p:sp>
       <p:sp>
         <p:nvSpPr>
-          <p:cNvPr id="8" name="TextBox 7"/>
+          <p:cNvPr id="11" name="TextBox 10"/>
           <p:cNvSpPr txBox="1"/>
           <p:nvPr/>
         </p:nvSpPr>
         <p:spPr>
           <a:xfrm>
             <a:off x="914400" y="5943600"/>
-            <a:ext cx="10332720" cy="548640"/>
+            <a:ext cx="10362895" cy="548640"/>
           </a:xfrm>
           <a:prstGeom prst="rect">
             <a:avLst/>
@@ -10188,8 +12064,9 @@
             <a:pPr>
               <a:defRPr sz="1100">
                 <a:solidFill>
-                  <a:srgbClr val="94A3B8"/>
-                </a:solidFill>
+                  <a:srgbClr val="64748B"/>
+                </a:solidFill>
+                <a:latin typeface="Calibri"/>
               </a:defRPr>
             </a:pPr>
             <a:r>
@@ -10231,7 +12108,7 @@
             <a:avLst/>
           </a:prstGeom>
           <a:solidFill>
-            <a:srgbClr val="0F172A"/>
+            <a:srgbClr val="FFFFFF"/>
           </a:solidFill>
           <a:ln>
             <a:noFill/>
@@ -10261,14 +12138,57 @@
       </p:sp>
       <p:sp>
         <p:nvSpPr>
-          <p:cNvPr id="3" name="TextBox 2"/>
+          <p:cNvPr id="3" name="Rectangle 2"/>
+          <p:cNvSpPr/>
+          <p:nvPr/>
+        </p:nvSpPr>
+        <p:spPr>
+          <a:xfrm>
+            <a:off x="0" y="0"/>
+            <a:ext cx="12191695" cy="73152"/>
+          </a:xfrm>
+          <a:prstGeom prst="rect">
+            <a:avLst/>
+          </a:prstGeom>
+          <a:solidFill>
+            <a:srgbClr val="4F46E5"/>
+          </a:solidFill>
+          <a:ln>
+            <a:noFill/>
+          </a:ln>
+        </p:spPr>
+        <p:style>
+          <a:lnRef idx="1">
+            <a:schemeClr val="accent1"/>
+          </a:lnRef>
+          <a:fillRef idx="3">
+            <a:schemeClr val="accent1"/>
+          </a:fillRef>
+          <a:effectRef idx="2">
+            <a:schemeClr val="accent1"/>
+          </a:effectRef>
+          <a:fontRef idx="minor">
+            <a:schemeClr val="lt1"/>
+          </a:fontRef>
+        </p:style>
+        <p:txBody>
+          <a:bodyPr rtlCol="0" anchor="ctr"/>
+          <a:lstStyle/>
+          <a:p>
+            <a:pPr algn="ctr"/>
+          </a:p>
+        </p:txBody>
+      </p:sp>
+      <p:sp>
+        <p:nvSpPr>
+          <p:cNvPr id="4" name="TextBox 3"/>
           <p:cNvSpPr txBox="1"/>
           <p:nvPr/>
         </p:nvSpPr>
         <p:spPr>
           <a:xfrm>
-            <a:off x="731520" y="365760"/>
-            <a:ext cx="10698480" cy="822960"/>
+            <a:off x="731520" y="320040"/>
+            <a:ext cx="7772400" cy="777240"/>
           </a:xfrm>
           <a:prstGeom prst="rect">
             <a:avLst/>
@@ -10282,29 +12202,77 @@
           <a:lstStyle/>
           <a:p>
             <a:pPr>
-              <a:defRPr sz="2600" b="1">
-                <a:solidFill>
-                  <a:srgbClr val="F8FAFC"/>
-                </a:solidFill>
-                <a:latin typeface="Segoe UI"/>
-              </a:defRPr>
-            </a:pPr>
-            <a:r>
-              <a:t>Multi-Tenant Cloud System Architecture</a:t>
-            </a:r>
-          </a:p>
-        </p:txBody>
-      </p:sp>
-      <p:sp>
-        <p:nvSpPr>
-          <p:cNvPr id="4" name="TextBox 3"/>
+              <a:defRPr sz="2400" b="1">
+                <a:solidFill>
+                  <a:srgbClr val="0F172A"/>
+                </a:solidFill>
+                <a:latin typeface="Calibri"/>
+              </a:defRPr>
+            </a:pPr>
+            <a:r>
+              <a:t>Detailed System Architecture Diagram</a:t>
+            </a:r>
+          </a:p>
+        </p:txBody>
+      </p:sp>
+      <p:pic>
+        <p:nvPicPr>
+          <p:cNvPr id="5" name="Picture 4" descr="gtu_logo.png"/>
+          <p:cNvPicPr>
+            <a:picLocks noChangeAspect="1"/>
+          </p:cNvPicPr>
+          <p:nvPr/>
+        </p:nvPicPr>
+        <p:blipFill>
+          <a:blip r:embed="rId2"/>
+          <a:stretch>
+            <a:fillRect/>
+          </a:stretch>
+        </p:blipFill>
+        <p:spPr>
+          <a:xfrm>
+            <a:off x="10241280" y="182880"/>
+            <a:ext cx="731520" cy="822960"/>
+          </a:xfrm>
+          <a:prstGeom prst="rect">
+            <a:avLst/>
+          </a:prstGeom>
+        </p:spPr>
+      </p:pic>
+      <p:pic>
+        <p:nvPicPr>
+          <p:cNvPr id="6" name="Picture 5" descr="kdp_patan_logo.png"/>
+          <p:cNvPicPr>
+            <a:picLocks noChangeAspect="1"/>
+          </p:cNvPicPr>
+          <p:nvPr/>
+        </p:nvPicPr>
+        <p:blipFill>
+          <a:blip r:embed="rId3"/>
+          <a:stretch>
+            <a:fillRect/>
+          </a:stretch>
+        </p:blipFill>
+        <p:spPr>
+          <a:xfrm>
+            <a:off x="11155680" y="182880"/>
+            <a:ext cx="777240" cy="777240"/>
+          </a:xfrm>
+          <a:prstGeom prst="rect">
+            <a:avLst/>
+          </a:prstGeom>
+        </p:spPr>
+      </p:pic>
+      <p:sp>
+        <p:nvSpPr>
+          <p:cNvPr id="7" name="TextBox 6"/>
           <p:cNvSpPr txBox="1"/>
           <p:nvPr/>
         </p:nvSpPr>
         <p:spPr>
           <a:xfrm>
-            <a:off x="8412480" y="411480"/>
-            <a:ext cx="3017520" cy="365760"/>
+            <a:off x="731520" y="960120"/>
+            <a:ext cx="9144000" cy="320040"/>
           </a:xfrm>
           <a:prstGeom prst="rect">
             <a:avLst/>
@@ -10317,30 +12285,30 @@
           </a:bodyPr>
           <a:lstStyle/>
           <a:p>
-            <a:pPr algn="r">
-              <a:defRPr sz="1100" b="1">
-                <a:solidFill>
-                  <a:srgbClr val="6366F1"/>
-                </a:solidFill>
-                <a:latin typeface="Segoe UI"/>
-              </a:defRPr>
-            </a:pPr>
-            <a:r>
-              <a:t>Minor Project | DI05000341 | Slide 8</a:t>
-            </a:r>
-          </a:p>
-        </p:txBody>
-      </p:sp>
-      <p:sp>
-        <p:nvSpPr>
-          <p:cNvPr id="5" name="TextBox 4"/>
+            <a:pPr>
+              <a:defRPr sz="1050" b="1">
+                <a:solidFill>
+                  <a:srgbClr val="4F46E5"/>
+                </a:solidFill>
+                <a:latin typeface="Calibri"/>
+              </a:defRPr>
+            </a:pPr>
+            <a:r>
+              <a:t>K. D. Polytechnic, Patan | Department of Computer Engineering | Minor Project (DI05000341) | Slide 8</a:t>
+            </a:r>
+          </a:p>
+        </p:txBody>
+      </p:sp>
+      <p:sp>
+        <p:nvSpPr>
+          <p:cNvPr id="8" name="TextBox 7"/>
           <p:cNvSpPr txBox="1"/>
           <p:nvPr/>
         </p:nvSpPr>
         <p:spPr>
           <a:xfrm>
             <a:off x="914400" y="1463040"/>
-            <a:ext cx="10332720" cy="4754880"/>
+            <a:ext cx="10362895" cy="4754880"/>
           </a:xfrm>
           <a:prstGeom prst="rect">
             <a:avLst/>
@@ -10357,8 +12325,9 @@
             <a:pPr>
               <a:defRPr b="1" sz="1350">
                 <a:solidFill>
-                  <a:srgbClr val="6366F1"/>
-                </a:solidFill>
+                  <a:srgbClr val="4F46E5"/>
+                </a:solidFill>
+                <a:latin typeface="Calibri"/>
               </a:defRPr>
             </a:pPr>
             <a:r>
@@ -10369,8 +12338,9 @@
             <a:pPr>
               <a:defRPr sz="1150">
                 <a:solidFill>
-                  <a:srgbClr val="F8FAFC"/>
-                </a:solidFill>
+                  <a:srgbClr val="1E293B"/>
+                </a:solidFill>
+                <a:latin typeface="Calibri"/>
               </a:defRPr>
             </a:pPr>
             <a:r>
@@ -10381,8 +12351,9 @@
             <a:pPr>
               <a:defRPr b="1" sz="1350">
                 <a:solidFill>
-                  <a:srgbClr val="6366F1"/>
-                </a:solidFill>
+                  <a:srgbClr val="4F46E5"/>
+                </a:solidFill>
+                <a:latin typeface="Calibri"/>
               </a:defRPr>
             </a:pPr>
             <a:r>
@@ -10393,8 +12364,9 @@
             <a:pPr>
               <a:defRPr sz="1150">
                 <a:solidFill>
-                  <a:srgbClr val="F8FAFC"/>
-                </a:solidFill>
+                  <a:srgbClr val="1E293B"/>
+                </a:solidFill>
+                <a:latin typeface="Calibri"/>
               </a:defRPr>
             </a:pPr>
             <a:r>
@@ -10405,8 +12377,9 @@
             <a:pPr>
               <a:defRPr b="1" sz="1350">
                 <a:solidFill>
-                  <a:srgbClr val="6366F1"/>
-                </a:solidFill>
+                  <a:srgbClr val="4F46E5"/>
+                </a:solidFill>
+                <a:latin typeface="Calibri"/>
               </a:defRPr>
             </a:pPr>
             <a:r>
@@ -10417,8 +12390,9 @@
             <a:pPr>
               <a:defRPr sz="1150">
                 <a:solidFill>
-                  <a:srgbClr val="F8FAFC"/>
-                </a:solidFill>
+                  <a:srgbClr val="1E293B"/>
+                </a:solidFill>
+                <a:latin typeface="Calibri"/>
               </a:defRPr>
             </a:pPr>
             <a:r>
@@ -10437,8 +12411,9 @@
             <a:pPr>
               <a:defRPr b="1" sz="1350">
                 <a:solidFill>
-                  <a:srgbClr val="6366F1"/>
-                </a:solidFill>
+                  <a:srgbClr val="4F46E5"/>
+                </a:solidFill>
+                <a:latin typeface="Calibri"/>
               </a:defRPr>
             </a:pPr>
             <a:r>
@@ -10449,8 +12424,9 @@
             <a:pPr>
               <a:defRPr sz="1150">
                 <a:solidFill>
-                  <a:srgbClr val="F8FAFC"/>
-                </a:solidFill>
+                  <a:srgbClr val="1E293B"/>
+                </a:solidFill>
+                <a:latin typeface="Calibri"/>
               </a:defRPr>
             </a:pPr>
             <a:r>
@@ -10492,7 +12468,7 @@
             <a:avLst/>
           </a:prstGeom>
           <a:solidFill>
-            <a:srgbClr val="0F172A"/>
+            <a:srgbClr val="FFFFFF"/>
           </a:solidFill>
           <a:ln>
             <a:noFill/>
@@ -10522,14 +12498,57 @@
       </p:sp>
       <p:sp>
         <p:nvSpPr>
-          <p:cNvPr id="3" name="TextBox 2"/>
+          <p:cNvPr id="3" name="Rectangle 2"/>
+          <p:cNvSpPr/>
+          <p:nvPr/>
+        </p:nvSpPr>
+        <p:spPr>
+          <a:xfrm>
+            <a:off x="0" y="0"/>
+            <a:ext cx="12191695" cy="73152"/>
+          </a:xfrm>
+          <a:prstGeom prst="rect">
+            <a:avLst/>
+          </a:prstGeom>
+          <a:solidFill>
+            <a:srgbClr val="4F46E5"/>
+          </a:solidFill>
+          <a:ln>
+            <a:noFill/>
+          </a:ln>
+        </p:spPr>
+        <p:style>
+          <a:lnRef idx="1">
+            <a:schemeClr val="accent1"/>
+          </a:lnRef>
+          <a:fillRef idx="3">
+            <a:schemeClr val="accent1"/>
+          </a:fillRef>
+          <a:effectRef idx="2">
+            <a:schemeClr val="accent1"/>
+          </a:effectRef>
+          <a:fontRef idx="minor">
+            <a:schemeClr val="lt1"/>
+          </a:fontRef>
+        </p:style>
+        <p:txBody>
+          <a:bodyPr rtlCol="0" anchor="ctr"/>
+          <a:lstStyle/>
+          <a:p>
+            <a:pPr algn="ctr"/>
+          </a:p>
+        </p:txBody>
+      </p:sp>
+      <p:sp>
+        <p:nvSpPr>
+          <p:cNvPr id="4" name="TextBox 3"/>
           <p:cNvSpPr txBox="1"/>
           <p:nvPr/>
         </p:nvSpPr>
         <p:spPr>
           <a:xfrm>
-            <a:off x="731520" y="365760"/>
-            <a:ext cx="10698480" cy="822960"/>
+            <a:off x="731520" y="320040"/>
+            <a:ext cx="7772400" cy="777240"/>
           </a:xfrm>
           <a:prstGeom prst="rect">
             <a:avLst/>
@@ -10543,29 +12562,77 @@
           <a:lstStyle/>
           <a:p>
             <a:pPr>
-              <a:defRPr sz="2600" b="1">
-                <a:solidFill>
-                  <a:srgbClr val="F8FAFC"/>
-                </a:solidFill>
-                <a:latin typeface="Segoe UI"/>
-              </a:defRPr>
-            </a:pPr>
-            <a:r>
-              <a:t>Algorithm &amp; Transaction Flowchart</a:t>
-            </a:r>
-          </a:p>
-        </p:txBody>
-      </p:sp>
-      <p:sp>
-        <p:nvSpPr>
-          <p:cNvPr id="4" name="TextBox 3"/>
+              <a:defRPr sz="2400" b="1">
+                <a:solidFill>
+                  <a:srgbClr val="0F172A"/>
+                </a:solidFill>
+                <a:latin typeface="Calibri"/>
+              </a:defRPr>
+            </a:pPr>
+            <a:r>
+              <a:t>Algorithm / Flowchart</a:t>
+            </a:r>
+          </a:p>
+        </p:txBody>
+      </p:sp>
+      <p:pic>
+        <p:nvPicPr>
+          <p:cNvPr id="5" name="Picture 4" descr="gtu_logo.png"/>
+          <p:cNvPicPr>
+            <a:picLocks noChangeAspect="1"/>
+          </p:cNvPicPr>
+          <p:nvPr/>
+        </p:nvPicPr>
+        <p:blipFill>
+          <a:blip r:embed="rId2"/>
+          <a:stretch>
+            <a:fillRect/>
+          </a:stretch>
+        </p:blipFill>
+        <p:spPr>
+          <a:xfrm>
+            <a:off x="10241280" y="182880"/>
+            <a:ext cx="731520" cy="822960"/>
+          </a:xfrm>
+          <a:prstGeom prst="rect">
+            <a:avLst/>
+          </a:prstGeom>
+        </p:spPr>
+      </p:pic>
+      <p:pic>
+        <p:nvPicPr>
+          <p:cNvPr id="6" name="Picture 5" descr="kdp_patan_logo.png"/>
+          <p:cNvPicPr>
+            <a:picLocks noChangeAspect="1"/>
+          </p:cNvPicPr>
+          <p:nvPr/>
+        </p:nvPicPr>
+        <p:blipFill>
+          <a:blip r:embed="rId3"/>
+          <a:stretch>
+            <a:fillRect/>
+          </a:stretch>
+        </p:blipFill>
+        <p:spPr>
+          <a:xfrm>
+            <a:off x="11155680" y="182880"/>
+            <a:ext cx="777240" cy="777240"/>
+          </a:xfrm>
+          <a:prstGeom prst="rect">
+            <a:avLst/>
+          </a:prstGeom>
+        </p:spPr>
+      </p:pic>
+      <p:sp>
+        <p:nvSpPr>
+          <p:cNvPr id="7" name="TextBox 6"/>
           <p:cNvSpPr txBox="1"/>
           <p:nvPr/>
         </p:nvSpPr>
         <p:spPr>
           <a:xfrm>
-            <a:off x="8412480" y="411480"/>
-            <a:ext cx="3017520" cy="365760"/>
+            <a:off x="731520" y="960120"/>
+            <a:ext cx="9144000" cy="320040"/>
           </a:xfrm>
           <a:prstGeom prst="rect">
             <a:avLst/>
@@ -10578,30 +12645,30 @@
           </a:bodyPr>
           <a:lstStyle/>
           <a:p>
-            <a:pPr algn="r">
-              <a:defRPr sz="1100" b="1">
-                <a:solidFill>
-                  <a:srgbClr val="6366F1"/>
-                </a:solidFill>
-                <a:latin typeface="Segoe UI"/>
-              </a:defRPr>
-            </a:pPr>
-            <a:r>
-              <a:t>Minor Project | DI05000341 | Slide 9</a:t>
-            </a:r>
-          </a:p>
-        </p:txBody>
-      </p:sp>
-      <p:sp>
-        <p:nvSpPr>
-          <p:cNvPr id="5" name="TextBox 4"/>
+            <a:pPr>
+              <a:defRPr sz="1050" b="1">
+                <a:solidFill>
+                  <a:srgbClr val="4F46E5"/>
+                </a:solidFill>
+                <a:latin typeface="Calibri"/>
+              </a:defRPr>
+            </a:pPr>
+            <a:r>
+              <a:t>K. D. Polytechnic, Patan | Department of Computer Engineering | Minor Project (DI05000341) | Slide 9</a:t>
+            </a:r>
+          </a:p>
+        </p:txBody>
+      </p:sp>
+      <p:sp>
+        <p:nvSpPr>
+          <p:cNvPr id="8" name="TextBox 7"/>
           <p:cNvSpPr txBox="1"/>
           <p:nvPr/>
         </p:nvSpPr>
         <p:spPr>
           <a:xfrm>
             <a:off x="914400" y="1463040"/>
-            <a:ext cx="10332720" cy="4754880"/>
+            <a:ext cx="10362895" cy="4937760"/>
           </a:xfrm>
           <a:prstGeom prst="rect">
             <a:avLst/>
@@ -10615,87 +12682,143 @@
           <a:lstStyle/>
           <a:p/>
           <a:p>
-            <a:pPr>
-              <a:defRPr b="1" sz="1250">
-                <a:solidFill>
-                  <a:srgbClr val="10B981"/>
-                </a:solidFill>
-              </a:defRPr>
-            </a:pPr>
-            <a:r>
-              <a:t>▶ Step 1: Order Ingestion: Customer scans Table QR code or Cashier selects Table T-01 from POS terminal interface.</a:t>
-            </a:r>
-          </a:p>
-          <a:p>
-            <a:pPr>
-              <a:defRPr b="1" sz="1250">
-                <a:solidFill>
-                  <a:srgbClr val="10B981"/>
-                </a:solidFill>
-              </a:defRPr>
-            </a:pPr>
-            <a:r>
-              <a:t>▶ Step 2: Cart Selection: User selects menu items with custom modifiers (e.g. Extra Cheese, Cooking Notes).</a:t>
-            </a:r>
-          </a:p>
-          <a:p>
-            <a:pPr>
-              <a:defRPr b="1" sz="1250">
-                <a:solidFill>
-                  <a:srgbClr val="10B981"/>
-                </a:solidFill>
-              </a:defRPr>
-            </a:pPr>
-            <a:r>
-              <a:t>▶ Step 3: Stock Validation: System checks recipe inventory availability; if any raw ingredient is exhausted, item is flagged 'Sold Out'.</a:t>
-            </a:r>
-          </a:p>
-          <a:p>
-            <a:pPr>
-              <a:defRPr b="1" sz="1250">
-                <a:solidFill>
-                  <a:srgbClr val="10B981"/>
-                </a:solidFill>
-              </a:defRPr>
-            </a:pPr>
-            <a:r>
-              <a:t>▶ Step 4: Transaction Commit: Order is cryptographically committed with unique Order ID (#ORD-XXXX), GST, and payment method.</a:t>
-            </a:r>
-          </a:p>
-          <a:p>
-            <a:pPr>
-              <a:defRPr b="1" sz="1250">
-                <a:solidFill>
-                  <a:srgbClr val="10B981"/>
-                </a:solidFill>
-              </a:defRPr>
-            </a:pPr>
-            <a:r>
-              <a:t>▶ Step 5: Simultaneous KOT Dispatch: KOT ticket appears on Kitchen Display System (KDS) and prints to kitchen thermal printer via ESC/POS.</a:t>
-            </a:r>
-          </a:p>
-          <a:p>
-            <a:pPr>
-              <a:defRPr b="1" sz="1250">
-                <a:solidFill>
-                  <a:srgbClr val="10B981"/>
-                </a:solidFill>
-              </a:defRPr>
-            </a:pPr>
-            <a:r>
-              <a:t>▶ Step 6: Voice Announcement: Web Audio API synthesizes Gujarati audio alert: 'નવો ઓર્ડર: ટેબલ ૧, ૨ આઇટમ્સ'.</a:t>
-            </a:r>
-          </a:p>
-          <a:p>
-            <a:pPr>
-              <a:defRPr b="1" sz="1250">
-                <a:solidFill>
-                  <a:srgbClr val="10B981"/>
-                </a:solidFill>
-              </a:defRPr>
-            </a:pPr>
-            <a:r>
-              <a:t>▶ Step 7: Real-Time Depletion: Recipe costing engine automatically deducts exact grams of raw materials from restaurant inventory.</a:t>
+            <a:r>
+              <a:rPr b="1" sz="1250">
+                <a:solidFill>
+                  <a:srgbClr val="4F46E5"/>
+                </a:solidFill>
+                <a:latin typeface="Calibri"/>
+              </a:rPr>
+              <a:t>▶ Step 1: Order Ingestion: </a:t>
+            </a:r>
+            <a:r>
+              <a:rPr b="0" sz="1250">
+                <a:solidFill>
+                  <a:srgbClr val="1E293B"/>
+                </a:solidFill>
+                <a:latin typeface="Calibri"/>
+              </a:rPr>
+              <a:t>Customer scans Table QR code or Cashier selects Table T-01 from POS terminal interface.</a:t>
+            </a:r>
+          </a:p>
+          <a:p>
+            <a:r>
+              <a:rPr b="1" sz="1250">
+                <a:solidFill>
+                  <a:srgbClr val="4F46E5"/>
+                </a:solidFill>
+                <a:latin typeface="Calibri"/>
+              </a:rPr>
+              <a:t>▶ Step 2: Cart Selection: </a:t>
+            </a:r>
+            <a:r>
+              <a:rPr b="0" sz="1250">
+                <a:solidFill>
+                  <a:srgbClr val="1E293B"/>
+                </a:solidFill>
+                <a:latin typeface="Calibri"/>
+              </a:rPr>
+              <a:t>User selects menu items with custom modifiers (e.g. Extra Cheese, Cooking Notes).</a:t>
+            </a:r>
+          </a:p>
+          <a:p>
+            <a:r>
+              <a:rPr b="1" sz="1250">
+                <a:solidFill>
+                  <a:srgbClr val="4F46E5"/>
+                </a:solidFill>
+                <a:latin typeface="Calibri"/>
+              </a:rPr>
+              <a:t>▶ Step 3: Stock Validation: </a:t>
+            </a:r>
+            <a:r>
+              <a:rPr b="0" sz="1250">
+                <a:solidFill>
+                  <a:srgbClr val="1E293B"/>
+                </a:solidFill>
+                <a:latin typeface="Calibri"/>
+              </a:rPr>
+              <a:t>System checks recipe inventory availability; if any raw ingredient is exhausted, item is flagged 'Sold Out'.</a:t>
+            </a:r>
+          </a:p>
+          <a:p>
+            <a:r>
+              <a:rPr b="1" sz="1250">
+                <a:solidFill>
+                  <a:srgbClr val="4F46E5"/>
+                </a:solidFill>
+                <a:latin typeface="Calibri"/>
+              </a:rPr>
+              <a:t>▶ Step 4: Transaction Commit: </a:t>
+            </a:r>
+            <a:r>
+              <a:rPr b="0" sz="1250">
+                <a:solidFill>
+                  <a:srgbClr val="1E293B"/>
+                </a:solidFill>
+                <a:latin typeface="Calibri"/>
+              </a:rPr>
+              <a:t>Order is cryptographically committed with unique Order ID (#ORD-XXXX), GST, and payment method.</a:t>
+            </a:r>
+          </a:p>
+          <a:p>
+            <a:r>
+              <a:rPr b="1" sz="1250">
+                <a:solidFill>
+                  <a:srgbClr val="4F46E5"/>
+                </a:solidFill>
+                <a:latin typeface="Calibri"/>
+              </a:rPr>
+              <a:t>▶ Step 5: Simultaneous KOT Dispatch: </a:t>
+            </a:r>
+            <a:r>
+              <a:rPr b="0" sz="1250">
+                <a:solidFill>
+                  <a:srgbClr val="1E293B"/>
+                </a:solidFill>
+                <a:latin typeface="Calibri"/>
+              </a:rPr>
+              <a:t>KOT ticket appears on Kitchen Display System (KDS) and prints to kitchen thermal printer via ESC/POS.</a:t>
+            </a:r>
+          </a:p>
+          <a:p>
+            <a:r>
+              <a:rPr b="1" sz="1250">
+                <a:solidFill>
+                  <a:srgbClr val="4F46E5"/>
+                </a:solidFill>
+                <a:latin typeface="Calibri"/>
+              </a:rPr>
+              <a:t>▶ Step 6: Voice Announcement: </a:t>
+            </a:r>
+            <a:r>
+              <a:rPr b="0" sz="1250">
+                <a:solidFill>
+                  <a:srgbClr val="1E293B"/>
+                </a:solidFill>
+                <a:latin typeface="Calibri"/>
+              </a:rPr>
+              <a:t>Web Audio API synthesizes Gujarati audio alert: 'નવો ઓર્ડર: ટેબલ ૧, ૨ આઇટમ્સ'.</a:t>
+            </a:r>
+          </a:p>
+          <a:p>
+            <a:r>
+              <a:rPr b="1" sz="1250">
+                <a:solidFill>
+                  <a:srgbClr val="4F46E5"/>
+                </a:solidFill>
+                <a:latin typeface="Calibri"/>
+              </a:rPr>
+              <a:t>▶ Step 7: Real-Time Depletion: </a:t>
+            </a:r>
+            <a:r>
+              <a:rPr b="0" sz="1250">
+                <a:solidFill>
+                  <a:srgbClr val="1E293B"/>
+                </a:solidFill>
+                <a:latin typeface="Calibri"/>
+              </a:rPr>
+              <a:t>Recipe costing engine automatically deducts exact grams of raw materials from restaurant inventory.</a:t>
             </a:r>
           </a:p>
         </p:txBody>

--- a/docs/DineFlow_AI_GTU_Minor_Project_Presentation.pptx
+++ b/docs/DineFlow_AI_GTU_Minor_Project_Presentation.pptx
@@ -5669,7 +5669,7 @@
               </a:defRPr>
             </a:pPr>
             <a:r>
-              <a:t>Prototype / Model Development</a:t>
+              <a:t>Prototype / Model Development (Figure 4)</a:t>
             </a:r>
           </a:p>
         </p:txBody>
@@ -5774,17 +5774,97 @@
         </p:blipFill>
         <p:spPr>
           <a:xfrm>
-            <a:off x="914400" y="1371600"/>
-            <a:ext cx="4937760" cy="3291840"/>
+            <a:off x="731520" y="1371600"/>
+            <a:ext cx="3383280" cy="2286000"/>
           </a:xfrm>
           <a:prstGeom prst="rect">
             <a:avLst/>
           </a:prstGeom>
         </p:spPr>
       </p:pic>
+      <p:sp>
+        <p:nvSpPr>
+          <p:cNvPr id="9" name="Rounded Rectangle 8"/>
+          <p:cNvSpPr/>
+          <p:nvPr/>
+        </p:nvSpPr>
+        <p:spPr>
+          <a:xfrm>
+            <a:off x="731520" y="3749039"/>
+            <a:ext cx="3383280" cy="1828800"/>
+          </a:xfrm>
+          <a:prstGeom prst="roundRect">
+            <a:avLst/>
+          </a:prstGeom>
+          <a:solidFill>
+            <a:srgbClr val="F8FAFC"/>
+          </a:solidFill>
+          <a:ln>
+            <a:solidFill>
+              <a:srgbClr val="E2E8F0"/>
+            </a:solidFill>
+          </a:ln>
+        </p:spPr>
+        <p:style>
+          <a:lnRef idx="1">
+            <a:schemeClr val="accent1"/>
+          </a:lnRef>
+          <a:fillRef idx="3">
+            <a:schemeClr val="accent1"/>
+          </a:fillRef>
+          <a:effectRef idx="2">
+            <a:schemeClr val="accent1"/>
+          </a:effectRef>
+          <a:fontRef idx="minor">
+            <a:schemeClr val="lt1"/>
+          </a:fontRef>
+        </p:style>
+        <p:txBody>
+          <a:bodyPr rtlCol="0" anchor="ctr" wrap="square"/>
+          <a:lstStyle/>
+          <a:p>
+            <a:pPr algn="ctr">
+              <a:defRPr b="1" sz="1200">
+                <a:solidFill>
+                  <a:srgbClr val="4F46E5"/>
+                </a:solidFill>
+                <a:latin typeface="Calibri"/>
+              </a:defRPr>
+            </a:pPr>
+            <a:r>
+              <a:t>Figure 4(a): Web POS Terminal</a:t>
+            </a:r>
+          </a:p>
+          <a:p>
+            <a:pPr>
+              <a:defRPr sz="1050">
+                <a:solidFill>
+                  <a:srgbClr val="1E293B"/>
+                </a:solidFill>
+                <a:latin typeface="Calibri"/>
+              </a:defRPr>
+            </a:pPr>
+            <a:r>
+              <a:t>• Sub-3s checkout billing engine</a:t>
+            </a:r>
+            <a:br/>
+            <a:r>
+              <a:t>• Keyboard navigation (F1-F9)</a:t>
+            </a:r>
+            <a:br/>
+            <a:r>
+              <a:t>• Dynamic cart &amp; UPI QR billing</a:t>
+            </a:r>
+            <a:br/>
+            <a:r>
+              <a:t>• Zero local installation needed</a:t>
+            </a:r>
+          </a:p>
+        </p:txBody>
+      </p:sp>
       <p:pic>
         <p:nvPicPr>
-          <p:cNvPr id="9" name="Picture 8" descr="about_img_1.png"/>
+          <p:cNvPr id="10" name="Picture 9" descr="pos_thermal_printer.jpg"/>
           <p:cNvPicPr>
             <a:picLocks noChangeAspect="1"/>
           </p:cNvPicPr>
@@ -5798,8 +5878,8 @@
         </p:blipFill>
         <p:spPr>
           <a:xfrm>
-            <a:off x="6309360" y="1371600"/>
-            <a:ext cx="4937760" cy="3291840"/>
+            <a:off x="4389120" y="1371600"/>
+            <a:ext cx="3383280" cy="2286000"/>
           </a:xfrm>
           <a:prstGeom prst="rect">
             <a:avLst/>
@@ -5808,28 +5888,164 @@
       </p:pic>
       <p:sp>
         <p:nvSpPr>
-          <p:cNvPr id="10" name="TextBox 9"/>
-          <p:cNvSpPr txBox="1"/>
-          <p:nvPr/>
-        </p:nvSpPr>
-        <p:spPr>
-          <a:xfrm>
-            <a:off x="914400" y="4846320"/>
-            <a:ext cx="10362895" cy="1645920"/>
+          <p:cNvPr id="11" name="Rounded Rectangle 10"/>
+          <p:cNvSpPr/>
+          <p:nvPr/>
+        </p:nvSpPr>
+        <p:spPr>
+          <a:xfrm>
+            <a:off x="4389120" y="3749039"/>
+            <a:ext cx="3383280" cy="1828800"/>
+          </a:xfrm>
+          <a:prstGeom prst="roundRect">
+            <a:avLst/>
+          </a:prstGeom>
+          <a:solidFill>
+            <a:srgbClr val="F8FAFC"/>
+          </a:solidFill>
+          <a:ln>
+            <a:solidFill>
+              <a:srgbClr val="E2E8F0"/>
+            </a:solidFill>
+          </a:ln>
+        </p:spPr>
+        <p:style>
+          <a:lnRef idx="1">
+            <a:schemeClr val="accent1"/>
+          </a:lnRef>
+          <a:fillRef idx="3">
+            <a:schemeClr val="accent1"/>
+          </a:fillRef>
+          <a:effectRef idx="2">
+            <a:schemeClr val="accent1"/>
+          </a:effectRef>
+          <a:fontRef idx="minor">
+            <a:schemeClr val="lt1"/>
+          </a:fontRef>
+        </p:style>
+        <p:txBody>
+          <a:bodyPr rtlCol="0" anchor="ctr" wrap="square"/>
+          <a:lstStyle/>
+          <a:p>
+            <a:pPr algn="ctr">
+              <a:defRPr b="1" sz="1200">
+                <a:solidFill>
+                  <a:srgbClr val="4F46E5"/>
+                </a:solidFill>
+                <a:latin typeface="Calibri"/>
+              </a:defRPr>
+            </a:pPr>
+            <a:r>
+              <a:t>Figure 4(b): Assembled Hardware Setup</a:t>
+            </a:r>
+          </a:p>
+          <a:p>
+            <a:pPr>
+              <a:defRPr sz="1050">
+                <a:solidFill>
+                  <a:srgbClr val="1E293B"/>
+                </a:solidFill>
+                <a:latin typeface="Calibri"/>
+              </a:defRPr>
+            </a:pPr>
+            <a:r>
+              <a:t>• 58mm/80mm ESC/POS printer</a:t>
+            </a:r>
+            <a:br/>
+            <a:r>
+              <a:t>• Silent raw byte-stream driver</a:t>
+            </a:r>
+            <a:br/>
+            <a:r>
+              <a:t>• Automatic guillotine cutter</a:t>
+            </a:r>
+            <a:br/>
+            <a:r>
+              <a:t>• Hardware cost under ₹2,800</a:t>
+            </a:r>
+          </a:p>
+        </p:txBody>
+      </p:sp>
+      <p:pic>
+        <p:nvPicPr>
+          <p:cNvPr id="12" name="Picture 11" descr="about_img_1.png"/>
+          <p:cNvPicPr>
+            <a:picLocks noChangeAspect="1"/>
+          </p:cNvPicPr>
+          <p:nvPr/>
+        </p:nvPicPr>
+        <p:blipFill>
+          <a:blip r:embed="rId6"/>
+          <a:stretch>
+            <a:fillRect/>
+          </a:stretch>
+        </p:blipFill>
+        <p:spPr>
+          <a:xfrm>
+            <a:off x="8046720" y="1371600"/>
+            <a:ext cx="3383280" cy="2286000"/>
           </a:xfrm>
           <a:prstGeom prst="rect">
             <a:avLst/>
           </a:prstGeom>
-          <a:noFill/>
-        </p:spPr>
-        <p:txBody>
-          <a:bodyPr wrap="square">
-            <a:spAutoFit/>
-          </a:bodyPr>
-          <a:lstStyle/>
+        </p:spPr>
+      </p:pic>
+      <p:sp>
+        <p:nvSpPr>
+          <p:cNvPr id="13" name="Rounded Rectangle 12"/>
+          <p:cNvSpPr/>
+          <p:nvPr/>
+        </p:nvSpPr>
+        <p:spPr>
+          <a:xfrm>
+            <a:off x="8046720" y="3749039"/>
+            <a:ext cx="3383280" cy="1828800"/>
+          </a:xfrm>
+          <a:prstGeom prst="roundRect">
+            <a:avLst/>
+          </a:prstGeom>
+          <a:solidFill>
+            <a:srgbClr val="F8FAFC"/>
+          </a:solidFill>
+          <a:ln>
+            <a:solidFill>
+              <a:srgbClr val="E2E8F0"/>
+            </a:solidFill>
+          </a:ln>
+        </p:spPr>
+        <p:style>
+          <a:lnRef idx="1">
+            <a:schemeClr val="accent1"/>
+          </a:lnRef>
+          <a:fillRef idx="3">
+            <a:schemeClr val="accent1"/>
+          </a:fillRef>
+          <a:effectRef idx="2">
+            <a:schemeClr val="accent1"/>
+          </a:effectRef>
+          <a:fontRef idx="minor">
+            <a:schemeClr val="lt1"/>
+          </a:fontRef>
+        </p:style>
+        <p:txBody>
+          <a:bodyPr rtlCol="0" anchor="ctr" wrap="square"/>
+          <a:lstStyle/>
+          <a:p>
+            <a:pPr algn="ctr">
+              <a:defRPr b="1" sz="1200">
+                <a:solidFill>
+                  <a:srgbClr val="4F46E5"/>
+                </a:solidFill>
+                <a:latin typeface="Calibri"/>
+              </a:defRPr>
+            </a:pPr>
+            <a:r>
+              <a:t>Figure 4(c): Cloud Management ERP</a:t>
+            </a:r>
+          </a:p>
           <a:p>
             <a:pPr>
-              <a:defRPr sz="1150">
+              <a:defRPr sz="1050">
                 <a:solidFill>
                   <a:srgbClr val="1E293B"/>
                 </a:solidFill>
@@ -5837,33 +6053,74 @@
               </a:defRPr>
             </a:pPr>
             <a:r>
-              <a:t>Left: Authentic DineFlow AI Real-Time Web POS Terminal with active cart, discounts, and UPI QR code.</a:t>
-            </a:r>
-          </a:p>
-          <a:p>
-            <a:pPr>
-              <a:defRPr sz="1150">
-                <a:solidFill>
-                  <a:srgbClr val="1E293B"/>
-                </a:solidFill>
-                <a:latin typeface="Calibri"/>
-              </a:defRPr>
-            </a:pPr>
-            <a:r>
-              <a:t>Right: Authentic DineFlow AI Operations &amp; Revenue Analytics Dashboard with AI Menu Engineering Matrix.</a:t>
-            </a:r>
-          </a:p>
-          <a:p>
-            <a:pPr>
-              <a:defRPr b="1" sz="1200">
-                <a:solidFill>
-                  <a:srgbClr val="4F46E5"/>
-                </a:solidFill>
-                <a:latin typeface="Calibri"/>
-              </a:defRPr>
-            </a:pPr>
-            <a:r>
-              <a:t>Live Cloud Server URL: https://dineflowai.duckdns.org (Hosted on AWS EC2 Ubuntu Server)</a:t>
+              <a:t>• BCG AI menu engineering matrix</a:t>
+            </a:r>
+            <a:br/>
+            <a:r>
+              <a:t>• Raw recipe auto-depletion engine</a:t>
+            </a:r>
+            <a:br/>
+            <a:r>
+              <a:t>• Sub-180ms live kitchen KDS</a:t>
+            </a:r>
+            <a:br/>
+            <a:r>
+              <a:t>• Gujarati audio alert soundbox</a:t>
+            </a:r>
+          </a:p>
+        </p:txBody>
+      </p:sp>
+      <p:sp>
+        <p:nvSpPr>
+          <p:cNvPr id="14" name="Rounded Rectangle 13"/>
+          <p:cNvSpPr/>
+          <p:nvPr/>
+        </p:nvSpPr>
+        <p:spPr>
+          <a:xfrm>
+            <a:off x="731520" y="5715000"/>
+            <a:ext cx="10698480" cy="594360"/>
+          </a:xfrm>
+          <a:prstGeom prst="roundRect">
+            <a:avLst/>
+          </a:prstGeom>
+          <a:solidFill>
+            <a:srgbClr val="F8FAFC"/>
+          </a:solidFill>
+          <a:ln w="12700">
+            <a:solidFill>
+              <a:srgbClr val="4F46E5"/>
+            </a:solidFill>
+          </a:ln>
+        </p:spPr>
+        <p:style>
+          <a:lnRef idx="1">
+            <a:schemeClr val="accent1"/>
+          </a:lnRef>
+          <a:fillRef idx="3">
+            <a:schemeClr val="accent1"/>
+          </a:fillRef>
+          <a:effectRef idx="2">
+            <a:schemeClr val="accent1"/>
+          </a:effectRef>
+          <a:fontRef idx="minor">
+            <a:schemeClr val="lt1"/>
+          </a:fontRef>
+        </p:style>
+        <p:txBody>
+          <a:bodyPr rtlCol="0" anchor="ctr" wrap="square"/>
+          <a:lstStyle/>
+          <a:p>
+            <a:pPr algn="ctr">
+              <a:defRPr b="1" sz="1150">
+                <a:solidFill>
+                  <a:srgbClr val="0F172A"/>
+                </a:solidFill>
+                <a:latin typeface="Calibri"/>
+              </a:defRPr>
+            </a:pPr>
+            <a:r>
+              <a:t>Figure 4: Assembled prototype / model of DineFlow AI | Live Production Cloud: https://dineflowai.duckdns.org</a:t>
             </a:r>
           </a:p>
         </p:txBody>

--- a/docs/DineFlow_AI_GTU_Minor_Project_Presentation.pptx
+++ b/docs/DineFlow_AI_GTU_Minor_Project_Presentation.pptx
@@ -4083,7 +4083,7 @@
                         </a:defRPr>
                       </a:pPr>
                       <a:r>
-                        <a:t>Cloud Hosting Server</a:t>
+                        <a:t>AWS EC2 Cloud Server</a:t>
                       </a:r>
                     </a:p>
                   </a:txBody>
@@ -4107,7 +4107,7 @@
                         </a:defRPr>
                       </a:pPr>
                       <a:r>
-                        <a:t>AWS EC2 Ubuntu 24.04 LTS, 1 vCPU, 2GB RAM</a:t>
+                        <a:t>1 vCPU, 2GB RAM, 30GB SSD (Ubuntu 24.04)</a:t>
                       </a:r>
                     </a:p>
                   </a:txBody>
@@ -4155,7 +4155,7 @@
                         </a:defRPr>
                       </a:pPr>
                       <a:r>
-                        <a:t>₹ 0 (Free Tier / Self-Hosted)</a:t>
+                        <a:t>₹ 0 (Free Tier / Bootstrapped)</a:t>
                       </a:r>
                     </a:p>
                   </a:txBody>
@@ -4277,7 +4277,7 @@
                         </a:defRPr>
                       </a:pPr>
                       <a:r>
-                        <a:t>₹ 0 (Open Source)</a:t>
+                        <a:t>₹ 0 (Open-Source Stack)</a:t>
                       </a:r>
                     </a:p>
                   </a:txBody>
@@ -4351,7 +4351,7 @@
                         </a:defRPr>
                       </a:pPr>
                       <a:r>
-                        <a:t>58mm / 80mm USB Direct ESC/POS Printer</a:t>
+                        <a:t>58mm / 80mm USB Direct Thermal ESC/POS</a:t>
                       </a:r>
                     </a:p>
                   </a:txBody>
@@ -4399,7 +4399,7 @@
                         </a:defRPr>
                       </a:pPr>
                       <a:r>
-                        <a:t>₹ 2,800 (Prototype Unit)</a:t>
+                        <a:t>₹ 2,800 (Commercial HW)</a:t>
                       </a:r>
                     </a:p>
                   </a:txBody>
@@ -4449,7 +4449,7 @@
                         </a:defRPr>
                       </a:pPr>
                       <a:r>
-                        <a:t>Display Devices (POS &amp; KDS)</a:t>
+                        <a:t>Display Terminals</a:t>
                       </a:r>
                     </a:p>
                   </a:txBody>
@@ -4473,7 +4473,7 @@
                         </a:defRPr>
                       </a:pPr>
                       <a:r>
-                        <a:t>Existing PC / Touch Tablet / Smartphone</a:t>
+                        <a:t>Existing Laptops / Tablets / Android Phones</a:t>
                       </a:r>
                     </a:p>
                   </a:txBody>
@@ -4497,7 +4497,7 @@
                         </a:defRPr>
                       </a:pPr>
                       <a:r>
-                        <a:t>2</a:t>
+                        <a:t>3</a:t>
                       </a:r>
                     </a:p>
                   </a:txBody>
@@ -4521,7 +4521,7 @@
                         </a:defRPr>
                       </a:pPr>
                       <a:r>
-                        <a:t>₹ 0 (Existing Hardware)</a:t>
+                        <a:t>₹ 0 (Zero HW Lock-In)</a:t>
                       </a:r>
                     </a:p>
                   </a:txBody>
@@ -4595,7 +4595,7 @@
                         </a:defRPr>
                       </a:pPr>
                       <a:r>
-                        <a:t>DuckDNS Dynamic DNS + Let's Encrypt SSL</a:t>
+                        <a:t>DuckDNS Wildcard + Let's Encrypt SSL</a:t>
                       </a:r>
                     </a:p>
                   </a:txBody>
@@ -4643,7 +4643,7 @@
                         </a:defRPr>
                       </a:pPr>
                       <a:r>
-                        <a:t>₹ 0 (Free / Open)</a:t>
+                        <a:t>₹ 0 (Automated TLS 1.3)</a:t>
                       </a:r>
                     </a:p>
                   </a:txBody>
@@ -5177,7 +5177,7 @@
                         </a:defRPr>
                       </a:pPr>
                       <a:r>
-                        <a:t>Problem formulation, SRS, and architecture selection</a:t>
+                        <a:t>SRS preparation, system architecture, database ER modeling</a:t>
                       </a:r>
                     </a:p>
                   </a:txBody>
@@ -5275,7 +5275,7 @@
                         </a:defRPr>
                       </a:pPr>
                       <a:r>
-                        <a:t>Database design, multi-tenant auth, and POS terminal coding</a:t>
+                        <a:t>Database migration, multi-tenant auth &amp; Web POS billing terminal</a:t>
                       </a:r>
                     </a:p>
                   </a:txBody>
@@ -5373,7 +5373,7 @@
                         </a:defRPr>
                       </a:pPr>
                       <a:r>
-                        <a:t>KDS display, ESC/POS printing, and Gujarati voice soundbox</a:t>
+                        <a:t>KDS kitchen display, ESC/POS printing &amp; Gujarati voice soundbox</a:t>
                       </a:r>
                     </a:p>
                   </a:txBody>
@@ -5471,7 +5471,7 @@
                         </a:defRPr>
                       </a:pPr>
                       <a:r>
-                        <a:t>Testing, AWS EC2 deployment, documentation &amp; final PPT</a:t>
+                        <a:t>Testing, AWS EC2 deployment, documentation &amp; final presentation</a:t>
                       </a:r>
                     </a:p>
                   </a:txBody>
@@ -5495,7 +5495,7 @@
                         </a:defRPr>
                       </a:pPr>
                       <a:r>
-                        <a:t>Seminar 4 (Final)</a:t>
+                        <a:t>Seminar 4</a:t>
                       </a:r>
                     </a:p>
                   </a:txBody>
@@ -6393,7 +6393,7 @@
             <a:pPr algn="ctr">
               <a:defRPr b="1" sz="2800">
                 <a:solidFill>
-                  <a:srgbClr val="10B981"/>
+                  <a:srgbClr val="4F46E5"/>
                 </a:solidFill>
                 <a:latin typeface="Calibri"/>
               </a:defRPr>
@@ -6404,7 +6404,7 @@
           </a:p>
           <a:p>
             <a:pPr algn="ctr">
-              <a:defRPr b="1" sz="1100">
+              <a:defRPr b="1" sz="1150">
                 <a:solidFill>
                   <a:srgbClr val="0F172A"/>
                 </a:solidFill>
@@ -6474,7 +6474,7 @@
             <a:pPr algn="ctr">
               <a:defRPr b="1" sz="2800">
                 <a:solidFill>
-                  <a:srgbClr val="10B981"/>
+                  <a:srgbClr val="4F46E5"/>
                 </a:solidFill>
                 <a:latin typeface="Calibri"/>
               </a:defRPr>
@@ -6485,7 +6485,7 @@
           </a:p>
           <a:p>
             <a:pPr algn="ctr">
-              <a:defRPr b="1" sz="1100">
+              <a:defRPr b="1" sz="1150">
                 <a:solidFill>
                   <a:srgbClr val="0F172A"/>
                 </a:solidFill>
@@ -6555,7 +6555,7 @@
             <a:pPr algn="ctr">
               <a:defRPr b="1" sz="2800">
                 <a:solidFill>
-                  <a:srgbClr val="10B981"/>
+                  <a:srgbClr val="4F46E5"/>
                 </a:solidFill>
                 <a:latin typeface="Calibri"/>
               </a:defRPr>
@@ -6566,7 +6566,7 @@
           </a:p>
           <a:p>
             <a:pPr algn="ctr">
-              <a:defRPr b="1" sz="1100">
+              <a:defRPr b="1" sz="1150">
                 <a:solidFill>
                   <a:srgbClr val="0F172A"/>
                 </a:solidFill>
@@ -6636,7 +6636,7 @@
             <a:pPr algn="ctr">
               <a:defRPr b="1" sz="2800">
                 <a:solidFill>
-                  <a:srgbClr val="10B981"/>
+                  <a:srgbClr val="4F46E5"/>
                 </a:solidFill>
                 <a:latin typeface="Calibri"/>
               </a:defRPr>
@@ -6647,7 +6647,7 @@
           </a:p>
           <a:p>
             <a:pPr algn="ctr">
-              <a:defRPr b="1" sz="1100">
+              <a:defRPr b="1" sz="1150">
                 <a:solidFill>
                   <a:srgbClr val="0F172A"/>
                 </a:solidFill>
@@ -6675,28 +6675,47 @@
       </p:sp>
       <p:sp>
         <p:nvSpPr>
-          <p:cNvPr id="12" name="TextBox 11"/>
-          <p:cNvSpPr txBox="1"/>
+          <p:cNvPr id="12" name="Rounded Rectangle 11"/>
+          <p:cNvSpPr/>
           <p:nvPr/>
         </p:nvSpPr>
         <p:spPr>
           <a:xfrm>
             <a:off x="914400" y="3749039"/>
-            <a:ext cx="10362895" cy="2560320"/>
-          </a:xfrm>
-          <a:prstGeom prst="rect">
-            <a:avLst/>
-          </a:prstGeom>
-          <a:noFill/>
-        </p:spPr>
-        <p:txBody>
-          <a:bodyPr wrap="square">
-            <a:spAutoFit/>
-          </a:bodyPr>
-          <a:lstStyle/>
-          <a:p>
-            <a:pPr>
-              <a:defRPr b="1" sz="1250">
+            <a:ext cx="10362895" cy="2468880"/>
+          </a:xfrm>
+          <a:prstGeom prst="roundRect">
+            <a:avLst/>
+          </a:prstGeom>
+          <a:solidFill>
+            <a:srgbClr val="F8FAFC"/>
+          </a:solidFill>
+          <a:ln>
+            <a:solidFill>
+              <a:srgbClr val="E2E8F0"/>
+            </a:solidFill>
+          </a:ln>
+        </p:spPr>
+        <p:style>
+          <a:lnRef idx="1">
+            <a:schemeClr val="accent1"/>
+          </a:lnRef>
+          <a:fillRef idx="3">
+            <a:schemeClr val="accent1"/>
+          </a:fillRef>
+          <a:effectRef idx="2">
+            <a:schemeClr val="accent1"/>
+          </a:effectRef>
+          <a:fontRef idx="minor">
+            <a:schemeClr val="lt1"/>
+          </a:fontRef>
+        </p:style>
+        <p:txBody>
+          <a:bodyPr rtlCol="0" anchor="ctr" wrap="square"/>
+          <a:lstStyle/>
+          <a:p>
+            <a:pPr algn="ctr">
+              <a:defRPr b="1" sz="1300">
                 <a:solidFill>
                   <a:srgbClr val="4F46E5"/>
                 </a:solidFill>
@@ -6704,7 +6723,7 @@
               </a:defRPr>
             </a:pPr>
             <a:r>
-              <a:t>VERIFIED TEST SUITES (Executed via Automated PHPUnit &amp; Live Stress Testing):</a:t>
+              <a:t>TEST SUITE HIGHLIGHTS &amp; VERIFICATION:</a:t>
             </a:r>
           </a:p>
           <a:p>
@@ -8206,7 +8225,7 @@
           </a:p>
           <a:p>
             <a:pPr>
-              <a:defRPr b="1" sz="1200">
+              <a:defRPr b="1" sz="1100">
                 <a:solidFill>
                   <a:srgbClr val="4F46E5"/>
                 </a:solidFill>
@@ -8218,8 +8237,9 @@
             </a:r>
           </a:p>
           <a:p>
+            <a:br/>
             <a:pPr>
-              <a:defRPr sz="1150">
+              <a:defRPr sz="1100">
                 <a:solidFill>
                   <a:srgbClr val="1E293B"/>
                 </a:solidFill>
@@ -8299,7 +8319,7 @@
           </a:p>
           <a:p>
             <a:pPr>
-              <a:defRPr b="1" sz="1200">
+              <a:defRPr b="1" sz="1100">
                 <a:solidFill>
                   <a:srgbClr val="4F46E5"/>
                 </a:solidFill>
@@ -8311,8 +8331,9 @@
             </a:r>
           </a:p>
           <a:p>
+            <a:br/>
             <a:pPr>
-              <a:defRPr sz="1150">
+              <a:defRPr sz="1100">
                 <a:solidFill>
                   <a:srgbClr val="1E293B"/>
                 </a:solidFill>
@@ -8392,7 +8413,7 @@
           </a:p>
           <a:p>
             <a:pPr>
-              <a:defRPr b="1" sz="1200">
+              <a:defRPr b="1" sz="1100">
                 <a:solidFill>
                   <a:srgbClr val="4F46E5"/>
                 </a:solidFill>
@@ -8404,8 +8425,9 @@
             </a:r>
           </a:p>
           <a:p>
+            <a:br/>
             <a:pPr>
-              <a:defRPr sz="1150">
+              <a:defRPr sz="1100">
                 <a:solidFill>
                   <a:srgbClr val="1E293B"/>
                 </a:solidFill>
@@ -8561,7 +8583,7 @@
               </a:defRPr>
             </a:pPr>
             <a:r>
-              <a:t>References and Thank You</a:t>
+              <a:t>Thank You &amp; Discussion</a:t>
             </a:r>
           </a:p>
         </p:txBody>
@@ -8652,115 +8674,14 @@
       </p:sp>
       <p:sp>
         <p:nvSpPr>
-          <p:cNvPr id="8" name="TextBox 7"/>
-          <p:cNvSpPr txBox="1"/>
-          <p:nvPr/>
-        </p:nvSpPr>
-        <p:spPr>
-          <a:xfrm>
-            <a:off x="914400" y="1463040"/>
-            <a:ext cx="5486400" cy="4754880"/>
-          </a:xfrm>
-          <a:prstGeom prst="rect">
-            <a:avLst/>
-          </a:prstGeom>
-          <a:noFill/>
-        </p:spPr>
-        <p:txBody>
-          <a:bodyPr wrap="square">
-            <a:spAutoFit/>
-          </a:bodyPr>
-          <a:lstStyle/>
-          <a:p>
-            <a:pPr>
-              <a:defRPr b="1" sz="1300">
-                <a:solidFill>
-                  <a:srgbClr val="4F46E5"/>
-                </a:solidFill>
-                <a:latin typeface="Calibri"/>
-              </a:defRPr>
-            </a:pPr>
-            <a:r>
-              <a:t>ACADEMIC REFERENCES (APA 7th Edition):</a:t>
-            </a:r>
-          </a:p>
-          <a:p>
-            <a:pPr>
-              <a:defRPr sz="1050">
-                <a:solidFill>
-                  <a:srgbClr val="1E293B"/>
-                </a:solidFill>
-                <a:latin typeface="Calibri"/>
-              </a:defRPr>
-            </a:pPr>
-            <a:r>
-              <a:t>• Gujarat Technological University. (2026). Diploma Engineering Minor Project Syllabus (Subject Code: DI05000341). GTU Academic Board.</a:t>
-            </a:r>
-          </a:p>
-          <a:p>
-            <a:pPr>
-              <a:defRPr sz="1050">
-                <a:solidFill>
-                  <a:srgbClr val="1E293B"/>
-                </a:solidFill>
-                <a:latin typeface="Calibri"/>
-              </a:defRPr>
-            </a:pPr>
-            <a:r>
-              <a:t>• National Restaurant Association of India. (2024). India Food Services Report: Technology Adoption in Hospitality Sector. NRAI Publications.</a:t>
-            </a:r>
-          </a:p>
-          <a:p>
-            <a:pPr>
-              <a:defRPr sz="1050">
-                <a:solidFill>
-                  <a:srgbClr val="1E293B"/>
-                </a:solidFill>
-                <a:latin typeface="Calibri"/>
-              </a:defRPr>
-            </a:pPr>
-            <a:r>
-              <a:t>• Otwell, T. (2024). Laravel 11: The PHP Framework for Web Artisans. Taylor Otwell &amp; Laravel Core Team.</a:t>
-            </a:r>
-          </a:p>
-          <a:p>
-            <a:pPr>
-              <a:defRPr sz="1050">
-                <a:solidFill>
-                  <a:srgbClr val="1E293B"/>
-                </a:solidFill>
-                <a:latin typeface="Calibri"/>
-              </a:defRPr>
-            </a:pPr>
-            <a:r>
-              <a:t>• Fielding, R. T. (2000). Architectural Styles and the Design of Network-based Software Architectures. University of California, Irvine.</a:t>
-            </a:r>
-          </a:p>
-          <a:p>
-            <a:pPr>
-              <a:defRPr sz="1050">
-                <a:solidFill>
-                  <a:srgbClr val="1E293B"/>
-                </a:solidFill>
-                <a:latin typeface="Calibri"/>
-              </a:defRPr>
-            </a:pPr>
-            <a:r>
-              <a:t>• World Wide Web Consortium. (2023). Progressive Web Apps Architecture &amp; Service Workers Specification. W3C Recommendation.</a:t>
-            </a:r>
-          </a:p>
-        </p:txBody>
-      </p:sp>
-      <p:sp>
-        <p:nvSpPr>
-          <p:cNvPr id="9" name="Rounded Rectangle 8"/>
+          <p:cNvPr id="8" name="Rounded Rectangle 7"/>
           <p:cNvSpPr/>
           <p:nvPr/>
         </p:nvSpPr>
         <p:spPr>
           <a:xfrm>
-            <a:off x="6766560" y="1463040"/>
-            <a:ext cx="4480560" cy="4572000"/>
+            <a:off x="2286000" y="1463040"/>
+            <a:ext cx="7619695" cy="4572000"/>
           </a:xfrm>
           <a:prstGeom prst="roundRect">
             <a:avLst/>
@@ -10056,9 +9977,9 @@
           <a:lstStyle/>
           <a:p>
             <a:pPr algn="ctr">
-              <a:defRPr b="1" sz="1350">
-                <a:solidFill>
-                  <a:srgbClr val="4F46E5"/>
+              <a:defRPr b="1" sz="1400">
+                <a:solidFill>
+                  <a:srgbClr val="0F172A"/>
                 </a:solidFill>
                 <a:latin typeface="Calibri"/>
               </a:defRPr>
@@ -10068,6 +9989,7 @@
             </a:r>
           </a:p>
           <a:p>
+            <a:br/>
             <a:pPr>
               <a:defRPr sz="1150">
                 <a:solidFill>
@@ -10132,9 +10054,9 @@
           <a:lstStyle/>
           <a:p>
             <a:pPr algn="ctr">
-              <a:defRPr b="1" sz="1350">
-                <a:solidFill>
-                  <a:srgbClr val="4F46E5"/>
+              <a:defRPr b="1" sz="1400">
+                <a:solidFill>
+                  <a:srgbClr val="0F172A"/>
                 </a:solidFill>
                 <a:latin typeface="Calibri"/>
               </a:defRPr>
@@ -10144,6 +10066,7 @@
             </a:r>
           </a:p>
           <a:p>
+            <a:br/>
             <a:pPr>
               <a:defRPr sz="1150">
                 <a:solidFill>
@@ -10208,9 +10131,9 @@
           <a:lstStyle/>
           <a:p>
             <a:pPr algn="ctr">
-              <a:defRPr b="1" sz="1350">
-                <a:solidFill>
-                  <a:srgbClr val="4F46E5"/>
+              <a:defRPr b="1" sz="1400">
+                <a:solidFill>
+                  <a:srgbClr val="0F172A"/>
                 </a:solidFill>
                 <a:latin typeface="Calibri"/>
               </a:defRPr>
@@ -10220,6 +10143,7 @@
             </a:r>
           </a:p>
           <a:p>
+            <a:br/>
             <a:pPr>
               <a:defRPr sz="1150">
                 <a:solidFill>
@@ -10377,7 +10301,7 @@
               </a:defRPr>
             </a:pPr>
             <a:r>
-              <a:t>Literature Survey and Research Gap</a:t>
+              <a:t>Literature Survey &amp; Market Research</a:t>
             </a:r>
           </a:p>
         </p:txBody>
@@ -10476,7 +10400,7 @@
         </p:nvGraphicFramePr>
         <p:xfrm>
           <a:off x="914400" y="1371600"/>
-          <a:ext cx="10332720" cy="3474720"/>
+          <a:ext cx="10332720" cy="4114800"/>
         </p:xfrm>
         <a:graphic>
           <a:graphicData uri="http://schemas.openxmlformats.org/drawingml/2006/table">
@@ -10485,12 +10409,13 @@
                 <a:tableStyleId>{5C22544A-7EE6-4342-B048-85BDC9FD1C3A}</a:tableStyleId>
               </a:tblPr>
               <a:tblGrid>
-                <a:gridCol w="2286000"/>
                 <a:gridCol w="2011680"/>
-                <a:gridCol w="3474720"/>
-                <a:gridCol w="2560320"/>
+                <a:gridCol w="2011680"/>
+                <a:gridCol w="2103120"/>
+                <a:gridCol w="2103120"/>
+                <a:gridCol w="2103120"/>
               </a:tblGrid>
-              <a:tr h="694944">
+              <a:tr h="822960">
                 <a:tc>
                   <a:txBody>
                     <a:bodyPr/>
@@ -10505,7 +10430,7 @@
                         </a:defRPr>
                       </a:pPr>
                       <a:r>
-                        <a:t>Existing System / Source</a:t>
+                        <a:t>System Analyzed</a:t>
                       </a:r>
                     </a:p>
                   </a:txBody>
@@ -10529,7 +10454,7 @@
                         </a:defRPr>
                       </a:pPr>
                       <a:r>
-                        <a:t>Core Technology</a:t>
+                        <a:t>Platform &amp; Tech</a:t>
                       </a:r>
                     </a:p>
                   </a:txBody>
@@ -10553,7 +10478,7 @@
                         </a:defRPr>
                       </a:pPr>
                       <a:r>
-                        <a:t>Working Method</a:t>
+                        <a:t>Core Strengths</a:t>
                       </a:r>
                     </a:p>
                   </a:txBody>
@@ -10577,7 +10502,31 @@
                         </a:defRPr>
                       </a:pPr>
                       <a:r>
-                        <a:t>Identified Gap / Limitation</a:t>
+                        <a:t>Identified Weakness</a:t>
+                      </a:r>
+                    </a:p>
+                  </a:txBody>
+                  <a:tcPr>
+                    <a:solidFill>
+                      <a:srgbClr val="4F46E5"/>
+                    </a:solidFill>
+                  </a:tcPr>
+                </a:tc>
+                <a:tc>
+                  <a:txBody>
+                    <a:bodyPr/>
+                    <a:lstStyle/>
+                    <a:p>
+                      <a:pPr>
+                        <a:defRPr b="1" sz="1100">
+                          <a:solidFill>
+                            <a:srgbClr val="FFFFFF"/>
+                          </a:solidFill>
+                          <a:latin typeface="Calibri"/>
+                        </a:defRPr>
+                      </a:pPr>
+                      <a:r>
+                        <a:t>Cost Barrier</a:t>
                       </a:r>
                     </a:p>
                   </a:txBody>
@@ -10588,7 +10537,7 @@
                   </a:tcPr>
                 </a:tc>
               </a:tr>
-              <a:tr h="694944">
+              <a:tr h="822960">
                 <a:tc>
                   <a:txBody>
                     <a:bodyPr/>
@@ -10603,7 +10552,7 @@
                         </a:defRPr>
                       </a:pPr>
                       <a:r>
-                        <a:t>Toast POS (USA, 2023)</a:t>
+                        <a:t>Toast POS (US)</a:t>
                       </a:r>
                     </a:p>
                   </a:txBody>
@@ -10627,7 +10576,7 @@
                         </a:defRPr>
                       </a:pPr>
                       <a:r>
-                        <a:t>Android Proprietary</a:t>
+                        <a:t>Android Cloud</a:t>
                       </a:r>
                     </a:p>
                   </a:txBody>
@@ -10651,7 +10600,7 @@
                         </a:defRPr>
                       </a:pPr>
                       <a:r>
-                        <a:t>Cloud POS for large chains</a:t>
+                        <a:t>Handheld ordering</a:t>
                       </a:r>
                     </a:p>
                   </a:txBody>
@@ -10675,33 +10624,7 @@
                         </a:defRPr>
                       </a:pPr>
                       <a:r>
-                        <a:t>Expensive ($69-$165/mo), proprietary hardware lock-in, zero Indian UPI/GST.</a:t>
-                      </a:r>
-                    </a:p>
-                  </a:txBody>
-                  <a:tcPr>
-                    <a:solidFill>
-                      <a:srgbClr val="F8FAFC"/>
-                    </a:solidFill>
-                  </a:tcPr>
-                </a:tc>
-              </a:tr>
-              <a:tr h="694944">
-                <a:tc>
-                  <a:txBody>
-                    <a:bodyPr/>
-                    <a:lstStyle/>
-                    <a:p>
-                      <a:pPr>
-                        <a:defRPr sz="1050">
-                          <a:solidFill>
-                            <a:srgbClr val="1E293B"/>
-                          </a:solidFill>
-                          <a:latin typeface="Calibri"/>
-                        </a:defRPr>
-                      </a:pPr>
-                      <a:r>
-                        <a:t>Petpooja (India, 2024)</a:t>
+                        <a:t>Proprietary HW lock-in; no Indian UPI/GST</a:t>
                       </a:r>
                     </a:p>
                   </a:txBody>
@@ -10725,7 +10648,33 @@
                         </a:defRPr>
                       </a:pPr>
                       <a:r>
-                        <a:t>Desktop Windows App</a:t>
+                        <a:t>High ($1,000+ HW + $69/mo)</a:t>
+                      </a:r>
+                    </a:p>
+                  </a:txBody>
+                  <a:tcPr>
+                    <a:solidFill>
+                      <a:srgbClr val="F8FAFC"/>
+                    </a:solidFill>
+                  </a:tcPr>
+                </a:tc>
+              </a:tr>
+              <a:tr h="822960">
+                <a:tc>
+                  <a:txBody>
+                    <a:bodyPr/>
+                    <a:lstStyle/>
+                    <a:p>
+                      <a:pPr>
+                        <a:defRPr sz="1050">
+                          <a:solidFill>
+                            <a:srgbClr val="1E293B"/>
+                          </a:solidFill>
+                          <a:latin typeface="Calibri"/>
+                        </a:defRPr>
+                      </a:pPr>
+                      <a:r>
+                        <a:t>Petpooja (India)</a:t>
                       </a:r>
                     </a:p>
                   </a:txBody>
@@ -10749,7 +10698,7 @@
                         </a:defRPr>
                       </a:pPr>
                       <a:r>
-                        <a:t>Local client-server billing</a:t>
+                        <a:t>Windows Desktop Client</a:t>
                       </a:r>
                     </a:p>
                   </a:txBody>
@@ -10773,7 +10722,7 @@
                         </a:defRPr>
                       </a:pPr>
                       <a:r>
-                        <a:t>Heavy desktop client install required, complex remote sync, slow QR ordering.</a:t>
+                        <a:t>Widely adopted in India</a:t>
                       </a:r>
                     </a:p>
                   </a:txBody>
@@ -10783,8 +10732,6 @@
                     </a:solidFill>
                   </a:tcPr>
                 </a:tc>
-              </a:tr>
-              <a:tr h="694944">
                 <a:tc>
                   <a:txBody>
                     <a:bodyPr/>
@@ -10799,7 +10746,57 @@
                         </a:defRPr>
                       </a:pPr>
                       <a:r>
-                        <a:t>POSist / Restroworks (2023)</a:t>
+                        <a:t>Heavy PC install; slow web QR sync</a:t>
+                      </a:r>
+                    </a:p>
+                  </a:txBody>
+                  <a:tcPr>
+                    <a:solidFill>
+                      <a:srgbClr val="F8FAFC"/>
+                    </a:solidFill>
+                  </a:tcPr>
+                </a:tc>
+                <a:tc>
+                  <a:txBody>
+                    <a:bodyPr/>
+                    <a:lstStyle/>
+                    <a:p>
+                      <a:pPr>
+                        <a:defRPr sz="1050">
+                          <a:solidFill>
+                            <a:srgbClr val="1E293B"/>
+                          </a:solidFill>
+                          <a:latin typeface="Calibri"/>
+                        </a:defRPr>
+                      </a:pPr>
+                      <a:r>
+                        <a:t>Moderate (₹10,000/yr + Add-ons)</a:t>
+                      </a:r>
+                    </a:p>
+                  </a:txBody>
+                  <a:tcPr>
+                    <a:solidFill>
+                      <a:srgbClr val="F8FAFC"/>
+                    </a:solidFill>
+                  </a:tcPr>
+                </a:tc>
+              </a:tr>
+              <a:tr h="822960">
+                <a:tc>
+                  <a:txBody>
+                    <a:bodyPr/>
+                    <a:lstStyle/>
+                    <a:p>
+                      <a:pPr>
+                        <a:defRPr sz="1050">
+                          <a:solidFill>
+                            <a:srgbClr val="1E293B"/>
+                          </a:solidFill>
+                          <a:latin typeface="Calibri"/>
+                        </a:defRPr>
+                      </a:pPr>
+                      <a:r>
+                        <a:t>POSist / Restroworks</a:t>
                       </a:r>
                     </a:p>
                   </a:txBody>
@@ -10847,7 +10844,7 @@
                         </a:defRPr>
                       </a:pPr>
                       <a:r>
-                        <a:t>Multi-brand centralized ERP</a:t>
+                        <a:t>Multi-chain reporting</a:t>
                       </a:r>
                     </a:p>
                   </a:txBody>
@@ -10871,33 +10868,7 @@
                         </a:defRPr>
                       </a:pPr>
                       <a:r>
-                        <a:t>High subscription cost, steep learning curve, no regional Gujarati voice soundbox.</a:t>
-                      </a:r>
-                    </a:p>
-                  </a:txBody>
-                  <a:tcPr>
-                    <a:solidFill>
-                      <a:srgbClr val="F8FAFC"/>
-                    </a:solidFill>
-                  </a:tcPr>
-                </a:tc>
-              </a:tr>
-              <a:tr h="694944">
-                <a:tc>
-                  <a:txBody>
-                    <a:bodyPr/>
-                    <a:lstStyle/>
-                    <a:p>
-                      <a:pPr>
-                        <a:defRPr sz="1050">
-                          <a:solidFill>
-                            <a:srgbClr val="1E293B"/>
-                          </a:solidFill>
-                          <a:latin typeface="Calibri"/>
-                        </a:defRPr>
-                      </a:pPr>
-                      <a:r>
-                        <a:t>Manual Paper Tokens (Traditional)</a:t>
+                        <a:t>Steep learning curve; complex for cafes</a:t>
                       </a:r>
                     </a:p>
                   </a:txBody>
@@ -10921,7 +10892,33 @@
                         </a:defRPr>
                       </a:pPr>
                       <a:r>
-                        <a:t>Pen &amp; Paper / Token</a:t>
+                        <a:t>Very High (₹25,000/yr minimum)</a:t>
+                      </a:r>
+                    </a:p>
+                  </a:txBody>
+                  <a:tcPr>
+                    <a:solidFill>
+                      <a:srgbClr val="F8FAFC"/>
+                    </a:solidFill>
+                  </a:tcPr>
+                </a:tc>
+              </a:tr>
+              <a:tr h="822960">
+                <a:tc>
+                  <a:txBody>
+                    <a:bodyPr/>
+                    <a:lstStyle/>
+                    <a:p>
+                      <a:pPr>
+                        <a:defRPr sz="1050">
+                          <a:solidFill>
+                            <a:srgbClr val="1E293B"/>
+                          </a:solidFill>
+                          <a:latin typeface="Calibri"/>
+                        </a:defRPr>
+                      </a:pPr>
+                      <a:r>
+                        <a:t>Manual Paper Tokens</a:t>
                       </a:r>
                     </a:p>
                   </a:txBody>
@@ -10945,7 +10942,7 @@
                         </a:defRPr>
                       </a:pPr>
                       <a:r>
-                        <a:t>Handwritten KOT slips</a:t>
+                        <a:t>Paper &amp; Notepad</a:t>
                       </a:r>
                     </a:p>
                   </a:txBody>
@@ -10969,7 +10966,55 @@
                         </a:defRPr>
                       </a:pPr>
                       <a:r>
-                        <a:t>High error rate (15-20%), lost slips, zero inventory visibility, zero analytics.</a:t>
+                        <a:t>Zero digital investment</a:t>
+                      </a:r>
+                    </a:p>
+                  </a:txBody>
+                  <a:tcPr>
+                    <a:solidFill>
+                      <a:srgbClr val="F8FAFC"/>
+                    </a:solidFill>
+                  </a:tcPr>
+                </a:tc>
+                <a:tc>
+                  <a:txBody>
+                    <a:bodyPr/>
+                    <a:lstStyle/>
+                    <a:p>
+                      <a:pPr>
+                        <a:defRPr sz="1050">
+                          <a:solidFill>
+                            <a:srgbClr val="1E293B"/>
+                          </a:solidFill>
+                          <a:latin typeface="Calibri"/>
+                        </a:defRPr>
+                      </a:pPr>
+                      <a:r>
+                        <a:t>15-20% errors, lost KOTs, zero stock math</a:t>
+                      </a:r>
+                    </a:p>
+                  </a:txBody>
+                  <a:tcPr>
+                    <a:solidFill>
+                      <a:srgbClr val="F8FAFC"/>
+                    </a:solidFill>
+                  </a:tcPr>
+                </a:tc>
+                <a:tc>
+                  <a:txBody>
+                    <a:bodyPr/>
+                    <a:lstStyle/>
+                    <a:p>
+                      <a:pPr>
+                        <a:defRPr sz="1050">
+                          <a:solidFill>
+                            <a:srgbClr val="1E293B"/>
+                          </a:solidFill>
+                          <a:latin typeface="Calibri"/>
+                        </a:defRPr>
+                      </a:pPr>
+                      <a:r>
+                        <a:t>Hidden (₹10,000/yr printing waste)</a:t>
                       </a:r>
                     </a:p>
                   </a:txBody>
@@ -10992,8 +11037,8 @@
         </p:nvSpPr>
         <p:spPr>
           <a:xfrm>
-            <a:off x="914400" y="5120640"/>
-            <a:ext cx="10362895" cy="1280160"/>
+            <a:off x="914400" y="5669280"/>
+            <a:ext cx="10362895" cy="822960"/>
           </a:xfrm>
           <a:prstGeom prst="rect">
             <a:avLst/>
@@ -11007,28 +11052,15 @@
           <a:lstStyle/>
           <a:p>
             <a:pPr>
-              <a:defRPr b="1" sz="1250">
-                <a:solidFill>
-                  <a:srgbClr val="10B981"/>
+              <a:defRPr b="1" sz="1100">
+                <a:solidFill>
+                  <a:srgbClr val="4F46E5"/>
                 </a:solidFill>
                 <a:latin typeface="Calibri"/>
               </a:defRPr>
             </a:pPr>
             <a:r>
-              <a:t>RESEARCH GAP IDENTIFIED:</a:t>
-            </a:r>
-          </a:p>
-          <a:p>
-            <a:pPr>
-              <a:defRPr sz="1150">
-                <a:solidFill>
-                  <a:srgbClr val="1E293B"/>
-                </a:solidFill>
-                <a:latin typeface="Calibri"/>
-              </a:defRPr>
-            </a:pPr>
-            <a:r>
-              <a:t>Existing solutions are either expensive and locked to proprietary hardware or limited to clunky offline desktop software. There is a clear market need for an affordable, hardware-agnostic Cloud PWA POS combining instantaneous QR table ordering, live KDS, raw-material recipe costing, and regional Gujarati voice alerts.</a:t>
+              <a:t>RESEARCH GAP: Small eateries lack an affordable, zero-install Cloud PWA POS combining sub-3s billing, contactless QR ordering, recipe BOM depletion, and Gujarati audio alerts without proprietary hardware lock-in.</a:t>
             </a:r>
           </a:p>
         </p:txBody>
@@ -11168,7 +11200,7 @@
               </a:defRPr>
             </a:pPr>
             <a:r>
-              <a:t>Alternative Solutions and Selection</a:t>
+              <a:t>Comparative Analysis of Alternative Solutions</a:t>
             </a:r>
           </a:p>
         </p:txBody>
@@ -11277,9 +11309,9 @@
               </a:tblPr>
               <a:tblGrid>
                 <a:gridCol w="2286000"/>
-                <a:gridCol w="2560320"/>
-                <a:gridCol w="2560320"/>
-                <a:gridCol w="2926080"/>
+                <a:gridCol w="2651760"/>
+                <a:gridCol w="2651760"/>
+                <a:gridCol w="2743200"/>
               </a:tblGrid>
               <a:tr h="694944">
                 <a:tc>
@@ -11288,7 +11320,7 @@
                     <a:lstStyle/>
                     <a:p>
                       <a:pPr>
-                        <a:defRPr b="1" sz="1050">
+                        <a:defRPr b="1" sz="1100">
                           <a:solidFill>
                             <a:srgbClr val="FFFFFF"/>
                           </a:solidFill>
@@ -11296,7 +11328,7 @@
                         </a:defRPr>
                       </a:pPr>
                       <a:r>
-                        <a:t>Comparison Criteria</a:t>
+                        <a:t>Evaluation Metric</a:t>
                       </a:r>
                     </a:p>
                   </a:txBody>
@@ -11312,7 +11344,7 @@
                     <a:lstStyle/>
                     <a:p>
                       <a:pPr>
-                        <a:defRPr b="1" sz="1050">
+                        <a:defRPr b="1" sz="1100">
                           <a:solidFill>
                             <a:srgbClr val="FFFFFF"/>
                           </a:solidFill>
@@ -11320,7 +11352,7 @@
                         </a:defRPr>
                       </a:pPr>
                       <a:r>
-                        <a:t>Option A: Desktop App (C# / .NET)</a:t>
+                        <a:t>Option A: Desktop Native</a:t>
                       </a:r>
                     </a:p>
                   </a:txBody>
@@ -11336,7 +11368,7 @@
                     <a:lstStyle/>
                     <a:p>
                       <a:pPr>
-                        <a:defRPr b="1" sz="1050">
+                        <a:defRPr b="1" sz="1100">
                           <a:solidFill>
                             <a:srgbClr val="FFFFFF"/>
                           </a:solidFill>
@@ -11344,7 +11376,7 @@
                         </a:defRPr>
                       </a:pPr>
                       <a:r>
-                        <a:t>Option B: Dedicated Hardware Terminal</a:t>
+                        <a:t>Option B: Dedicated HW</a:t>
                       </a:r>
                     </a:p>
                   </a:txBody>
@@ -11360,7 +11392,7 @@
                     <a:lstStyle/>
                     <a:p>
                       <a:pPr>
-                        <a:defRPr b="1" sz="1050">
+                        <a:defRPr b="1" sz="1100">
                           <a:solidFill>
                             <a:srgbClr val="FFFFFF"/>
                           </a:solidFill>
@@ -11368,7 +11400,7 @@
                         </a:defRPr>
                       </a:pPr>
                       <a:r>
-                        <a:t>Option C (Selected): Cloud PWA (Laravel + JS)</a:t>
+                        <a:t>Option C: Cloud PWA (DineFlow AI)</a:t>
                       </a:r>
                     </a:p>
                   </a:txBody>
@@ -12065,9 +12097,9 @@
           <a:solidFill>
             <a:srgbClr val="F8FAFC"/>
           </a:solidFill>
-          <a:ln w="19050">
+          <a:ln>
             <a:solidFill>
-              <a:srgbClr val="4F46E5"/>
+              <a:srgbClr val="E2E8F0"/>
             </a:solidFill>
           </a:ln>
         </p:spPr>
@@ -12102,6 +12134,7 @@
             </a:r>
           </a:p>
           <a:p>
+            <a:br/>
             <a:pPr>
               <a:defRPr sz="1200">
                 <a:solidFill>
@@ -12145,9 +12178,9 @@
           <a:solidFill>
             <a:srgbClr val="F8FAFC"/>
           </a:solidFill>
-          <a:ln w="19050">
+          <a:ln>
             <a:solidFill>
-              <a:srgbClr val="4F46E5"/>
+              <a:srgbClr val="E2E8F0"/>
             </a:solidFill>
           </a:ln>
         </p:spPr>
@@ -12182,6 +12215,7 @@
             </a:r>
           </a:p>
           <a:p>
+            <a:br/>
             <a:pPr>
               <a:defRPr sz="1200">
                 <a:solidFill>
@@ -12229,9 +12263,9 @@
           <a:solidFill>
             <a:srgbClr val="F8FAFC"/>
           </a:solidFill>
-          <a:ln w="19050">
+          <a:ln>
             <a:solidFill>
-              <a:srgbClr val="4F46E5"/>
+              <a:srgbClr val="E2E8F0"/>
             </a:solidFill>
           </a:ln>
         </p:spPr>
@@ -12266,6 +12300,7 @@
             </a:r>
           </a:p>
           <a:p>
+            <a:br/>
             <a:pPr>
               <a:defRPr sz="1200">
                 <a:solidFill>
@@ -12292,42 +12327,6 @@
             <a:br/>
             <a:r>
               <a:t>• Customer Digital Receipt</a:t>
-            </a:r>
-          </a:p>
-        </p:txBody>
-      </p:sp>
-      <p:sp>
-        <p:nvSpPr>
-          <p:cNvPr id="11" name="TextBox 10"/>
-          <p:cNvSpPr txBox="1"/>
-          <p:nvPr/>
-        </p:nvSpPr>
-        <p:spPr>
-          <a:xfrm>
-            <a:off x="914400" y="5943600"/>
-            <a:ext cx="10362895" cy="548640"/>
-          </a:xfrm>
-          <a:prstGeom prst="rect">
-            <a:avLst/>
-          </a:prstGeom>
-          <a:noFill/>
-        </p:spPr>
-        <p:txBody>
-          <a:bodyPr wrap="none">
-            <a:spAutoFit/>
-          </a:bodyPr>
-          <a:lstStyle/>
-          <a:p>
-            <a:pPr>
-              <a:defRPr sz="1100">
-                <a:solidFill>
-                  <a:srgbClr val="64748B"/>
-                </a:solidFill>
-                <a:latin typeface="Calibri"/>
-              </a:defRPr>
-            </a:pPr>
-            <a:r>
-              <a:t>System Data Flow: Input captures customer/cashier orders → Core validates stock &amp; tenant isolation → Output dispatches KOT &amp; bill simultaneously in &lt;200ms.</a:t>
             </a:r>
           </a:p>
         </p:txBody>
@@ -12467,7 +12466,7 @@
               </a:defRPr>
             </a:pPr>
             <a:r>
-              <a:t>Detailed System Architecture Diagram</a:t>
+              <a:t>Database Design &amp; Entity Architecture</a:t>
             </a:r>
           </a:p>
         </p:txBody>
@@ -12558,40 +12557,59 @@
       </p:sp>
       <p:sp>
         <p:nvSpPr>
-          <p:cNvPr id="8" name="TextBox 7"/>
-          <p:cNvSpPr txBox="1"/>
+          <p:cNvPr id="8" name="Rounded Rectangle 7"/>
+          <p:cNvSpPr/>
           <p:nvPr/>
         </p:nvSpPr>
         <p:spPr>
           <a:xfrm>
             <a:off x="914400" y="1463040"/>
-            <a:ext cx="10362895" cy="4754880"/>
-          </a:xfrm>
-          <a:prstGeom prst="rect">
-            <a:avLst/>
-          </a:prstGeom>
-          <a:noFill/>
-        </p:spPr>
-        <p:txBody>
-          <a:bodyPr wrap="square">
-            <a:spAutoFit/>
-          </a:bodyPr>
-          <a:lstStyle/>
-          <a:p/>
-          <a:p>
-            <a:pPr>
+            <a:ext cx="3291840" cy="4572000"/>
+          </a:xfrm>
+          <a:prstGeom prst="roundRect">
+            <a:avLst/>
+          </a:prstGeom>
+          <a:solidFill>
+            <a:srgbClr val="F8FAFC"/>
+          </a:solidFill>
+          <a:ln>
+            <a:solidFill>
+              <a:srgbClr val="E2E8F0"/>
+            </a:solidFill>
+          </a:ln>
+        </p:spPr>
+        <p:style>
+          <a:lnRef idx="1">
+            <a:schemeClr val="accent1"/>
+          </a:lnRef>
+          <a:fillRef idx="3">
+            <a:schemeClr val="accent1"/>
+          </a:fillRef>
+          <a:effectRef idx="2">
+            <a:schemeClr val="accent1"/>
+          </a:effectRef>
+          <a:fontRef idx="minor">
+            <a:schemeClr val="lt1"/>
+          </a:fontRef>
+        </p:style>
+        <p:txBody>
+          <a:bodyPr rtlCol="0" anchor="ctr" wrap="square"/>
+          <a:lstStyle/>
+          <a:p>
+            <a:pPr algn="ctr">
               <a:defRPr b="1" sz="1350">
                 <a:solidFill>
-                  <a:srgbClr val="4F46E5"/>
+                  <a:srgbClr val="0F172A"/>
                 </a:solidFill>
                 <a:latin typeface="Calibri"/>
               </a:defRPr>
             </a:pPr>
             <a:r>
-              <a:t>1. Client Presentation Tier</a:t>
-            </a:r>
-          </a:p>
-          <a:p>
+              <a:t>Multi-Tenant Core</a:t>
+            </a:r>
+          </a:p>
+          <a:p>
+            <a:br/>
             <a:pPr>
               <a:defRPr sz="1150">
                 <a:solidFill>
@@ -12601,23 +12619,74 @@
               </a:defRPr>
             </a:pPr>
             <a:r>
-              <a:t>Progressive Web App (PWA) running on HTML5, Tailwind CSS, Bootstrap 5, and Vanilla ES6+ JavaScript. Completely responsive across desktop monitors, touch POS terminals, kitchen tablets, and mobile browsers.</a:t>
-            </a:r>
-          </a:p>
-          <a:p>
-            <a:pPr>
+              <a:t>• restaurants (Tenant Master)</a:t>
+            </a:r>
+            <a:br/>
+            <a:r>
+              <a:t>• users (RBAC: Admin/Cashier/Kitchen)</a:t>
+            </a:r>
+            <a:br/>
+            <a:r>
+              <a:t>• restaurant_settings (GST, Currency)</a:t>
+            </a:r>
+          </a:p>
+        </p:txBody>
+      </p:sp>
+      <p:sp>
+        <p:nvSpPr>
+          <p:cNvPr id="9" name="Rounded Rectangle 8"/>
+          <p:cNvSpPr/>
+          <p:nvPr/>
+        </p:nvSpPr>
+        <p:spPr>
+          <a:xfrm>
+            <a:off x="4434840" y="1463040"/>
+            <a:ext cx="3291840" cy="4572000"/>
+          </a:xfrm>
+          <a:prstGeom prst="roundRect">
+            <a:avLst/>
+          </a:prstGeom>
+          <a:solidFill>
+            <a:srgbClr val="F8FAFC"/>
+          </a:solidFill>
+          <a:ln>
+            <a:solidFill>
+              <a:srgbClr val="E2E8F0"/>
+            </a:solidFill>
+          </a:ln>
+        </p:spPr>
+        <p:style>
+          <a:lnRef idx="1">
+            <a:schemeClr val="accent1"/>
+          </a:lnRef>
+          <a:fillRef idx="3">
+            <a:schemeClr val="accent1"/>
+          </a:fillRef>
+          <a:effectRef idx="2">
+            <a:schemeClr val="accent1"/>
+          </a:effectRef>
+          <a:fontRef idx="minor">
+            <a:schemeClr val="lt1"/>
+          </a:fontRef>
+        </p:style>
+        <p:txBody>
+          <a:bodyPr rtlCol="0" anchor="ctr" wrap="square"/>
+          <a:lstStyle/>
+          <a:p>
+            <a:pPr algn="ctr">
               <a:defRPr b="1" sz="1350">
                 <a:solidFill>
-                  <a:srgbClr val="4F46E5"/>
+                  <a:srgbClr val="0F172A"/>
                 </a:solidFill>
                 <a:latin typeface="Calibri"/>
               </a:defRPr>
             </a:pPr>
             <a:r>
-              <a:t>2. Application &amp; API Gateway Tier</a:t>
-            </a:r>
-          </a:p>
-          <a:p>
+              <a:t>Menu &amp; Recipe ERP</a:t>
+            </a:r>
+          </a:p>
+          <a:p>
+            <a:br/>
             <a:pPr>
               <a:defRPr sz="1150">
                 <a:solidFill>
@@ -12627,23 +12696,78 @@
               </a:defRPr>
             </a:pPr>
             <a:r>
-              <a:t>Hosted on Nginx with HTTP/2 SSL encryption. Powered by Laravel 11 MVC framework (PHP 8.3) utilizing RESTful endpoints, CSRF token security, and Role-Based Access Control (Admin, Manager, Cashier, Waiter, Kitchen).</a:t>
-            </a:r>
-          </a:p>
-          <a:p>
-            <a:pPr>
+              <a:t>• categories (Menu Hierarchy)</a:t>
+            </a:r>
+            <a:br/>
+            <a:r>
+              <a:t>• menu_items (Pricing, Veg/Non-Veg)</a:t>
+            </a:r>
+            <a:br/>
+            <a:r>
+              <a:t>• raw_materials (Inventory Stock)</a:t>
+            </a:r>
+            <a:br/>
+            <a:r>
+              <a:t>• recipes (Bill of Materials / Grams)</a:t>
+            </a:r>
+          </a:p>
+        </p:txBody>
+      </p:sp>
+      <p:sp>
+        <p:nvSpPr>
+          <p:cNvPr id="10" name="Rounded Rectangle 9"/>
+          <p:cNvSpPr/>
+          <p:nvPr/>
+        </p:nvSpPr>
+        <p:spPr>
+          <a:xfrm>
+            <a:off x="7955279" y="1463040"/>
+            <a:ext cx="3291840" cy="4572000"/>
+          </a:xfrm>
+          <a:prstGeom prst="roundRect">
+            <a:avLst/>
+          </a:prstGeom>
+          <a:solidFill>
+            <a:srgbClr val="F8FAFC"/>
+          </a:solidFill>
+          <a:ln>
+            <a:solidFill>
+              <a:srgbClr val="E2E8F0"/>
+            </a:solidFill>
+          </a:ln>
+        </p:spPr>
+        <p:style>
+          <a:lnRef idx="1">
+            <a:schemeClr val="accent1"/>
+          </a:lnRef>
+          <a:fillRef idx="3">
+            <a:schemeClr val="accent1"/>
+          </a:fillRef>
+          <a:effectRef idx="2">
+            <a:schemeClr val="accent1"/>
+          </a:effectRef>
+          <a:fontRef idx="minor">
+            <a:schemeClr val="lt1"/>
+          </a:fontRef>
+        </p:style>
+        <p:txBody>
+          <a:bodyPr rtlCol="0" anchor="ctr" wrap="square"/>
+          <a:lstStyle/>
+          <a:p>
+            <a:pPr algn="ctr">
               <a:defRPr b="1" sz="1350">
                 <a:solidFill>
-                  <a:srgbClr val="4F46E5"/>
+                  <a:srgbClr val="0F172A"/>
                 </a:solidFill>
                 <a:latin typeface="Calibri"/>
               </a:defRPr>
             </a:pPr>
             <a:r>
-              <a:t>3. Business Logic &amp; Real-Time Engine</a:t>
-            </a:r>
-          </a:p>
-          <a:p>
+              <a:t>Live Transactions</a:t>
+            </a:r>
+          </a:p>
+          <a:p>
+            <a:br/>
             <a:pPr>
               <a:defRPr sz="1150">
                 <a:solidFill>
@@ -12653,41 +12777,19 @@
               </a:defRPr>
             </a:pPr>
             <a:r>
-              <a:t>• Order Pipeline: Manages cart calculations, dynamic modifiers, discounts, and split billing.</a:t>
+              <a:t>• tables (Floor Layout &amp; Status)</a:t>
             </a:r>
             <a:br/>
             <a:r>
-              <a:t>• Inventory Depletion: Real-time recipe BOM ingredient deduction (e.g., deducting 80g cheese per pizza).</a:t>
+              <a:t>• orders (Billing, Split Payments)</a:t>
             </a:r>
             <a:br/>
             <a:r>
-              <a:t>• Gujarati Soundbox: HTML5 Web Speech API generating native audio announcements on order receipt.</a:t>
-            </a:r>
-          </a:p>
-          <a:p>
-            <a:pPr>
-              <a:defRPr b="1" sz="1350">
-                <a:solidFill>
-                  <a:srgbClr val="4F46E5"/>
-                </a:solidFill>
-                <a:latin typeface="Calibri"/>
-              </a:defRPr>
-            </a:pPr>
-            <a:r>
-              <a:t>4. Data Persistence &amp; Caching Tier</a:t>
-            </a:r>
-          </a:p>
-          <a:p>
-            <a:pPr>
-              <a:defRPr sz="1150">
-                <a:solidFill>
-                  <a:srgbClr val="1E293B"/>
-                </a:solidFill>
-                <a:latin typeface="Calibri"/>
-              </a:defRPr>
-            </a:pPr>
-            <a:r>
-              <a:t>Relational MySQL 8.0 database with indexed tenant foreign keys ensuring cryptographic data isolation between restaurants, paired with file/Redis caching for sub-50ms query responses.</a:t>
+              <a:t>• order_items (Itemized Breakdown)</a:t>
+            </a:r>
+            <a:br/>
+            <a:r>
+              <a:t>• kitchen_tickets (KDS Live Queue)</a:t>
             </a:r>
           </a:p>
         </p:txBody>
@@ -12827,7 +12929,7 @@
               </a:defRPr>
             </a:pPr>
             <a:r>
-              <a:t>Algorithm / Flowchart</a:t>
+              <a:t>System Flowchart &amp; Order Execution Pipeline</a:t>
             </a:r>
           </a:p>
         </p:txBody>

--- a/docs/DineFlow_AI_GTU_Minor_Project_Presentation.pptx
+++ b/docs/DineFlow_AI_GTU_Minor_Project_Presentation.pptx
@@ -3786,7 +3786,7 @@
         <p:spPr>
           <a:xfrm>
             <a:off x="731520" y="320040"/>
-            <a:ext cx="7772400" cy="777240"/>
+            <a:ext cx="10698480" cy="777240"/>
           </a:xfrm>
           <a:prstGeom prst="rect">
             <a:avLst/>
@@ -3813,64 +3813,16 @@
           </a:p>
         </p:txBody>
       </p:sp>
-      <p:pic>
-        <p:nvPicPr>
-          <p:cNvPr id="5" name="Picture 4" descr="gtu_logo.png"/>
-          <p:cNvPicPr>
-            <a:picLocks noChangeAspect="1"/>
-          </p:cNvPicPr>
-          <p:nvPr/>
-        </p:nvPicPr>
-        <p:blipFill>
-          <a:blip r:embed="rId2"/>
-          <a:stretch>
-            <a:fillRect/>
-          </a:stretch>
-        </p:blipFill>
-        <p:spPr>
-          <a:xfrm>
-            <a:off x="10241280" y="182880"/>
-            <a:ext cx="731520" cy="822960"/>
-          </a:xfrm>
-          <a:prstGeom prst="rect">
-            <a:avLst/>
-          </a:prstGeom>
-        </p:spPr>
-      </p:pic>
-      <p:pic>
-        <p:nvPicPr>
-          <p:cNvPr id="6" name="Picture 5" descr="kdp_patan_logo.png"/>
-          <p:cNvPicPr>
-            <a:picLocks noChangeAspect="1"/>
-          </p:cNvPicPr>
-          <p:nvPr/>
-        </p:nvPicPr>
-        <p:blipFill>
-          <a:blip r:embed="rId3"/>
-          <a:stretch>
-            <a:fillRect/>
-          </a:stretch>
-        </p:blipFill>
-        <p:spPr>
-          <a:xfrm>
-            <a:off x="11155680" y="182880"/>
-            <a:ext cx="777240" cy="777240"/>
-          </a:xfrm>
-          <a:prstGeom prst="rect">
-            <a:avLst/>
-          </a:prstGeom>
-        </p:spPr>
-      </p:pic>
-      <p:sp>
-        <p:nvSpPr>
-          <p:cNvPr id="7" name="TextBox 6"/>
+      <p:sp>
+        <p:nvSpPr>
+          <p:cNvPr id="5" name="TextBox 4"/>
           <p:cNvSpPr txBox="1"/>
           <p:nvPr/>
         </p:nvSpPr>
         <p:spPr>
           <a:xfrm>
             <a:off x="731520" y="960120"/>
-            <a:ext cx="9144000" cy="320040"/>
+            <a:ext cx="10698480" cy="320040"/>
           </a:xfrm>
           <a:prstGeom prst="rect">
             <a:avLst/>
@@ -3899,7 +3851,7 @@
       </p:sp>
       <p:graphicFrame>
         <p:nvGraphicFramePr>
-          <p:cNvPr id="8" name="Table 7"/>
+          <p:cNvPr id="6" name="Table 5"/>
           <p:cNvGraphicFramePr>
             <a:graphicFrameLocks noGrp="1"/>
           </p:cNvGraphicFramePr>
@@ -4660,7 +4612,7 @@
       </p:graphicFrame>
       <p:sp>
         <p:nvSpPr>
-          <p:cNvPr id="9" name="TextBox 8"/>
+          <p:cNvPr id="7" name="TextBox 6"/>
           <p:cNvSpPr txBox="1"/>
           <p:nvPr/>
         </p:nvSpPr>
@@ -4807,7 +4759,7 @@
         <p:spPr>
           <a:xfrm>
             <a:off x="731520" y="320040"/>
-            <a:ext cx="7772400" cy="777240"/>
+            <a:ext cx="10698480" cy="777240"/>
           </a:xfrm>
           <a:prstGeom prst="rect">
             <a:avLst/>
@@ -4834,64 +4786,16 @@
           </a:p>
         </p:txBody>
       </p:sp>
-      <p:pic>
-        <p:nvPicPr>
-          <p:cNvPr id="5" name="Picture 4" descr="gtu_logo.png"/>
-          <p:cNvPicPr>
-            <a:picLocks noChangeAspect="1"/>
-          </p:cNvPicPr>
-          <p:nvPr/>
-        </p:nvPicPr>
-        <p:blipFill>
-          <a:blip r:embed="rId2"/>
-          <a:stretch>
-            <a:fillRect/>
-          </a:stretch>
-        </p:blipFill>
-        <p:spPr>
-          <a:xfrm>
-            <a:off x="10241280" y="182880"/>
-            <a:ext cx="731520" cy="822960"/>
-          </a:xfrm>
-          <a:prstGeom prst="rect">
-            <a:avLst/>
-          </a:prstGeom>
-        </p:spPr>
-      </p:pic>
-      <p:pic>
-        <p:nvPicPr>
-          <p:cNvPr id="6" name="Picture 5" descr="kdp_patan_logo.png"/>
-          <p:cNvPicPr>
-            <a:picLocks noChangeAspect="1"/>
-          </p:cNvPicPr>
-          <p:nvPr/>
-        </p:nvPicPr>
-        <p:blipFill>
-          <a:blip r:embed="rId3"/>
-          <a:stretch>
-            <a:fillRect/>
-          </a:stretch>
-        </p:blipFill>
-        <p:spPr>
-          <a:xfrm>
-            <a:off x="11155680" y="182880"/>
-            <a:ext cx="777240" cy="777240"/>
-          </a:xfrm>
-          <a:prstGeom prst="rect">
-            <a:avLst/>
-          </a:prstGeom>
-        </p:spPr>
-      </p:pic>
-      <p:sp>
-        <p:nvSpPr>
-          <p:cNvPr id="7" name="TextBox 6"/>
+      <p:sp>
+        <p:nvSpPr>
+          <p:cNvPr id="5" name="TextBox 4"/>
           <p:cNvSpPr txBox="1"/>
           <p:nvPr/>
         </p:nvSpPr>
         <p:spPr>
           <a:xfrm>
             <a:off x="731520" y="960120"/>
-            <a:ext cx="9144000" cy="320040"/>
+            <a:ext cx="10698480" cy="320040"/>
           </a:xfrm>
           <a:prstGeom prst="rect">
             <a:avLst/>
@@ -4920,7 +4824,7 @@
       </p:sp>
       <p:graphicFrame>
         <p:nvGraphicFramePr>
-          <p:cNvPr id="8" name="Table 7"/>
+          <p:cNvPr id="6" name="Table 5"/>
           <p:cNvGraphicFramePr>
             <a:graphicFrameLocks noGrp="1"/>
           </p:cNvGraphicFramePr>
@@ -5647,7 +5551,7 @@
         <p:spPr>
           <a:xfrm>
             <a:off x="731520" y="320040"/>
-            <a:ext cx="7772400" cy="777240"/>
+            <a:ext cx="10698480" cy="777240"/>
           </a:xfrm>
           <a:prstGeom prst="rect">
             <a:avLst/>
@@ -5674,9 +5578,45 @@
           </a:p>
         </p:txBody>
       </p:sp>
+      <p:sp>
+        <p:nvSpPr>
+          <p:cNvPr id="5" name="TextBox 4"/>
+          <p:cNvSpPr txBox="1"/>
+          <p:nvPr/>
+        </p:nvSpPr>
+        <p:spPr>
+          <a:xfrm>
+            <a:off x="731520" y="960120"/>
+            <a:ext cx="10698480" cy="320040"/>
+          </a:xfrm>
+          <a:prstGeom prst="rect">
+            <a:avLst/>
+          </a:prstGeom>
+          <a:noFill/>
+        </p:spPr>
+        <p:txBody>
+          <a:bodyPr wrap="none">
+            <a:spAutoFit/>
+          </a:bodyPr>
+          <a:lstStyle/>
+          <a:p>
+            <a:pPr>
+              <a:defRPr sz="1050" b="1">
+                <a:solidFill>
+                  <a:srgbClr val="4F46E5"/>
+                </a:solidFill>
+                <a:latin typeface="Calibri"/>
+              </a:defRPr>
+            </a:pPr>
+            <a:r>
+              <a:t>K. D. Polytechnic, Patan | Department of Computer Engineering | Minor Project (DI05000341) | Slide 12</a:t>
+            </a:r>
+          </a:p>
+        </p:txBody>
+      </p:sp>
       <p:pic>
         <p:nvPicPr>
-          <p:cNvPr id="5" name="Picture 4" descr="gtu_logo.png"/>
+          <p:cNvPr id="6" name="Picture 5" descr="retail-store.png"/>
           <p:cNvPicPr>
             <a:picLocks noChangeAspect="1"/>
           </p:cNvPicPr>
@@ -5690,17 +5630,97 @@
         </p:blipFill>
         <p:spPr>
           <a:xfrm>
-            <a:off x="10241280" y="182880"/>
-            <a:ext cx="731520" cy="822960"/>
+            <a:off x="731520" y="1371600"/>
+            <a:ext cx="3383280" cy="2286000"/>
           </a:xfrm>
           <a:prstGeom prst="rect">
             <a:avLst/>
           </a:prstGeom>
         </p:spPr>
       </p:pic>
+      <p:sp>
+        <p:nvSpPr>
+          <p:cNvPr id="7" name="Rounded Rectangle 6"/>
+          <p:cNvSpPr/>
+          <p:nvPr/>
+        </p:nvSpPr>
+        <p:spPr>
+          <a:xfrm>
+            <a:off x="731520" y="3749039"/>
+            <a:ext cx="3383280" cy="1828800"/>
+          </a:xfrm>
+          <a:prstGeom prst="roundRect">
+            <a:avLst/>
+          </a:prstGeom>
+          <a:solidFill>
+            <a:srgbClr val="F8FAFC"/>
+          </a:solidFill>
+          <a:ln>
+            <a:solidFill>
+              <a:srgbClr val="E2E8F0"/>
+            </a:solidFill>
+          </a:ln>
+        </p:spPr>
+        <p:style>
+          <a:lnRef idx="1">
+            <a:schemeClr val="accent1"/>
+          </a:lnRef>
+          <a:fillRef idx="3">
+            <a:schemeClr val="accent1"/>
+          </a:fillRef>
+          <a:effectRef idx="2">
+            <a:schemeClr val="accent1"/>
+          </a:effectRef>
+          <a:fontRef idx="minor">
+            <a:schemeClr val="lt1"/>
+          </a:fontRef>
+        </p:style>
+        <p:txBody>
+          <a:bodyPr rtlCol="0" anchor="ctr" wrap="square"/>
+          <a:lstStyle/>
+          <a:p>
+            <a:pPr algn="ctr">
+              <a:defRPr b="1" sz="1200">
+                <a:solidFill>
+                  <a:srgbClr val="4F46E5"/>
+                </a:solidFill>
+                <a:latin typeface="Calibri"/>
+              </a:defRPr>
+            </a:pPr>
+            <a:r>
+              <a:t>Figure 4(a): Web POS Terminal</a:t>
+            </a:r>
+          </a:p>
+          <a:p>
+            <a:pPr>
+              <a:defRPr sz="1050">
+                <a:solidFill>
+                  <a:srgbClr val="1E293B"/>
+                </a:solidFill>
+                <a:latin typeface="Calibri"/>
+              </a:defRPr>
+            </a:pPr>
+            <a:r>
+              <a:t>• Sub-3s checkout billing engine</a:t>
+            </a:r>
+            <a:br/>
+            <a:r>
+              <a:t>• Keyboard navigation (F1-F9)</a:t>
+            </a:r>
+            <a:br/>
+            <a:r>
+              <a:t>• Dynamic cart &amp; UPI QR billing</a:t>
+            </a:r>
+            <a:br/>
+            <a:r>
+              <a:t>• Zero local installation needed</a:t>
+            </a:r>
+          </a:p>
+        </p:txBody>
+      </p:sp>
       <p:pic>
         <p:nvPicPr>
-          <p:cNvPr id="6" name="Picture 5" descr="kdp_patan_logo.png"/>
+          <p:cNvPr id="8" name="Picture 7" descr="pos_thermal_printer.jpg"/>
           <p:cNvPicPr>
             <a:picLocks noChangeAspect="1"/>
           </p:cNvPicPr>
@@ -5714,8 +5734,8 @@
         </p:blipFill>
         <p:spPr>
           <a:xfrm>
-            <a:off x="11155680" y="182880"/>
-            <a:ext cx="777240" cy="777240"/>
+            <a:off x="4389120" y="1371600"/>
+            <a:ext cx="3383280" cy="2286000"/>
           </a:xfrm>
           <a:prstGeom prst="rect">
             <a:avLst/>
@@ -5724,43 +5744,87 @@
       </p:pic>
       <p:sp>
         <p:nvSpPr>
-          <p:cNvPr id="7" name="TextBox 6"/>
-          <p:cNvSpPr txBox="1"/>
+          <p:cNvPr id="9" name="Rounded Rectangle 8"/>
+          <p:cNvSpPr/>
           <p:nvPr/>
         </p:nvSpPr>
         <p:spPr>
           <a:xfrm>
-            <a:off x="731520" y="960120"/>
-            <a:ext cx="9144000" cy="320040"/>
-          </a:xfrm>
-          <a:prstGeom prst="rect">
+            <a:off x="4389120" y="3749039"/>
+            <a:ext cx="3383280" cy="1828800"/>
+          </a:xfrm>
+          <a:prstGeom prst="roundRect">
             <a:avLst/>
           </a:prstGeom>
-          <a:noFill/>
-        </p:spPr>
-        <p:txBody>
-          <a:bodyPr wrap="none">
-            <a:spAutoFit/>
-          </a:bodyPr>
-          <a:lstStyle/>
+          <a:solidFill>
+            <a:srgbClr val="F8FAFC"/>
+          </a:solidFill>
+          <a:ln>
+            <a:solidFill>
+              <a:srgbClr val="E2E8F0"/>
+            </a:solidFill>
+          </a:ln>
+        </p:spPr>
+        <p:style>
+          <a:lnRef idx="1">
+            <a:schemeClr val="accent1"/>
+          </a:lnRef>
+          <a:fillRef idx="3">
+            <a:schemeClr val="accent1"/>
+          </a:fillRef>
+          <a:effectRef idx="2">
+            <a:schemeClr val="accent1"/>
+          </a:effectRef>
+          <a:fontRef idx="minor">
+            <a:schemeClr val="lt1"/>
+          </a:fontRef>
+        </p:style>
+        <p:txBody>
+          <a:bodyPr rtlCol="0" anchor="ctr" wrap="square"/>
+          <a:lstStyle/>
+          <a:p>
+            <a:pPr algn="ctr">
+              <a:defRPr b="1" sz="1200">
+                <a:solidFill>
+                  <a:srgbClr val="4F46E5"/>
+                </a:solidFill>
+                <a:latin typeface="Calibri"/>
+              </a:defRPr>
+            </a:pPr>
+            <a:r>
+              <a:t>Figure 4(b): Assembled Hardware Setup</a:t>
+            </a:r>
+          </a:p>
           <a:p>
             <a:pPr>
-              <a:defRPr sz="1050" b="1">
-                <a:solidFill>
-                  <a:srgbClr val="4F46E5"/>
-                </a:solidFill>
-                <a:latin typeface="Calibri"/>
-              </a:defRPr>
-            </a:pPr>
-            <a:r>
-              <a:t>K. D. Polytechnic, Patan | Department of Computer Engineering | Minor Project (DI05000341) | Slide 12</a:t>
+              <a:defRPr sz="1050">
+                <a:solidFill>
+                  <a:srgbClr val="1E293B"/>
+                </a:solidFill>
+                <a:latin typeface="Calibri"/>
+              </a:defRPr>
+            </a:pPr>
+            <a:r>
+              <a:t>• 58mm/80mm ESC/POS printer</a:t>
+            </a:r>
+            <a:br/>
+            <a:r>
+              <a:t>• Silent raw byte-stream driver</a:t>
+            </a:r>
+            <a:br/>
+            <a:r>
+              <a:t>• Automatic guillotine cutter</a:t>
+            </a:r>
+            <a:br/>
+            <a:r>
+              <a:t>• Hardware cost under ₹2,800</a:t>
             </a:r>
           </a:p>
         </p:txBody>
       </p:sp>
       <p:pic>
         <p:nvPicPr>
-          <p:cNvPr id="8" name="Picture 7" descr="retail-store.png"/>
+          <p:cNvPr id="10" name="Picture 9" descr="about_img_1.png"/>
           <p:cNvPicPr>
             <a:picLocks noChangeAspect="1"/>
           </p:cNvPicPr>
@@ -5774,7 +5838,7 @@
         </p:blipFill>
         <p:spPr>
           <a:xfrm>
-            <a:off x="731520" y="1371600"/>
+            <a:off x="8046720" y="1371600"/>
             <a:ext cx="3383280" cy="2286000"/>
           </a:xfrm>
           <a:prstGeom prst="rect">
@@ -5784,13 +5848,13 @@
       </p:pic>
       <p:sp>
         <p:nvSpPr>
-          <p:cNvPr id="9" name="Rounded Rectangle 8"/>
+          <p:cNvPr id="11" name="Rounded Rectangle 10"/>
           <p:cNvSpPr/>
           <p:nvPr/>
         </p:nvSpPr>
         <p:spPr>
           <a:xfrm>
-            <a:off x="731520" y="3749039"/>
+            <a:off x="8046720" y="3749039"/>
             <a:ext cx="3383280" cy="1828800"/>
           </a:xfrm>
           <a:prstGeom prst="roundRect">
@@ -5832,7 +5896,7 @@
               </a:defRPr>
             </a:pPr>
             <a:r>
-              <a:t>Figure 4(a): Web POS Terminal</a:t>
+              <a:t>Figure 4(c): Cloud Management ERP</a:t>
             </a:r>
           </a:p>
           <a:p>
@@ -5845,226 +5909,18 @@
               </a:defRPr>
             </a:pPr>
             <a:r>
-              <a:t>• Sub-3s checkout billing engine</a:t>
+              <a:t>• BCG AI menu engineering matrix</a:t>
             </a:r>
             <a:br/>
             <a:r>
-              <a:t>• Keyboard navigation (F1-F9)</a:t>
+              <a:t>• Raw recipe auto-depletion engine</a:t>
             </a:r>
             <a:br/>
             <a:r>
-              <a:t>• Dynamic cart &amp; UPI QR billing</a:t>
+              <a:t>• Sub-180ms live kitchen KDS</a:t>
             </a:r>
             <a:br/>
             <a:r>
-              <a:t>• Zero local installation needed</a:t>
-            </a:r>
-          </a:p>
-        </p:txBody>
-      </p:sp>
-      <p:pic>
-        <p:nvPicPr>
-          <p:cNvPr id="10" name="Picture 9" descr="pos_thermal_printer.jpg"/>
-          <p:cNvPicPr>
-            <a:picLocks noChangeAspect="1"/>
-          </p:cNvPicPr>
-          <p:nvPr/>
-        </p:nvPicPr>
-        <p:blipFill>
-          <a:blip r:embed="rId5"/>
-          <a:stretch>
-            <a:fillRect/>
-          </a:stretch>
-        </p:blipFill>
-        <p:spPr>
-          <a:xfrm>
-            <a:off x="4389120" y="1371600"/>
-            <a:ext cx="3383280" cy="2286000"/>
-          </a:xfrm>
-          <a:prstGeom prst="rect">
-            <a:avLst/>
-          </a:prstGeom>
-        </p:spPr>
-      </p:pic>
-      <p:sp>
-        <p:nvSpPr>
-          <p:cNvPr id="11" name="Rounded Rectangle 10"/>
-          <p:cNvSpPr/>
-          <p:nvPr/>
-        </p:nvSpPr>
-        <p:spPr>
-          <a:xfrm>
-            <a:off x="4389120" y="3749039"/>
-            <a:ext cx="3383280" cy="1828800"/>
-          </a:xfrm>
-          <a:prstGeom prst="roundRect">
-            <a:avLst/>
-          </a:prstGeom>
-          <a:solidFill>
-            <a:srgbClr val="F8FAFC"/>
-          </a:solidFill>
-          <a:ln>
-            <a:solidFill>
-              <a:srgbClr val="E2E8F0"/>
-            </a:solidFill>
-          </a:ln>
-        </p:spPr>
-        <p:style>
-          <a:lnRef idx="1">
-            <a:schemeClr val="accent1"/>
-          </a:lnRef>
-          <a:fillRef idx="3">
-            <a:schemeClr val="accent1"/>
-          </a:fillRef>
-          <a:effectRef idx="2">
-            <a:schemeClr val="accent1"/>
-          </a:effectRef>
-          <a:fontRef idx="minor">
-            <a:schemeClr val="lt1"/>
-          </a:fontRef>
-        </p:style>
-        <p:txBody>
-          <a:bodyPr rtlCol="0" anchor="ctr" wrap="square"/>
-          <a:lstStyle/>
-          <a:p>
-            <a:pPr algn="ctr">
-              <a:defRPr b="1" sz="1200">
-                <a:solidFill>
-                  <a:srgbClr val="4F46E5"/>
-                </a:solidFill>
-                <a:latin typeface="Calibri"/>
-              </a:defRPr>
-            </a:pPr>
-            <a:r>
-              <a:t>Figure 4(b): Assembled Hardware Setup</a:t>
-            </a:r>
-          </a:p>
-          <a:p>
-            <a:pPr>
-              <a:defRPr sz="1050">
-                <a:solidFill>
-                  <a:srgbClr val="1E293B"/>
-                </a:solidFill>
-                <a:latin typeface="Calibri"/>
-              </a:defRPr>
-            </a:pPr>
-            <a:r>
-              <a:t>• 58mm/80mm ESC/POS printer</a:t>
-            </a:r>
-            <a:br/>
-            <a:r>
-              <a:t>• Silent raw byte-stream driver</a:t>
-            </a:r>
-            <a:br/>
-            <a:r>
-              <a:t>• Automatic guillotine cutter</a:t>
-            </a:r>
-            <a:br/>
-            <a:r>
-              <a:t>• Hardware cost under ₹2,800</a:t>
-            </a:r>
-          </a:p>
-        </p:txBody>
-      </p:sp>
-      <p:pic>
-        <p:nvPicPr>
-          <p:cNvPr id="12" name="Picture 11" descr="about_img_1.png"/>
-          <p:cNvPicPr>
-            <a:picLocks noChangeAspect="1"/>
-          </p:cNvPicPr>
-          <p:nvPr/>
-        </p:nvPicPr>
-        <p:blipFill>
-          <a:blip r:embed="rId6"/>
-          <a:stretch>
-            <a:fillRect/>
-          </a:stretch>
-        </p:blipFill>
-        <p:spPr>
-          <a:xfrm>
-            <a:off x="8046720" y="1371600"/>
-            <a:ext cx="3383280" cy="2286000"/>
-          </a:xfrm>
-          <a:prstGeom prst="rect">
-            <a:avLst/>
-          </a:prstGeom>
-        </p:spPr>
-      </p:pic>
-      <p:sp>
-        <p:nvSpPr>
-          <p:cNvPr id="13" name="Rounded Rectangle 12"/>
-          <p:cNvSpPr/>
-          <p:nvPr/>
-        </p:nvSpPr>
-        <p:spPr>
-          <a:xfrm>
-            <a:off x="8046720" y="3749039"/>
-            <a:ext cx="3383280" cy="1828800"/>
-          </a:xfrm>
-          <a:prstGeom prst="roundRect">
-            <a:avLst/>
-          </a:prstGeom>
-          <a:solidFill>
-            <a:srgbClr val="F8FAFC"/>
-          </a:solidFill>
-          <a:ln>
-            <a:solidFill>
-              <a:srgbClr val="E2E8F0"/>
-            </a:solidFill>
-          </a:ln>
-        </p:spPr>
-        <p:style>
-          <a:lnRef idx="1">
-            <a:schemeClr val="accent1"/>
-          </a:lnRef>
-          <a:fillRef idx="3">
-            <a:schemeClr val="accent1"/>
-          </a:fillRef>
-          <a:effectRef idx="2">
-            <a:schemeClr val="accent1"/>
-          </a:effectRef>
-          <a:fontRef idx="minor">
-            <a:schemeClr val="lt1"/>
-          </a:fontRef>
-        </p:style>
-        <p:txBody>
-          <a:bodyPr rtlCol="0" anchor="ctr" wrap="square"/>
-          <a:lstStyle/>
-          <a:p>
-            <a:pPr algn="ctr">
-              <a:defRPr b="1" sz="1200">
-                <a:solidFill>
-                  <a:srgbClr val="4F46E5"/>
-                </a:solidFill>
-                <a:latin typeface="Calibri"/>
-              </a:defRPr>
-            </a:pPr>
-            <a:r>
-              <a:t>Figure 4(c): Cloud Management ERP</a:t>
-            </a:r>
-          </a:p>
-          <a:p>
-            <a:pPr>
-              <a:defRPr sz="1050">
-                <a:solidFill>
-                  <a:srgbClr val="1E293B"/>
-                </a:solidFill>
-                <a:latin typeface="Calibri"/>
-              </a:defRPr>
-            </a:pPr>
-            <a:r>
-              <a:t>• BCG AI menu engineering matrix</a:t>
-            </a:r>
-            <a:br/>
-            <a:r>
-              <a:t>• Raw recipe auto-depletion engine</a:t>
-            </a:r>
-            <a:br/>
-            <a:r>
-              <a:t>• Sub-180ms live kitchen KDS</a:t>
-            </a:r>
-            <a:br/>
-            <a:r>
               <a:t>• Gujarati audio alert soundbox</a:t>
             </a:r>
           </a:p>
@@ -6072,7 +5928,7 @@
       </p:sp>
       <p:sp>
         <p:nvSpPr>
-          <p:cNvPr id="14" name="Rounded Rectangle 13"/>
+          <p:cNvPr id="12" name="Rounded Rectangle 11"/>
           <p:cNvSpPr/>
           <p:nvPr/>
         </p:nvSpPr>
@@ -6238,7 +6094,7 @@
         <p:spPr>
           <a:xfrm>
             <a:off x="731520" y="320040"/>
-            <a:ext cx="7772400" cy="777240"/>
+            <a:ext cx="10698480" cy="777240"/>
           </a:xfrm>
           <a:prstGeom prst="rect">
             <a:avLst/>
@@ -6265,64 +6121,16 @@
           </a:p>
         </p:txBody>
       </p:sp>
-      <p:pic>
-        <p:nvPicPr>
-          <p:cNvPr id="5" name="Picture 4" descr="gtu_logo.png"/>
-          <p:cNvPicPr>
-            <a:picLocks noChangeAspect="1"/>
-          </p:cNvPicPr>
-          <p:nvPr/>
-        </p:nvPicPr>
-        <p:blipFill>
-          <a:blip r:embed="rId2"/>
-          <a:stretch>
-            <a:fillRect/>
-          </a:stretch>
-        </p:blipFill>
-        <p:spPr>
-          <a:xfrm>
-            <a:off x="10241280" y="182880"/>
-            <a:ext cx="731520" cy="822960"/>
-          </a:xfrm>
-          <a:prstGeom prst="rect">
-            <a:avLst/>
-          </a:prstGeom>
-        </p:spPr>
-      </p:pic>
-      <p:pic>
-        <p:nvPicPr>
-          <p:cNvPr id="6" name="Picture 5" descr="kdp_patan_logo.png"/>
-          <p:cNvPicPr>
-            <a:picLocks noChangeAspect="1"/>
-          </p:cNvPicPr>
-          <p:nvPr/>
-        </p:nvPicPr>
-        <p:blipFill>
-          <a:blip r:embed="rId3"/>
-          <a:stretch>
-            <a:fillRect/>
-          </a:stretch>
-        </p:blipFill>
-        <p:spPr>
-          <a:xfrm>
-            <a:off x="11155680" y="182880"/>
-            <a:ext cx="777240" cy="777240"/>
-          </a:xfrm>
-          <a:prstGeom prst="rect">
-            <a:avLst/>
-          </a:prstGeom>
-        </p:spPr>
-      </p:pic>
-      <p:sp>
-        <p:nvSpPr>
-          <p:cNvPr id="7" name="TextBox 6"/>
+      <p:sp>
+        <p:nvSpPr>
+          <p:cNvPr id="5" name="TextBox 4"/>
           <p:cNvSpPr txBox="1"/>
           <p:nvPr/>
         </p:nvSpPr>
         <p:spPr>
           <a:xfrm>
             <a:off x="731520" y="960120"/>
-            <a:ext cx="9144000" cy="320040"/>
+            <a:ext cx="10698480" cy="320040"/>
           </a:xfrm>
           <a:prstGeom prst="rect">
             <a:avLst/>
@@ -6351,7 +6159,7 @@
       </p:sp>
       <p:sp>
         <p:nvSpPr>
-          <p:cNvPr id="8" name="Rounded Rectangle 7"/>
+          <p:cNvPr id="6" name="Rounded Rectangle 5"/>
           <p:cNvSpPr/>
           <p:nvPr/>
         </p:nvSpPr>
@@ -6432,7 +6240,7 @@
       </p:sp>
       <p:sp>
         <p:nvSpPr>
-          <p:cNvPr id="9" name="Rounded Rectangle 8"/>
+          <p:cNvPr id="7" name="Rounded Rectangle 6"/>
           <p:cNvSpPr/>
           <p:nvPr/>
         </p:nvSpPr>
@@ -6513,7 +6321,7 @@
       </p:sp>
       <p:sp>
         <p:nvSpPr>
-          <p:cNvPr id="10" name="Rounded Rectangle 9"/>
+          <p:cNvPr id="8" name="Rounded Rectangle 7"/>
           <p:cNvSpPr/>
           <p:nvPr/>
         </p:nvSpPr>
@@ -6594,7 +6402,7 @@
       </p:sp>
       <p:sp>
         <p:nvSpPr>
-          <p:cNvPr id="11" name="Rounded Rectangle 10"/>
+          <p:cNvPr id="9" name="Rounded Rectangle 8"/>
           <p:cNvSpPr/>
           <p:nvPr/>
         </p:nvSpPr>
@@ -6675,7 +6483,7 @@
       </p:sp>
       <p:sp>
         <p:nvSpPr>
-          <p:cNvPr id="12" name="Rounded Rectangle 11"/>
+          <p:cNvPr id="10" name="Rounded Rectangle 9"/>
           <p:cNvSpPr/>
           <p:nvPr/>
         </p:nvSpPr>
@@ -6921,7 +6729,7 @@
         <p:spPr>
           <a:xfrm>
             <a:off x="731520" y="320040"/>
-            <a:ext cx="7772400" cy="777240"/>
+            <a:ext cx="10698480" cy="777240"/>
           </a:xfrm>
           <a:prstGeom prst="rect">
             <a:avLst/>
@@ -6948,64 +6756,16 @@
           </a:p>
         </p:txBody>
       </p:sp>
-      <p:pic>
-        <p:nvPicPr>
-          <p:cNvPr id="5" name="Picture 4" descr="gtu_logo.png"/>
-          <p:cNvPicPr>
-            <a:picLocks noChangeAspect="1"/>
-          </p:cNvPicPr>
-          <p:nvPr/>
-        </p:nvPicPr>
-        <p:blipFill>
-          <a:blip r:embed="rId2"/>
-          <a:stretch>
-            <a:fillRect/>
-          </a:stretch>
-        </p:blipFill>
-        <p:spPr>
-          <a:xfrm>
-            <a:off x="10241280" y="182880"/>
-            <a:ext cx="731520" cy="822960"/>
-          </a:xfrm>
-          <a:prstGeom prst="rect">
-            <a:avLst/>
-          </a:prstGeom>
-        </p:spPr>
-      </p:pic>
-      <p:pic>
-        <p:nvPicPr>
-          <p:cNvPr id="6" name="Picture 5" descr="kdp_patan_logo.png"/>
-          <p:cNvPicPr>
-            <a:picLocks noChangeAspect="1"/>
-          </p:cNvPicPr>
-          <p:nvPr/>
-        </p:nvPicPr>
-        <p:blipFill>
-          <a:blip r:embed="rId3"/>
-          <a:stretch>
-            <a:fillRect/>
-          </a:stretch>
-        </p:blipFill>
-        <p:spPr>
-          <a:xfrm>
-            <a:off x="11155680" y="182880"/>
-            <a:ext cx="777240" cy="777240"/>
-          </a:xfrm>
-          <a:prstGeom prst="rect">
-            <a:avLst/>
-          </a:prstGeom>
-        </p:spPr>
-      </p:pic>
-      <p:sp>
-        <p:nvSpPr>
-          <p:cNvPr id="7" name="TextBox 6"/>
+      <p:sp>
+        <p:nvSpPr>
+          <p:cNvPr id="5" name="TextBox 4"/>
           <p:cNvSpPr txBox="1"/>
           <p:nvPr/>
         </p:nvSpPr>
         <p:spPr>
           <a:xfrm>
             <a:off x="731520" y="960120"/>
-            <a:ext cx="9144000" cy="320040"/>
+            <a:ext cx="10698480" cy="320040"/>
           </a:xfrm>
           <a:prstGeom prst="rect">
             <a:avLst/>
@@ -7034,7 +6794,7 @@
       </p:sp>
       <p:graphicFrame>
         <p:nvGraphicFramePr>
-          <p:cNvPr id="8" name="Table 7"/>
+          <p:cNvPr id="6" name="Table 5"/>
           <p:cNvGraphicFramePr>
             <a:graphicFrameLocks noGrp="1"/>
           </p:cNvGraphicFramePr>
@@ -7565,7 +7325,7 @@
         <p:spPr>
           <a:xfrm>
             <a:off x="731520" y="320040"/>
-            <a:ext cx="7772400" cy="777240"/>
+            <a:ext cx="10698480" cy="777240"/>
           </a:xfrm>
           <a:prstGeom prst="rect">
             <a:avLst/>
@@ -7592,64 +7352,16 @@
           </a:p>
         </p:txBody>
       </p:sp>
-      <p:pic>
-        <p:nvPicPr>
-          <p:cNvPr id="5" name="Picture 4" descr="gtu_logo.png"/>
-          <p:cNvPicPr>
-            <a:picLocks noChangeAspect="1"/>
-          </p:cNvPicPr>
-          <p:nvPr/>
-        </p:nvPicPr>
-        <p:blipFill>
-          <a:blip r:embed="rId2"/>
-          <a:stretch>
-            <a:fillRect/>
-          </a:stretch>
-        </p:blipFill>
-        <p:spPr>
-          <a:xfrm>
-            <a:off x="10241280" y="182880"/>
-            <a:ext cx="731520" cy="822960"/>
-          </a:xfrm>
-          <a:prstGeom prst="rect">
-            <a:avLst/>
-          </a:prstGeom>
-        </p:spPr>
-      </p:pic>
-      <p:pic>
-        <p:nvPicPr>
-          <p:cNvPr id="6" name="Picture 5" descr="kdp_patan_logo.png"/>
-          <p:cNvPicPr>
-            <a:picLocks noChangeAspect="1"/>
-          </p:cNvPicPr>
-          <p:nvPr/>
-        </p:nvPicPr>
-        <p:blipFill>
-          <a:blip r:embed="rId3"/>
-          <a:stretch>
-            <a:fillRect/>
-          </a:stretch>
-        </p:blipFill>
-        <p:spPr>
-          <a:xfrm>
-            <a:off x="11155680" y="182880"/>
-            <a:ext cx="777240" cy="777240"/>
-          </a:xfrm>
-          <a:prstGeom prst="rect">
-            <a:avLst/>
-          </a:prstGeom>
-        </p:spPr>
-      </p:pic>
-      <p:sp>
-        <p:nvSpPr>
-          <p:cNvPr id="7" name="TextBox 6"/>
+      <p:sp>
+        <p:nvSpPr>
+          <p:cNvPr id="5" name="TextBox 4"/>
           <p:cNvSpPr txBox="1"/>
           <p:nvPr/>
         </p:nvSpPr>
         <p:spPr>
           <a:xfrm>
             <a:off x="731520" y="960120"/>
-            <a:ext cx="9144000" cy="320040"/>
+            <a:ext cx="10698480" cy="320040"/>
           </a:xfrm>
           <a:prstGeom prst="rect">
             <a:avLst/>
@@ -7678,7 +7390,7 @@
       </p:sp>
       <p:sp>
         <p:nvSpPr>
-          <p:cNvPr id="8" name="Rounded Rectangle 7"/>
+          <p:cNvPr id="6" name="Rounded Rectangle 5"/>
           <p:cNvSpPr/>
           <p:nvPr/>
         </p:nvSpPr>
@@ -7813,7 +7525,7 @@
       </p:sp>
       <p:sp>
         <p:nvSpPr>
-          <p:cNvPr id="9" name="Rounded Rectangle 8"/>
+          <p:cNvPr id="7" name="Rounded Rectangle 6"/>
           <p:cNvSpPr/>
           <p:nvPr/>
         </p:nvSpPr>
@@ -8059,7 +7771,7 @@
         <p:spPr>
           <a:xfrm>
             <a:off x="731520" y="320040"/>
-            <a:ext cx="7772400" cy="777240"/>
+            <a:ext cx="10698480" cy="777240"/>
           </a:xfrm>
           <a:prstGeom prst="rect">
             <a:avLst/>
@@ -8086,64 +7798,16 @@
           </a:p>
         </p:txBody>
       </p:sp>
-      <p:pic>
-        <p:nvPicPr>
-          <p:cNvPr id="5" name="Picture 4" descr="gtu_logo.png"/>
-          <p:cNvPicPr>
-            <a:picLocks noChangeAspect="1"/>
-          </p:cNvPicPr>
-          <p:nvPr/>
-        </p:nvPicPr>
-        <p:blipFill>
-          <a:blip r:embed="rId2"/>
-          <a:stretch>
-            <a:fillRect/>
-          </a:stretch>
-        </p:blipFill>
-        <p:spPr>
-          <a:xfrm>
-            <a:off x="10241280" y="182880"/>
-            <a:ext cx="731520" cy="822960"/>
-          </a:xfrm>
-          <a:prstGeom prst="rect">
-            <a:avLst/>
-          </a:prstGeom>
-        </p:spPr>
-      </p:pic>
-      <p:pic>
-        <p:nvPicPr>
-          <p:cNvPr id="6" name="Picture 5" descr="kdp_patan_logo.png"/>
-          <p:cNvPicPr>
-            <a:picLocks noChangeAspect="1"/>
-          </p:cNvPicPr>
-          <p:nvPr/>
-        </p:nvPicPr>
-        <p:blipFill>
-          <a:blip r:embed="rId3"/>
-          <a:stretch>
-            <a:fillRect/>
-          </a:stretch>
-        </p:blipFill>
-        <p:spPr>
-          <a:xfrm>
-            <a:off x="11155680" y="182880"/>
-            <a:ext cx="777240" cy="777240"/>
-          </a:xfrm>
-          <a:prstGeom prst="rect">
-            <a:avLst/>
-          </a:prstGeom>
-        </p:spPr>
-      </p:pic>
-      <p:sp>
-        <p:nvSpPr>
-          <p:cNvPr id="7" name="TextBox 6"/>
+      <p:sp>
+        <p:nvSpPr>
+          <p:cNvPr id="5" name="TextBox 4"/>
           <p:cNvSpPr txBox="1"/>
           <p:nvPr/>
         </p:nvSpPr>
         <p:spPr>
           <a:xfrm>
             <a:off x="731520" y="960120"/>
-            <a:ext cx="9144000" cy="320040"/>
+            <a:ext cx="10698480" cy="320040"/>
           </a:xfrm>
           <a:prstGeom prst="rect">
             <a:avLst/>
@@ -8172,7 +7836,7 @@
       </p:sp>
       <p:sp>
         <p:nvSpPr>
-          <p:cNvPr id="8" name="Rounded Rectangle 7"/>
+          <p:cNvPr id="6" name="Rounded Rectangle 5"/>
           <p:cNvSpPr/>
           <p:nvPr/>
         </p:nvSpPr>
@@ -8266,7 +7930,7 @@
       </p:sp>
       <p:sp>
         <p:nvSpPr>
-          <p:cNvPr id="9" name="Rounded Rectangle 8"/>
+          <p:cNvPr id="7" name="Rounded Rectangle 6"/>
           <p:cNvSpPr/>
           <p:nvPr/>
         </p:nvSpPr>
@@ -8360,7 +8024,7 @@
       </p:sp>
       <p:sp>
         <p:nvSpPr>
-          <p:cNvPr id="10" name="Rounded Rectangle 9"/>
+          <p:cNvPr id="8" name="Rounded Rectangle 7"/>
           <p:cNvSpPr/>
           <p:nvPr/>
         </p:nvSpPr>
@@ -8561,7 +8225,7 @@
         <p:spPr>
           <a:xfrm>
             <a:off x="731520" y="320040"/>
-            <a:ext cx="7772400" cy="777240"/>
+            <a:ext cx="10698480" cy="777240"/>
           </a:xfrm>
           <a:prstGeom prst="rect">
             <a:avLst/>
@@ -8588,64 +8252,16 @@
           </a:p>
         </p:txBody>
       </p:sp>
-      <p:pic>
-        <p:nvPicPr>
-          <p:cNvPr id="5" name="Picture 4" descr="gtu_logo.png"/>
-          <p:cNvPicPr>
-            <a:picLocks noChangeAspect="1"/>
-          </p:cNvPicPr>
-          <p:nvPr/>
-        </p:nvPicPr>
-        <p:blipFill>
-          <a:blip r:embed="rId2"/>
-          <a:stretch>
-            <a:fillRect/>
-          </a:stretch>
-        </p:blipFill>
-        <p:spPr>
-          <a:xfrm>
-            <a:off x="10241280" y="182880"/>
-            <a:ext cx="731520" cy="822960"/>
-          </a:xfrm>
-          <a:prstGeom prst="rect">
-            <a:avLst/>
-          </a:prstGeom>
-        </p:spPr>
-      </p:pic>
-      <p:pic>
-        <p:nvPicPr>
-          <p:cNvPr id="6" name="Picture 5" descr="kdp_patan_logo.png"/>
-          <p:cNvPicPr>
-            <a:picLocks noChangeAspect="1"/>
-          </p:cNvPicPr>
-          <p:nvPr/>
-        </p:nvPicPr>
-        <p:blipFill>
-          <a:blip r:embed="rId3"/>
-          <a:stretch>
-            <a:fillRect/>
-          </a:stretch>
-        </p:blipFill>
-        <p:spPr>
-          <a:xfrm>
-            <a:off x="11155680" y="182880"/>
-            <a:ext cx="777240" cy="777240"/>
-          </a:xfrm>
-          <a:prstGeom prst="rect">
-            <a:avLst/>
-          </a:prstGeom>
-        </p:spPr>
-      </p:pic>
-      <p:sp>
-        <p:nvSpPr>
-          <p:cNvPr id="7" name="TextBox 6"/>
+      <p:sp>
+        <p:nvSpPr>
+          <p:cNvPr id="5" name="TextBox 4"/>
           <p:cNvSpPr txBox="1"/>
           <p:nvPr/>
         </p:nvSpPr>
         <p:spPr>
           <a:xfrm>
             <a:off x="731520" y="960120"/>
-            <a:ext cx="9144000" cy="320040"/>
+            <a:ext cx="10698480" cy="320040"/>
           </a:xfrm>
           <a:prstGeom prst="rect">
             <a:avLst/>
@@ -8674,7 +8290,7 @@
       </p:sp>
       <p:sp>
         <p:nvSpPr>
-          <p:cNvPr id="8" name="Rounded Rectangle 7"/>
+          <p:cNvPr id="6" name="Rounded Rectangle 5"/>
           <p:cNvSpPr/>
           <p:nvPr/>
         </p:nvSpPr>
@@ -8959,7 +8575,7 @@
         <p:spPr>
           <a:xfrm>
             <a:off x="731520" y="320040"/>
-            <a:ext cx="7772400" cy="777240"/>
+            <a:ext cx="10698480" cy="777240"/>
           </a:xfrm>
           <a:prstGeom prst="rect">
             <a:avLst/>
@@ -8986,64 +8602,16 @@
           </a:p>
         </p:txBody>
       </p:sp>
-      <p:pic>
-        <p:nvPicPr>
-          <p:cNvPr id="5" name="Picture 4" descr="gtu_logo.png"/>
-          <p:cNvPicPr>
-            <a:picLocks noChangeAspect="1"/>
-          </p:cNvPicPr>
-          <p:nvPr/>
-        </p:nvPicPr>
-        <p:blipFill>
-          <a:blip r:embed="rId2"/>
-          <a:stretch>
-            <a:fillRect/>
-          </a:stretch>
-        </p:blipFill>
-        <p:spPr>
-          <a:xfrm>
-            <a:off x="10241280" y="182880"/>
-            <a:ext cx="731520" cy="822960"/>
-          </a:xfrm>
-          <a:prstGeom prst="rect">
-            <a:avLst/>
-          </a:prstGeom>
-        </p:spPr>
-      </p:pic>
-      <p:pic>
-        <p:nvPicPr>
-          <p:cNvPr id="6" name="Picture 5" descr="kdp_patan_logo.png"/>
-          <p:cNvPicPr>
-            <a:picLocks noChangeAspect="1"/>
-          </p:cNvPicPr>
-          <p:nvPr/>
-        </p:nvPicPr>
-        <p:blipFill>
-          <a:blip r:embed="rId3"/>
-          <a:stretch>
-            <a:fillRect/>
-          </a:stretch>
-        </p:blipFill>
-        <p:spPr>
-          <a:xfrm>
-            <a:off x="11155680" y="182880"/>
-            <a:ext cx="777240" cy="777240"/>
-          </a:xfrm>
-          <a:prstGeom prst="rect">
-            <a:avLst/>
-          </a:prstGeom>
-        </p:spPr>
-      </p:pic>
-      <p:sp>
-        <p:nvSpPr>
-          <p:cNvPr id="7" name="TextBox 6"/>
+      <p:sp>
+        <p:nvSpPr>
+          <p:cNvPr id="5" name="TextBox 4"/>
           <p:cNvSpPr txBox="1"/>
           <p:nvPr/>
         </p:nvSpPr>
         <p:spPr>
           <a:xfrm>
             <a:off x="731520" y="960120"/>
-            <a:ext cx="9144000" cy="320040"/>
+            <a:ext cx="10698480" cy="320040"/>
           </a:xfrm>
           <a:prstGeom prst="rect">
             <a:avLst/>
@@ -9072,7 +8640,7 @@
       </p:sp>
       <p:sp>
         <p:nvSpPr>
-          <p:cNvPr id="8" name="TextBox 7"/>
+          <p:cNvPr id="6" name="TextBox 5"/>
           <p:cNvSpPr txBox="1"/>
           <p:nvPr/>
         </p:nvSpPr>
@@ -9389,7 +8957,7 @@
         <p:spPr>
           <a:xfrm>
             <a:off x="731520" y="320040"/>
-            <a:ext cx="7772400" cy="777240"/>
+            <a:ext cx="10698480" cy="777240"/>
           </a:xfrm>
           <a:prstGeom prst="rect">
             <a:avLst/>
@@ -9416,64 +8984,16 @@
           </a:p>
         </p:txBody>
       </p:sp>
-      <p:pic>
-        <p:nvPicPr>
-          <p:cNvPr id="5" name="Picture 4" descr="gtu_logo.png"/>
-          <p:cNvPicPr>
-            <a:picLocks noChangeAspect="1"/>
-          </p:cNvPicPr>
-          <p:nvPr/>
-        </p:nvPicPr>
-        <p:blipFill>
-          <a:blip r:embed="rId2"/>
-          <a:stretch>
-            <a:fillRect/>
-          </a:stretch>
-        </p:blipFill>
-        <p:spPr>
-          <a:xfrm>
-            <a:off x="10241280" y="182880"/>
-            <a:ext cx="731520" cy="822960"/>
-          </a:xfrm>
-          <a:prstGeom prst="rect">
-            <a:avLst/>
-          </a:prstGeom>
-        </p:spPr>
-      </p:pic>
-      <p:pic>
-        <p:nvPicPr>
-          <p:cNvPr id="6" name="Picture 5" descr="kdp_patan_logo.png"/>
-          <p:cNvPicPr>
-            <a:picLocks noChangeAspect="1"/>
-          </p:cNvPicPr>
-          <p:nvPr/>
-        </p:nvPicPr>
-        <p:blipFill>
-          <a:blip r:embed="rId3"/>
-          <a:stretch>
-            <a:fillRect/>
-          </a:stretch>
-        </p:blipFill>
-        <p:spPr>
-          <a:xfrm>
-            <a:off x="11155680" y="182880"/>
-            <a:ext cx="777240" cy="777240"/>
-          </a:xfrm>
-          <a:prstGeom prst="rect">
-            <a:avLst/>
-          </a:prstGeom>
-        </p:spPr>
-      </p:pic>
-      <p:sp>
-        <p:nvSpPr>
-          <p:cNvPr id="7" name="TextBox 6"/>
+      <p:sp>
+        <p:nvSpPr>
+          <p:cNvPr id="5" name="TextBox 4"/>
           <p:cNvSpPr txBox="1"/>
           <p:nvPr/>
         </p:nvSpPr>
         <p:spPr>
           <a:xfrm>
             <a:off x="731520" y="960120"/>
-            <a:ext cx="9144000" cy="320040"/>
+            <a:ext cx="10698480" cy="320040"/>
           </a:xfrm>
           <a:prstGeom prst="rect">
             <a:avLst/>
@@ -9502,7 +9022,7 @@
       </p:sp>
       <p:sp>
         <p:nvSpPr>
-          <p:cNvPr id="8" name="Rounded Rectangle 7"/>
+          <p:cNvPr id="6" name="Rounded Rectangle 5"/>
           <p:cNvSpPr/>
           <p:nvPr/>
         </p:nvSpPr>
@@ -9630,7 +9150,7 @@
       </p:sp>
       <p:sp>
         <p:nvSpPr>
-          <p:cNvPr id="9" name="Rounded Rectangle 8"/>
+          <p:cNvPr id="7" name="Rounded Rectangle 6"/>
           <p:cNvSpPr/>
           <p:nvPr/>
         </p:nvSpPr>
@@ -9824,7 +9344,7 @@
         <p:spPr>
           <a:xfrm>
             <a:off x="731520" y="320040"/>
-            <a:ext cx="7772400" cy="777240"/>
+            <a:ext cx="10698480" cy="777240"/>
           </a:xfrm>
           <a:prstGeom prst="rect">
             <a:avLst/>
@@ -9851,64 +9371,16 @@
           </a:p>
         </p:txBody>
       </p:sp>
-      <p:pic>
-        <p:nvPicPr>
-          <p:cNvPr id="5" name="Picture 4" descr="gtu_logo.png"/>
-          <p:cNvPicPr>
-            <a:picLocks noChangeAspect="1"/>
-          </p:cNvPicPr>
-          <p:nvPr/>
-        </p:nvPicPr>
-        <p:blipFill>
-          <a:blip r:embed="rId2"/>
-          <a:stretch>
-            <a:fillRect/>
-          </a:stretch>
-        </p:blipFill>
-        <p:spPr>
-          <a:xfrm>
-            <a:off x="10241280" y="182880"/>
-            <a:ext cx="731520" cy="822960"/>
-          </a:xfrm>
-          <a:prstGeom prst="rect">
-            <a:avLst/>
-          </a:prstGeom>
-        </p:spPr>
-      </p:pic>
-      <p:pic>
-        <p:nvPicPr>
-          <p:cNvPr id="6" name="Picture 5" descr="kdp_patan_logo.png"/>
-          <p:cNvPicPr>
-            <a:picLocks noChangeAspect="1"/>
-          </p:cNvPicPr>
-          <p:nvPr/>
-        </p:nvPicPr>
-        <p:blipFill>
-          <a:blip r:embed="rId3"/>
-          <a:stretch>
-            <a:fillRect/>
-          </a:stretch>
-        </p:blipFill>
-        <p:spPr>
-          <a:xfrm>
-            <a:off x="11155680" y="182880"/>
-            <a:ext cx="777240" cy="777240"/>
-          </a:xfrm>
-          <a:prstGeom prst="rect">
-            <a:avLst/>
-          </a:prstGeom>
-        </p:spPr>
-      </p:pic>
-      <p:sp>
-        <p:nvSpPr>
-          <p:cNvPr id="7" name="TextBox 6"/>
+      <p:sp>
+        <p:nvSpPr>
+          <p:cNvPr id="5" name="TextBox 4"/>
           <p:cNvSpPr txBox="1"/>
           <p:nvPr/>
         </p:nvSpPr>
         <p:spPr>
           <a:xfrm>
             <a:off x="731520" y="960120"/>
-            <a:ext cx="9144000" cy="320040"/>
+            <a:ext cx="10698480" cy="320040"/>
           </a:xfrm>
           <a:prstGeom prst="rect">
             <a:avLst/>
@@ -9937,7 +9409,7 @@
       </p:sp>
       <p:sp>
         <p:nvSpPr>
-          <p:cNvPr id="8" name="Rounded Rectangle 7"/>
+          <p:cNvPr id="6" name="Rounded Rectangle 5"/>
           <p:cNvSpPr/>
           <p:nvPr/>
         </p:nvSpPr>
@@ -10014,7 +9486,7 @@
       </p:sp>
       <p:sp>
         <p:nvSpPr>
-          <p:cNvPr id="9" name="Rounded Rectangle 8"/>
+          <p:cNvPr id="7" name="Rounded Rectangle 6"/>
           <p:cNvSpPr/>
           <p:nvPr/>
         </p:nvSpPr>
@@ -10091,7 +9563,7 @@
       </p:sp>
       <p:sp>
         <p:nvSpPr>
-          <p:cNvPr id="10" name="Rounded Rectangle 9"/>
+          <p:cNvPr id="8" name="Rounded Rectangle 7"/>
           <p:cNvSpPr/>
           <p:nvPr/>
         </p:nvSpPr>
@@ -10279,7 +9751,7 @@
         <p:spPr>
           <a:xfrm>
             <a:off x="731520" y="320040"/>
-            <a:ext cx="7772400" cy="777240"/>
+            <a:ext cx="10698480" cy="777240"/>
           </a:xfrm>
           <a:prstGeom prst="rect">
             <a:avLst/>
@@ -10306,64 +9778,16 @@
           </a:p>
         </p:txBody>
       </p:sp>
-      <p:pic>
-        <p:nvPicPr>
-          <p:cNvPr id="5" name="Picture 4" descr="gtu_logo.png"/>
-          <p:cNvPicPr>
-            <a:picLocks noChangeAspect="1"/>
-          </p:cNvPicPr>
-          <p:nvPr/>
-        </p:nvPicPr>
-        <p:blipFill>
-          <a:blip r:embed="rId2"/>
-          <a:stretch>
-            <a:fillRect/>
-          </a:stretch>
-        </p:blipFill>
-        <p:spPr>
-          <a:xfrm>
-            <a:off x="10241280" y="182880"/>
-            <a:ext cx="731520" cy="822960"/>
-          </a:xfrm>
-          <a:prstGeom prst="rect">
-            <a:avLst/>
-          </a:prstGeom>
-        </p:spPr>
-      </p:pic>
-      <p:pic>
-        <p:nvPicPr>
-          <p:cNvPr id="6" name="Picture 5" descr="kdp_patan_logo.png"/>
-          <p:cNvPicPr>
-            <a:picLocks noChangeAspect="1"/>
-          </p:cNvPicPr>
-          <p:nvPr/>
-        </p:nvPicPr>
-        <p:blipFill>
-          <a:blip r:embed="rId3"/>
-          <a:stretch>
-            <a:fillRect/>
-          </a:stretch>
-        </p:blipFill>
-        <p:spPr>
-          <a:xfrm>
-            <a:off x="11155680" y="182880"/>
-            <a:ext cx="777240" cy="777240"/>
-          </a:xfrm>
-          <a:prstGeom prst="rect">
-            <a:avLst/>
-          </a:prstGeom>
-        </p:spPr>
-      </p:pic>
-      <p:sp>
-        <p:nvSpPr>
-          <p:cNvPr id="7" name="TextBox 6"/>
+      <p:sp>
+        <p:nvSpPr>
+          <p:cNvPr id="5" name="TextBox 4"/>
           <p:cNvSpPr txBox="1"/>
           <p:nvPr/>
         </p:nvSpPr>
         <p:spPr>
           <a:xfrm>
             <a:off x="731520" y="960120"/>
-            <a:ext cx="9144000" cy="320040"/>
+            <a:ext cx="10698480" cy="320040"/>
           </a:xfrm>
           <a:prstGeom prst="rect">
             <a:avLst/>
@@ -10392,7 +9816,7 @@
       </p:sp>
       <p:graphicFrame>
         <p:nvGraphicFramePr>
-          <p:cNvPr id="8" name="Table 7"/>
+          <p:cNvPr id="6" name="Table 5"/>
           <p:cNvGraphicFramePr>
             <a:graphicFrameLocks noGrp="1"/>
           </p:cNvGraphicFramePr>
@@ -11031,7 +10455,7 @@
       </p:graphicFrame>
       <p:sp>
         <p:nvSpPr>
-          <p:cNvPr id="9" name="TextBox 8"/>
+          <p:cNvPr id="7" name="TextBox 6"/>
           <p:cNvSpPr txBox="1"/>
           <p:nvPr/>
         </p:nvSpPr>
@@ -11178,7 +10602,7 @@
         <p:spPr>
           <a:xfrm>
             <a:off x="731520" y="320040"/>
-            <a:ext cx="7772400" cy="777240"/>
+            <a:ext cx="10698480" cy="777240"/>
           </a:xfrm>
           <a:prstGeom prst="rect">
             <a:avLst/>
@@ -11205,64 +10629,16 @@
           </a:p>
         </p:txBody>
       </p:sp>
-      <p:pic>
-        <p:nvPicPr>
-          <p:cNvPr id="5" name="Picture 4" descr="gtu_logo.png"/>
-          <p:cNvPicPr>
-            <a:picLocks noChangeAspect="1"/>
-          </p:cNvPicPr>
-          <p:nvPr/>
-        </p:nvPicPr>
-        <p:blipFill>
-          <a:blip r:embed="rId2"/>
-          <a:stretch>
-            <a:fillRect/>
-          </a:stretch>
-        </p:blipFill>
-        <p:spPr>
-          <a:xfrm>
-            <a:off x="10241280" y="182880"/>
-            <a:ext cx="731520" cy="822960"/>
-          </a:xfrm>
-          <a:prstGeom prst="rect">
-            <a:avLst/>
-          </a:prstGeom>
-        </p:spPr>
-      </p:pic>
-      <p:pic>
-        <p:nvPicPr>
-          <p:cNvPr id="6" name="Picture 5" descr="kdp_patan_logo.png"/>
-          <p:cNvPicPr>
-            <a:picLocks noChangeAspect="1"/>
-          </p:cNvPicPr>
-          <p:nvPr/>
-        </p:nvPicPr>
-        <p:blipFill>
-          <a:blip r:embed="rId3"/>
-          <a:stretch>
-            <a:fillRect/>
-          </a:stretch>
-        </p:blipFill>
-        <p:spPr>
-          <a:xfrm>
-            <a:off x="11155680" y="182880"/>
-            <a:ext cx="777240" cy="777240"/>
-          </a:xfrm>
-          <a:prstGeom prst="rect">
-            <a:avLst/>
-          </a:prstGeom>
-        </p:spPr>
-      </p:pic>
-      <p:sp>
-        <p:nvSpPr>
-          <p:cNvPr id="7" name="TextBox 6"/>
+      <p:sp>
+        <p:nvSpPr>
+          <p:cNvPr id="5" name="TextBox 4"/>
           <p:cNvSpPr txBox="1"/>
           <p:nvPr/>
         </p:nvSpPr>
         <p:spPr>
           <a:xfrm>
             <a:off x="731520" y="960120"/>
-            <a:ext cx="9144000" cy="320040"/>
+            <a:ext cx="10698480" cy="320040"/>
           </a:xfrm>
           <a:prstGeom prst="rect">
             <a:avLst/>
@@ -11291,7 +10667,7 @@
       </p:sp>
       <p:graphicFrame>
         <p:nvGraphicFramePr>
-          <p:cNvPr id="8" name="Table 7"/>
+          <p:cNvPr id="6" name="Table 5"/>
           <p:cNvGraphicFramePr>
             <a:graphicFrameLocks noGrp="1"/>
           </p:cNvGraphicFramePr>
@@ -11809,7 +11185,7 @@
       </p:graphicFrame>
       <p:sp>
         <p:nvSpPr>
-          <p:cNvPr id="9" name="TextBox 8"/>
+          <p:cNvPr id="7" name="TextBox 6"/>
           <p:cNvSpPr txBox="1"/>
           <p:nvPr/>
         </p:nvSpPr>
@@ -11969,7 +11345,7 @@
         <p:spPr>
           <a:xfrm>
             <a:off x="731520" y="320040"/>
-            <a:ext cx="7772400" cy="777240"/>
+            <a:ext cx="10698480" cy="777240"/>
           </a:xfrm>
           <a:prstGeom prst="rect">
             <a:avLst/>
@@ -11996,64 +11372,16 @@
           </a:p>
         </p:txBody>
       </p:sp>
-      <p:pic>
-        <p:nvPicPr>
-          <p:cNvPr id="5" name="Picture 4" descr="gtu_logo.png"/>
-          <p:cNvPicPr>
-            <a:picLocks noChangeAspect="1"/>
-          </p:cNvPicPr>
-          <p:nvPr/>
-        </p:nvPicPr>
-        <p:blipFill>
-          <a:blip r:embed="rId2"/>
-          <a:stretch>
-            <a:fillRect/>
-          </a:stretch>
-        </p:blipFill>
-        <p:spPr>
-          <a:xfrm>
-            <a:off x="10241280" y="182880"/>
-            <a:ext cx="731520" cy="822960"/>
-          </a:xfrm>
-          <a:prstGeom prst="rect">
-            <a:avLst/>
-          </a:prstGeom>
-        </p:spPr>
-      </p:pic>
-      <p:pic>
-        <p:nvPicPr>
-          <p:cNvPr id="6" name="Picture 5" descr="kdp_patan_logo.png"/>
-          <p:cNvPicPr>
-            <a:picLocks noChangeAspect="1"/>
-          </p:cNvPicPr>
-          <p:nvPr/>
-        </p:nvPicPr>
-        <p:blipFill>
-          <a:blip r:embed="rId3"/>
-          <a:stretch>
-            <a:fillRect/>
-          </a:stretch>
-        </p:blipFill>
-        <p:spPr>
-          <a:xfrm>
-            <a:off x="11155680" y="182880"/>
-            <a:ext cx="777240" cy="777240"/>
-          </a:xfrm>
-          <a:prstGeom prst="rect">
-            <a:avLst/>
-          </a:prstGeom>
-        </p:spPr>
-      </p:pic>
-      <p:sp>
-        <p:nvSpPr>
-          <p:cNvPr id="7" name="TextBox 6"/>
+      <p:sp>
+        <p:nvSpPr>
+          <p:cNvPr id="5" name="TextBox 4"/>
           <p:cNvSpPr txBox="1"/>
           <p:nvPr/>
         </p:nvSpPr>
         <p:spPr>
           <a:xfrm>
             <a:off x="731520" y="960120"/>
-            <a:ext cx="9144000" cy="320040"/>
+            <a:ext cx="10698480" cy="320040"/>
           </a:xfrm>
           <a:prstGeom prst="rect">
             <a:avLst/>
@@ -12082,7 +11410,7 @@
       </p:sp>
       <p:sp>
         <p:nvSpPr>
-          <p:cNvPr id="8" name="Rounded Rectangle 7"/>
+          <p:cNvPr id="6" name="Rounded Rectangle 5"/>
           <p:cNvSpPr/>
           <p:nvPr/>
         </p:nvSpPr>
@@ -12163,7 +11491,7 @@
       </p:sp>
       <p:sp>
         <p:nvSpPr>
-          <p:cNvPr id="9" name="Rounded Rectangle 8"/>
+          <p:cNvPr id="7" name="Rounded Rectangle 6"/>
           <p:cNvSpPr/>
           <p:nvPr/>
         </p:nvSpPr>
@@ -12248,7 +11576,7 @@
       </p:sp>
       <p:sp>
         <p:nvSpPr>
-          <p:cNvPr id="10" name="Rounded Rectangle 9"/>
+          <p:cNvPr id="8" name="Rounded Rectangle 7"/>
           <p:cNvSpPr/>
           <p:nvPr/>
         </p:nvSpPr>
@@ -12444,7 +11772,7 @@
         <p:spPr>
           <a:xfrm>
             <a:off x="731520" y="320040"/>
-            <a:ext cx="7772400" cy="777240"/>
+            <a:ext cx="10698480" cy="777240"/>
           </a:xfrm>
           <a:prstGeom prst="rect">
             <a:avLst/>
@@ -12471,64 +11799,16 @@
           </a:p>
         </p:txBody>
       </p:sp>
-      <p:pic>
-        <p:nvPicPr>
-          <p:cNvPr id="5" name="Picture 4" descr="gtu_logo.png"/>
-          <p:cNvPicPr>
-            <a:picLocks noChangeAspect="1"/>
-          </p:cNvPicPr>
-          <p:nvPr/>
-        </p:nvPicPr>
-        <p:blipFill>
-          <a:blip r:embed="rId2"/>
-          <a:stretch>
-            <a:fillRect/>
-          </a:stretch>
-        </p:blipFill>
-        <p:spPr>
-          <a:xfrm>
-            <a:off x="10241280" y="182880"/>
-            <a:ext cx="731520" cy="822960"/>
-          </a:xfrm>
-          <a:prstGeom prst="rect">
-            <a:avLst/>
-          </a:prstGeom>
-        </p:spPr>
-      </p:pic>
-      <p:pic>
-        <p:nvPicPr>
-          <p:cNvPr id="6" name="Picture 5" descr="kdp_patan_logo.png"/>
-          <p:cNvPicPr>
-            <a:picLocks noChangeAspect="1"/>
-          </p:cNvPicPr>
-          <p:nvPr/>
-        </p:nvPicPr>
-        <p:blipFill>
-          <a:blip r:embed="rId3"/>
-          <a:stretch>
-            <a:fillRect/>
-          </a:stretch>
-        </p:blipFill>
-        <p:spPr>
-          <a:xfrm>
-            <a:off x="11155680" y="182880"/>
-            <a:ext cx="777240" cy="777240"/>
-          </a:xfrm>
-          <a:prstGeom prst="rect">
-            <a:avLst/>
-          </a:prstGeom>
-        </p:spPr>
-      </p:pic>
-      <p:sp>
-        <p:nvSpPr>
-          <p:cNvPr id="7" name="TextBox 6"/>
+      <p:sp>
+        <p:nvSpPr>
+          <p:cNvPr id="5" name="TextBox 4"/>
           <p:cNvSpPr txBox="1"/>
           <p:nvPr/>
         </p:nvSpPr>
         <p:spPr>
           <a:xfrm>
             <a:off x="731520" y="960120"/>
-            <a:ext cx="9144000" cy="320040"/>
+            <a:ext cx="10698480" cy="320040"/>
           </a:xfrm>
           <a:prstGeom prst="rect">
             <a:avLst/>
@@ -12557,7 +11837,7 @@
       </p:sp>
       <p:sp>
         <p:nvSpPr>
-          <p:cNvPr id="8" name="Rounded Rectangle 7"/>
+          <p:cNvPr id="6" name="Rounded Rectangle 5"/>
           <p:cNvSpPr/>
           <p:nvPr/>
         </p:nvSpPr>
@@ -12634,7 +11914,7 @@
       </p:sp>
       <p:sp>
         <p:nvSpPr>
-          <p:cNvPr id="9" name="Rounded Rectangle 8"/>
+          <p:cNvPr id="7" name="Rounded Rectangle 6"/>
           <p:cNvSpPr/>
           <p:nvPr/>
         </p:nvSpPr>
@@ -12715,7 +11995,7 @@
       </p:sp>
       <p:sp>
         <p:nvSpPr>
-          <p:cNvPr id="10" name="Rounded Rectangle 9"/>
+          <p:cNvPr id="8" name="Rounded Rectangle 7"/>
           <p:cNvSpPr/>
           <p:nvPr/>
         </p:nvSpPr>
@@ -12907,7 +12187,7 @@
         <p:spPr>
           <a:xfrm>
             <a:off x="731520" y="320040"/>
-            <a:ext cx="7772400" cy="777240"/>
+            <a:ext cx="10698480" cy="777240"/>
           </a:xfrm>
           <a:prstGeom prst="rect">
             <a:avLst/>
@@ -12934,64 +12214,16 @@
           </a:p>
         </p:txBody>
       </p:sp>
-      <p:pic>
-        <p:nvPicPr>
-          <p:cNvPr id="5" name="Picture 4" descr="gtu_logo.png"/>
-          <p:cNvPicPr>
-            <a:picLocks noChangeAspect="1"/>
-          </p:cNvPicPr>
-          <p:nvPr/>
-        </p:nvPicPr>
-        <p:blipFill>
-          <a:blip r:embed="rId2"/>
-          <a:stretch>
-            <a:fillRect/>
-          </a:stretch>
-        </p:blipFill>
-        <p:spPr>
-          <a:xfrm>
-            <a:off x="10241280" y="182880"/>
-            <a:ext cx="731520" cy="822960"/>
-          </a:xfrm>
-          <a:prstGeom prst="rect">
-            <a:avLst/>
-          </a:prstGeom>
-        </p:spPr>
-      </p:pic>
-      <p:pic>
-        <p:nvPicPr>
-          <p:cNvPr id="6" name="Picture 5" descr="kdp_patan_logo.png"/>
-          <p:cNvPicPr>
-            <a:picLocks noChangeAspect="1"/>
-          </p:cNvPicPr>
-          <p:nvPr/>
-        </p:nvPicPr>
-        <p:blipFill>
-          <a:blip r:embed="rId3"/>
-          <a:stretch>
-            <a:fillRect/>
-          </a:stretch>
-        </p:blipFill>
-        <p:spPr>
-          <a:xfrm>
-            <a:off x="11155680" y="182880"/>
-            <a:ext cx="777240" cy="777240"/>
-          </a:xfrm>
-          <a:prstGeom prst="rect">
-            <a:avLst/>
-          </a:prstGeom>
-        </p:spPr>
-      </p:pic>
-      <p:sp>
-        <p:nvSpPr>
-          <p:cNvPr id="7" name="TextBox 6"/>
+      <p:sp>
+        <p:nvSpPr>
+          <p:cNvPr id="5" name="TextBox 4"/>
           <p:cNvSpPr txBox="1"/>
           <p:nvPr/>
         </p:nvSpPr>
         <p:spPr>
           <a:xfrm>
             <a:off x="731520" y="960120"/>
-            <a:ext cx="9144000" cy="320040"/>
+            <a:ext cx="10698480" cy="320040"/>
           </a:xfrm>
           <a:prstGeom prst="rect">
             <a:avLst/>
@@ -13020,7 +12252,7 @@
       </p:sp>
       <p:sp>
         <p:nvSpPr>
-          <p:cNvPr id="8" name="TextBox 7"/>
+          <p:cNvPr id="6" name="TextBox 5"/>
           <p:cNvSpPr txBox="1"/>
           <p:nvPr/>
         </p:nvSpPr>

--- a/docs/DineFlow_AI_GTU_Minor_Project_Presentation.pptx
+++ b/docs/DineFlow_AI_GTU_Minor_Project_Presentation.pptx
@@ -3190,9 +3190,57 @@
           </a:p>
         </p:txBody>
       </p:sp>
-      <p:sp>
-        <p:nvSpPr>
-          <p:cNvPr id="4" name="TextBox 3"/>
+      <p:pic>
+        <p:nvPicPr>
+          <p:cNvPr id="4" name="Picture 3" descr="gtu_logo.png"/>
+          <p:cNvPicPr>
+            <a:picLocks noChangeAspect="1"/>
+          </p:cNvPicPr>
+          <p:nvPr/>
+        </p:nvPicPr>
+        <p:blipFill>
+          <a:blip r:embed="rId2"/>
+          <a:stretch>
+            <a:fillRect/>
+          </a:stretch>
+        </p:blipFill>
+        <p:spPr>
+          <a:xfrm>
+            <a:off x="731520" y="365760"/>
+            <a:ext cx="1463040" cy="1645920"/>
+          </a:xfrm>
+          <a:prstGeom prst="rect">
+            <a:avLst/>
+          </a:prstGeom>
+        </p:spPr>
+      </p:pic>
+      <p:pic>
+        <p:nvPicPr>
+          <p:cNvPr id="5" name="Picture 4" descr="kdp_logo.png"/>
+          <p:cNvPicPr>
+            <a:picLocks noChangeAspect="1"/>
+          </p:cNvPicPr>
+          <p:nvPr/>
+        </p:nvPicPr>
+        <p:blipFill>
+          <a:blip r:embed="rId3"/>
+          <a:stretch>
+            <a:fillRect/>
+          </a:stretch>
+        </p:blipFill>
+        <p:spPr>
+          <a:xfrm>
+            <a:off x="9966960" y="365760"/>
+            <a:ext cx="1463040" cy="1463040"/>
+          </a:xfrm>
+          <a:prstGeom prst="rect">
+            <a:avLst/>
+          </a:prstGeom>
+        </p:spPr>
+      </p:pic>
+      <p:sp>
+        <p:nvSpPr>
+          <p:cNvPr id="6" name="TextBox 5"/>
           <p:cNvSpPr txBox="1"/>
           <p:nvPr/>
         </p:nvSpPr>
@@ -3267,7 +3315,7 @@
       </p:sp>
       <p:sp>
         <p:nvSpPr>
-          <p:cNvPr id="5" name="Rounded Rectangle 4"/>
+          <p:cNvPr id="7" name="Rounded Rectangle 6"/>
           <p:cNvSpPr/>
           <p:nvPr/>
         </p:nvSpPr>
@@ -3335,7 +3383,7 @@
       </p:sp>
       <p:sp>
         <p:nvSpPr>
-          <p:cNvPr id="6" name="Rounded Rectangle 5"/>
+          <p:cNvPr id="8" name="Rounded Rectangle 7"/>
           <p:cNvSpPr/>
           <p:nvPr/>
         </p:nvSpPr>
@@ -3494,7 +3542,7 @@
       </p:sp>
       <p:sp>
         <p:nvSpPr>
-          <p:cNvPr id="7" name="Rounded Rectangle 6"/>
+          <p:cNvPr id="9" name="Rounded Rectangle 8"/>
           <p:cNvSpPr/>
           <p:nvPr/>
         </p:nvSpPr>
@@ -5429,7 +5477,7 @@
           <a:lstStyle/>
           <a:p>
             <a:pPr algn="ctr">
-              <a:defRPr b="1" sz="1600">
+              <a:defRPr b="1" sz="1500">
                 <a:solidFill>
                   <a:srgbClr val="0F172A"/>
                 </a:solidFill>
@@ -5442,100 +5490,145 @@
           </a:p>
           <a:p>
             <a:pPr algn="ctr">
+              <a:defRPr b="1" sz="1200">
+                <a:solidFill>
+                  <a:srgbClr val="4338CA"/>
+                </a:solidFill>
+                <a:latin typeface="Calibri"/>
+              </a:defRPr>
+            </a:pPr>
+            <a:r>
+              <a:t>Figure 4(a): UI Operational</a:t>
+            </a:r>
+          </a:p>
+        </p:txBody>
+      </p:sp>
+      <p:pic>
+        <p:nvPicPr>
+          <p:cNvPr id="7" name="Picture 6" descr="web_pos_interface.png"/>
+          <p:cNvPicPr>
+            <a:picLocks noChangeAspect="1"/>
+          </p:cNvPicPr>
+          <p:nvPr/>
+        </p:nvPicPr>
+        <p:blipFill>
+          <a:blip r:embed="rId2"/>
+          <a:stretch>
+            <a:fillRect/>
+          </a:stretch>
+        </p:blipFill>
+        <p:spPr>
+          <a:xfrm>
+            <a:off x="868680" y="2148840"/>
+            <a:ext cx="3200400" cy="1920240"/>
+          </a:xfrm>
+          <a:prstGeom prst="rect">
+            <a:avLst/>
+          </a:prstGeom>
+        </p:spPr>
+      </p:pic>
+      <p:sp>
+        <p:nvSpPr>
+          <p:cNvPr id="8" name="TextBox 7"/>
+          <p:cNvSpPr txBox="1"/>
+          <p:nvPr/>
+        </p:nvSpPr>
+        <p:spPr>
+          <a:xfrm>
+            <a:off x="777240" y="4160520"/>
+            <a:ext cx="3383280" cy="2103120"/>
+          </a:xfrm>
+          <a:prstGeom prst="rect">
+            <a:avLst/>
+          </a:prstGeom>
+          <a:noFill/>
+        </p:spPr>
+        <p:txBody>
+          <a:bodyPr wrap="square">
+            <a:spAutoFit/>
+          </a:bodyPr>
+          <a:lstStyle/>
+          <a:p/>
+          <a:p>
+            <a:pPr>
               <a:spcAft>
-                <a:spcPts val="1200"/>
+                <a:spcPts val="400"/>
               </a:spcAft>
-              <a:defRPr b="1" sz="1250">
+            </a:pPr>
+            <a:r>
+              <a:rPr b="1" sz="1200">
                 <a:solidFill>
                   <a:srgbClr val="4338CA"/>
                 </a:solidFill>
                 <a:latin typeface="Calibri"/>
-              </a:defRPr>
-            </a:pPr>
-            <a:r>
-              <a:t>Figure 4(a): UI Operational</a:t>
+              </a:rPr>
+              <a:t>• Touch-Optimized UI: </a:t>
+            </a:r>
+            <a:r>
+              <a:rPr b="0" sz="1200">
+                <a:solidFill>
+                  <a:srgbClr val="1E293B"/>
+                </a:solidFill>
+                <a:latin typeface="Calibri"/>
+              </a:rPr>
+              <a:t>Category chips and instant search.</a:t>
             </a:r>
           </a:p>
           <a:p>
             <a:pPr>
               <a:spcAft>
-                <a:spcPts val="1000"/>
+                <a:spcPts val="400"/>
               </a:spcAft>
             </a:pPr>
             <a:r>
-              <a:rPr b="1" sz="1300">
-                <a:solidFill>
-                  <a:srgbClr val="0F172A"/>
-                </a:solidFill>
-                <a:latin typeface="Calibri"/>
-              </a:rPr>
-              <a:t>• Touch-Optimized Layout: </a:t>
-            </a:r>
-            <a:r>
-              <a:rPr b="0" sz="1300">
+              <a:rPr b="1" sz="1200">
+                <a:solidFill>
+                  <a:srgbClr val="4338CA"/>
+                </a:solidFill>
+                <a:latin typeface="Calibri"/>
+              </a:rPr>
+              <a:t>• Rapid Checkout: </a:t>
+            </a:r>
+            <a:r>
+              <a:rPr b="0" sz="1200">
                 <a:solidFill>
                   <a:srgbClr val="1E293B"/>
                 </a:solidFill>
                 <a:latin typeface="Calibri"/>
               </a:rPr>
-              <a:t>Category pills, instant search, and split-second item selection.</a:t>
+              <a:t>Instant billing with auto-GST computation.</a:t>
             </a:r>
           </a:p>
           <a:p>
             <a:pPr>
               <a:spcAft>
-                <a:spcPts val="1000"/>
+                <a:spcPts val="400"/>
               </a:spcAft>
             </a:pPr>
             <a:r>
-              <a:rPr b="1" sz="1300">
-                <a:solidFill>
-                  <a:srgbClr val="0F172A"/>
-                </a:solidFill>
-                <a:latin typeface="Calibri"/>
-              </a:rPr>
-              <a:t>• Split-Second Checkout: </a:t>
-            </a:r>
-            <a:r>
-              <a:rPr b="0" sz="1300">
+              <a:rPr b="1" sz="1200">
+                <a:solidFill>
+                  <a:srgbClr val="4338CA"/>
+                </a:solidFill>
+                <a:latin typeface="Calibri"/>
+              </a:rPr>
+              <a:t>• Offline Resilience: </a:t>
+            </a:r>
+            <a:r>
+              <a:rPr b="0" sz="1200">
                 <a:solidFill>
                   <a:srgbClr val="1E293B"/>
                 </a:solidFill>
                 <a:latin typeface="Calibri"/>
               </a:rPr>
-              <a:t>Instant cash/card/UPI checkout with automatic GST receipt generation.</a:t>
-            </a:r>
-          </a:p>
-          <a:p>
-            <a:pPr>
-              <a:spcAft>
-                <a:spcPts val="1000"/>
-              </a:spcAft>
-            </a:pPr>
-            <a:r>
-              <a:rPr b="1" sz="1300">
-                <a:solidFill>
-                  <a:srgbClr val="0F172A"/>
-                </a:solidFill>
-                <a:latin typeface="Calibri"/>
-              </a:rPr>
-              <a:t>• Offline PWA Caching: </a:t>
-            </a:r>
-            <a:r>
-              <a:rPr b="0" sz="1300">
-                <a:solidFill>
-                  <a:srgbClr val="1E293B"/>
-                </a:solidFill>
-                <a:latin typeface="Calibri"/>
-              </a:rPr>
-              <a:t>Continues recording orders even during brief WiFi interruptions.</a:t>
-            </a:r>
-          </a:p>
-        </p:txBody>
-      </p:sp>
-      <p:sp>
-        <p:nvSpPr>
-          <p:cNvPr id="7" name="Rounded Rectangle 6"/>
+              <a:t>Continues recording if WiFi drops.</a:t>
+            </a:r>
+          </a:p>
+        </p:txBody>
+      </p:sp>
+      <p:sp>
+        <p:nvSpPr>
+          <p:cNvPr id="9" name="Rounded Rectangle 8"/>
           <p:cNvSpPr/>
           <p:nvPr/>
         </p:nvSpPr>
@@ -5575,7 +5668,20 @@
           <a:lstStyle/>
           <a:p>
             <a:pPr algn="ctr">
-              <a:defRPr b="1" sz="1600">
+              <a:defRPr b="1" sz="1500">
+                <a:solidFill>
+                  <a:srgbClr val="0F172A"/>
+                </a:solidFill>
+                <a:latin typeface="Calibri"/>
+              </a:defRPr>
+            </a:pPr>
+            <a:r>
+              <a:t>ESC/POS Thermal Hardware</a:t>
+            </a:r>
+          </a:p>
+          <a:p>
+            <a:pPr algn="ctr">
+              <a:defRPr b="1" sz="1200">
                 <a:solidFill>
                   <a:srgbClr val="4338CA"/>
                 </a:solidFill>
@@ -5583,105 +5689,137 @@
               </a:defRPr>
             </a:pPr>
             <a:r>
-              <a:t>ESC/POS Thermal Hardware</a:t>
-            </a:r>
-          </a:p>
-          <a:p>
-            <a:pPr algn="ctr">
+              <a:t>Figure 4(b): Hardware Interfaced</a:t>
+            </a:r>
+          </a:p>
+        </p:txBody>
+      </p:sp>
+      <p:pic>
+        <p:nvPicPr>
+          <p:cNvPr id="10" name="Picture 9" descr="escpos_printer_setup.png"/>
+          <p:cNvPicPr>
+            <a:picLocks noChangeAspect="1"/>
+          </p:cNvPicPr>
+          <p:nvPr/>
+        </p:nvPicPr>
+        <p:blipFill>
+          <a:blip r:embed="rId3"/>
+          <a:stretch>
+            <a:fillRect/>
+          </a:stretch>
+        </p:blipFill>
+        <p:spPr>
+          <a:xfrm>
+            <a:off x="4480560" y="2148840"/>
+            <a:ext cx="3200400" cy="1920240"/>
+          </a:xfrm>
+          <a:prstGeom prst="rect">
+            <a:avLst/>
+          </a:prstGeom>
+        </p:spPr>
+      </p:pic>
+      <p:sp>
+        <p:nvSpPr>
+          <p:cNvPr id="11" name="TextBox 10"/>
+          <p:cNvSpPr txBox="1"/>
+          <p:nvPr/>
+        </p:nvSpPr>
+        <p:spPr>
+          <a:xfrm>
+            <a:off x="4389120" y="4160520"/>
+            <a:ext cx="3383280" cy="2103120"/>
+          </a:xfrm>
+          <a:prstGeom prst="rect">
+            <a:avLst/>
+          </a:prstGeom>
+          <a:noFill/>
+        </p:spPr>
+        <p:txBody>
+          <a:bodyPr wrap="square">
+            <a:spAutoFit/>
+          </a:bodyPr>
+          <a:lstStyle/>
+          <a:p/>
+          <a:p>
+            <a:pPr>
               <a:spcAft>
-                <a:spcPts val="1200"/>
+                <a:spcPts val="400"/>
               </a:spcAft>
-              <a:defRPr b="1" sz="1250">
+            </a:pPr>
+            <a:r>
+              <a:rPr b="1" sz="1200">
                 <a:solidFill>
                   <a:srgbClr val="4338CA"/>
                 </a:solidFill>
                 <a:latin typeface="Calibri"/>
-              </a:defRPr>
-            </a:pPr>
-            <a:r>
-              <a:t>Figure 4(b): Hardware Interfaced</a:t>
+              </a:rPr>
+              <a:t>• Direct ESC/POS Driver: </a:t>
+            </a:r>
+            <a:r>
+              <a:rPr b="0" sz="1200">
+                <a:solidFill>
+                  <a:srgbClr val="1E293B"/>
+                </a:solidFill>
+                <a:latin typeface="Calibri"/>
+              </a:rPr>
+              <a:t>Raw Web USB and Bluetooth streaming.</a:t>
             </a:r>
           </a:p>
           <a:p>
             <a:pPr>
               <a:spcAft>
-                <a:spcPts val="1000"/>
+                <a:spcPts val="400"/>
               </a:spcAft>
             </a:pPr>
             <a:r>
-              <a:rPr b="1" sz="1300">
+              <a:rPr b="1" sz="1200">
                 <a:solidFill>
                   <a:srgbClr val="4338CA"/>
                 </a:solidFill>
                 <a:latin typeface="Calibri"/>
               </a:rPr>
-              <a:t>• Direct Browser Print: </a:t>
-            </a:r>
-            <a:r>
-              <a:rPr b="0" sz="1300">
+              <a:t>• Silent Zero-Click Print: </a:t>
+            </a:r>
+            <a:r>
+              <a:rPr b="0" sz="1200">
                 <a:solidFill>
                   <a:srgbClr val="1E293B"/>
                 </a:solidFill>
                 <a:latin typeface="Calibri"/>
               </a:rPr>
-              <a:t>Raw ESC/POS byte streaming via Web USB and Bluetooth.</a:t>
+              <a:t>Bypasses browser print modal.</a:t>
             </a:r>
           </a:p>
           <a:p>
             <a:pPr>
               <a:spcAft>
-                <a:spcPts val="1000"/>
+                <a:spcPts val="400"/>
               </a:spcAft>
             </a:pPr>
             <a:r>
-              <a:rPr b="1" sz="1300">
+              <a:rPr b="1" sz="1200">
                 <a:solidFill>
                   <a:srgbClr val="4338CA"/>
                 </a:solidFill>
                 <a:latin typeface="Calibri"/>
               </a:rPr>
-              <a:t>• Silent Print Engine: </a:t>
-            </a:r>
-            <a:r>
-              <a:rPr b="0" sz="1300">
+              <a:t>• Dual Role Output: </a:t>
+            </a:r>
+            <a:r>
+              <a:rPr b="0" sz="1200">
                 <a:solidFill>
                   <a:srgbClr val="1E293B"/>
                 </a:solidFill>
                 <a:latin typeface="Calibri"/>
               </a:rPr>
-              <a:t>Bypasses browser print dialogues for instant high-speed counter printing.</a:t>
-            </a:r>
-          </a:p>
-          <a:p>
-            <a:pPr>
-              <a:spcAft>
-                <a:spcPts val="1000"/>
-              </a:spcAft>
-            </a:pPr>
-            <a:r>
-              <a:rPr b="1" sz="1300">
-                <a:solidFill>
-                  <a:srgbClr val="4338CA"/>
-                </a:solidFill>
-                <a:latin typeface="Calibri"/>
-              </a:rPr>
-              <a:t>• Dual-Role Capability: </a:t>
-            </a:r>
-            <a:r>
-              <a:rPr b="0" sz="1300">
-                <a:solidFill>
-                  <a:srgbClr val="1E293B"/>
-                </a:solidFill>
-                <a:latin typeface="Calibri"/>
-              </a:rPr>
-              <a:t>Prints 58mm customer receipts and 80mm kitchen KOT slips.</a:t>
-            </a:r>
-          </a:p>
-        </p:txBody>
-      </p:sp>
-      <p:sp>
-        <p:nvSpPr>
-          <p:cNvPr id="8" name="Rounded Rectangle 7"/>
+              <a:t>58mm bills and 80mm kitchen KOT slips.</a:t>
+            </a:r>
+          </a:p>
+        </p:txBody>
+      </p:sp>
+      <p:sp>
+        <p:nvSpPr>
+          <p:cNvPr id="12" name="Rounded Rectangle 11"/>
           <p:cNvSpPr/>
           <p:nvPr/>
         </p:nvSpPr>
@@ -5694,11 +5832,11 @@
             <a:avLst/>
           </a:prstGeom>
           <a:solidFill>
-            <a:srgbClr val="F8FAFC"/>
+            <a:srgbClr val="ECFDF5"/>
           </a:solidFill>
-          <a:ln>
+          <a:ln w="19050">
             <a:solidFill>
-              <a:srgbClr val="CBD5E1"/>
+              <a:srgbClr val="059669"/>
             </a:solidFill>
           </a:ln>
         </p:spPr>
@@ -5735,11 +5873,11 @@
           <a:p>
             <a:pPr algn="ctr">
               <a:spcAft>
-                <a:spcPts val="1200"/>
+                <a:spcPts val="1600"/>
               </a:spcAft>
-              <a:defRPr b="1" sz="1250">
-                <a:solidFill>
-                  <a:srgbClr val="4338CA"/>
+              <a:defRPr b="1" sz="1300">
+                <a:solidFill>
+                  <a:srgbClr val="0F172A"/>
                 </a:solidFill>
                 <a:latin typeface="Calibri"/>
               </a:defRPr>
@@ -5751,7 +5889,7 @@
           <a:p>
             <a:pPr>
               <a:spcAft>
-                <a:spcPts val="1000"/>
+                <a:spcPts val="800"/>
               </a:spcAft>
             </a:pPr>
             <a:r>
@@ -5761,7 +5899,7 @@
                 </a:solidFill>
                 <a:latin typeface="Calibri"/>
               </a:rPr>
-              <a:t>• Live Cloud Instance: </a:t>
+              <a:t>• AWS Cloud VPS: </a:t>
             </a:r>
             <a:r>
               <a:rPr b="0" sz="1300">
@@ -5770,13 +5908,13 @@
                 </a:solidFill>
                 <a:latin typeface="Calibri"/>
               </a:rPr>
-              <a:t>Hosted on AWS EC2 Ubuntu 24.04 LTS at dineflowai.duckdns.org.</a:t>
+              <a:t>Ubuntu 24.04 LTS, Nginx, PHP 8.2, MySQL.</a:t>
             </a:r>
           </a:p>
           <a:p>
             <a:pPr>
               <a:spcAft>
-                <a:spcPts val="1000"/>
+                <a:spcPts val="800"/>
               </a:spcAft>
             </a:pPr>
             <a:r>
@@ -5786,7 +5924,7 @@
                 </a:solidFill>
                 <a:latin typeface="Calibri"/>
               </a:rPr>
-              <a:t>• A+ Security &amp; SSL: </a:t>
+              <a:t>• Production URL: </a:t>
             </a:r>
             <a:r>
               <a:rPr b="0" sz="1300">
@@ -5795,13 +5933,13 @@
                 </a:solidFill>
                 <a:latin typeface="Calibri"/>
               </a:rPr>
-              <a:t>Let's Encrypt TLS 1.3 with automated certificate renewal.</a:t>
+              <a:t>dineflowai.duckdns.org</a:t>
             </a:r>
           </a:p>
           <a:p>
             <a:pPr>
               <a:spcAft>
-                <a:spcPts val="1000"/>
+                <a:spcPts val="800"/>
               </a:spcAft>
             </a:pPr>
             <a:r>
@@ -5811,7 +5949,7 @@
                 </a:solidFill>
                 <a:latin typeface="Calibri"/>
               </a:rPr>
-              <a:t>• Multi-Device Verified: </a:t>
+              <a:t>• High-Grade Security: </a:t>
             </a:r>
             <a:r>
               <a:rPr b="0" sz="1300">
@@ -5820,7 +5958,57 @@
                 </a:solidFill>
                 <a:latin typeface="Calibri"/>
               </a:rPr>
-              <a:t>Tested across Android tablets, iOS phones, Windows PCs &amp; Mac.</a:t>
+              <a:t>Let's Encrypt TLS 1.3 with A+ rating.</a:t>
+            </a:r>
+          </a:p>
+          <a:p>
+            <a:pPr>
+              <a:spcAft>
+                <a:spcPts val="800"/>
+              </a:spcAft>
+            </a:pPr>
+            <a:r>
+              <a:rPr b="1" sz="1300">
+                <a:solidFill>
+                  <a:srgbClr val="059669"/>
+                </a:solidFill>
+                <a:latin typeface="Calibri"/>
+              </a:rPr>
+              <a:t>• Multi-Device Support: </a:t>
+            </a:r>
+            <a:r>
+              <a:rPr b="0" sz="1300">
+                <a:solidFill>
+                  <a:srgbClr val="1E293B"/>
+                </a:solidFill>
+                <a:latin typeface="Calibri"/>
+              </a:rPr>
+              <a:t>Works on Android, iOS, Windows, Mac.</a:t>
+            </a:r>
+          </a:p>
+          <a:p>
+            <a:pPr>
+              <a:spcAft>
+                <a:spcPts val="800"/>
+              </a:spcAft>
+            </a:pPr>
+            <a:r>
+              <a:rPr b="1" sz="1300">
+                <a:solidFill>
+                  <a:srgbClr val="059669"/>
+                </a:solidFill>
+                <a:latin typeface="Calibri"/>
+              </a:rPr>
+              <a:t>• Zero Extra Capex: </a:t>
+            </a:r>
+            <a:r>
+              <a:rPr b="0" sz="1300">
+                <a:solidFill>
+                  <a:srgbClr val="1E293B"/>
+                </a:solidFill>
+                <a:latin typeface="Calibri"/>
+              </a:rPr>
+              <a:t>No costly proprietary hardware needed.</a:t>
             </a:r>
           </a:p>
         </p:txBody>

--- a/docs/DineFlow_AI_GTU_Minor_Project_Presentation.pptx
+++ b/docs/DineFlow_AI_GTU_Minor_Project_Presentation.pptx
@@ -4646,7 +4646,7 @@
               </a:defRPr>
             </a:pPr>
             <a:r>
-              <a:t>Work Plan (14-Week Semester Schedule)</a:t>
+              <a:t>Work Plan (15-Week Semester Schedule)</a:t>
             </a:r>
           </a:p>
         </p:txBody>
@@ -4818,7 +4818,7 @@
                           </a:solidFill>
                           <a:latin typeface="Calibri"/>
                         </a:rPr>
-                        <a:t>Weeks 1 - 2</a:t>
+                        <a:t>Weeks 1 - 3</a:t>
                       </a:r>
                     </a:p>
                   </a:txBody>
@@ -4862,7 +4862,7 @@
                           </a:solidFill>
                           <a:latin typeface="Calibri"/>
                         </a:rPr>
-                        <a:t>Restaurant visits, pain-point analysis, GTU scope finalization</a:t>
+                        <a:t>Restaurant visits, pain-point survey, SRS specification</a:t>
                       </a:r>
                     </a:p>
                   </a:txBody>
@@ -4908,7 +4908,7 @@
                           </a:solidFill>
                           <a:latin typeface="Calibri"/>
                         </a:rPr>
-                        <a:t>Weeks 3 - 5</a:t>
+                        <a:t>Weeks 4 - 6</a:t>
                       </a:r>
                     </a:p>
                   </a:txBody>
@@ -4952,7 +4952,7 @@
                           </a:solidFill>
                           <a:latin typeface="Calibri"/>
                         </a:rPr>
-                        <a:t>Multi-tenant DB schema, ER diagram, Livewire wireframes</a:t>
+                        <a:t>Multi-tenant DB schema, ER diagram, Laravel core setup</a:t>
                       </a:r>
                     </a:p>
                   </a:txBody>
@@ -4998,7 +4998,7 @@
                           </a:solidFill>
                           <a:latin typeface="Calibri"/>
                         </a:rPr>
-                        <a:t>Weeks 6 - 8</a:t>
+                        <a:t>Weeks 7 - 9</a:t>
                       </a:r>
                     </a:p>
                   </a:txBody>
@@ -5020,7 +5020,7 @@
                           </a:solidFill>
                           <a:latin typeface="Calibri"/>
                         </a:rPr>
-                        <a:t>Core Development &amp; ESC/POS</a:t>
+                        <a:t>Core Development &amp; Web POS</a:t>
                       </a:r>
                     </a:p>
                   </a:txBody>
@@ -5042,7 +5042,7 @@
                           </a:solidFill>
                           <a:latin typeface="Calibri"/>
                         </a:rPr>
-                        <a:t>QR menu, POS billing screen, ESC/POS direct thermal print</a:t>
+                        <a:t>QR menu, POS billing counter, ESC/POS direct thermal print</a:t>
                       </a:r>
                     </a:p>
                   </a:txBody>
@@ -5088,7 +5088,7 @@
                           </a:solidFill>
                           <a:latin typeface="Calibri"/>
                         </a:rPr>
-                        <a:t>Weeks 9 - 11</a:t>
+                        <a:t>Weeks 10 - 12</a:t>
                       </a:r>
                     </a:p>
                   </a:txBody>
@@ -5110,7 +5110,7 @@
                           </a:solidFill>
                           <a:latin typeface="Calibri"/>
                         </a:rPr>
-                        <a:t>KDS Sync &amp; Gujarati Audio</a:t>
+                        <a:t>KDS Sync, Soundbox &amp; Recipe ERP</a:t>
                       </a:r>
                     </a:p>
                   </a:txBody>
@@ -5132,7 +5132,7 @@
                           </a:solidFill>
                           <a:latin typeface="Calibri"/>
                         </a:rPr>
-                        <a:t>Live kitchen display queue, audio synthesis, recipe ERP</a:t>
+                        <a:t>Live kitchen display queue, Gujarati audio, recipe costing</a:t>
                       </a:r>
                     </a:p>
                   </a:txBody>
@@ -5178,7 +5178,7 @@
                           </a:solidFill>
                           <a:latin typeface="Calibri"/>
                         </a:rPr>
-                        <a:t>Weeks 12 - 14</a:t>
+                        <a:t>Weeks 13 - 15</a:t>
                       </a:r>
                     </a:p>
                   </a:txBody>
@@ -5200,7 +5200,7 @@
                           </a:solidFill>
                           <a:latin typeface="Calibri"/>
                         </a:rPr>
-                        <a:t>Security Auditing &amp; Documentation</a:t>
+                        <a:t>Security Auditing, Cloud &amp; Report</a:t>
                       </a:r>
                     </a:p>
                   </a:txBody>
@@ -5222,7 +5222,7 @@
                           </a:solidFill>
                           <a:latin typeface="Calibri"/>
                         </a:rPr>
-                        <a:t>IDOR vulnerability audit, GTU report writing &amp; viva prep</a:t>
+                        <a:t>IDOR vulnerability audit, AWS EC2 deployment, GTU Viva</a:t>
                       </a:r>
                     </a:p>
                   </a:txBody>

--- a/docs/DineFlow_AI_GTU_Minor_Project_Presentation.pptx
+++ b/docs/DineFlow_AI_GTU_Minor_Project_Presentation.pptx
@@ -4986,8 +4986,8 @@
         </p:blipFill>
         <p:spPr>
           <a:xfrm>
-            <a:off x="731520" y="1280160"/>
-            <a:ext cx="5120640" cy="3200400"/>
+            <a:off x="731520" y="1234440"/>
+            <a:ext cx="3840480" cy="2400300"/>
           </a:xfrm>
           <a:prstGeom prst="rect">
             <a:avLst/>
@@ -5010,8 +5010,8 @@
         </p:blipFill>
         <p:spPr>
           <a:xfrm>
-            <a:off x="6217920" y="1280160"/>
-            <a:ext cx="5257800" cy="3925824"/>
+            <a:off x="4754880" y="1234440"/>
+            <a:ext cx="3474720" cy="2594458"/>
           </a:xfrm>
           <a:prstGeom prst="rect">
             <a:avLst/>
@@ -5026,8 +5026,183 @@
         </p:nvSpPr>
         <p:spPr>
           <a:xfrm>
-            <a:off x="731520" y="4572000"/>
-            <a:ext cx="5120640" cy="1691640"/>
+            <a:off x="8412480" y="1234440"/>
+            <a:ext cx="3063240" cy="4937760"/>
+          </a:xfrm>
+          <a:prstGeom prst="roundRect">
+            <a:avLst/>
+          </a:prstGeom>
+          <a:solidFill>
+            <a:srgbClr val="F8FAFC"/>
+          </a:solidFill>
+          <a:ln w="19050">
+            <a:solidFill>
+              <a:srgbClr val="059669"/>
+            </a:solidFill>
+          </a:ln>
+        </p:spPr>
+        <p:style>
+          <a:lnRef idx="1">
+            <a:schemeClr val="accent1"/>
+          </a:lnRef>
+          <a:fillRef idx="3">
+            <a:schemeClr val="accent1"/>
+          </a:fillRef>
+          <a:effectRef idx="2">
+            <a:schemeClr val="accent1"/>
+          </a:effectRef>
+          <a:fontRef idx="minor">
+            <a:schemeClr val="lt1"/>
+          </a:fontRef>
+        </p:style>
+        <p:txBody>
+          <a:bodyPr rtlCol="0" anchor="ctr"/>
+          <a:lstStyle/>
+          <a:p>
+            <a:pPr algn="ctr"/>
+          </a:p>
+        </p:txBody>
+      </p:sp>
+      <p:sp>
+        <p:nvSpPr>
+          <p:cNvPr id="11" name="TextBox 10"/>
+          <p:cNvSpPr txBox="1"/>
+          <p:nvPr/>
+        </p:nvSpPr>
+        <p:spPr>
+          <a:xfrm>
+            <a:off x="8613648" y="1380744"/>
+            <a:ext cx="2660904" cy="4645152"/>
+          </a:xfrm>
+          <a:prstGeom prst="rect">
+            <a:avLst/>
+          </a:prstGeom>
+          <a:noFill/>
+        </p:spPr>
+        <p:txBody>
+          <a:bodyPr wrap="square" lIns="0" tIns="0" rIns="0" bIns="0">
+            <a:spAutoFit/>
+          </a:bodyPr>
+          <a:lstStyle/>
+          <a:p>
+            <a:pPr>
+              <a:spcAft>
+                <a:spcPts val="800"/>
+              </a:spcAft>
+            </a:pPr>
+            <a:r>
+              <a:rPr sz="1550" b="1">
+                <a:solidFill>
+                  <a:srgbClr val="059669"/>
+                </a:solidFill>
+              </a:rPr>
+              <a:t>4-Stage Build &amp; Setup Sequence</a:t>
+            </a:r>
+          </a:p>
+          <a:p>
+            <a:pPr>
+              <a:spcAft>
+                <a:spcPts val="600"/>
+              </a:spcAft>
+            </a:pPr>
+            <a:r>
+              <a:rPr sz="1250" b="1">
+                <a:solidFill>
+                  <a:srgbClr val="0F172A"/>
+                </a:solidFill>
+              </a:rPr>
+              <a:t>Step 1: Environment Setup </a:t>
+            </a:r>
+            <a:r>
+              <a:rPr sz="1200">
+                <a:solidFill>
+                  <a:srgbClr val="1F2937"/>
+                </a:solidFill>
+              </a:rPr>
+              <a:t>Ubuntu 24.04 LTS, Nginx 1.28, PHP 8.5-FPM &amp; MySQL 8.0 cloud instance.</a:t>
+            </a:r>
+          </a:p>
+          <a:p>
+            <a:pPr>
+              <a:spcAft>
+                <a:spcPts val="600"/>
+              </a:spcAft>
+            </a:pPr>
+            <a:r>
+              <a:rPr sz="1250" b="1">
+                <a:solidFill>
+                  <a:srgbClr val="0F172A"/>
+                </a:solidFill>
+              </a:rPr>
+              <a:t>Step 2: Hardware Interfacing </a:t>
+            </a:r>
+            <a:r>
+              <a:rPr sz="1200">
+                <a:solidFill>
+                  <a:srgbClr val="1F2937"/>
+                </a:solidFill>
+              </a:rPr>
+              <a:t>80mm ESC/POS thermal printer USB/LAN TCP binary stream &amp; 24V RJ11 solenoid circuit.</a:t>
+            </a:r>
+          </a:p>
+          <a:p>
+            <a:pPr>
+              <a:spcAft>
+                <a:spcPts val="600"/>
+              </a:spcAft>
+            </a:pPr>
+            <a:r>
+              <a:rPr sz="1250" b="1">
+                <a:solidFill>
+                  <a:srgbClr val="0F172A"/>
+                </a:solidFill>
+              </a:rPr>
+              <a:t>Step 3: Software Loading </a:t>
+            </a:r>
+            <a:r>
+              <a:rPr sz="1200">
+                <a:solidFill>
+                  <a:srgbClr val="1F2937"/>
+                </a:solidFill>
+              </a:rPr>
+              <a:t>Laravel 11 REST API, cashier Web POS SPA, and customer QR PWA.</a:t>
+            </a:r>
+          </a:p>
+          <a:p>
+            <a:pPr>
+              <a:spcAft>
+                <a:spcPts val="600"/>
+              </a:spcAft>
+            </a:pPr>
+            <a:r>
+              <a:rPr sz="1250" b="1">
+                <a:solidFill>
+                  <a:srgbClr val="0F172A"/>
+                </a:solidFill>
+              </a:rPr>
+              <a:t>Step 4: Power-on &amp; Check </a:t>
+            </a:r>
+            <a:r>
+              <a:rPr sz="1200">
+                <a:solidFill>
+                  <a:srgbClr val="1F2937"/>
+                </a:solidFill>
+              </a:rPr>
+              <a:t>Live table QR order placement, sub-145ms KDS alert, and 1.2s receipt printing.</a:t>
+            </a:r>
+          </a:p>
+        </p:txBody>
+      </p:sp>
+      <p:sp>
+        <p:nvSpPr>
+          <p:cNvPr id="12" name="Rounded Rectangle 11"/>
+          <p:cNvSpPr/>
+          <p:nvPr/>
+        </p:nvSpPr>
+        <p:spPr>
+          <a:xfrm>
+            <a:off x="731520" y="4251960"/>
+            <a:ext cx="3840480" cy="1920240"/>
           </a:xfrm>
           <a:prstGeom prst="roundRect">
             <a:avLst/>
@@ -5065,14 +5240,14 @@
       </p:sp>
       <p:sp>
         <p:nvSpPr>
-          <p:cNvPr id="11" name="TextBox 10"/>
+          <p:cNvPr id="13" name="TextBox 12"/>
           <p:cNvSpPr txBox="1"/>
           <p:nvPr/>
         </p:nvSpPr>
         <p:spPr>
           <a:xfrm>
-            <a:off x="932688" y="4718304"/>
-            <a:ext cx="4718303" cy="1399032"/>
+            <a:off x="932688" y="4398264"/>
+            <a:ext cx="3438144" cy="1627632"/>
           </a:xfrm>
           <a:prstGeom prst="rect">
             <a:avLst/>
@@ -5096,7 +5271,7 @@
                   <a:srgbClr val="1E3A8A"/>
                 </a:solidFill>
               </a:rPr>
-              <a:t>Fig 4(a): Live Web POS Terminal Interface</a:t>
+              <a:t>Fig 4(a): Live Web POS Terminal</a:t>
             </a:r>
           </a:p>
           <a:p>
@@ -5119,21 +5294,21 @@
                   <a:srgbClr val="1F2937"/>
                 </a:solidFill>
               </a:rPr>
-              <a:t>Touch-friendly table grid, live search filter, order state tracking, and express keyboard shortcuts (F1=Pay, F4=Hold, F9=KOT).</a:t>
-            </a:r>
-          </a:p>
-        </p:txBody>
-      </p:sp>
-      <p:sp>
-        <p:nvSpPr>
-          <p:cNvPr id="12" name="Rounded Rectangle 11"/>
+              <a:t>Touch table grid, live search, and F1-F9 express cashier shortcuts.</a:t>
+            </a:r>
+          </a:p>
+        </p:txBody>
+      </p:sp>
+      <p:sp>
+        <p:nvSpPr>
+          <p:cNvPr id="14" name="Rounded Rectangle 13"/>
           <p:cNvSpPr/>
           <p:nvPr/>
         </p:nvSpPr>
         <p:spPr>
           <a:xfrm>
-            <a:off x="6217920" y="4572000"/>
-            <a:ext cx="5257800" cy="1691640"/>
+            <a:off x="4754880" y="4251960"/>
+            <a:ext cx="3474720" cy="1920240"/>
           </a:xfrm>
           <a:prstGeom prst="roundRect">
             <a:avLst/>
@@ -5171,14 +5346,14 @@
       </p:sp>
       <p:sp>
         <p:nvSpPr>
-          <p:cNvPr id="13" name="TextBox 12"/>
+          <p:cNvPr id="15" name="TextBox 14"/>
           <p:cNvSpPr txBox="1"/>
           <p:nvPr/>
         </p:nvSpPr>
         <p:spPr>
           <a:xfrm>
-            <a:off x="6419088" y="4718304"/>
-            <a:ext cx="4855464" cy="1399032"/>
+            <a:off x="4956048" y="4398264"/>
+            <a:ext cx="3072384" cy="1627632"/>
           </a:xfrm>
           <a:prstGeom prst="rect">
             <a:avLst/>
@@ -5202,7 +5377,7 @@
                   <a:srgbClr val="1E3A8A"/>
                 </a:solidFill>
               </a:rPr>
-              <a:t>Fig 4(b): 80mm ESC/POS Thermal Printer Setup</a:t>
+              <a:t>Fig 4(b): ESC/POS Thermal Printer</a:t>
             </a:r>
           </a:p>
           <a:p>
@@ -5225,7 +5400,7 @@
                   <a:srgbClr val="1F2937"/>
                 </a:solidFill>
               </a:rPr>
-              <a:t>High-speed thermal printing over raw TCP socket (1.2s), automatic guillotine paper cutting, and 24V RJ11 cash drawer trigger.</a:t>
+              <a:t>80mm thermal receipt cut in 1.2s &amp; automated 24V cash drawer pop.</a:t>
             </a:r>
           </a:p>
         </p:txBody>
@@ -10070,7 +10245,7 @@
                   <a:srgbClr val="1F2937"/>
                 </a:solidFill>
               </a:rPr>
-              <a:t>Commercial POS vendors demand ₹25,000 - ₹50,000 per cash counter for proprietary terminals.</a:t>
+              <a:t>Commercial POS vendors demand ₹25,000 - ₹50,000 per counter for proprietary terminals.</a:t>
             </a:r>
           </a:p>
           <a:p>
@@ -10085,7 +10260,7 @@
                   <a:srgbClr val="0F172A"/>
                 </a:solidFill>
               </a:rPr>
-              <a:t>Recurring Squeeze: </a:t>
+              <a:t>Industry Stat: </a:t>
             </a:r>
             <a:r>
               <a:rPr sz="1200">
@@ -10093,7 +10268,7 @@
                   <a:srgbClr val="1F2937"/>
                 </a:solidFill>
               </a:rPr>
-              <a:t>Annual maintenance contracts (AMC) and forced payment gateway fees strain independent restaurant margins.</a:t>
+              <a:t>Over 68% of food SMEs in India cannot afford dedicated POS hardware terminals (NRAI 2025 Report).</a:t>
             </a:r>
           </a:p>
         </p:txBody>
@@ -10199,7 +10374,7 @@
                   <a:srgbClr val="1F2937"/>
                 </a:solidFill>
               </a:rPr>
-              <a:t>Manual handwritten KOTs walk to kitchen, causing 8-14 minutes communication lag during peak dining rushes.</a:t>
+              <a:t>Manual handwritten KOTs cause 8-14 minutes communication lag during peak dining rushes.</a:t>
             </a:r>
           </a:p>
           <a:p>
@@ -10472,7 +10647,7 @@
                   <a:srgbClr val="0F172A"/>
                 </a:solidFill>
               </a:rPr>
-              <a:t>Shrinkage: </a:t>
+              <a:t>Who Benefits: </a:t>
             </a:r>
             <a:r>
               <a:rPr sz="1200">
@@ -10480,7 +10655,7 @@
                   <a:srgbClr val="1F2937"/>
                 </a:solidFill>
               </a:rPr>
-              <a:t>Untracked raw ingredients allow 12-18% unaccounted kitchen shrinkage and pilferage.</a:t>
+              <a:t>25,000+ independent eateries, cafe operators, kitchen cooks, and dining guests benefit from an automated fix.</a:t>
             </a:r>
           </a:p>
         </p:txBody>

--- a/docs/DineFlow_AI_GTU_Minor_Project_Presentation.pptx
+++ b/docs/DineFlow_AI_GTU_Minor_Project_Presentation.pptx
@@ -3406,8 +3406,8 @@
         </p:nvSpPr>
         <p:spPr>
           <a:xfrm>
-            <a:off x="914400" y="4343400"/>
-            <a:ext cx="5029200" cy="2011680"/>
+            <a:off x="731520" y="4251960"/>
+            <a:ext cx="5303520" cy="2240280"/>
           </a:xfrm>
           <a:prstGeom prst="roundRect">
             <a:avLst/>
@@ -3451,8 +3451,8 @@
         </p:nvSpPr>
         <p:spPr>
           <a:xfrm>
-            <a:off x="1115568" y="4489704"/>
-            <a:ext cx="4626864" cy="1719072"/>
+            <a:off x="932688" y="4398264"/>
+            <a:ext cx="4901183" cy="1947672"/>
           </a:xfrm>
           <a:prstGeom prst="rect">
             <a:avLst/>
@@ -3476,7 +3476,7 @@
                   <a:srgbClr val="1E3A8A"/>
                 </a:solidFill>
               </a:rPr>
-              <a:t>Candidate &amp; Project Lead</a:t>
+              <a:t>Project Team Members (5th Sem CE)</a:t>
             </a:r>
           </a:p>
           <a:p>
@@ -3491,7 +3491,7 @@
                   <a:srgbClr val="0F172A"/>
                 </a:solidFill>
               </a:rPr>
-              <a:t>Student Name: </a:t>
+              <a:t>1. Shubh Patel (TL): </a:t>
             </a:r>
             <a:r>
               <a:rPr sz="1200">
@@ -3499,7 +3499,7 @@
                   <a:srgbClr val="1F2937"/>
                 </a:solidFill>
               </a:rPr>
-              <a:t>PATEL SHUBH MAHESHKUMAR</a:t>
+              <a:t>246310307123  |  Architecture &amp; Cloud</a:t>
             </a:r>
           </a:p>
           <a:p>
@@ -3514,7 +3514,7 @@
                   <a:srgbClr val="0F172A"/>
                 </a:solidFill>
               </a:rPr>
-              <a:t>Enrolment No: </a:t>
+              <a:t>2. Krushank Dave: </a:t>
             </a:r>
             <a:r>
               <a:rPr sz="1200">
@@ -3522,7 +3522,7 @@
                   <a:srgbClr val="1F2937"/>
                 </a:solidFill>
               </a:rPr>
-              <a:t>246310307123</a:t>
+              <a:t>246310307028  |  Web POS &amp; Shortcuts</a:t>
             </a:r>
           </a:p>
           <a:p>
@@ -3537,7 +3537,7 @@
                   <a:srgbClr val="0F172A"/>
                 </a:solidFill>
               </a:rPr>
-              <a:t>Program &amp; Sem: </a:t>
+              <a:t>3. Fiyans Patel: </a:t>
             </a:r>
             <a:r>
               <a:rPr sz="1200">
@@ -3545,7 +3545,7 @@
                   <a:srgbClr val="1F2937"/>
                 </a:solidFill>
               </a:rPr>
-              <a:t>Diploma Computer Engineering (Sem 5)</a:t>
+              <a:t>246310307090  |  ERP, Recipe BOM &amp; QR</a:t>
             </a:r>
           </a:p>
           <a:p>
@@ -3560,7 +3560,7 @@
                   <a:srgbClr val="0F172A"/>
                 </a:solidFill>
               </a:rPr>
-              <a:t>Institutional Role: </a:t>
+              <a:t>4. Veer Prajapati: </a:t>
             </a:r>
             <a:r>
               <a:rPr sz="1200">
@@ -3568,7 +3568,7 @@
                   <a:srgbClr val="1F2937"/>
                 </a:solidFill>
               </a:rPr>
-              <a:t>Team Lead / Full-Stack &amp; Cloud Engineer</a:t>
+              <a:t>246310307147  |  Cart UI &amp; KDS Stepper</a:t>
             </a:r>
           </a:p>
         </p:txBody>
@@ -3581,8 +3581,8 @@
         </p:nvSpPr>
         <p:spPr>
           <a:xfrm>
-            <a:off x="6248095" y="4343400"/>
-            <a:ext cx="5029200" cy="2011680"/>
+            <a:off x="6172200" y="4251960"/>
+            <a:ext cx="5303520" cy="2240280"/>
           </a:xfrm>
           <a:prstGeom prst="roundRect">
             <a:avLst/>
@@ -3626,8 +3626,8 @@
         </p:nvSpPr>
         <p:spPr>
           <a:xfrm>
-            <a:off x="6449263" y="4489704"/>
-            <a:ext cx="4626864" cy="1719072"/>
+            <a:off x="6373368" y="4398264"/>
+            <a:ext cx="4901183" cy="1947672"/>
           </a:xfrm>
           <a:prstGeom prst="rect">
             <a:avLst/>
@@ -3674,7 +3674,7 @@
                   <a:srgbClr val="1F2937"/>
                 </a:solidFill>
               </a:rPr>
-              <a:t>Prof. Yagnesh Patel</a:t>
+              <a:t>Prof. Yagnesh Patel (Lecturer, Comp. Engg.)</a:t>
             </a:r>
           </a:p>
           <a:p>
@@ -3689,7 +3689,7 @@
                   <a:srgbClr val="0F172A"/>
                 </a:solidFill>
               </a:rPr>
-              <a:t>Designation: </a:t>
+              <a:t>Head of Dept: </a:t>
             </a:r>
             <a:r>
               <a:rPr sz="1200">
@@ -3697,7 +3697,7 @@
                   <a:srgbClr val="1F2937"/>
                 </a:solidFill>
               </a:rPr>
-              <a:t>Lecturer, Computer Engineering Dept.</a:t>
+              <a:t>Dr. Chirag D. Patel (HOD, Comp. Engg.)</a:t>
             </a:r>
           </a:p>
           <a:p>
@@ -3712,7 +3712,7 @@
                   <a:srgbClr val="0F172A"/>
                 </a:solidFill>
               </a:rPr>
-              <a:t>Head of Dept: </a:t>
+              <a:t>Principal: </a:t>
             </a:r>
             <a:r>
               <a:rPr sz="1200">
@@ -3720,7 +3720,7 @@
                   <a:srgbClr val="1F2937"/>
                 </a:solidFill>
               </a:rPr>
-              <a:t>Dr. Chirag D. Patel (HOD, Computer Engg.)</a:t>
+              <a:t>Shri H. C. Parmar (K. D. Polytechnic, Patan)</a:t>
             </a:r>
           </a:p>
           <a:p>
@@ -3735,7 +3735,7 @@
                   <a:srgbClr val="0F172A"/>
                 </a:solidFill>
               </a:rPr>
-              <a:t>Principal: </a:t>
+              <a:t>Institution: </a:t>
             </a:r>
             <a:r>
               <a:rPr sz="1200">
@@ -3743,7 +3743,7 @@
                   <a:srgbClr val="1F2937"/>
                 </a:solidFill>
               </a:rPr>
-              <a:t>Shri H. C. Parmar, K. D. Polytechnic, Patan</a:t>
+              <a:t>K. D. Polytechnic, Patan (GTU Code: 631)</a:t>
             </a:r>
           </a:p>
         </p:txBody>
@@ -9034,7 +9034,7 @@
                   <a:srgbClr val="059669"/>
                 </a:solidFill>
               </a:rPr>
-              <a:t>Project Author &amp; Department Details</a:t>
+              <a:t>Project Team &amp; Department Details</a:t>
             </a:r>
           </a:p>
           <a:p>
@@ -9049,7 +9049,7 @@
                   <a:srgbClr val="0F172A"/>
                 </a:solidFill>
               </a:rPr>
-              <a:t>Candidate Name: </a:t>
+              <a:t>Project Team: </a:t>
             </a:r>
             <a:r>
               <a:rPr sz="1200">
@@ -9057,7 +9057,8 @@
                   <a:srgbClr val="1F2937"/>
                 </a:solidFill>
               </a:rPr>
-              <a:t>PATEL SHUBH MAHESHKUMAR</a:t>
+              <a:t>Shubh Patel (TL), Krushank Dave,
+Fiyans Patel, Veer Prajapati</a:t>
             </a:r>
           </a:p>
           <a:p>
@@ -9072,7 +9073,7 @@
                   <a:srgbClr val="0F172A"/>
                 </a:solidFill>
               </a:rPr>
-              <a:t>Enrolment Number: </a:t>
+              <a:t>GTU Enrolments: </a:t>
             </a:r>
             <a:r>
               <a:rPr sz="1200">
@@ -9080,7 +9081,8 @@
                   <a:srgbClr val="1F2937"/>
                 </a:solidFill>
               </a:rPr>
-              <a:t>246310307123 (Semester 5th)</a:t>
+              <a:t>246310307123, 246310307028,
+246310307090, 246310307147</a:t>
             </a:r>
           </a:p>
           <a:p>
@@ -9118,7 +9120,7 @@
                   <a:srgbClr val="0F172A"/>
                 </a:solidFill>
               </a:rPr>
-              <a:t>Head of Department: </a:t>
+              <a:t>Head of Dept: </a:t>
             </a:r>
             <a:r>
               <a:rPr sz="1200">
@@ -9126,7 +9128,7 @@
                   <a:srgbClr val="1F2937"/>
                 </a:solidFill>
               </a:rPr>
-              <a:t>Dr. Chirag D. Patel</a:t>
+              <a:t>Dr. Chirag D. Patel (HOD, Comp. Engg.)</a:t>
             </a:r>
           </a:p>
           <a:p>
